--- a/slides/T320_kMeans.pptx
+++ b/slides/T320_kMeans.pptx
@@ -11,22 +11,22 @@
     <p:sldId id="257" r:id="rId2"/>
     <p:sldId id="284" r:id="rId3"/>
     <p:sldId id="258" r:id="rId4"/>
-    <p:sldId id="294" r:id="rId5"/>
-    <p:sldId id="286" r:id="rId6"/>
+    <p:sldId id="301" r:id="rId5"/>
+    <p:sldId id="294" r:id="rId6"/>
     <p:sldId id="285" r:id="rId7"/>
     <p:sldId id="287" r:id="rId8"/>
     <p:sldId id="296" r:id="rId9"/>
-    <p:sldId id="288" r:id="rId10"/>
-    <p:sldId id="297" r:id="rId11"/>
-    <p:sldId id="298" r:id="rId12"/>
-    <p:sldId id="289" r:id="rId13"/>
-    <p:sldId id="290" r:id="rId14"/>
-    <p:sldId id="291" r:id="rId15"/>
+    <p:sldId id="286" r:id="rId10"/>
+    <p:sldId id="288" r:id="rId11"/>
+    <p:sldId id="297" r:id="rId12"/>
+    <p:sldId id="304" r:id="rId13"/>
+    <p:sldId id="305" r:id="rId14"/>
+    <p:sldId id="306" r:id="rId15"/>
     <p:sldId id="292" r:id="rId16"/>
     <p:sldId id="299" r:id="rId17"/>
-    <p:sldId id="293" r:id="rId18"/>
-    <p:sldId id="300" r:id="rId19"/>
-    <p:sldId id="283" r:id="rId20"/>
+    <p:sldId id="300" r:id="rId18"/>
+    <p:sldId id="293" r:id="rId19"/>
+    <p:sldId id="307" r:id="rId20"/>
     <p:sldId id="269" r:id="rId21"/>
     <p:sldId id="265" r:id="rId22"/>
     <p:sldId id="271" r:id="rId23"/>
@@ -218,7 +218,7 @@
           <a:p>
             <a:fld id="{C3C82C08-3EFC-4473-8294-F0E229C19EFF}" type="datetimeFigureOut">
               <a:rPr lang="pt-BR" smtClean="0"/>
-              <a:t>30/11/2024</a:t>
+              <a:t>13/06/2026</a:t>
             </a:fld>
             <a:endParaRPr lang="pt-BR"/>
           </a:p>
@@ -570,6 +570,113 @@
 </p:notes>
 </file>
 
+<file path=ppt/notesSlides/notesSlide10.xml><?xml version="1.0" encoding="utf-8"?>
+<p:notes xmlns:a="http://schemas.openxmlformats.org/drawingml/2006/main" xmlns:r="http://schemas.openxmlformats.org/officeDocument/2006/relationships" xmlns:p="http://schemas.openxmlformats.org/presentationml/2006/main">
+  <p:cSld>
+    <p:spTree>
+      <p:nvGrpSpPr>
+        <p:cNvPr id="1" name=""/>
+        <p:cNvGrpSpPr/>
+        <p:nvPr/>
+      </p:nvGrpSpPr>
+      <p:grpSpPr>
+        <a:xfrm>
+          <a:off x="0" y="0"/>
+          <a:ext cx="0" cy="0"/>
+          <a:chOff x="0" y="0"/>
+          <a:chExt cx="0" cy="0"/>
+        </a:xfrm>
+      </p:grpSpPr>
+      <p:sp>
+        <p:nvSpPr>
+          <p:cNvPr id="2" name="Slide Image Placeholder 1"/>
+          <p:cNvSpPr>
+            <a:spLocks noGrp="1" noRot="1" noChangeAspect="1"/>
+          </p:cNvSpPr>
+          <p:nvPr>
+            <p:ph type="sldImg"/>
+          </p:nvPr>
+        </p:nvSpPr>
+        <p:spPr/>
+      </p:sp>
+      <p:sp>
+        <p:nvSpPr>
+          <p:cNvPr id="3" name="Notes Placeholder 2"/>
+          <p:cNvSpPr>
+            <a:spLocks noGrp="1"/>
+          </p:cNvSpPr>
+          <p:nvPr>
+            <p:ph type="body" idx="1"/>
+          </p:nvPr>
+        </p:nvSpPr>
+        <p:spPr/>
+        <p:txBody>
+          <a:bodyPr/>
+          <a:lstStyle/>
+          <a:p>
+            <a:r>
+              <a:rPr lang="pt-BR" sz="1200" b="1" dirty="0"/>
+              <a:t>Projeto #2:</a:t>
+            </a:r>
+            <a:r>
+              <a:rPr lang="pt-BR" sz="1200" dirty="0"/>
+              <a:t> https://mybinder.org/v2/gh/zz4fap/t320_aprendizado_de_maquina/main?filepath=projeto%2Fprojeto_2_T320_1S2022.ipynb</a:t>
+            </a:r>
+          </a:p>
+          <a:p>
+            <a:endParaRPr lang="pt-BR" sz="1200" dirty="0"/>
+          </a:p>
+          <a:p>
+            <a:r>
+              <a:rPr lang="pt-BR" sz="1200" b="1" dirty="0"/>
+              <a:t>Projeto #2:</a:t>
+            </a:r>
+            <a:r>
+              <a:rPr lang="pt-BR" sz="1200" dirty="0"/>
+              <a:t> https://colab.research.google.com/github/zz4fap/t320_aprendizado_de_maquina/blob/main/projeto/projeto_2_T320_1S2022.ipynb</a:t>
+            </a:r>
+          </a:p>
+          <a:p>
+            <a:endParaRPr lang="pt-BR" sz="1200" dirty="0"/>
+          </a:p>
+        </p:txBody>
+      </p:sp>
+      <p:sp>
+        <p:nvSpPr>
+          <p:cNvPr id="4" name="Slide Number Placeholder 3"/>
+          <p:cNvSpPr>
+            <a:spLocks noGrp="1"/>
+          </p:cNvSpPr>
+          <p:nvPr>
+            <p:ph type="sldNum" sz="quarter" idx="10"/>
+          </p:nvPr>
+        </p:nvSpPr>
+        <p:spPr/>
+        <p:txBody>
+          <a:bodyPr/>
+          <a:lstStyle/>
+          <a:p>
+            <a:fld id="{6FC8D850-966F-45A6-8DE7-15B891E7D40D}" type="slidenum">
+              <a:rPr lang="pt-BR" smtClean="0"/>
+              <a:t>19</a:t>
+            </a:fld>
+            <a:endParaRPr lang="pt-BR"/>
+          </a:p>
+        </p:txBody>
+      </p:sp>
+    </p:spTree>
+    <p:extLst>
+      <p:ext uri="{BB962C8B-B14F-4D97-AF65-F5344CB8AC3E}">
+        <p14:creationId xmlns:p14="http://schemas.microsoft.com/office/powerpoint/2010/main" val="803546741"/>
+      </p:ext>
+    </p:extLst>
+  </p:cSld>
+  <p:clrMapOvr>
+    <a:masterClrMapping/>
+  </p:clrMapOvr>
+</p:notes>
+</file>
+
 <file path=ppt/notesSlides/notesSlide2.xml><?xml version="1.0" encoding="utf-8"?>
 <p:notes xmlns:a="http://schemas.openxmlformats.org/drawingml/2006/main" xmlns:r="http://schemas.openxmlformats.org/officeDocument/2006/relationships" xmlns:p="http://schemas.openxmlformats.org/presentationml/2006/main">
   <p:cSld>
@@ -676,13 +783,7 @@
   <p:cSld>
     <p:spTree>
       <p:nvGrpSpPr>
-        <p:cNvPr id="1" name="">
-          <a:extLst>
-            <a:ext uri="{FF2B5EF4-FFF2-40B4-BE49-F238E27FC236}">
-              <a16:creationId xmlns:a16="http://schemas.microsoft.com/office/drawing/2014/main" id="{BFE637E2-97BB-CFD3-DBB7-5EC561A4F1C5}"/>
-            </a:ext>
-          </a:extLst>
-        </p:cNvPr>
+        <p:cNvPr id="1" name=""/>
         <p:cNvGrpSpPr/>
         <p:nvPr/>
       </p:nvGrpSpPr>
@@ -696,13 +797,7 @@
       </p:grpSpPr>
       <p:sp>
         <p:nvSpPr>
-          <p:cNvPr id="2" name="Slide Image Placeholder 1">
-            <a:extLst>
-              <a:ext uri="{FF2B5EF4-FFF2-40B4-BE49-F238E27FC236}">
-                <a16:creationId xmlns:a16="http://schemas.microsoft.com/office/drawing/2014/main" id="{4ED7BD22-361E-0DCE-46D8-42A9C128E592}"/>
-              </a:ext>
-            </a:extLst>
-          </p:cNvPr>
+          <p:cNvPr id="2" name="Slide Image Placeholder 1"/>
           <p:cNvSpPr>
             <a:spLocks noGrp="1" noRot="1" noChangeAspect="1"/>
           </p:cNvSpPr>
@@ -714,13 +809,7 @@
       </p:sp>
       <p:sp>
         <p:nvSpPr>
-          <p:cNvPr id="3" name="Notes Placeholder 2">
-            <a:extLst>
-              <a:ext uri="{FF2B5EF4-FFF2-40B4-BE49-F238E27FC236}">
-                <a16:creationId xmlns:a16="http://schemas.microsoft.com/office/drawing/2014/main" id="{A845AE5E-1008-C289-F444-04515B31A21D}"/>
-              </a:ext>
-            </a:extLst>
-          </p:cNvPr>
+          <p:cNvPr id="3" name="Notes Placeholder 2"/>
           <p:cNvSpPr>
             <a:spLocks noGrp="1"/>
           </p:cNvSpPr>
@@ -756,13 +845,7 @@
       </p:sp>
       <p:sp>
         <p:nvSpPr>
-          <p:cNvPr id="4" name="Slide Number Placeholder 3">
-            <a:extLst>
-              <a:ext uri="{FF2B5EF4-FFF2-40B4-BE49-F238E27FC236}">
-                <a16:creationId xmlns:a16="http://schemas.microsoft.com/office/drawing/2014/main" id="{64C5BAB2-4C6F-96F0-D4ED-0C66FFB4872B}"/>
-              </a:ext>
-            </a:extLst>
-          </p:cNvPr>
+          <p:cNvPr id="4" name="Slide Number Placeholder 3"/>
           <p:cNvSpPr>
             <a:spLocks noGrp="1"/>
           </p:cNvSpPr>
@@ -786,7 +869,7 @@
     </p:spTree>
     <p:extLst>
       <p:ext uri="{BB962C8B-B14F-4D97-AF65-F5344CB8AC3E}">
-        <p14:creationId xmlns:p14="http://schemas.microsoft.com/office/powerpoint/2010/main" val="2508298284"/>
+        <p14:creationId xmlns:p14="http://schemas.microsoft.com/office/powerpoint/2010/main" val="3599174583"/>
       </p:ext>
     </p:extLst>
   </p:cSld>
@@ -801,7 +884,13 @@
   <p:cSld>
     <p:spTree>
       <p:nvGrpSpPr>
-        <p:cNvPr id="1" name=""/>
+        <p:cNvPr id="1" name="">
+          <a:extLst>
+            <a:ext uri="{FF2B5EF4-FFF2-40B4-BE49-F238E27FC236}">
+              <a16:creationId xmlns:a16="http://schemas.microsoft.com/office/drawing/2014/main" xmlns="" id="{BFE637E2-97BB-CFD3-DBB7-5EC561A4F1C5}"/>
+            </a:ext>
+          </a:extLst>
+        </p:cNvPr>
         <p:cNvGrpSpPr/>
         <p:nvPr/>
       </p:nvGrpSpPr>
@@ -815,7 +904,13 @@
       </p:grpSpPr>
       <p:sp>
         <p:nvSpPr>
-          <p:cNvPr id="2" name="Slide Image Placeholder 1"/>
+          <p:cNvPr id="2" name="Slide Image Placeholder 1">
+            <a:extLst>
+              <a:ext uri="{FF2B5EF4-FFF2-40B4-BE49-F238E27FC236}">
+                <a16:creationId xmlns:a16="http://schemas.microsoft.com/office/drawing/2014/main" xmlns="" id="{4ED7BD22-361E-0DCE-46D8-42A9C128E592}"/>
+              </a:ext>
+            </a:extLst>
+          </p:cNvPr>
           <p:cNvSpPr>
             <a:spLocks noGrp="1" noRot="1" noChangeAspect="1"/>
           </p:cNvSpPr>
@@ -827,7 +922,13 @@
       </p:sp>
       <p:sp>
         <p:nvSpPr>
-          <p:cNvPr id="3" name="Notes Placeholder 2"/>
+          <p:cNvPr id="3" name="Notes Placeholder 2">
+            <a:extLst>
+              <a:ext uri="{FF2B5EF4-FFF2-40B4-BE49-F238E27FC236}">
+                <a16:creationId xmlns:a16="http://schemas.microsoft.com/office/drawing/2014/main" xmlns="" id="{A845AE5E-1008-C289-F444-04515B31A21D}"/>
+              </a:ext>
+            </a:extLst>
+          </p:cNvPr>
           <p:cNvSpPr>
             <a:spLocks noGrp="1"/>
           </p:cNvSpPr>
@@ -839,234 +940,6 @@
         <p:txBody>
           <a:bodyPr/>
           <a:lstStyle/>
-          <a:p>
-            <a:r>
-              <a:rPr lang="pt-BR" dirty="0"/>
-              <a:t>Em </a:t>
-            </a:r>
-            <a:r>
-              <a:rPr lang="pt-BR" b="1" dirty="0"/>
-              <a:t>clusterização</a:t>
-            </a:r>
-            <a:r>
-              <a:rPr lang="pt-BR" dirty="0"/>
-              <a:t>, um </a:t>
-            </a:r>
-            <a:r>
-              <a:rPr lang="pt-BR" b="1" dirty="0"/>
-              <a:t>centroide</a:t>
-            </a:r>
-            <a:r>
-              <a:rPr lang="pt-BR" dirty="0"/>
-              <a:t> é o ponto central de um grupo (cluster) de dados. Ele representa a "média" das amostras dentro do cluster, sendo um ponto de referência que pode ser usado para definir a posição do cluster no espaço de características.</a:t>
-            </a:r>
-          </a:p>
-          <a:p>
-            <a:r>
-              <a:rPr lang="pt-BR" b="1" dirty="0"/>
-              <a:t>Características principais:</a:t>
-            </a:r>
-          </a:p>
-          <a:p>
-            <a:pPr>
-              <a:buFont typeface="Arial" panose="020B0604020202020204" pitchFamily="34" charset="0"/>
-              <a:buChar char="•"/>
-            </a:pPr>
-            <a:r>
-              <a:rPr lang="pt-BR" dirty="0"/>
-              <a:t>O centroide é geralmente calculado como a </a:t>
-            </a:r>
-            <a:r>
-              <a:rPr lang="pt-BR" b="1" dirty="0"/>
-              <a:t>média aritmética</a:t>
-            </a:r>
-            <a:r>
-              <a:rPr lang="pt-BR" dirty="0"/>
-              <a:t> das coordenadas de todos os pontos do cluster.</a:t>
-            </a:r>
-          </a:p>
-          <a:p>
-            <a:pPr>
-              <a:buFont typeface="Arial" panose="020B0604020202020204" pitchFamily="34" charset="0"/>
-              <a:buChar char="•"/>
-            </a:pPr>
-            <a:r>
-              <a:rPr lang="pt-BR" dirty="0"/>
-              <a:t>No caso de algoritmos como </a:t>
-            </a:r>
-            <a:r>
-              <a:rPr lang="pt-BR" b="1" dirty="0"/>
-              <a:t>K-</a:t>
-            </a:r>
-            <a:r>
-              <a:rPr lang="pt-BR" b="1" dirty="0" err="1"/>
-              <a:t>Means</a:t>
-            </a:r>
-            <a:r>
-              <a:rPr lang="pt-BR" dirty="0"/>
-              <a:t>, os centroides são ajustados iterativamente até que os clusters se estabilizem ou atinjam um critério de parada.</a:t>
-            </a:r>
-          </a:p>
-          <a:p>
-            <a:pPr>
-              <a:buFont typeface="Arial" panose="020B0604020202020204" pitchFamily="34" charset="0"/>
-              <a:buChar char="•"/>
-            </a:pPr>
-            <a:r>
-              <a:rPr lang="pt-BR" dirty="0"/>
-              <a:t>O centroide </a:t>
-            </a:r>
-            <a:r>
-              <a:rPr lang="pt-BR" b="1" dirty="0"/>
-              <a:t>não precisa ser um ponto real</a:t>
-            </a:r>
-            <a:r>
-              <a:rPr lang="pt-BR" dirty="0"/>
-              <a:t> no conjunto de dados; ele pode estar em uma posição intermediária entre os pontos.</a:t>
-            </a:r>
-          </a:p>
-          <a:p>
-            <a:r>
-              <a:rPr lang="pt-BR" b="1" dirty="0"/>
-              <a:t>Cálculo do centroide:</a:t>
-            </a:r>
-          </a:p>
-          <a:p>
-            <a:r>
-              <a:rPr lang="pt-BR" dirty="0"/>
-              <a:t>Se o cluster contém </a:t>
-            </a:r>
-            <a:r>
-              <a:rPr lang="pt-BR" dirty="0" err="1"/>
-              <a:t>nn</a:t>
-            </a:r>
-            <a:r>
-              <a:rPr lang="pt-BR" dirty="0"/>
-              <a:t> pontos de dimensão </a:t>
-            </a:r>
-            <a:r>
-              <a:rPr lang="pt-BR" dirty="0" err="1"/>
-              <a:t>dd</a:t>
-            </a:r>
-            <a:r>
-              <a:rPr lang="pt-BR" dirty="0"/>
-              <a:t>, as coordenadas do centroide são calculadas como:</a:t>
-            </a:r>
-          </a:p>
-          <a:p>
-            <a:r>
-              <a:rPr lang="pt-BR" dirty="0"/>
-              <a:t>Centroide=(1n∑i=1nxi1,1n∑i=1nxi2,…,1n∑i=1nxid)\</a:t>
-            </a:r>
-            <a:r>
-              <a:rPr lang="pt-BR" dirty="0" err="1"/>
-              <a:t>text</a:t>
-            </a:r>
-            <a:r>
-              <a:rPr lang="pt-BR" dirty="0"/>
-              <a:t>{Centroide} = \</a:t>
-            </a:r>
-            <a:r>
-              <a:rPr lang="pt-BR" dirty="0" err="1"/>
-              <a:t>left</a:t>
-            </a:r>
-            <a:r>
-              <a:rPr lang="pt-BR" dirty="0"/>
-              <a:t>( \</a:t>
-            </a:r>
-            <a:r>
-              <a:rPr lang="pt-BR" dirty="0" err="1"/>
-              <a:t>frac</a:t>
-            </a:r>
-            <a:r>
-              <a:rPr lang="pt-BR" dirty="0"/>
-              <a:t>{1}{n} \sum_{i=1}^{n} x_{i1}, \</a:t>
-            </a:r>
-            <a:r>
-              <a:rPr lang="pt-BR" dirty="0" err="1"/>
-              <a:t>frac</a:t>
-            </a:r>
-            <a:r>
-              <a:rPr lang="pt-BR" dirty="0"/>
-              <a:t>{1}{n} \sum_{i=1}^{n} x_{i2}, \</a:t>
-            </a:r>
-            <a:r>
-              <a:rPr lang="pt-BR" dirty="0" err="1"/>
-              <a:t>ldots</a:t>
-            </a:r>
-            <a:r>
-              <a:rPr lang="pt-BR" dirty="0"/>
-              <a:t>, \</a:t>
-            </a:r>
-            <a:r>
-              <a:rPr lang="pt-BR" dirty="0" err="1"/>
-              <a:t>frac</a:t>
-            </a:r>
-            <a:r>
-              <a:rPr lang="pt-BR" dirty="0"/>
-              <a:t>{1}{n} \sum_{i=1}^{n} x_{id} \</a:t>
-            </a:r>
-            <a:r>
-              <a:rPr lang="pt-BR" dirty="0" err="1"/>
-              <a:t>right</a:t>
-            </a:r>
-            <a:r>
-              <a:rPr lang="pt-BR" dirty="0"/>
-              <a:t>) </a:t>
-            </a:r>
-            <a:r>
-              <a:rPr lang="pt-BR" b="1" dirty="0"/>
-              <a:t>Aplicações:</a:t>
-            </a:r>
-          </a:p>
-          <a:p>
-            <a:pPr>
-              <a:buFont typeface="Arial" panose="020B0604020202020204" pitchFamily="34" charset="0"/>
-              <a:buChar char="•"/>
-            </a:pPr>
-            <a:r>
-              <a:rPr lang="pt-BR" dirty="0"/>
-              <a:t>Serve como ponto de referência para determinar quais amostras pertencem a um cluster (calculando distâncias em algoritmos como K-</a:t>
-            </a:r>
-            <a:r>
-              <a:rPr lang="pt-BR" dirty="0" err="1"/>
-              <a:t>Means</a:t>
-            </a:r>
-            <a:r>
-              <a:rPr lang="pt-BR" dirty="0"/>
-              <a:t>).</a:t>
-            </a:r>
-          </a:p>
-          <a:p>
-            <a:pPr>
-              <a:buFont typeface="Arial" panose="020B0604020202020204" pitchFamily="34" charset="0"/>
-              <a:buChar char="•"/>
-            </a:pPr>
-            <a:r>
-              <a:rPr lang="pt-BR" dirty="0"/>
-              <a:t>Ajuda na interpretação dos clusters ao indicar a "localização média" de seus elementos.</a:t>
-            </a:r>
-          </a:p>
-          <a:p>
-            <a:r>
-              <a:rPr lang="pt-BR" b="1" dirty="0"/>
-              <a:t>Observação:</a:t>
-            </a:r>
-          </a:p>
-          <a:p>
-            <a:r>
-              <a:rPr lang="pt-BR" dirty="0"/>
-              <a:t>Em algoritmos baseados em densidade, como </a:t>
-            </a:r>
-            <a:r>
-              <a:rPr lang="pt-BR" b="1" dirty="0"/>
-              <a:t>DBSCAN</a:t>
-            </a:r>
-            <a:r>
-              <a:rPr lang="pt-BR" dirty="0"/>
-              <a:t>, o conceito de centroide pode não ser tão relevante, já que esses métodos não dependem de cálculos baseados na média dos pontos, mas na densidade local.</a:t>
-            </a:r>
-          </a:p>
           <a:p>
             <a:pPr marL="0" marR="0" lvl="0" indent="0" algn="l" defTabSz="914400" rtl="0" eaLnBrk="1" fontAlgn="auto" latinLnBrk="0" hangingPunct="1">
               <a:lnSpc>
@@ -1080,358 +953,24 @@
               </a:spcAft>
               <a:buClrTx/>
               <a:buSzTx/>
-              <a:buFont typeface="Arial" panose="020B0604020202020204" pitchFamily="34" charset="0"/>
+              <a:buFontTx/>
               <a:buNone/>
               <a:tabLst/>
               <a:defRPr/>
             </a:pPr>
-            <a:endParaRPr lang="en-US" dirty="0"/>
-          </a:p>
-          <a:p>
-            <a:pPr marL="0" marR="0" lvl="0" indent="0" algn="l" defTabSz="914400" rtl="0" eaLnBrk="1" fontAlgn="auto" latinLnBrk="0" hangingPunct="1">
-              <a:lnSpc>
-                <a:spcPct val="100000"/>
-              </a:lnSpc>
-              <a:spcBef>
-                <a:spcPts val="0"/>
-              </a:spcBef>
-              <a:spcAft>
-                <a:spcPts val="0"/>
-              </a:spcAft>
-              <a:buClrTx/>
-              <a:buSzTx/>
-              <a:buFont typeface="Arial" panose="020B0604020202020204" pitchFamily="34" charset="0"/>
-              <a:buNone/>
-              <a:tabLst/>
-              <a:defRPr/>
-            </a:pPr>
-            <a:endParaRPr lang="en-US" dirty="0"/>
-          </a:p>
-          <a:p>
-            <a:pPr marL="0" marR="0" lvl="0" indent="0" algn="l" defTabSz="914400" rtl="0" eaLnBrk="1" fontAlgn="auto" latinLnBrk="0" hangingPunct="1">
-              <a:lnSpc>
-                <a:spcPct val="100000"/>
-              </a:lnSpc>
-              <a:spcBef>
-                <a:spcPts val="0"/>
-              </a:spcBef>
-              <a:spcAft>
-                <a:spcPts val="0"/>
-              </a:spcAft>
-              <a:buClrTx/>
-              <a:buSzTx/>
-              <a:buFont typeface="Arial" panose="020B0604020202020204" pitchFamily="34" charset="0"/>
-              <a:buNone/>
-              <a:tabLst/>
-              <a:defRPr/>
-            </a:pPr>
-            <a:endParaRPr lang="en-US" dirty="0"/>
-          </a:p>
-          <a:p>
-            <a:pPr marL="0" marR="0" lvl="0" indent="0" algn="l" defTabSz="914400" rtl="0" eaLnBrk="1" fontAlgn="auto" latinLnBrk="0" hangingPunct="1">
-              <a:lnSpc>
-                <a:spcPct val="100000"/>
-              </a:lnSpc>
-              <a:spcBef>
-                <a:spcPts val="0"/>
-              </a:spcBef>
-              <a:spcAft>
-                <a:spcPts val="0"/>
-              </a:spcAft>
-              <a:buClrTx/>
-              <a:buSzTx/>
-              <a:buFont typeface="Arial" panose="020B0604020202020204" pitchFamily="34" charset="0"/>
-              <a:buNone/>
-              <a:tabLst/>
-              <a:defRPr/>
-            </a:pPr>
-            <a:endParaRPr lang="en-US" dirty="0"/>
-          </a:p>
-          <a:p>
-            <a:pPr marL="171450" marR="0" lvl="0" indent="-171450" algn="l" defTabSz="914400" rtl="0" eaLnBrk="1" fontAlgn="auto" latinLnBrk="0" hangingPunct="1">
-              <a:lnSpc>
-                <a:spcPct val="100000"/>
-              </a:lnSpc>
-              <a:spcBef>
-                <a:spcPts val="0"/>
-              </a:spcBef>
-              <a:spcAft>
-                <a:spcPts val="0"/>
-              </a:spcAft>
-              <a:buClrTx/>
-              <a:buSzTx/>
-              <a:buFont typeface="Arial" panose="020B0604020202020204" pitchFamily="34" charset="0"/>
-              <a:buChar char="•"/>
-              <a:tabLst/>
-              <a:defRPr/>
-            </a:pPr>
-            <a:r>
-              <a:rPr lang="en-US" dirty="0"/>
-              <a:t>C</a:t>
-            </a:r>
-            <a:r>
-              <a:rPr lang="pt-BR" dirty="0" err="1"/>
-              <a:t>entros</a:t>
-            </a:r>
-            <a:r>
-              <a:rPr lang="pt-BR" dirty="0"/>
-              <a:t> para redes Bayesianas ou de </a:t>
-            </a:r>
-            <a:r>
-              <a:rPr lang="en-US" dirty="0" err="1"/>
-              <a:t>Função</a:t>
-            </a:r>
-            <a:r>
-              <a:rPr lang="en-US" dirty="0"/>
-              <a:t> de base radial (</a:t>
-            </a:r>
-            <a:r>
-              <a:rPr lang="pt-BR" dirty="0"/>
-              <a:t>RBF): Os classificadores bayesianos e as redes de função de base radial operam com centros,</a:t>
-            </a:r>
-            <a:r>
-              <a:rPr lang="pt-BR" baseline="0" dirty="0"/>
-              <a:t> pois utilizam distribuições gaussianas. </a:t>
-            </a:r>
-            <a:r>
-              <a:rPr lang="pt-BR" dirty="0"/>
-              <a:t>Geralmente, os centros são identificados com os vetores de atributos dos exemplos individuais.</a:t>
-            </a:r>
-            <a:r>
-              <a:rPr lang="pt-BR" baseline="0" dirty="0"/>
-              <a:t> </a:t>
-            </a:r>
-            <a:r>
-              <a:rPr lang="pt-BR" dirty="0"/>
-              <a:t>No entanto, isso levaria a classificadores impraticavelmente grandes em domínios com milhões de exemplos. O engenheiro então prefere dividir o conjunto de treinamento em N clusters e identificar os centros gaussianos com os </a:t>
-            </a:r>
-            <a:r>
-              <a:rPr lang="pt-BR" dirty="0" err="1"/>
-              <a:t>centróides</a:t>
-            </a:r>
-            <a:r>
-              <a:rPr lang="pt-BR" dirty="0"/>
-              <a:t> dos clusters.</a:t>
-            </a:r>
-          </a:p>
-          <a:p>
-            <a:pPr marL="171450" marR="0" lvl="0" indent="-171450" algn="l" defTabSz="914400" rtl="0" eaLnBrk="1" fontAlgn="auto" latinLnBrk="0" hangingPunct="1">
-              <a:lnSpc>
-                <a:spcPct val="100000"/>
-              </a:lnSpc>
-              <a:spcBef>
-                <a:spcPts val="0"/>
-              </a:spcBef>
-              <a:spcAft>
-                <a:spcPts val="0"/>
-              </a:spcAft>
-              <a:buClrTx/>
-              <a:buSzTx/>
-              <a:buFont typeface="Arial" panose="020B0604020202020204" pitchFamily="34" charset="0"/>
-              <a:buChar char="•"/>
-              <a:tabLst/>
-              <a:defRPr/>
-            </a:pPr>
-            <a:r>
-              <a:rPr lang="pt-BR" dirty="0"/>
-              <a:t>Estimativas de valores de atributos desconhecidos : </a:t>
-            </a:r>
-            <a:r>
-              <a:rPr lang="pt-BR" sz="1200" b="0" i="0" kern="1200" dirty="0">
-                <a:solidFill>
-                  <a:schemeClr val="tx1"/>
-                </a:solidFill>
-                <a:effectLst/>
-                <a:latin typeface="+mn-lt"/>
-                <a:ea typeface="+mn-ea"/>
-                <a:cs typeface="+mn-cs"/>
-              </a:rPr>
-              <a:t>Existem</a:t>
-            </a:r>
-            <a:r>
-              <a:rPr lang="pt-BR" sz="1200" b="0" i="0" kern="1200" baseline="0" dirty="0">
-                <a:solidFill>
-                  <a:schemeClr val="tx1"/>
-                </a:solidFill>
-                <a:effectLst/>
-                <a:latin typeface="+mn-lt"/>
-                <a:ea typeface="+mn-ea"/>
-                <a:cs typeface="+mn-cs"/>
-              </a:rPr>
-              <a:t> casos onde </a:t>
-            </a:r>
-            <a:r>
-              <a:rPr lang="pt-BR" sz="1200" b="0" i="0" kern="1200" dirty="0">
-                <a:solidFill>
-                  <a:schemeClr val="tx1"/>
-                </a:solidFill>
-                <a:effectLst/>
-                <a:latin typeface="+mn-lt"/>
-                <a:ea typeface="+mn-ea"/>
-                <a:cs typeface="+mn-cs"/>
-              </a:rPr>
-              <a:t>alguns valores de atributos às vezes são desconhecidos.</a:t>
-            </a:r>
-            <a:r>
-              <a:rPr lang="pt-BR" sz="1200" b="0" i="0" kern="1200" baseline="0" dirty="0">
-                <a:solidFill>
-                  <a:schemeClr val="tx1"/>
-                </a:solidFill>
-                <a:effectLst/>
-                <a:latin typeface="+mn-lt"/>
-                <a:ea typeface="+mn-ea"/>
-                <a:cs typeface="+mn-cs"/>
-              </a:rPr>
-              <a:t> </a:t>
-            </a:r>
-            <a:r>
-              <a:rPr lang="pt-BR" sz="1200" b="0" i="0" kern="1200" dirty="0">
-                <a:solidFill>
-                  <a:schemeClr val="tx1"/>
-                </a:solidFill>
-                <a:effectLst/>
-                <a:latin typeface="+mn-lt"/>
-                <a:ea typeface="+mn-ea"/>
-                <a:cs typeface="+mn-cs"/>
-              </a:rPr>
-              <a:t>Uma forma simples de lidar com esta questão</a:t>
-            </a:r>
-            <a:r>
-              <a:rPr lang="pt-BR" sz="1200" b="0" i="0" kern="1200" baseline="0" dirty="0">
-                <a:solidFill>
-                  <a:schemeClr val="tx1"/>
-                </a:solidFill>
-                <a:effectLst/>
-                <a:latin typeface="+mn-lt"/>
-                <a:ea typeface="+mn-ea"/>
-                <a:cs typeface="+mn-cs"/>
-              </a:rPr>
-              <a:t> é usar a</a:t>
-            </a:r>
-            <a:r>
-              <a:rPr lang="pt-BR" sz="1200" b="0" i="0" kern="1200" dirty="0">
-                <a:solidFill>
-                  <a:schemeClr val="tx1"/>
-                </a:solidFill>
-                <a:effectLst/>
-                <a:latin typeface="+mn-lt"/>
-                <a:ea typeface="+mn-ea"/>
-                <a:cs typeface="+mn-cs"/>
-              </a:rPr>
-              <a:t> estimativa do valor ausente como sendo a média ou o valor mais frequente de um determinado cluster.</a:t>
-            </a:r>
-            <a:r>
-              <a:rPr lang="pt-BR" sz="1200" b="0" i="0" kern="1200" baseline="0" dirty="0">
-                <a:solidFill>
-                  <a:schemeClr val="tx1"/>
-                </a:solidFill>
-                <a:effectLst/>
-                <a:latin typeface="+mn-lt"/>
-                <a:ea typeface="+mn-ea"/>
-                <a:cs typeface="+mn-cs"/>
-              </a:rPr>
-              <a:t> Esta é uma abordagem </a:t>
-            </a:r>
-            <a:r>
-              <a:rPr lang="pt-BR" sz="1200" b="0" i="0" kern="1200" dirty="0">
-                <a:solidFill>
-                  <a:schemeClr val="tx1"/>
-                </a:solidFill>
-                <a:effectLst/>
-                <a:latin typeface="+mn-lt"/>
-                <a:ea typeface="+mn-ea"/>
-                <a:cs typeface="+mn-cs"/>
-              </a:rPr>
-              <a:t>mais sólida porque usa mais informações sobre a natureza do domínio.</a:t>
-            </a:r>
-          </a:p>
-          <a:p>
-            <a:pPr marL="171450" marR="0" lvl="0" indent="-171450" algn="l" defTabSz="914400" rtl="0" eaLnBrk="1" fontAlgn="auto" latinLnBrk="0" hangingPunct="1">
-              <a:lnSpc>
-                <a:spcPct val="100000"/>
-              </a:lnSpc>
-              <a:spcBef>
-                <a:spcPts val="0"/>
-              </a:spcBef>
-              <a:spcAft>
-                <a:spcPts val="0"/>
-              </a:spcAft>
-              <a:buClrTx/>
-              <a:buSzTx/>
-              <a:buFont typeface="Arial" panose="020B0604020202020204" pitchFamily="34" charset="0"/>
-              <a:buChar char="•"/>
-              <a:tabLst/>
-              <a:defRPr/>
-            </a:pPr>
-            <a:r>
-              <a:rPr lang="pt-BR" dirty="0"/>
-              <a:t>ferramentas de visualização de dados multidimensionais</a:t>
-            </a:r>
-          </a:p>
-          <a:p>
-            <a:pPr marL="171450" marR="0" lvl="0" indent="-171450" algn="l" defTabSz="914400" rtl="0" eaLnBrk="1" fontAlgn="auto" latinLnBrk="0" hangingPunct="1">
-              <a:lnSpc>
-                <a:spcPct val="100000"/>
-              </a:lnSpc>
-              <a:spcBef>
-                <a:spcPts val="0"/>
-              </a:spcBef>
-              <a:spcAft>
-                <a:spcPts val="0"/>
-              </a:spcAft>
-              <a:buClrTx/>
-              <a:buSzTx/>
-              <a:buFont typeface="Arial" panose="020B0604020202020204" pitchFamily="34" charset="0"/>
-              <a:buChar char="•"/>
-              <a:tabLst/>
-              <a:defRPr/>
-            </a:pPr>
-            <a:r>
-              <a:rPr lang="pt-BR" dirty="0"/>
-              <a:t>Auxiliares para criação de classificadores mais simples: </a:t>
-            </a:r>
-            <a:r>
-              <a:rPr lang="pt-BR" sz="1200" b="0" i="0" kern="1200" dirty="0">
-                <a:solidFill>
-                  <a:schemeClr val="tx1"/>
-                </a:solidFill>
-                <a:effectLst/>
-                <a:latin typeface="+mn-lt"/>
-                <a:ea typeface="+mn-ea"/>
-                <a:cs typeface="+mn-cs"/>
-              </a:rPr>
-              <a:t>o conhecimento de clusters de dados pode ser útil no aprendizado supervisionado. É bastante comum que todos (ou quase todos) os exemplos em um cluster pertençam à mesma classe. Nesse caso, o desenvolvedor de um software de aprendizado supervisionado pode decidir primeiro identificar os clusters e depois rotular cada cluster (todos os exemplos que pertencem</a:t>
-            </a:r>
-            <a:r>
-              <a:rPr lang="pt-BR" sz="1200" b="0" i="0" kern="1200" baseline="0" dirty="0">
-                <a:solidFill>
-                  <a:schemeClr val="tx1"/>
-                </a:solidFill>
-                <a:effectLst/>
-                <a:latin typeface="+mn-lt"/>
-                <a:ea typeface="+mn-ea"/>
-                <a:cs typeface="+mn-cs"/>
-              </a:rPr>
-              <a:t> ao cluster)</a:t>
-            </a:r>
-            <a:r>
-              <a:rPr lang="pt-BR" sz="1200" b="0" i="0" kern="1200" dirty="0">
-                <a:solidFill>
-                  <a:schemeClr val="tx1"/>
-                </a:solidFill>
-                <a:effectLst/>
-                <a:latin typeface="+mn-lt"/>
-                <a:ea typeface="+mn-ea"/>
-                <a:cs typeface="+mn-cs"/>
-              </a:rPr>
-              <a:t> com sua classe dominante.</a:t>
-            </a:r>
-          </a:p>
-        </p:txBody>
-      </p:sp>
-      <p:sp>
-        <p:nvSpPr>
-          <p:cNvPr id="4" name="Slide Number Placeholder 3"/>
+            <a:endParaRPr lang="pt-BR" dirty="0"/>
+          </a:p>
+        </p:txBody>
+      </p:sp>
+      <p:sp>
+        <p:nvSpPr>
+          <p:cNvPr id="4" name="Slide Number Placeholder 3">
+            <a:extLst>
+              <a:ext uri="{FF2B5EF4-FFF2-40B4-BE49-F238E27FC236}">
+                <a16:creationId xmlns:a16="http://schemas.microsoft.com/office/drawing/2014/main" xmlns="" id="{64C5BAB2-4C6F-96F0-D4ED-0C66FFB4872B}"/>
+              </a:ext>
+            </a:extLst>
+          </p:cNvPr>
           <p:cNvSpPr>
             <a:spLocks noGrp="1"/>
           </p:cNvSpPr>
@@ -1455,7 +994,7 @@
     </p:spTree>
     <p:extLst>
       <p:ext uri="{BB962C8B-B14F-4D97-AF65-F5344CB8AC3E}">
-        <p14:creationId xmlns:p14="http://schemas.microsoft.com/office/powerpoint/2010/main" val="2248288649"/>
+        <p14:creationId xmlns:p14="http://schemas.microsoft.com/office/powerpoint/2010/main" val="2508298284"/>
       </p:ext>
     </p:extLst>
   </p:cSld>
@@ -1557,7 +1096,7 @@
         <p:cNvPr id="1" name="">
           <a:extLst>
             <a:ext uri="{FF2B5EF4-FFF2-40B4-BE49-F238E27FC236}">
-              <a16:creationId xmlns:a16="http://schemas.microsoft.com/office/drawing/2014/main" id="{D98F69D2-AA2F-1FAB-FC58-E17B9F051FEC}"/>
+              <a16:creationId xmlns:a16="http://schemas.microsoft.com/office/drawing/2014/main" xmlns="" id="{D98F69D2-AA2F-1FAB-FC58-E17B9F051FEC}"/>
             </a:ext>
           </a:extLst>
         </p:cNvPr>
@@ -1577,7 +1116,7 @@
           <p:cNvPr id="2" name="Espaço Reservado para Imagem de Slide 1">
             <a:extLst>
               <a:ext uri="{FF2B5EF4-FFF2-40B4-BE49-F238E27FC236}">
-                <a16:creationId xmlns:a16="http://schemas.microsoft.com/office/drawing/2014/main" id="{BFA38404-D7C9-03F2-A7E5-10C0EFC8F190}"/>
+                <a16:creationId xmlns:a16="http://schemas.microsoft.com/office/drawing/2014/main" xmlns="" id="{BFA38404-D7C9-03F2-A7E5-10C0EFC8F190}"/>
               </a:ext>
             </a:extLst>
           </p:cNvPr>
@@ -1595,7 +1134,7 @@
           <p:cNvPr id="3" name="Espaço Reservado para Anotações 2">
             <a:extLst>
               <a:ext uri="{FF2B5EF4-FFF2-40B4-BE49-F238E27FC236}">
-                <a16:creationId xmlns:a16="http://schemas.microsoft.com/office/drawing/2014/main" id="{5A8313F1-5D52-52B4-46D0-20D6D6D5149A}"/>
+                <a16:creationId xmlns:a16="http://schemas.microsoft.com/office/drawing/2014/main" xmlns="" id="{5A8313F1-5D52-52B4-46D0-20D6D6D5149A}"/>
               </a:ext>
             </a:extLst>
           </p:cNvPr>
@@ -1620,7 +1159,7 @@
           <p:cNvPr id="4" name="Espaço Reservado para Número de Slide 3">
             <a:extLst>
               <a:ext uri="{FF2B5EF4-FFF2-40B4-BE49-F238E27FC236}">
-                <a16:creationId xmlns:a16="http://schemas.microsoft.com/office/drawing/2014/main" id="{428A95A6-CC49-168A-C37A-1C6EB3B93225}"/>
+                <a16:creationId xmlns:a16="http://schemas.microsoft.com/office/drawing/2014/main" xmlns="" id="{428A95A6-CC49-168A-C37A-1C6EB3B93225}"/>
               </a:ext>
             </a:extLst>
           </p:cNvPr>
@@ -1676,7 +1215,7 @@
       </p:grpSpPr>
       <p:sp>
         <p:nvSpPr>
-          <p:cNvPr id="2" name="Espaço Reservado para Imagem de Slide 1"/>
+          <p:cNvPr id="2" name="Slide Image Placeholder 1"/>
           <p:cNvSpPr>
             <a:spLocks noGrp="1" noRot="1" noChangeAspect="1"/>
           </p:cNvSpPr>
@@ -1688,7 +1227,7 @@
       </p:sp>
       <p:sp>
         <p:nvSpPr>
-          <p:cNvPr id="3" name="Espaço Reservado para Anotações 2"/>
+          <p:cNvPr id="3" name="Notes Placeholder 2"/>
           <p:cNvSpPr>
             <a:spLocks noGrp="1"/>
           </p:cNvSpPr>
@@ -1703,29 +1242,29 @@
           <a:p>
             <a:r>
               <a:rPr lang="pt-BR" dirty="0"/>
-              <a:t>O K-</a:t>
-            </a:r>
-            <a:r>
-              <a:rPr lang="pt-BR" dirty="0" err="1"/>
-              <a:t>Means</a:t>
-            </a:r>
-            <a:r>
-              <a:rPr lang="pt-BR" dirty="0"/>
-              <a:t> encerra o treinamento com base em </a:t>
+              <a:t>Em </a:t>
             </a:r>
             <a:r>
               <a:rPr lang="pt-BR" b="1" dirty="0"/>
-              <a:t>critérios de convergência</a:t>
-            </a:r>
-            <a:r>
-              <a:rPr lang="pt-BR" dirty="0"/>
-              <a:t> que indicam quando o algoritmo atingiu um estado estável ou suficiente para parar. Esses critérios incluem:</a:t>
-            </a:r>
-          </a:p>
-          <a:p>
+              <a:t>clusterização</a:t>
+            </a:r>
+            <a:r>
+              <a:rPr lang="pt-BR" dirty="0"/>
+              <a:t>, um </a:t>
+            </a:r>
             <a:r>
               <a:rPr lang="pt-BR" b="1" dirty="0"/>
-              <a:t>1. Estabilização dos Centroides</a:t>
+              <a:t>centroide</a:t>
+            </a:r>
+            <a:r>
+              <a:rPr lang="pt-BR" dirty="0"/>
+              <a:t> é o ponto central de um grupo (cluster) de dados. Ele representa a "média" das amostras dentro do cluster, sendo um ponto de referência que pode ser usado para definir a posição do cluster no espaço de características.</a:t>
+            </a:r>
+          </a:p>
+          <a:p>
+            <a:r>
+              <a:rPr lang="pt-BR" b="1" dirty="0"/>
+              <a:t>Características principais:</a:t>
             </a:r>
           </a:p>
           <a:p>
@@ -1735,15 +1274,15 @@
             </a:pPr>
             <a:r>
               <a:rPr lang="pt-BR" dirty="0"/>
-              <a:t>O algoritmo para quando os </a:t>
+              <a:t>O centroide é geralmente calculado como a </a:t>
             </a:r>
             <a:r>
               <a:rPr lang="pt-BR" b="1" dirty="0"/>
-              <a:t>centroides não se movem mais significativamente</a:t>
-            </a:r>
-            <a:r>
-              <a:rPr lang="pt-BR" dirty="0"/>
-              <a:t> entre iterações.</a:t>
+              <a:t>média aritmética</a:t>
+            </a:r>
+            <a:r>
+              <a:rPr lang="pt-BR" dirty="0"/>
+              <a:t> das coordenadas de todos os pontos do cluster.</a:t>
             </a:r>
           </a:p>
           <a:p>
@@ -1753,49 +1292,19 @@
             </a:pPr>
             <a:r>
               <a:rPr lang="pt-BR" dirty="0"/>
-              <a:t>Concretamente, isso significa que os deslocamentos dos centroides são menores que um limite pré-definido (ϵ\</a:t>
-            </a:r>
-            <a:r>
-              <a:rPr lang="pt-BR" dirty="0" err="1"/>
-              <a:t>epsilon</a:t>
-            </a:r>
-            <a:r>
-              <a:rPr lang="pt-BR" dirty="0"/>
-              <a:t>).</a:t>
-            </a:r>
-          </a:p>
-          <a:p>
-            <a:r>
-              <a:rPr lang="pt-BR" dirty="0"/>
-              <a:t>∥novo centroide−antigo centroide∥&lt;ϵ\|\</a:t>
-            </a:r>
-            <a:r>
-              <a:rPr lang="pt-BR" dirty="0" err="1"/>
-              <a:t>text</a:t>
-            </a:r>
-            <a:r>
-              <a:rPr lang="pt-BR" dirty="0"/>
-              <a:t>{novo centroide} - \</a:t>
-            </a:r>
-            <a:r>
-              <a:rPr lang="pt-BR" dirty="0" err="1"/>
-              <a:t>text</a:t>
-            </a:r>
-            <a:r>
-              <a:rPr lang="pt-BR" dirty="0"/>
-              <a:t>{antigo centroide}\| &lt; \</a:t>
-            </a:r>
-            <a:r>
-              <a:rPr lang="pt-BR" dirty="0" err="1"/>
-              <a:t>epsilon</a:t>
-            </a:r>
-            <a:r>
-              <a:rPr lang="pt-BR" dirty="0"/>
-              <a:t> </a:t>
+              <a:t>No caso de algoritmos como </a:t>
             </a:r>
             <a:r>
               <a:rPr lang="pt-BR" b="1" dirty="0"/>
-              <a:t>2. Estabilização das Atribuições de Cluster</a:t>
+              <a:t>K-</a:t>
+            </a:r>
+            <a:r>
+              <a:rPr lang="pt-BR" b="1" dirty="0" err="1"/>
+              <a:t>Means</a:t>
+            </a:r>
+            <a:r>
+              <a:rPr lang="pt-BR" dirty="0"/>
+              <a:t>, os centroides são ajustados iterativamente até que os clusters se estabilizem ou atinjam um critério de parada.</a:t>
             </a:r>
           </a:p>
           <a:p>
@@ -1805,21 +1314,109 @@
             </a:pPr>
             <a:r>
               <a:rPr lang="pt-BR" dirty="0"/>
-              <a:t>Se os pontos não mudarem de cluster entre iterações, o K-</a:t>
+              <a:t>O centroide </a:t>
+            </a:r>
+            <a:r>
+              <a:rPr lang="pt-BR" b="1" dirty="0"/>
+              <a:t>não precisa ser um ponto real</a:t>
+            </a:r>
+            <a:r>
+              <a:rPr lang="pt-BR" dirty="0"/>
+              <a:t> no conjunto de dados; ele pode estar em uma posição intermediária entre os pontos.</a:t>
+            </a:r>
+          </a:p>
+          <a:p>
+            <a:r>
+              <a:rPr lang="pt-BR" b="1" dirty="0"/>
+              <a:t>Cálculo do centroide:</a:t>
+            </a:r>
+          </a:p>
+          <a:p>
+            <a:r>
+              <a:rPr lang="pt-BR" dirty="0"/>
+              <a:t>Se o cluster contém </a:t>
             </a:r>
             <a:r>
               <a:rPr lang="pt-BR" dirty="0" err="1"/>
-              <a:t>Means</a:t>
-            </a:r>
-            <a:r>
-              <a:rPr lang="pt-BR" dirty="0"/>
-              <a:t> considera que atingiu a convergência.</a:t>
-            </a:r>
-          </a:p>
-          <a:p>
+              <a:t>nn</a:t>
+            </a:r>
+            <a:r>
+              <a:rPr lang="pt-BR" dirty="0"/>
+              <a:t> pontos de dimensão </a:t>
+            </a:r>
+            <a:r>
+              <a:rPr lang="pt-BR" dirty="0" err="1"/>
+              <a:t>dd</a:t>
+            </a:r>
+            <a:r>
+              <a:rPr lang="pt-BR" dirty="0"/>
+              <a:t>, as coordenadas do centroide são calculadas como:</a:t>
+            </a:r>
+          </a:p>
+          <a:p>
+            <a:r>
+              <a:rPr lang="pt-BR" dirty="0"/>
+              <a:t>Centroide=(1n∑i=1nxi1,1n∑i=1nxi2,…,1n∑i=1nxid)\</a:t>
+            </a:r>
+            <a:r>
+              <a:rPr lang="pt-BR" dirty="0" err="1"/>
+              <a:t>text</a:t>
+            </a:r>
+            <a:r>
+              <a:rPr lang="pt-BR" dirty="0"/>
+              <a:t>{Centroide} = \</a:t>
+            </a:r>
+            <a:r>
+              <a:rPr lang="pt-BR" dirty="0" err="1"/>
+              <a:t>left</a:t>
+            </a:r>
+            <a:r>
+              <a:rPr lang="pt-BR" dirty="0"/>
+              <a:t>( \</a:t>
+            </a:r>
+            <a:r>
+              <a:rPr lang="pt-BR" dirty="0" err="1"/>
+              <a:t>frac</a:t>
+            </a:r>
+            <a:r>
+              <a:rPr lang="pt-BR" dirty="0"/>
+              <a:t>{1}{n} \sum_{i=1}^{n} x_{i1}, \</a:t>
+            </a:r>
+            <a:r>
+              <a:rPr lang="pt-BR" dirty="0" err="1"/>
+              <a:t>frac</a:t>
+            </a:r>
+            <a:r>
+              <a:rPr lang="pt-BR" dirty="0"/>
+              <a:t>{1}{n} \sum_{i=1}^{n} x_{i2}, \</a:t>
+            </a:r>
+            <a:r>
+              <a:rPr lang="pt-BR" dirty="0" err="1"/>
+              <a:t>ldots</a:t>
+            </a:r>
+            <a:r>
+              <a:rPr lang="pt-BR" dirty="0"/>
+              <a:t>, \</a:t>
+            </a:r>
+            <a:r>
+              <a:rPr lang="pt-BR" dirty="0" err="1"/>
+              <a:t>frac</a:t>
+            </a:r>
+            <a:r>
+              <a:rPr lang="pt-BR" dirty="0"/>
+              <a:t>{1}{n} \sum_{i=1}^{n} x_{id} \</a:t>
+            </a:r>
+            <a:r>
+              <a:rPr lang="pt-BR" dirty="0" err="1"/>
+              <a:t>right</a:t>
+            </a:r>
+            <a:r>
+              <a:rPr lang="pt-BR" dirty="0"/>
+              <a:t>) </a:t>
+            </a:r>
             <a:r>
               <a:rPr lang="pt-BR" b="1" dirty="0"/>
-              <a:t>3. Número Máximo de Iterações</a:t>
+              <a:t>Aplicações:</a:t>
             </a:r>
           </a:p>
           <a:p>
@@ -1829,21 +1426,15 @@
             </a:pPr>
             <a:r>
               <a:rPr lang="pt-BR" dirty="0"/>
-              <a:t>Um limite máximo de iterações pode ser imposto (</a:t>
+              <a:t>Serve como ponto de referência para determinar quais amostras pertencem a um cluster (calculando distâncias em algoritmos como K-</a:t>
             </a:r>
             <a:r>
               <a:rPr lang="pt-BR" dirty="0" err="1"/>
-              <a:t>max_itermax</a:t>
-            </a:r>
-            <a:r>
-              <a:rPr lang="pt-BR" dirty="0"/>
-              <a:t>\_iter) para evitar que o algoritmo continue indefinidamente, especialmente em casos em que a convergência é difícil de alcançar.</a:t>
-            </a:r>
-          </a:p>
-          <a:p>
-            <a:r>
-              <a:rPr lang="pt-BR" b="1" dirty="0"/>
-              <a:t>4. Convergência da Função Objetivo</a:t>
+              <a:t>Means</a:t>
+            </a:r>
+            <a:r>
+              <a:rPr lang="pt-BR" dirty="0"/>
+              <a:t>).</a:t>
             </a:r>
           </a:p>
           <a:p>
@@ -1853,236 +1444,399 @@
             </a:pPr>
             <a:r>
               <a:rPr lang="pt-BR" dirty="0"/>
-              <a:t>O algoritmo minimiza a </a:t>
-            </a:r>
+              <a:t>Ajuda na interpretação dos clusters ao indicar a "localização média" de seus elementos.</a:t>
+            </a:r>
+          </a:p>
+          <a:p>
             <a:r>
               <a:rPr lang="pt-BR" b="1" dirty="0"/>
-              <a:t>soma dos erros quadráticos </a:t>
-            </a:r>
-            <a:r>
-              <a:rPr lang="pt-BR" b="1" dirty="0" err="1"/>
-              <a:t>intra-cluster</a:t>
+              <a:t>Observação:</a:t>
+            </a:r>
+          </a:p>
+          <a:p>
+            <a:r>
+              <a:rPr lang="pt-BR" dirty="0"/>
+              <a:t>Em algoritmos baseados em densidade, como </a:t>
             </a:r>
             <a:r>
               <a:rPr lang="pt-BR" b="1" dirty="0"/>
-              <a:t> (WSS)</a:t>
-            </a:r>
-            <a:r>
-              <a:rPr lang="pt-BR" dirty="0"/>
-              <a:t>, definida como:</a:t>
-            </a:r>
-          </a:p>
-          <a:p>
-            <a:pPr>
+              <a:t>DBSCAN</a:t>
+            </a:r>
+            <a:r>
+              <a:rPr lang="pt-BR" dirty="0"/>
+              <a:t>, o conceito de centroide pode não ser tão relevante, já que esses métodos não dependem de cálculos baseados na média dos pontos, mas na densidade local.</a:t>
+            </a:r>
+          </a:p>
+          <a:p>
+            <a:pPr marL="0" marR="0" lvl="0" indent="0" algn="l" defTabSz="914400" rtl="0" eaLnBrk="1" fontAlgn="auto" latinLnBrk="0" hangingPunct="1">
+              <a:lnSpc>
+                <a:spcPct val="100000"/>
+              </a:lnSpc>
+              <a:spcBef>
+                <a:spcPts val="0"/>
+              </a:spcBef>
+              <a:spcAft>
+                <a:spcPts val="0"/>
+              </a:spcAft>
+              <a:buClrTx/>
+              <a:buSzTx/>
+              <a:buFont typeface="Arial" panose="020B0604020202020204" pitchFamily="34" charset="0"/>
+              <a:buNone/>
+              <a:tabLst/>
+              <a:defRPr/>
+            </a:pPr>
+            <a:endParaRPr lang="en-US" dirty="0"/>
+          </a:p>
+          <a:p>
+            <a:pPr marL="0" marR="0" lvl="0" indent="0" algn="l" defTabSz="914400" rtl="0" eaLnBrk="1" fontAlgn="auto" latinLnBrk="0" hangingPunct="1">
+              <a:lnSpc>
+                <a:spcPct val="100000"/>
+              </a:lnSpc>
+              <a:spcBef>
+                <a:spcPts val="0"/>
+              </a:spcBef>
+              <a:spcAft>
+                <a:spcPts val="0"/>
+              </a:spcAft>
+              <a:buClrTx/>
+              <a:buSzTx/>
+              <a:buFont typeface="Arial" panose="020B0604020202020204" pitchFamily="34" charset="0"/>
+              <a:buNone/>
+              <a:tabLst/>
+              <a:defRPr/>
+            </a:pPr>
+            <a:endParaRPr lang="en-US" dirty="0"/>
+          </a:p>
+          <a:p>
+            <a:pPr marL="0" marR="0" lvl="0" indent="0" algn="l" defTabSz="914400" rtl="0" eaLnBrk="1" fontAlgn="auto" latinLnBrk="0" hangingPunct="1">
+              <a:lnSpc>
+                <a:spcPct val="100000"/>
+              </a:lnSpc>
+              <a:spcBef>
+                <a:spcPts val="0"/>
+              </a:spcBef>
+              <a:spcAft>
+                <a:spcPts val="0"/>
+              </a:spcAft>
+              <a:buClrTx/>
+              <a:buSzTx/>
+              <a:buFont typeface="Arial" panose="020B0604020202020204" pitchFamily="34" charset="0"/>
+              <a:buNone/>
+              <a:tabLst/>
+              <a:defRPr/>
+            </a:pPr>
+            <a:endParaRPr lang="en-US" dirty="0"/>
+          </a:p>
+          <a:p>
+            <a:pPr marL="0" marR="0" lvl="0" indent="0" algn="l" defTabSz="914400" rtl="0" eaLnBrk="1" fontAlgn="auto" latinLnBrk="0" hangingPunct="1">
+              <a:lnSpc>
+                <a:spcPct val="100000"/>
+              </a:lnSpc>
+              <a:spcBef>
+                <a:spcPts val="0"/>
+              </a:spcBef>
+              <a:spcAft>
+                <a:spcPts val="0"/>
+              </a:spcAft>
+              <a:buClrTx/>
+              <a:buSzTx/>
+              <a:buFont typeface="Arial" panose="020B0604020202020204" pitchFamily="34" charset="0"/>
+              <a:buNone/>
+              <a:tabLst/>
+              <a:defRPr/>
+            </a:pPr>
+            <a:endParaRPr lang="en-US" dirty="0"/>
+          </a:p>
+          <a:p>
+            <a:pPr marL="171450" marR="0" lvl="0" indent="-171450" algn="l" defTabSz="914400" rtl="0" eaLnBrk="1" fontAlgn="auto" latinLnBrk="0" hangingPunct="1">
+              <a:lnSpc>
+                <a:spcPct val="100000"/>
+              </a:lnSpc>
+              <a:spcBef>
+                <a:spcPts val="0"/>
+              </a:spcBef>
+              <a:spcAft>
+                <a:spcPts val="0"/>
+              </a:spcAft>
+              <a:buClrTx/>
+              <a:buSzTx/>
               <a:buFont typeface="Arial" panose="020B0604020202020204" pitchFamily="34" charset="0"/>
               <a:buChar char="•"/>
+              <a:tabLst/>
+              <a:defRPr/>
             </a:pPr>
             <a:r>
-              <a:rPr lang="pt-BR" dirty="0"/>
-              <a:t>WSS=∑i=1k∑x∈Ci∥x−μi∥2\</a:t>
+              <a:rPr lang="en-US" dirty="0"/>
+              <a:t>C</a:t>
             </a:r>
             <a:r>
               <a:rPr lang="pt-BR" dirty="0" err="1"/>
-              <a:t>text</a:t>
-            </a:r>
-            <a:r>
-              <a:rPr lang="pt-BR" dirty="0"/>
-              <a:t>{WSS} = \sum_{i=1}^{k} \sum_{x \in </a:t>
+              <a:t>entros</a:t>
+            </a:r>
+            <a:r>
+              <a:rPr lang="pt-BR" dirty="0"/>
+              <a:t> para redes Bayesianas ou de </a:t>
+            </a:r>
+            <a:r>
+              <a:rPr lang="en-US" dirty="0" err="1"/>
+              <a:t>Função</a:t>
+            </a:r>
+            <a:r>
+              <a:rPr lang="en-US" dirty="0"/>
+              <a:t> de base radial (</a:t>
+            </a:r>
+            <a:r>
+              <a:rPr lang="pt-BR" dirty="0"/>
+              <a:t>RBF): Os classificadores bayesianos e as redes de função de base radial operam com centros,</a:t>
+            </a:r>
+            <a:r>
+              <a:rPr lang="pt-BR" baseline="0" dirty="0"/>
+              <a:t> pois utilizam distribuições gaussianas. </a:t>
+            </a:r>
+            <a:r>
+              <a:rPr lang="pt-BR" dirty="0"/>
+              <a:t>Geralmente, os centros são identificados com os vetores de atributos dos exemplos individuais.</a:t>
+            </a:r>
+            <a:r>
+              <a:rPr lang="pt-BR" baseline="0" dirty="0"/>
+              <a:t> </a:t>
+            </a:r>
+            <a:r>
+              <a:rPr lang="pt-BR" dirty="0"/>
+              <a:t>No entanto, isso levaria a classificadores impraticavelmente grandes em domínios com milhões de exemplos. O engenheiro então prefere dividir o conjunto de treinamento em N clusters e identificar os centros gaussianos com os </a:t>
             </a:r>
             <a:r>
               <a:rPr lang="pt-BR" dirty="0" err="1"/>
-              <a:t>C_i</a:t>
-            </a:r>
-            <a:r>
-              <a:rPr lang="pt-BR" dirty="0"/>
-              <a:t>} \|\</a:t>
-            </a:r>
-            <a:r>
-              <a:rPr lang="pt-BR" dirty="0" err="1"/>
-              <a:t>mathbf</a:t>
-            </a:r>
-            <a:r>
-              <a:rPr lang="pt-BR" dirty="0"/>
-              <a:t>{x} - \</a:t>
-            </a:r>
-            <a:r>
-              <a:rPr lang="pt-BR" dirty="0" err="1"/>
-              <a:t>mu_i</a:t>
-            </a:r>
-            <a:r>
-              <a:rPr lang="pt-BR" dirty="0"/>
-              <a:t>\|^2 O K-</a:t>
-            </a:r>
-            <a:r>
-              <a:rPr lang="pt-BR" dirty="0" err="1"/>
-              <a:t>Means</a:t>
-            </a:r>
-            <a:r>
-              <a:rPr lang="pt-BR" dirty="0"/>
-              <a:t> para quando a redução no WSSWSS entre iterações consecutivas é menor que um limiar (Δ\Delta).</a:t>
-            </a:r>
-          </a:p>
-          <a:p>
-            <a:r>
-              <a:rPr lang="pt-BR" b="1" dirty="0"/>
-              <a:t>Processo Geral:</a:t>
-            </a:r>
-          </a:p>
-          <a:p>
-            <a:pPr>
-              <a:buFont typeface="+mj-lt"/>
-              <a:buAutoNum type="arabicPeriod"/>
-            </a:pPr>
-            <a:r>
-              <a:rPr lang="pt-BR" b="1" dirty="0"/>
-              <a:t>Inicialização</a:t>
-            </a:r>
-            <a:r>
-              <a:rPr lang="pt-BR" dirty="0"/>
-              <a:t>: Escolher </a:t>
-            </a:r>
-            <a:r>
-              <a:rPr lang="pt-BR" dirty="0" err="1"/>
-              <a:t>kk</a:t>
-            </a:r>
-            <a:r>
-              <a:rPr lang="pt-BR" dirty="0"/>
-              <a:t> centroides iniciais (aleatoriamente ou por métodos como K-</a:t>
-            </a:r>
-            <a:r>
-              <a:rPr lang="pt-BR" dirty="0" err="1"/>
-              <a:t>Means</a:t>
-            </a:r>
-            <a:r>
-              <a:rPr lang="pt-BR" dirty="0"/>
-              <a:t>++).</a:t>
-            </a:r>
-          </a:p>
-          <a:p>
-            <a:pPr>
-              <a:buFont typeface="+mj-lt"/>
-              <a:buAutoNum type="arabicPeriod"/>
-            </a:pPr>
-            <a:r>
-              <a:rPr lang="pt-BR" b="1" dirty="0"/>
-              <a:t>Passo de Atribuição</a:t>
-            </a:r>
-            <a:r>
-              <a:rPr lang="pt-BR" dirty="0"/>
-              <a:t>: Atribuir cada ponto ao cluster mais próximo (com base na distância, normalmente Euclidiana).</a:t>
-            </a:r>
-          </a:p>
-          <a:p>
-            <a:pPr>
-              <a:buFont typeface="+mj-lt"/>
-              <a:buAutoNum type="arabicPeriod"/>
-            </a:pPr>
-            <a:r>
-              <a:rPr lang="pt-BR" b="1" dirty="0"/>
-              <a:t>Passo de Atualização</a:t>
-            </a:r>
-            <a:r>
-              <a:rPr lang="pt-BR" dirty="0"/>
-              <a:t>: Recalcular os centroides como a média dos pontos atribuídos a cada cluster.</a:t>
-            </a:r>
-          </a:p>
-          <a:p>
-            <a:pPr>
-              <a:buFont typeface="+mj-lt"/>
-              <a:buAutoNum type="arabicPeriod"/>
-            </a:pPr>
-            <a:r>
-              <a:rPr lang="pt-BR" b="1" dirty="0"/>
-              <a:t>Verificação do Critério de Parada</a:t>
-            </a:r>
-            <a:r>
-              <a:rPr lang="pt-BR" dirty="0"/>
-              <a:t>: Verificar se algum dos critérios acima foi atendido. Caso contrário, repetir os passos 2 e 3.</a:t>
-            </a:r>
-          </a:p>
-          <a:p>
-            <a:r>
-              <a:rPr lang="pt-BR" b="1" dirty="0"/>
-              <a:t>Convergência e Garantias</a:t>
-            </a:r>
-          </a:p>
-          <a:p>
-            <a:pPr>
+              <a:t>centróides</a:t>
+            </a:r>
+            <a:r>
+              <a:rPr lang="pt-BR" dirty="0"/>
+              <a:t> dos clusters.</a:t>
+            </a:r>
+          </a:p>
+          <a:p>
+            <a:pPr marL="171450" marR="0" lvl="0" indent="-171450" algn="l" defTabSz="914400" rtl="0" eaLnBrk="1" fontAlgn="auto" latinLnBrk="0" hangingPunct="1">
+              <a:lnSpc>
+                <a:spcPct val="100000"/>
+              </a:lnSpc>
+              <a:spcBef>
+                <a:spcPts val="0"/>
+              </a:spcBef>
+              <a:spcAft>
+                <a:spcPts val="0"/>
+              </a:spcAft>
+              <a:buClrTx/>
+              <a:buSzTx/>
               <a:buFont typeface="Arial" panose="020B0604020202020204" pitchFamily="34" charset="0"/>
               <a:buChar char="•"/>
+              <a:tabLst/>
+              <a:defRPr/>
             </a:pPr>
             <a:r>
               <a:rPr lang="pt-BR" dirty="0"/>
-              <a:t>O K-</a:t>
-            </a:r>
-            <a:r>
-              <a:rPr lang="pt-BR" dirty="0" err="1"/>
-              <a:t>Means</a:t>
-            </a:r>
-            <a:r>
-              <a:rPr lang="pt-BR" dirty="0"/>
+              <a:t>Estimativas de valores de atributos desconhecidos : </a:t>
+            </a:r>
+            <a:r>
+              <a:rPr lang="pt-BR" sz="1200" b="0" i="0" kern="1200" dirty="0">
+                <a:solidFill>
+                  <a:schemeClr val="tx1"/>
+                </a:solidFill>
+                <a:effectLst/>
+                <a:latin typeface="+mn-lt"/>
+                <a:ea typeface="+mn-ea"/>
+                <a:cs typeface="+mn-cs"/>
+              </a:rPr>
+              <a:t>Existem</a:t>
+            </a:r>
+            <a:r>
+              <a:rPr lang="pt-BR" sz="1200" b="0" i="0" kern="1200" baseline="0" dirty="0">
+                <a:solidFill>
+                  <a:schemeClr val="tx1"/>
+                </a:solidFill>
+                <a:effectLst/>
+                <a:latin typeface="+mn-lt"/>
+                <a:ea typeface="+mn-ea"/>
+                <a:cs typeface="+mn-cs"/>
+              </a:rPr>
+              <a:t> casos onde </a:t>
+            </a:r>
+            <a:r>
+              <a:rPr lang="pt-BR" sz="1200" b="0" i="0" kern="1200" dirty="0">
+                <a:solidFill>
+                  <a:schemeClr val="tx1"/>
+                </a:solidFill>
+                <a:effectLst/>
+                <a:latin typeface="+mn-lt"/>
+                <a:ea typeface="+mn-ea"/>
+                <a:cs typeface="+mn-cs"/>
+              </a:rPr>
+              <a:t>alguns valores de atributos às vezes são desconhecidos.</a:t>
+            </a:r>
+            <a:r>
+              <a:rPr lang="pt-BR" sz="1200" b="0" i="0" kern="1200" baseline="0" dirty="0">
+                <a:solidFill>
+                  <a:schemeClr val="tx1"/>
+                </a:solidFill>
+                <a:effectLst/>
+                <a:latin typeface="+mn-lt"/>
+                <a:ea typeface="+mn-ea"/>
+                <a:cs typeface="+mn-cs"/>
+              </a:rPr>
               <a:t> </a:t>
             </a:r>
             <a:r>
-              <a:rPr lang="pt-BR" b="1" dirty="0"/>
-              <a:t>sempre converge</a:t>
-            </a:r>
-            <a:r>
-              <a:rPr lang="pt-BR" dirty="0"/>
-              <a:t>, mas pode parar em mínimos locais (não garante o ótimo global).</a:t>
-            </a:r>
-          </a:p>
-          <a:p>
-            <a:pPr>
+              <a:rPr lang="pt-BR" sz="1200" b="0" i="0" kern="1200" dirty="0">
+                <a:solidFill>
+                  <a:schemeClr val="tx1"/>
+                </a:solidFill>
+                <a:effectLst/>
+                <a:latin typeface="+mn-lt"/>
+                <a:ea typeface="+mn-ea"/>
+                <a:cs typeface="+mn-cs"/>
+              </a:rPr>
+              <a:t>Uma forma simples de lidar com esta questão</a:t>
+            </a:r>
+            <a:r>
+              <a:rPr lang="pt-BR" sz="1200" b="0" i="0" kern="1200" baseline="0" dirty="0">
+                <a:solidFill>
+                  <a:schemeClr val="tx1"/>
+                </a:solidFill>
+                <a:effectLst/>
+                <a:latin typeface="+mn-lt"/>
+                <a:ea typeface="+mn-ea"/>
+                <a:cs typeface="+mn-cs"/>
+              </a:rPr>
+              <a:t> é usar a</a:t>
+            </a:r>
+            <a:r>
+              <a:rPr lang="pt-BR" sz="1200" b="0" i="0" kern="1200" dirty="0">
+                <a:solidFill>
+                  <a:schemeClr val="tx1"/>
+                </a:solidFill>
+                <a:effectLst/>
+                <a:latin typeface="+mn-lt"/>
+                <a:ea typeface="+mn-ea"/>
+                <a:cs typeface="+mn-cs"/>
+              </a:rPr>
+              <a:t> estimativa do valor ausente como sendo a média ou o valor mais frequente de um determinado cluster.</a:t>
+            </a:r>
+            <a:r>
+              <a:rPr lang="pt-BR" sz="1200" b="0" i="0" kern="1200" baseline="0" dirty="0">
+                <a:solidFill>
+                  <a:schemeClr val="tx1"/>
+                </a:solidFill>
+                <a:effectLst/>
+                <a:latin typeface="+mn-lt"/>
+                <a:ea typeface="+mn-ea"/>
+                <a:cs typeface="+mn-cs"/>
+              </a:rPr>
+              <a:t> Esta é uma abordagem </a:t>
+            </a:r>
+            <a:r>
+              <a:rPr lang="pt-BR" sz="1200" b="0" i="0" kern="1200" dirty="0">
+                <a:solidFill>
+                  <a:schemeClr val="tx1"/>
+                </a:solidFill>
+                <a:effectLst/>
+                <a:latin typeface="+mn-lt"/>
+                <a:ea typeface="+mn-ea"/>
+                <a:cs typeface="+mn-cs"/>
+              </a:rPr>
+              <a:t>mais sólida porque usa mais informações sobre a natureza do domínio.</a:t>
+            </a:r>
+          </a:p>
+          <a:p>
+            <a:pPr marL="171450" marR="0" lvl="0" indent="-171450" algn="l" defTabSz="914400" rtl="0" eaLnBrk="1" fontAlgn="auto" latinLnBrk="0" hangingPunct="1">
+              <a:lnSpc>
+                <a:spcPct val="100000"/>
+              </a:lnSpc>
+              <a:spcBef>
+                <a:spcPts val="0"/>
+              </a:spcBef>
+              <a:spcAft>
+                <a:spcPts val="0"/>
+              </a:spcAft>
+              <a:buClrTx/>
+              <a:buSzTx/>
               <a:buFont typeface="Arial" panose="020B0604020202020204" pitchFamily="34" charset="0"/>
               <a:buChar char="•"/>
+              <a:tabLst/>
+              <a:defRPr/>
             </a:pPr>
             <a:r>
               <a:rPr lang="pt-BR" dirty="0"/>
-              <a:t>Para melhorar a convergência, pode-se: </a:t>
-            </a:r>
-          </a:p>
-          <a:p>
-            <a:pPr marL="742950" lvl="1" indent="-285750">
+              <a:t>ferramentas de visualização de dados multidimensionais</a:t>
+            </a:r>
+          </a:p>
+          <a:p>
+            <a:pPr marL="171450" marR="0" lvl="0" indent="-171450" algn="l" defTabSz="914400" rtl="0" eaLnBrk="1" fontAlgn="auto" latinLnBrk="0" hangingPunct="1">
+              <a:lnSpc>
+                <a:spcPct val="100000"/>
+              </a:lnSpc>
+              <a:spcBef>
+                <a:spcPts val="0"/>
+              </a:spcBef>
+              <a:spcAft>
+                <a:spcPts val="0"/>
+              </a:spcAft>
+              <a:buClrTx/>
+              <a:buSzTx/>
               <a:buFont typeface="Arial" panose="020B0604020202020204" pitchFamily="34" charset="0"/>
               <a:buChar char="•"/>
+              <a:tabLst/>
+              <a:defRPr/>
             </a:pPr>
             <a:r>
               <a:rPr lang="pt-BR" dirty="0"/>
-              <a:t>Usar inicialização inteligente (como K-</a:t>
-            </a:r>
-            <a:r>
-              <a:rPr lang="pt-BR" dirty="0" err="1"/>
-              <a:t>Means</a:t>
-            </a:r>
-            <a:r>
-              <a:rPr lang="pt-BR" dirty="0"/>
-              <a:t>++).</a:t>
-            </a:r>
-          </a:p>
-          <a:p>
-            <a:pPr marL="742950" lvl="1" indent="-285750">
-              <a:buFont typeface="Arial" panose="020B0604020202020204" pitchFamily="34" charset="0"/>
-              <a:buChar char="•"/>
-            </a:pPr>
-            <a:r>
-              <a:rPr lang="pt-BR" dirty="0"/>
-              <a:t>Executar o algoritmo várias vezes com diferentes inicializações e escolher o melhor resultado.</a:t>
-            </a:r>
-          </a:p>
-          <a:p>
-            <a:endParaRPr lang="pt-BR" dirty="0"/>
-          </a:p>
-        </p:txBody>
-      </p:sp>
-      <p:sp>
-        <p:nvSpPr>
-          <p:cNvPr id="4" name="Espaço Reservado para Número de Slide 3"/>
+              <a:t>Auxiliares para criação de classificadores mais simples: </a:t>
+            </a:r>
+            <a:r>
+              <a:rPr lang="pt-BR" sz="1200" b="0" i="0" kern="1200" dirty="0">
+                <a:solidFill>
+                  <a:schemeClr val="tx1"/>
+                </a:solidFill>
+                <a:effectLst/>
+                <a:latin typeface="+mn-lt"/>
+                <a:ea typeface="+mn-ea"/>
+                <a:cs typeface="+mn-cs"/>
+              </a:rPr>
+              <a:t>o conhecimento de clusters de dados pode ser útil no aprendizado supervisionado. É bastante comum que todos (ou quase todos) os exemplos em um cluster pertençam à mesma classe. Nesse caso, o desenvolvedor de um software de aprendizado supervisionado pode decidir primeiro identificar os clusters e depois rotular cada cluster (todos os exemplos que pertencem</a:t>
+            </a:r>
+            <a:r>
+              <a:rPr lang="pt-BR" sz="1200" b="0" i="0" kern="1200" baseline="0" dirty="0">
+                <a:solidFill>
+                  <a:schemeClr val="tx1"/>
+                </a:solidFill>
+                <a:effectLst/>
+                <a:latin typeface="+mn-lt"/>
+                <a:ea typeface="+mn-ea"/>
+                <a:cs typeface="+mn-cs"/>
+              </a:rPr>
+              <a:t> ao cluster)</a:t>
+            </a:r>
+            <a:r>
+              <a:rPr lang="pt-BR" sz="1200" b="0" i="0" kern="1200" dirty="0">
+                <a:solidFill>
+                  <a:schemeClr val="tx1"/>
+                </a:solidFill>
+                <a:effectLst/>
+                <a:latin typeface="+mn-lt"/>
+                <a:ea typeface="+mn-ea"/>
+                <a:cs typeface="+mn-cs"/>
+              </a:rPr>
+              <a:t> com sua classe dominante.</a:t>
+            </a:r>
+          </a:p>
+        </p:txBody>
+      </p:sp>
+      <p:sp>
+        <p:nvSpPr>
+          <p:cNvPr id="4" name="Slide Number Placeholder 3"/>
           <p:cNvSpPr>
             <a:spLocks noGrp="1"/>
           </p:cNvSpPr>
           <p:nvPr>
-            <p:ph type="sldNum" sz="quarter" idx="5"/>
+            <p:ph type="sldNum" sz="quarter" idx="10"/>
           </p:nvPr>
         </p:nvSpPr>
         <p:spPr/>
@@ -2092,7 +1846,7 @@
           <a:p>
             <a:fld id="{F430A2A4-8C14-4B1A-AD48-7B6401078BF7}" type="slidenum">
               <a:rPr lang="pt-BR" smtClean="0"/>
-              <a:t>14</a:t>
+              <a:t>9</a:t>
             </a:fld>
             <a:endParaRPr lang="pt-BR"/>
           </a:p>
@@ -2101,7 +1855,7 @@
     </p:spTree>
     <p:extLst>
       <p:ext uri="{BB962C8B-B14F-4D97-AF65-F5344CB8AC3E}">
-        <p14:creationId xmlns:p14="http://schemas.microsoft.com/office/powerpoint/2010/main" val="3481659351"/>
+        <p14:creationId xmlns:p14="http://schemas.microsoft.com/office/powerpoint/2010/main" val="2248288649"/>
       </p:ext>
     </p:extLst>
   </p:cSld>
@@ -2155,104 +1909,9 @@
           <a:bodyPr/>
           <a:lstStyle/>
           <a:p>
-            <a:pPr marL="0" marR="0" lvl="0" indent="0" algn="l" defTabSz="914400" rtl="0" eaLnBrk="1" fontAlgn="auto" latinLnBrk="0" hangingPunct="1">
-              <a:lnSpc>
-                <a:spcPct val="100000"/>
-              </a:lnSpc>
-              <a:spcBef>
-                <a:spcPts val="0"/>
-              </a:spcBef>
-              <a:spcAft>
-                <a:spcPts val="0"/>
-              </a:spcAft>
-              <a:buClrTx/>
-              <a:buSzTx/>
-              <a:buFontTx/>
-              <a:buNone/>
-              <a:tabLst/>
-              <a:defRPr/>
-            </a:pPr>
-            <a:r>
-              <a:rPr lang="pt-BR" sz="1200" b="0" dirty="0">
-                <a:solidFill>
-                  <a:srgbClr val="00B0F0"/>
-                </a:solidFill>
-              </a:rPr>
-              <a:t>E</a:t>
-            </a:r>
-            <a:r>
-              <a:rPr lang="pt-BR" dirty="0"/>
-              <a:t>xemplo:</a:t>
-            </a:r>
-            <a:r>
-              <a:rPr lang="pt-BR" baseline="0" dirty="0"/>
-              <a:t> </a:t>
-            </a:r>
-            <a:r>
-              <a:rPr lang="pt-BR" dirty="0"/>
-              <a:t>https://colab.research.google.com/github/zz4fap/t320_aprendizado_de_maquina/blob/main/notebooks/clustering/kmeans_example.ipynb</a:t>
-            </a:r>
-          </a:p>
-          <a:p>
-            <a:pPr marL="0" marR="0" lvl="0" indent="0" algn="l" defTabSz="914400" rtl="0" eaLnBrk="1" fontAlgn="auto" latinLnBrk="0" hangingPunct="1">
-              <a:lnSpc>
-                <a:spcPct val="100000"/>
-              </a:lnSpc>
-              <a:spcBef>
-                <a:spcPts val="0"/>
-              </a:spcBef>
-              <a:spcAft>
-                <a:spcPts val="0"/>
-              </a:spcAft>
-              <a:buClrTx/>
-              <a:buSzTx/>
-              <a:buFontTx/>
-              <a:buNone/>
-              <a:tabLst/>
-              <a:defRPr/>
-            </a:pPr>
-            <a:endParaRPr lang="pt-BR" sz="1200" b="0" dirty="0">
-              <a:solidFill>
-                <a:srgbClr val="00B0F0"/>
-              </a:solidFill>
-            </a:endParaRPr>
-          </a:p>
-          <a:p>
-            <a:pPr marL="0" marR="0" lvl="0" indent="0" algn="l" defTabSz="914400" rtl="0" eaLnBrk="1" fontAlgn="auto" latinLnBrk="0" hangingPunct="1">
-              <a:lnSpc>
-                <a:spcPct val="100000"/>
-              </a:lnSpc>
-              <a:spcBef>
-                <a:spcPts val="0"/>
-              </a:spcBef>
-              <a:spcAft>
-                <a:spcPts val="0"/>
-              </a:spcAft>
-              <a:buClrTx/>
-              <a:buSzTx/>
-              <a:buFontTx/>
-              <a:buNone/>
-              <a:tabLst/>
-              <a:defRPr/>
-            </a:pPr>
-            <a:endParaRPr lang="pt-BR" sz="1200" b="0" dirty="0">
-              <a:solidFill>
-                <a:srgbClr val="00B0F0"/>
-              </a:solidFill>
-            </a:endParaRPr>
-          </a:p>
-          <a:p>
-            <a:r>
-              <a:rPr lang="pt-BR" dirty="0"/>
-              <a:t>Identificar o melhor número de clusters (</a:t>
-            </a:r>
-            <a:r>
-              <a:rPr lang="pt-BR" dirty="0" err="1"/>
-              <a:t>kk</a:t>
-            </a:r>
-            <a:r>
-              <a:rPr lang="pt-BR" dirty="0"/>
-              <a:t>) no K-</a:t>
+            <a:r>
+              <a:rPr lang="pt-BR" dirty="0"/>
+              <a:t>O K-</a:t>
             </a:r>
             <a:r>
               <a:rPr lang="pt-BR" dirty="0" err="1"/>
@@ -2260,61 +1919,221 @@
             </a:r>
             <a:r>
               <a:rPr lang="pt-BR" dirty="0"/>
-              <a:t> é um passo fundamental para garantir a eficiência e a utilidade da clusterização. Existem várias abordagens para determinar o valor ideal de </a:t>
+              <a:t> encerra o treinamento com base em </a:t>
+            </a:r>
+            <a:r>
+              <a:rPr lang="pt-BR" b="1" dirty="0"/>
+              <a:t>critérios de convergência</a:t>
+            </a:r>
+            <a:r>
+              <a:rPr lang="pt-BR" dirty="0"/>
+              <a:t> que indicam quando o algoritmo atingiu um estado estável ou suficiente para parar. Esses critérios incluem:</a:t>
+            </a:r>
+          </a:p>
+          <a:p>
+            <a:r>
+              <a:rPr lang="pt-BR" b="1" dirty="0"/>
+              <a:t>1. Estabilização dos Centroides</a:t>
+            </a:r>
+          </a:p>
+          <a:p>
+            <a:pPr>
+              <a:buFont typeface="Arial" panose="020B0604020202020204" pitchFamily="34" charset="0"/>
+              <a:buChar char="•"/>
+            </a:pPr>
+            <a:r>
+              <a:rPr lang="pt-BR" dirty="0"/>
+              <a:t>O algoritmo para quando os </a:t>
+            </a:r>
+            <a:r>
+              <a:rPr lang="pt-BR" b="1" dirty="0"/>
+              <a:t>centroides não se movem mais significativamente</a:t>
+            </a:r>
+            <a:r>
+              <a:rPr lang="pt-BR" dirty="0"/>
+              <a:t> entre iterações.</a:t>
+            </a:r>
+          </a:p>
+          <a:p>
+            <a:pPr>
+              <a:buFont typeface="Arial" panose="020B0604020202020204" pitchFamily="34" charset="0"/>
+              <a:buChar char="•"/>
+            </a:pPr>
+            <a:r>
+              <a:rPr lang="pt-BR" dirty="0"/>
+              <a:t>Concretamente, isso significa que os deslocamentos dos centroides são menores que um limite pré-definido (ϵ\</a:t>
             </a:r>
             <a:r>
               <a:rPr lang="pt-BR" dirty="0" err="1"/>
-              <a:t>kk</a:t>
-            </a:r>
-            <a:r>
-              <a:rPr lang="pt-BR" dirty="0"/>
-              <a:t>. As mais comuns incluem:</a:t>
-            </a:r>
-          </a:p>
-          <a:p>
+              <a:t>epsilon</a:t>
+            </a:r>
+            <a:r>
+              <a:rPr lang="pt-BR" dirty="0"/>
+              <a:t>).</a:t>
+            </a:r>
+          </a:p>
+          <a:p>
+            <a:r>
+              <a:rPr lang="pt-BR" dirty="0"/>
+              <a:t>∥novo centroide−antigo centroide∥&lt;ϵ\|\</a:t>
+            </a:r>
+            <a:r>
+              <a:rPr lang="pt-BR" dirty="0" err="1"/>
+              <a:t>text</a:t>
+            </a:r>
+            <a:r>
+              <a:rPr lang="pt-BR" dirty="0"/>
+              <a:t>{novo centroide} - \</a:t>
+            </a:r>
+            <a:r>
+              <a:rPr lang="pt-BR" dirty="0" err="1"/>
+              <a:t>text</a:t>
+            </a:r>
+            <a:r>
+              <a:rPr lang="pt-BR" dirty="0"/>
+              <a:t>{antigo centroide}\| &lt; \</a:t>
+            </a:r>
+            <a:r>
+              <a:rPr lang="pt-BR" dirty="0" err="1"/>
+              <a:t>epsilon</a:t>
+            </a:r>
+            <a:r>
+              <a:rPr lang="pt-BR" dirty="0"/>
+              <a:t> </a:t>
+            </a:r>
             <a:r>
               <a:rPr lang="pt-BR" b="1" dirty="0"/>
-              <a:t>1. Método do Cotovelo (</a:t>
-            </a:r>
-            <a:r>
-              <a:rPr lang="pt-BR" b="1" dirty="0" err="1"/>
-              <a:t>Elbow</a:t>
-            </a:r>
+              <a:t>2. Estabilização das Atribuições de Cluster</a:t>
+            </a:r>
+          </a:p>
+          <a:p>
+            <a:pPr>
+              <a:buFont typeface="Arial" panose="020B0604020202020204" pitchFamily="34" charset="0"/>
+              <a:buChar char="•"/>
+            </a:pPr>
+            <a:r>
+              <a:rPr lang="pt-BR" dirty="0"/>
+              <a:t>Se os pontos não mudarem de cluster entre iterações, o K-</a:t>
+            </a:r>
+            <a:r>
+              <a:rPr lang="pt-BR" dirty="0" err="1"/>
+              <a:t>Means</a:t>
+            </a:r>
+            <a:r>
+              <a:rPr lang="pt-BR" dirty="0"/>
+              <a:t> considera que atingiu a convergência.</a:t>
+            </a:r>
+          </a:p>
+          <a:p>
             <a:r>
               <a:rPr lang="pt-BR" b="1" dirty="0"/>
-              <a:t> </a:t>
-            </a:r>
-            <a:r>
-              <a:rPr lang="pt-BR" b="1" dirty="0" err="1"/>
-              <a:t>Method</a:t>
-            </a:r>
+              <a:t>3. Número Máximo de Iterações</a:t>
+            </a:r>
+          </a:p>
+          <a:p>
+            <a:pPr>
+              <a:buFont typeface="Arial" panose="020B0604020202020204" pitchFamily="34" charset="0"/>
+              <a:buChar char="•"/>
+            </a:pPr>
+            <a:r>
+              <a:rPr lang="pt-BR" dirty="0"/>
+              <a:t>Um limite máximo de iterações pode ser imposto (</a:t>
+            </a:r>
+            <a:r>
+              <a:rPr lang="pt-BR" dirty="0" err="1"/>
+              <a:t>max_itermax</a:t>
+            </a:r>
+            <a:r>
+              <a:rPr lang="pt-BR" dirty="0"/>
+              <a:t>\_iter) para evitar que o algoritmo continue indefinidamente, especialmente em casos em que a convergência é difícil de alcançar.</a:t>
+            </a:r>
+          </a:p>
+          <a:p>
             <a:r>
               <a:rPr lang="pt-BR" b="1" dirty="0"/>
-              <a:t>)</a:t>
-            </a:r>
-          </a:p>
-          <a:p>
-            <a:r>
-              <a:rPr lang="pt-BR" dirty="0"/>
-              <a:t>Este método analisa a variação da </a:t>
+              <a:t>4. Convergência da Função Objetivo</a:t>
+            </a:r>
+          </a:p>
+          <a:p>
+            <a:pPr>
+              <a:buFont typeface="Arial" panose="020B0604020202020204" pitchFamily="34" charset="0"/>
+              <a:buChar char="•"/>
+            </a:pPr>
+            <a:r>
+              <a:rPr lang="pt-BR" dirty="0"/>
+              <a:t>O algoritmo minimiza a </a:t>
             </a:r>
             <a:r>
               <a:rPr lang="pt-BR" b="1" dirty="0"/>
-              <a:t>inércia </a:t>
+              <a:t>soma dos erros quadráticos </a:t>
             </a:r>
             <a:r>
               <a:rPr lang="pt-BR" b="1" dirty="0" err="1"/>
               <a:t>intra-cluster</a:t>
             </a:r>
             <a:r>
-              <a:rPr lang="pt-BR" dirty="0"/>
-              <a:t> (ou soma dos erros quadráticos dentro dos clusters, WSSWSS) à medida que o número de clusters aumenta.</a:t>
-            </a:r>
-          </a:p>
-          <a:p>
-            <a:r>
               <a:rPr lang="pt-BR" b="1" dirty="0"/>
-              <a:t>Passos:</a:t>
+              <a:t> (WSS)</a:t>
+            </a:r>
+            <a:r>
+              <a:rPr lang="pt-BR" dirty="0"/>
+              <a:t>, definida como:</a:t>
+            </a:r>
+          </a:p>
+          <a:p>
+            <a:pPr>
+              <a:buFont typeface="Arial" panose="020B0604020202020204" pitchFamily="34" charset="0"/>
+              <a:buChar char="•"/>
+            </a:pPr>
+            <a:r>
+              <a:rPr lang="pt-BR" dirty="0"/>
+              <a:t>WSS=∑i=1k∑x∈Ci∥x−μi∥2\</a:t>
+            </a:r>
+            <a:r>
+              <a:rPr lang="pt-BR" dirty="0" err="1"/>
+              <a:t>text</a:t>
+            </a:r>
+            <a:r>
+              <a:rPr lang="pt-BR" dirty="0"/>
+              <a:t>{WSS} = \sum_{i=1}^{k} \sum_{x \in </a:t>
+            </a:r>
+            <a:r>
+              <a:rPr lang="pt-BR" dirty="0" err="1"/>
+              <a:t>C_i</a:t>
+            </a:r>
+            <a:r>
+              <a:rPr lang="pt-BR" dirty="0"/>
+              <a:t>} \|\</a:t>
+            </a:r>
+            <a:r>
+              <a:rPr lang="pt-BR" dirty="0" err="1"/>
+              <a:t>mathbf</a:t>
+            </a:r>
+            <a:r>
+              <a:rPr lang="pt-BR" dirty="0"/>
+              <a:t>{x} - \</a:t>
+            </a:r>
+            <a:r>
+              <a:rPr lang="pt-BR" dirty="0" err="1"/>
+              <a:t>mu_i</a:t>
+            </a:r>
+            <a:r>
+              <a:rPr lang="pt-BR" dirty="0"/>
+              <a:t>\|^2 O K-</a:t>
+            </a:r>
+            <a:r>
+              <a:rPr lang="pt-BR" dirty="0" err="1"/>
+              <a:t>Means</a:t>
+            </a:r>
+            <a:r>
+              <a:rPr lang="pt-BR" dirty="0"/>
+              <a:t> para quando a redução no WSSWSS entre iterações consecutivas é menor que um limiar (Δ\Delta).</a:t>
+            </a:r>
+          </a:p>
+          <a:p>
+            <a:r>
+              <a:rPr lang="pt-BR" b="1" dirty="0"/>
+              <a:t>Processo Geral:</a:t>
             </a:r>
           </a:p>
           <a:p>
@@ -2323,8 +2142,20 @@
               <a:buAutoNum type="arabicPeriod"/>
             </a:pPr>
             <a:r>
-              <a:rPr lang="pt-BR" dirty="0"/>
-              <a:t>Execute o K-</a:t>
+              <a:rPr lang="pt-BR" b="1" dirty="0"/>
+              <a:t>Inicialização</a:t>
+            </a:r>
+            <a:r>
+              <a:rPr lang="pt-BR" dirty="0"/>
+              <a:t>: Escolher </a:t>
+            </a:r>
+            <a:r>
+              <a:rPr lang="pt-BR" dirty="0" err="1"/>
+              <a:t>kk</a:t>
+            </a:r>
+            <a:r>
+              <a:rPr lang="pt-BR" dirty="0"/>
+              <a:t> centroides iniciais (aleatoriamente ou por métodos como K-</a:t>
             </a:r>
             <a:r>
               <a:rPr lang="pt-BR" dirty="0" err="1"/>
@@ -2332,15 +2163,7 @@
             </a:r>
             <a:r>
               <a:rPr lang="pt-BR" dirty="0"/>
-              <a:t> com diferentes valores de </a:t>
-            </a:r>
-            <a:r>
-              <a:rPr lang="pt-BR" dirty="0" err="1"/>
-              <a:t>kk</a:t>
-            </a:r>
-            <a:r>
-              <a:rPr lang="pt-BR" dirty="0"/>
-              <a:t> (por exemplo, k=1k=1 a k=10k=10).</a:t>
+              <a:t>++).</a:t>
             </a:r>
           </a:p>
           <a:p>
@@ -2349,16 +2172,12 @@
               <a:buAutoNum type="arabicPeriod"/>
             </a:pPr>
             <a:r>
-              <a:rPr lang="pt-BR" dirty="0"/>
-              <a:t>Calcule o WSSWSS para cada valor de </a:t>
-            </a:r>
-            <a:r>
-              <a:rPr lang="pt-BR" dirty="0" err="1"/>
-              <a:t>kk</a:t>
-            </a:r>
-            <a:r>
-              <a:rPr lang="pt-BR" dirty="0"/>
-              <a:t>.</a:t>
+              <a:rPr lang="pt-BR" b="1" dirty="0"/>
+              <a:t>Passo de Atribuição</a:t>
+            </a:r>
+            <a:r>
+              <a:rPr lang="pt-BR" dirty="0"/>
+              <a:t>: Atribuir cada ponto ao cluster mais próximo (com base na distância, normalmente Euclidiana).</a:t>
             </a:r>
           </a:p>
           <a:p>
@@ -2367,16 +2186,12 @@
               <a:buAutoNum type="arabicPeriod"/>
             </a:pPr>
             <a:r>
-              <a:rPr lang="pt-BR" dirty="0"/>
-              <a:t>Trace um gráfico do WSSWSS em função de </a:t>
-            </a:r>
-            <a:r>
-              <a:rPr lang="pt-BR" dirty="0" err="1"/>
-              <a:t>kk</a:t>
-            </a:r>
-            <a:r>
-              <a:rPr lang="pt-BR" dirty="0"/>
-              <a:t>.</a:t>
+              <a:rPr lang="pt-BR" b="1" dirty="0"/>
+              <a:t>Passo de Atualização</a:t>
+            </a:r>
+            <a:r>
+              <a:rPr lang="pt-BR" dirty="0"/>
+              <a:t>: Recalcular os centroides como a média dos pontos atribuídos a cada cluster.</a:t>
             </a:r>
           </a:p>
           <a:p>
@@ -2385,56 +2200,18 @@
               <a:buAutoNum type="arabicPeriod"/>
             </a:pPr>
             <a:r>
-              <a:rPr lang="pt-BR" dirty="0"/>
-              <a:t>Identifique o "cotovelo" no gráfico — o ponto onde a redução no WSSWSS se torna menos significativa.</a:t>
-            </a:r>
-          </a:p>
-          <a:p>
-            <a:r>
               <a:rPr lang="pt-BR" b="1" dirty="0"/>
-              <a:t>Observação:</a:t>
-            </a:r>
-          </a:p>
-          <a:p>
-            <a:r>
-              <a:rPr lang="pt-BR" dirty="0"/>
-              <a:t>O "cotovelo" indica que aumentar </a:t>
-            </a:r>
-            <a:r>
-              <a:rPr lang="pt-BR" dirty="0" err="1"/>
-              <a:t>kk</a:t>
-            </a:r>
-            <a:r>
-              <a:rPr lang="pt-BR" dirty="0"/>
-              <a:t> além desse ponto não resulta em uma melhoria substancial na compactação dos clusters.</a:t>
+              <a:t>Verificação do Critério de Parada</a:t>
+            </a:r>
+            <a:r>
+              <a:rPr lang="pt-BR" dirty="0"/>
+              <a:t>: Verificar se algum dos critérios acima foi atendido. Caso contrário, repetir os passos 2 e 3.</a:t>
             </a:r>
           </a:p>
           <a:p>
             <a:r>
               <a:rPr lang="pt-BR" b="1" dirty="0"/>
-              <a:t>2. Coeficiente de Silhueta (</a:t>
-            </a:r>
-            <a:r>
-              <a:rPr lang="pt-BR" b="1" dirty="0" err="1"/>
-              <a:t>Silhouette</a:t>
-            </a:r>
-            <a:r>
-              <a:rPr lang="pt-BR" b="1" dirty="0"/>
-              <a:t> Score)</a:t>
-            </a:r>
-          </a:p>
-          <a:p>
-            <a:r>
-              <a:rPr lang="pt-BR" dirty="0"/>
-              <a:t>O coeficiente de silhueta avalia a </a:t>
-            </a:r>
-            <a:r>
-              <a:rPr lang="pt-BR" b="1" dirty="0"/>
-              <a:t>qualidade da clusterização</a:t>
-            </a:r>
-            <a:r>
-              <a:rPr lang="pt-BR" dirty="0"/>
-              <a:t>, considerando a coesão dentro dos clusters e a separação entre eles.</a:t>
+              <a:t>Convergência e Garantias</a:t>
             </a:r>
           </a:p>
           <a:p>
@@ -2444,39 +2221,23 @@
             </a:pPr>
             <a:r>
               <a:rPr lang="pt-BR" dirty="0"/>
-              <a:t>s=b−</a:t>
+              <a:t>O K-</a:t>
             </a:r>
             <a:r>
               <a:rPr lang="pt-BR" dirty="0" err="1"/>
-              <a:t>amax</a:t>
-            </a:r>
-            <a:r>
-              <a:rPr lang="pt-BR" dirty="0"/>
-              <a:t>⁡(</a:t>
-            </a:r>
-            <a:r>
-              <a:rPr lang="pt-BR" dirty="0" err="1"/>
-              <a:t>a,b</a:t>
-            </a:r>
-            <a:r>
-              <a:rPr lang="pt-BR" dirty="0"/>
-              <a:t>)s = \</a:t>
-            </a:r>
-            <a:r>
-              <a:rPr lang="pt-BR" dirty="0" err="1"/>
-              <a:t>frac</a:t>
-            </a:r>
-            <a:r>
-              <a:rPr lang="pt-BR" dirty="0"/>
-              <a:t>{b - a}{\</a:t>
-            </a:r>
-            <a:r>
-              <a:rPr lang="pt-BR" dirty="0" err="1"/>
-              <a:t>max</a:t>
-            </a:r>
-            <a:r>
-              <a:rPr lang="pt-BR" dirty="0"/>
-              <a:t>(a, b)} aa: distância média de um ponto para os outros pontos do mesmo cluster.</a:t>
+              <a:t>Means</a:t>
+            </a:r>
+            <a:r>
+              <a:rPr lang="pt-BR" dirty="0"/>
+              <a:t> </a:t>
+            </a:r>
+            <a:r>
+              <a:rPr lang="pt-BR" b="1" dirty="0"/>
+              <a:t>sempre converge</a:t>
+            </a:r>
+            <a:r>
+              <a:rPr lang="pt-BR" dirty="0"/>
+              <a:t>, mas pode parar em mínimos locais (não garante o ótimo global).</a:t>
             </a:r>
           </a:p>
           <a:p>
@@ -2485,198 +2246,18 @@
               <a:buChar char="•"/>
             </a:pPr>
             <a:r>
-              <a:rPr lang="pt-BR" dirty="0" err="1"/>
-              <a:t>bb</a:t>
-            </a:r>
-            <a:r>
-              <a:rPr lang="pt-BR" dirty="0"/>
-              <a:t>: distância média de um ponto para os pontos do cluster mais próximo.</a:t>
-            </a:r>
-          </a:p>
-          <a:p>
-            <a:r>
-              <a:rPr lang="pt-BR" b="1" dirty="0"/>
-              <a:t>Passos:</a:t>
-            </a:r>
-          </a:p>
-          <a:p>
-            <a:pPr>
-              <a:buFont typeface="+mj-lt"/>
-              <a:buAutoNum type="arabicPeriod"/>
-            </a:pPr>
-            <a:r>
-              <a:rPr lang="pt-BR" dirty="0"/>
-              <a:t>Execute o K-</a:t>
-            </a:r>
-            <a:r>
-              <a:rPr lang="pt-BR" dirty="0" err="1"/>
-              <a:t>Means</a:t>
-            </a:r>
-            <a:r>
-              <a:rPr lang="pt-BR" dirty="0"/>
-              <a:t> para diferentes valores de </a:t>
-            </a:r>
-            <a:r>
-              <a:rPr lang="pt-BR" dirty="0" err="1"/>
-              <a:t>kk</a:t>
-            </a:r>
-            <a:r>
-              <a:rPr lang="pt-BR" dirty="0"/>
-              <a:t>.</a:t>
-            </a:r>
-          </a:p>
-          <a:p>
-            <a:pPr>
-              <a:buFont typeface="+mj-lt"/>
-              <a:buAutoNum type="arabicPeriod"/>
-            </a:pPr>
-            <a:r>
-              <a:rPr lang="pt-BR" dirty="0"/>
-              <a:t>Calcule o coeficiente de silhueta para cada ponto e, em seguida, a média para o conjunto.</a:t>
-            </a:r>
-          </a:p>
-          <a:p>
-            <a:pPr>
-              <a:buFont typeface="+mj-lt"/>
-              <a:buAutoNum type="arabicPeriod"/>
-            </a:pPr>
-            <a:r>
-              <a:rPr lang="pt-BR" dirty="0"/>
-              <a:t>Escolha </a:t>
-            </a:r>
-            <a:r>
-              <a:rPr lang="pt-BR" dirty="0" err="1"/>
-              <a:t>kk</a:t>
-            </a:r>
-            <a:r>
-              <a:rPr lang="pt-BR" dirty="0"/>
-              <a:t> que maximize o valor médio do coeficiente de silhueta.</a:t>
-            </a:r>
-          </a:p>
-          <a:p>
-            <a:r>
-              <a:rPr lang="pt-BR" b="1" dirty="0"/>
-              <a:t>3. Critério Gap </a:t>
-            </a:r>
-            <a:r>
-              <a:rPr lang="pt-BR" b="1" dirty="0" err="1"/>
-              <a:t>Statistic</a:t>
-            </a:r>
-            <a:endParaRPr lang="pt-BR" b="1" dirty="0"/>
-          </a:p>
-          <a:p>
-            <a:r>
-              <a:rPr lang="pt-BR" dirty="0"/>
-              <a:t>Este método compara a dispersão dos clusters no conjunto de dados com uma dispersão esperada de um conjunto de dados gerado aleatoriamente.</a:t>
-            </a:r>
-          </a:p>
-          <a:p>
-            <a:r>
-              <a:rPr lang="pt-BR" b="1" dirty="0"/>
-              <a:t>Passos:</a:t>
-            </a:r>
-          </a:p>
-          <a:p>
-            <a:pPr>
-              <a:buFont typeface="+mj-lt"/>
-              <a:buAutoNum type="arabicPeriod"/>
-            </a:pPr>
-            <a:r>
-              <a:rPr lang="pt-BR" dirty="0"/>
-              <a:t>Execute o K-</a:t>
-            </a:r>
-            <a:r>
-              <a:rPr lang="pt-BR" dirty="0" err="1"/>
-              <a:t>Means</a:t>
-            </a:r>
-            <a:r>
-              <a:rPr lang="pt-BR" dirty="0"/>
-              <a:t> para diferentes valores de </a:t>
-            </a:r>
-            <a:r>
-              <a:rPr lang="pt-BR" dirty="0" err="1"/>
-              <a:t>kk</a:t>
-            </a:r>
-            <a:r>
-              <a:rPr lang="pt-BR" dirty="0"/>
-              <a:t> no conjunto de dados real.</a:t>
-            </a:r>
-          </a:p>
-          <a:p>
-            <a:pPr>
-              <a:buFont typeface="+mj-lt"/>
-              <a:buAutoNum type="arabicPeriod"/>
-            </a:pPr>
-            <a:r>
-              <a:rPr lang="pt-BR" dirty="0"/>
-              <a:t>Gere um conjunto de dados aleatório com a mesma distribuição e calcule a dispersão dos clusters.</a:t>
-            </a:r>
-          </a:p>
-          <a:p>
-            <a:pPr>
-              <a:buFont typeface="+mj-lt"/>
-              <a:buAutoNum type="arabicPeriod"/>
-            </a:pPr>
-            <a:r>
-              <a:rPr lang="pt-BR" dirty="0"/>
-              <a:t>Compare as dispersões e encontre </a:t>
-            </a:r>
-            <a:r>
-              <a:rPr lang="pt-BR" dirty="0" err="1"/>
-              <a:t>kk</a:t>
-            </a:r>
-            <a:r>
-              <a:rPr lang="pt-BR" dirty="0"/>
-              <a:t> que maximize a diferença (gap) entre os dois conjuntos.</a:t>
-            </a:r>
-          </a:p>
-          <a:p>
-            <a:r>
-              <a:rPr lang="pt-BR" b="1" dirty="0"/>
-              <a:t>4. Validação Cruzada</a:t>
-            </a:r>
-          </a:p>
-          <a:p>
-            <a:r>
-              <a:rPr lang="pt-BR" dirty="0"/>
-              <a:t>Divida o conjunto de dados em subconjuntos e avalie a consistência dos clusters em diferentes amostras.</a:t>
-            </a:r>
-          </a:p>
-          <a:p>
-            <a:r>
-              <a:rPr lang="pt-BR" b="1" dirty="0"/>
-              <a:t>5. Métodos Automáticos, como X-</a:t>
-            </a:r>
-            <a:r>
-              <a:rPr lang="pt-BR" b="1" dirty="0" err="1"/>
-              <a:t>Means</a:t>
-            </a:r>
-            <a:r>
-              <a:rPr lang="pt-BR" b="1" dirty="0"/>
-              <a:t> e G-</a:t>
-            </a:r>
-            <a:r>
-              <a:rPr lang="pt-BR" b="1" dirty="0" err="1"/>
-              <a:t>Means</a:t>
-            </a:r>
-            <a:endParaRPr lang="pt-BR" b="1" dirty="0"/>
-          </a:p>
-          <a:p>
-            <a:pPr>
+              <a:rPr lang="pt-BR" dirty="0"/>
+              <a:t>Para melhorar a convergência, pode-se: </a:t>
+            </a:r>
+          </a:p>
+          <a:p>
+            <a:pPr marL="742950" lvl="1" indent="-285750">
               <a:buFont typeface="Arial" panose="020B0604020202020204" pitchFamily="34" charset="0"/>
               <a:buChar char="•"/>
             </a:pPr>
             <a:r>
-              <a:rPr lang="pt-BR" b="1" dirty="0"/>
-              <a:t>X-</a:t>
-            </a:r>
-            <a:r>
-              <a:rPr lang="pt-BR" b="1" dirty="0" err="1"/>
-              <a:t>Means</a:t>
-            </a:r>
-            <a:r>
-              <a:rPr lang="pt-BR" dirty="0"/>
-              <a:t>: Extensão do K-</a:t>
+              <a:rPr lang="pt-BR" dirty="0"/>
+              <a:t>Usar inicialização inteligente (como K-</a:t>
             </a:r>
             <a:r>
               <a:rPr lang="pt-BR" dirty="0" err="1"/>
@@ -2684,85 +2265,21 @@
             </a:r>
             <a:r>
               <a:rPr lang="pt-BR" dirty="0"/>
-              <a:t> que escolhe automaticamente </a:t>
-            </a:r>
-            <a:r>
-              <a:rPr lang="pt-BR" dirty="0" err="1"/>
-              <a:t>kk</a:t>
-            </a:r>
-            <a:r>
-              <a:rPr lang="pt-BR" dirty="0"/>
-              <a:t> otimizando o critério Bayesiano.</a:t>
-            </a:r>
-          </a:p>
-          <a:p>
-            <a:pPr>
+              <a:t>++).</a:t>
+            </a:r>
+          </a:p>
+          <a:p>
+            <a:pPr marL="742950" lvl="1" indent="-285750">
               <a:buFont typeface="Arial" panose="020B0604020202020204" pitchFamily="34" charset="0"/>
               <a:buChar char="•"/>
             </a:pPr>
             <a:r>
-              <a:rPr lang="pt-BR" b="1" dirty="0"/>
-              <a:t>G-</a:t>
-            </a:r>
-            <a:r>
-              <a:rPr lang="pt-BR" b="1" dirty="0" err="1"/>
-              <a:t>Means</a:t>
-            </a:r>
-            <a:r>
-              <a:rPr lang="pt-BR" dirty="0"/>
-              <a:t>: Usa testes estatísticos para determinar se os clusters seguem uma distribuição gaussiana.</a:t>
-            </a:r>
-          </a:p>
-          <a:p>
-            <a:r>
-              <a:rPr lang="pt-BR" b="1" dirty="0"/>
-              <a:t>Considerações:</a:t>
-            </a:r>
-          </a:p>
-          <a:p>
-            <a:pPr>
-              <a:buFont typeface="Arial" panose="020B0604020202020204" pitchFamily="34" charset="0"/>
-              <a:buChar char="•"/>
-            </a:pPr>
-            <a:r>
-              <a:rPr lang="pt-BR" b="1" dirty="0"/>
-              <a:t>Dimensão dos dados</a:t>
-            </a:r>
-            <a:r>
-              <a:rPr lang="pt-BR" dirty="0"/>
-              <a:t>: Em alta dimensionalidade, os métodos podem se tornar menos claros devido à maldição da dimensionalidade.</a:t>
-            </a:r>
-          </a:p>
-          <a:p>
-            <a:pPr>
-              <a:buFont typeface="Arial" panose="020B0604020202020204" pitchFamily="34" charset="0"/>
-              <a:buChar char="•"/>
-            </a:pPr>
-            <a:r>
-              <a:rPr lang="pt-BR" b="1" dirty="0"/>
-              <a:t>Interpretação</a:t>
-            </a:r>
-            <a:r>
-              <a:rPr lang="pt-BR" dirty="0"/>
-              <a:t>: O número de clusters deve fazer sentido no contexto do problema, além de ser estatisticamente válido.</a:t>
-            </a:r>
-          </a:p>
-          <a:p>
-            <a:r>
-              <a:rPr lang="pt-BR" dirty="0"/>
-              <a:t>Combinar múltiplos métodos pode ser útil para confirmar a escolha do melhor </a:t>
-            </a:r>
-            <a:r>
-              <a:rPr lang="pt-BR" dirty="0" err="1"/>
-              <a:t>kk</a:t>
-            </a:r>
-            <a:r>
-              <a:rPr lang="pt-BR" dirty="0"/>
-              <a:t>.</a:t>
-            </a:r>
-          </a:p>
-          <a:p>
-            <a:endParaRPr lang="en-US" dirty="0"/>
+              <a:rPr lang="pt-BR" dirty="0"/>
+              <a:t>Executar o algoritmo várias vezes com diferentes inicializações e escolher o melhor resultado.</a:t>
+            </a:r>
+          </a:p>
+          <a:p>
+            <a:endParaRPr lang="pt-BR" dirty="0"/>
           </a:p>
         </p:txBody>
       </p:sp>
@@ -2773,7 +2290,7 @@
             <a:spLocks noGrp="1"/>
           </p:cNvSpPr>
           <p:nvPr>
-            <p:ph type="sldNum" sz="quarter" idx="10"/>
+            <p:ph type="sldNum" sz="quarter" idx="5"/>
           </p:nvPr>
         </p:nvSpPr>
         <p:spPr/>
@@ -2783,7 +2300,7 @@
           <a:p>
             <a:fld id="{F430A2A4-8C14-4B1A-AD48-7B6401078BF7}" type="slidenum">
               <a:rPr lang="pt-BR" smtClean="0"/>
-              <a:t>17</a:t>
+              <a:t>14</a:t>
             </a:fld>
             <a:endParaRPr lang="pt-BR"/>
           </a:p>
@@ -2792,7 +2309,7 @@
     </p:spTree>
     <p:extLst>
       <p:ext uri="{BB962C8B-B14F-4D97-AF65-F5344CB8AC3E}">
-        <p14:creationId xmlns:p14="http://schemas.microsoft.com/office/powerpoint/2010/main" val="3992294165"/>
+        <p14:creationId xmlns:p14="http://schemas.microsoft.com/office/powerpoint/2010/main" val="2457203387"/>
       </p:ext>
     </p:extLst>
   </p:cSld>
@@ -2821,7 +2338,7 @@
       </p:grpSpPr>
       <p:sp>
         <p:nvSpPr>
-          <p:cNvPr id="2" name="Slide Image Placeholder 1"/>
+          <p:cNvPr id="2" name="Espaço Reservado para Imagem de Slide 1"/>
           <p:cNvSpPr>
             <a:spLocks noGrp="1" noRot="1" noChangeAspect="1"/>
           </p:cNvSpPr>
@@ -2833,7 +2350,7 @@
       </p:sp>
       <p:sp>
         <p:nvSpPr>
-          <p:cNvPr id="3" name="Notes Placeholder 2"/>
+          <p:cNvPr id="3" name="Espaço Reservado para Anotações 2"/>
           <p:cNvSpPr>
             <a:spLocks noGrp="1"/>
           </p:cNvSpPr>
@@ -2846,23 +2363,620 @@
           <a:bodyPr/>
           <a:lstStyle/>
           <a:p>
-            <a:r>
-              <a:rPr lang="pt-BR" sz="1200" b="1" dirty="0"/>
-              <a:t>Laboratório #1</a:t>
-            </a:r>
-            <a:r>
-              <a:rPr lang="pt-BR" sz="1200" dirty="0"/>
-              <a:t>: https://mybinder.org/v2/gh/zz4fap/t320_aprendizado_de_maquina/main?filepath=labs%2FLaboratorio1.ipynb</a:t>
-            </a:r>
-          </a:p>
-          <a:p>
-            <a:endParaRPr lang="pt-BR" sz="1200" dirty="0"/>
-          </a:p>
-        </p:txBody>
-      </p:sp>
-      <p:sp>
-        <p:nvSpPr>
-          <p:cNvPr id="4" name="Slide Number Placeholder 3"/>
+            <a:pPr marL="0" marR="0" lvl="0" indent="0" algn="l" defTabSz="914400" rtl="0" eaLnBrk="1" fontAlgn="auto" latinLnBrk="0" hangingPunct="1">
+              <a:lnSpc>
+                <a:spcPct val="100000"/>
+              </a:lnSpc>
+              <a:spcBef>
+                <a:spcPts val="0"/>
+              </a:spcBef>
+              <a:spcAft>
+                <a:spcPts val="0"/>
+              </a:spcAft>
+              <a:buClrTx/>
+              <a:buSzTx/>
+              <a:buFontTx/>
+              <a:buNone/>
+              <a:tabLst/>
+              <a:defRPr/>
+            </a:pPr>
+            <a:r>
+              <a:rPr lang="pt-BR" sz="1200" b="0" dirty="0">
+                <a:solidFill>
+                  <a:srgbClr val="00B0F0"/>
+                </a:solidFill>
+              </a:rPr>
+              <a:t>E</a:t>
+            </a:r>
+            <a:r>
+              <a:rPr lang="pt-BR" dirty="0"/>
+              <a:t>xemplo:</a:t>
+            </a:r>
+            <a:r>
+              <a:rPr lang="pt-BR" baseline="0" dirty="0"/>
+              <a:t> </a:t>
+            </a:r>
+            <a:r>
+              <a:rPr lang="pt-BR" dirty="0"/>
+              <a:t>https://colab.research.google.com/github/zz4fap/t320_aprendizado_de_maquina/blob/main/notebooks/clustering/kmeans_example.ipynb</a:t>
+            </a:r>
+          </a:p>
+          <a:p>
+            <a:pPr marL="0" marR="0" lvl="0" indent="0" algn="l" defTabSz="914400" rtl="0" eaLnBrk="1" fontAlgn="auto" latinLnBrk="0" hangingPunct="1">
+              <a:lnSpc>
+                <a:spcPct val="100000"/>
+              </a:lnSpc>
+              <a:spcBef>
+                <a:spcPts val="0"/>
+              </a:spcBef>
+              <a:spcAft>
+                <a:spcPts val="0"/>
+              </a:spcAft>
+              <a:buClrTx/>
+              <a:buSzTx/>
+              <a:buFontTx/>
+              <a:buNone/>
+              <a:tabLst/>
+              <a:defRPr/>
+            </a:pPr>
+            <a:endParaRPr lang="pt-BR" sz="1200" b="0" dirty="0">
+              <a:solidFill>
+                <a:srgbClr val="00B0F0"/>
+              </a:solidFill>
+            </a:endParaRPr>
+          </a:p>
+          <a:p>
+            <a:pPr marL="0" marR="0" lvl="0" indent="0" algn="l" defTabSz="914400" rtl="0" eaLnBrk="1" fontAlgn="auto" latinLnBrk="0" hangingPunct="1">
+              <a:lnSpc>
+                <a:spcPct val="100000"/>
+              </a:lnSpc>
+              <a:spcBef>
+                <a:spcPts val="0"/>
+              </a:spcBef>
+              <a:spcAft>
+                <a:spcPts val="0"/>
+              </a:spcAft>
+              <a:buClrTx/>
+              <a:buSzTx/>
+              <a:buFontTx/>
+              <a:buNone/>
+              <a:tabLst/>
+              <a:defRPr/>
+            </a:pPr>
+            <a:endParaRPr lang="pt-BR" sz="1200" b="0" dirty="0">
+              <a:solidFill>
+                <a:srgbClr val="00B0F0"/>
+              </a:solidFill>
+            </a:endParaRPr>
+          </a:p>
+          <a:p>
+            <a:r>
+              <a:rPr lang="pt-BR" dirty="0"/>
+              <a:t>Identificar o melhor número de clusters (</a:t>
+            </a:r>
+            <a:r>
+              <a:rPr lang="pt-BR" dirty="0" err="1"/>
+              <a:t>kk</a:t>
+            </a:r>
+            <a:r>
+              <a:rPr lang="pt-BR" dirty="0"/>
+              <a:t>) no K-</a:t>
+            </a:r>
+            <a:r>
+              <a:rPr lang="pt-BR" dirty="0" err="1"/>
+              <a:t>Means</a:t>
+            </a:r>
+            <a:r>
+              <a:rPr lang="pt-BR" dirty="0"/>
+              <a:t> é um passo fundamental para garantir a eficiência e a utilidade da clusterização. Existem várias abordagens para determinar o valor ideal de </a:t>
+            </a:r>
+            <a:r>
+              <a:rPr lang="pt-BR" dirty="0" err="1"/>
+              <a:t>kk</a:t>
+            </a:r>
+            <a:r>
+              <a:rPr lang="pt-BR" dirty="0"/>
+              <a:t>. As mais comuns incluem:</a:t>
+            </a:r>
+          </a:p>
+          <a:p>
+            <a:r>
+              <a:rPr lang="pt-BR" b="1" dirty="0"/>
+              <a:t>1. Método do Cotovelo (</a:t>
+            </a:r>
+            <a:r>
+              <a:rPr lang="pt-BR" b="1" dirty="0" err="1"/>
+              <a:t>Elbow</a:t>
+            </a:r>
+            <a:r>
+              <a:rPr lang="pt-BR" b="1" dirty="0"/>
+              <a:t> </a:t>
+            </a:r>
+            <a:r>
+              <a:rPr lang="pt-BR" b="1" dirty="0" err="1"/>
+              <a:t>Method</a:t>
+            </a:r>
+            <a:r>
+              <a:rPr lang="pt-BR" b="1" dirty="0"/>
+              <a:t>)</a:t>
+            </a:r>
+          </a:p>
+          <a:p>
+            <a:r>
+              <a:rPr lang="pt-BR" dirty="0"/>
+              <a:t>Este método analisa a variação da </a:t>
+            </a:r>
+            <a:r>
+              <a:rPr lang="pt-BR" b="1" dirty="0"/>
+              <a:t>inércia </a:t>
+            </a:r>
+            <a:r>
+              <a:rPr lang="pt-BR" b="1" dirty="0" err="1"/>
+              <a:t>intra-cluster</a:t>
+            </a:r>
+            <a:r>
+              <a:rPr lang="pt-BR" dirty="0"/>
+              <a:t> (ou soma dos erros quadráticos dentro dos clusters, WSSWSS) à medida que o número de clusters aumenta.</a:t>
+            </a:r>
+          </a:p>
+          <a:p>
+            <a:r>
+              <a:rPr lang="pt-BR" b="1" dirty="0"/>
+              <a:t>Passos:</a:t>
+            </a:r>
+          </a:p>
+          <a:p>
+            <a:pPr>
+              <a:buFont typeface="+mj-lt"/>
+              <a:buAutoNum type="arabicPeriod"/>
+            </a:pPr>
+            <a:r>
+              <a:rPr lang="pt-BR" dirty="0"/>
+              <a:t>Execute o K-</a:t>
+            </a:r>
+            <a:r>
+              <a:rPr lang="pt-BR" dirty="0" err="1"/>
+              <a:t>Means</a:t>
+            </a:r>
+            <a:r>
+              <a:rPr lang="pt-BR" dirty="0"/>
+              <a:t> com diferentes valores de </a:t>
+            </a:r>
+            <a:r>
+              <a:rPr lang="pt-BR" dirty="0" err="1"/>
+              <a:t>kk</a:t>
+            </a:r>
+            <a:r>
+              <a:rPr lang="pt-BR" dirty="0"/>
+              <a:t> (por exemplo, k=1k=1 a k=10k=10).</a:t>
+            </a:r>
+          </a:p>
+          <a:p>
+            <a:pPr>
+              <a:buFont typeface="+mj-lt"/>
+              <a:buAutoNum type="arabicPeriod"/>
+            </a:pPr>
+            <a:r>
+              <a:rPr lang="pt-BR" dirty="0"/>
+              <a:t>Calcule o WSSWSS para cada valor de </a:t>
+            </a:r>
+            <a:r>
+              <a:rPr lang="pt-BR" dirty="0" err="1"/>
+              <a:t>kk</a:t>
+            </a:r>
+            <a:r>
+              <a:rPr lang="pt-BR" dirty="0"/>
+              <a:t>.</a:t>
+            </a:r>
+          </a:p>
+          <a:p>
+            <a:pPr>
+              <a:buFont typeface="+mj-lt"/>
+              <a:buAutoNum type="arabicPeriod"/>
+            </a:pPr>
+            <a:r>
+              <a:rPr lang="pt-BR" dirty="0"/>
+              <a:t>Trace um gráfico do WSSWSS em função de </a:t>
+            </a:r>
+            <a:r>
+              <a:rPr lang="pt-BR" dirty="0" err="1"/>
+              <a:t>kk</a:t>
+            </a:r>
+            <a:r>
+              <a:rPr lang="pt-BR" dirty="0"/>
+              <a:t>.</a:t>
+            </a:r>
+          </a:p>
+          <a:p>
+            <a:pPr>
+              <a:buFont typeface="+mj-lt"/>
+              <a:buAutoNum type="arabicPeriod"/>
+            </a:pPr>
+            <a:r>
+              <a:rPr lang="pt-BR" dirty="0"/>
+              <a:t>Identifique o "cotovelo" no gráfico — o ponto onde a redução no WSSWSS se torna menos significativa.</a:t>
+            </a:r>
+          </a:p>
+          <a:p>
+            <a:r>
+              <a:rPr lang="pt-BR" b="1" dirty="0"/>
+              <a:t>Observação:</a:t>
+            </a:r>
+          </a:p>
+          <a:p>
+            <a:r>
+              <a:rPr lang="pt-BR" dirty="0"/>
+              <a:t>O "cotovelo" indica que aumentar </a:t>
+            </a:r>
+            <a:r>
+              <a:rPr lang="pt-BR" dirty="0" err="1"/>
+              <a:t>kk</a:t>
+            </a:r>
+            <a:r>
+              <a:rPr lang="pt-BR" dirty="0"/>
+              <a:t> além desse ponto não resulta em uma melhoria substancial na compactação dos clusters.</a:t>
+            </a:r>
+          </a:p>
+          <a:p>
+            <a:r>
+              <a:rPr lang="pt-BR" b="1" dirty="0"/>
+              <a:t>2. Coeficiente de Silhueta (</a:t>
+            </a:r>
+            <a:r>
+              <a:rPr lang="pt-BR" b="1" dirty="0" err="1"/>
+              <a:t>Silhouette</a:t>
+            </a:r>
+            <a:r>
+              <a:rPr lang="pt-BR" b="1" dirty="0"/>
+              <a:t> Score)</a:t>
+            </a:r>
+          </a:p>
+          <a:p>
+            <a:r>
+              <a:rPr lang="pt-BR" dirty="0"/>
+              <a:t>O coeficiente de silhueta avalia a </a:t>
+            </a:r>
+            <a:r>
+              <a:rPr lang="pt-BR" b="1" dirty="0"/>
+              <a:t>qualidade da clusterização</a:t>
+            </a:r>
+            <a:r>
+              <a:rPr lang="pt-BR" dirty="0"/>
+              <a:t>, considerando a coesão dentro dos clusters e a separação entre eles.</a:t>
+            </a:r>
+          </a:p>
+          <a:p>
+            <a:pPr>
+              <a:buFont typeface="Arial" panose="020B0604020202020204" pitchFamily="34" charset="0"/>
+              <a:buChar char="•"/>
+            </a:pPr>
+            <a:r>
+              <a:rPr lang="pt-BR" dirty="0"/>
+              <a:t>s=b−</a:t>
+            </a:r>
+            <a:r>
+              <a:rPr lang="pt-BR" dirty="0" err="1"/>
+              <a:t>amax</a:t>
+            </a:r>
+            <a:r>
+              <a:rPr lang="pt-BR" dirty="0"/>
+              <a:t>⁡(</a:t>
+            </a:r>
+            <a:r>
+              <a:rPr lang="pt-BR" dirty="0" err="1"/>
+              <a:t>a,b</a:t>
+            </a:r>
+            <a:r>
+              <a:rPr lang="pt-BR" dirty="0"/>
+              <a:t>)s = \</a:t>
+            </a:r>
+            <a:r>
+              <a:rPr lang="pt-BR" dirty="0" err="1"/>
+              <a:t>frac</a:t>
+            </a:r>
+            <a:r>
+              <a:rPr lang="pt-BR" dirty="0"/>
+              <a:t>{b - a}{\</a:t>
+            </a:r>
+            <a:r>
+              <a:rPr lang="pt-BR" dirty="0" err="1"/>
+              <a:t>max</a:t>
+            </a:r>
+            <a:r>
+              <a:rPr lang="pt-BR" dirty="0"/>
+              <a:t>(a, b)} aa: distância média de um ponto para os outros pontos do mesmo cluster.</a:t>
+            </a:r>
+          </a:p>
+          <a:p>
+            <a:pPr>
+              <a:buFont typeface="Arial" panose="020B0604020202020204" pitchFamily="34" charset="0"/>
+              <a:buChar char="•"/>
+            </a:pPr>
+            <a:r>
+              <a:rPr lang="pt-BR" dirty="0" err="1"/>
+              <a:t>bb</a:t>
+            </a:r>
+            <a:r>
+              <a:rPr lang="pt-BR" dirty="0"/>
+              <a:t>: distância média de um ponto para os pontos do cluster mais próximo.</a:t>
+            </a:r>
+          </a:p>
+          <a:p>
+            <a:r>
+              <a:rPr lang="pt-BR" b="1" dirty="0"/>
+              <a:t>Passos:</a:t>
+            </a:r>
+          </a:p>
+          <a:p>
+            <a:pPr>
+              <a:buFont typeface="+mj-lt"/>
+              <a:buAutoNum type="arabicPeriod"/>
+            </a:pPr>
+            <a:r>
+              <a:rPr lang="pt-BR" dirty="0"/>
+              <a:t>Execute o K-</a:t>
+            </a:r>
+            <a:r>
+              <a:rPr lang="pt-BR" dirty="0" err="1"/>
+              <a:t>Means</a:t>
+            </a:r>
+            <a:r>
+              <a:rPr lang="pt-BR" dirty="0"/>
+              <a:t> para diferentes valores de </a:t>
+            </a:r>
+            <a:r>
+              <a:rPr lang="pt-BR" dirty="0" err="1"/>
+              <a:t>kk</a:t>
+            </a:r>
+            <a:r>
+              <a:rPr lang="pt-BR" dirty="0"/>
+              <a:t>.</a:t>
+            </a:r>
+          </a:p>
+          <a:p>
+            <a:pPr>
+              <a:buFont typeface="+mj-lt"/>
+              <a:buAutoNum type="arabicPeriod"/>
+            </a:pPr>
+            <a:r>
+              <a:rPr lang="pt-BR" dirty="0"/>
+              <a:t>Calcule o coeficiente de silhueta para cada ponto e, em seguida, a média para o conjunto.</a:t>
+            </a:r>
+          </a:p>
+          <a:p>
+            <a:pPr>
+              <a:buFont typeface="+mj-lt"/>
+              <a:buAutoNum type="arabicPeriod"/>
+            </a:pPr>
+            <a:r>
+              <a:rPr lang="pt-BR" dirty="0"/>
+              <a:t>Escolha </a:t>
+            </a:r>
+            <a:r>
+              <a:rPr lang="pt-BR" dirty="0" err="1"/>
+              <a:t>kk</a:t>
+            </a:r>
+            <a:r>
+              <a:rPr lang="pt-BR" dirty="0"/>
+              <a:t> que maximize o valor médio do coeficiente de silhueta.</a:t>
+            </a:r>
+          </a:p>
+          <a:p>
+            <a:r>
+              <a:rPr lang="pt-BR" b="1" dirty="0"/>
+              <a:t>3. Critério Gap </a:t>
+            </a:r>
+            <a:r>
+              <a:rPr lang="pt-BR" b="1" dirty="0" err="1"/>
+              <a:t>Statistic</a:t>
+            </a:r>
+            <a:endParaRPr lang="pt-BR" b="1" dirty="0"/>
+          </a:p>
+          <a:p>
+            <a:r>
+              <a:rPr lang="pt-BR" dirty="0"/>
+              <a:t>Este método compara a dispersão dos clusters no conjunto de dados com uma dispersão esperada de um conjunto de dados gerado aleatoriamente.</a:t>
+            </a:r>
+          </a:p>
+          <a:p>
+            <a:r>
+              <a:rPr lang="pt-BR" b="1" dirty="0"/>
+              <a:t>Passos:</a:t>
+            </a:r>
+          </a:p>
+          <a:p>
+            <a:pPr>
+              <a:buFont typeface="+mj-lt"/>
+              <a:buAutoNum type="arabicPeriod"/>
+            </a:pPr>
+            <a:r>
+              <a:rPr lang="pt-BR" dirty="0"/>
+              <a:t>Execute o K-</a:t>
+            </a:r>
+            <a:r>
+              <a:rPr lang="pt-BR" dirty="0" err="1"/>
+              <a:t>Means</a:t>
+            </a:r>
+            <a:r>
+              <a:rPr lang="pt-BR" dirty="0"/>
+              <a:t> para diferentes valores de </a:t>
+            </a:r>
+            <a:r>
+              <a:rPr lang="pt-BR" dirty="0" err="1"/>
+              <a:t>kk</a:t>
+            </a:r>
+            <a:r>
+              <a:rPr lang="pt-BR" dirty="0"/>
+              <a:t> no conjunto de dados real.</a:t>
+            </a:r>
+          </a:p>
+          <a:p>
+            <a:pPr>
+              <a:buFont typeface="+mj-lt"/>
+              <a:buAutoNum type="arabicPeriod"/>
+            </a:pPr>
+            <a:r>
+              <a:rPr lang="pt-BR" dirty="0"/>
+              <a:t>Gere um conjunto de dados aleatório com a mesma distribuição e calcule a dispersão dos clusters.</a:t>
+            </a:r>
+          </a:p>
+          <a:p>
+            <a:pPr>
+              <a:buFont typeface="+mj-lt"/>
+              <a:buAutoNum type="arabicPeriod"/>
+            </a:pPr>
+            <a:r>
+              <a:rPr lang="pt-BR" dirty="0"/>
+              <a:t>Compare as dispersões e encontre </a:t>
+            </a:r>
+            <a:r>
+              <a:rPr lang="pt-BR" dirty="0" err="1"/>
+              <a:t>kk</a:t>
+            </a:r>
+            <a:r>
+              <a:rPr lang="pt-BR" dirty="0"/>
+              <a:t> que maximize a diferença (gap) entre os dois conjuntos.</a:t>
+            </a:r>
+          </a:p>
+          <a:p>
+            <a:r>
+              <a:rPr lang="pt-BR" b="1" dirty="0"/>
+              <a:t>4. Validação Cruzada</a:t>
+            </a:r>
+          </a:p>
+          <a:p>
+            <a:r>
+              <a:rPr lang="pt-BR" dirty="0"/>
+              <a:t>Divida o conjunto de dados em subconjuntos e avalie a consistência dos clusters em diferentes amostras.</a:t>
+            </a:r>
+          </a:p>
+          <a:p>
+            <a:r>
+              <a:rPr lang="pt-BR" b="1" dirty="0"/>
+              <a:t>5. Métodos Automáticos, como X-</a:t>
+            </a:r>
+            <a:r>
+              <a:rPr lang="pt-BR" b="1" dirty="0" err="1"/>
+              <a:t>Means</a:t>
+            </a:r>
+            <a:r>
+              <a:rPr lang="pt-BR" b="1" dirty="0"/>
+              <a:t> e G-</a:t>
+            </a:r>
+            <a:r>
+              <a:rPr lang="pt-BR" b="1" dirty="0" err="1"/>
+              <a:t>Means</a:t>
+            </a:r>
+            <a:endParaRPr lang="pt-BR" b="1" dirty="0"/>
+          </a:p>
+          <a:p>
+            <a:pPr>
+              <a:buFont typeface="Arial" panose="020B0604020202020204" pitchFamily="34" charset="0"/>
+              <a:buChar char="•"/>
+            </a:pPr>
+            <a:r>
+              <a:rPr lang="pt-BR" b="1" dirty="0"/>
+              <a:t>X-</a:t>
+            </a:r>
+            <a:r>
+              <a:rPr lang="pt-BR" b="1" dirty="0" err="1"/>
+              <a:t>Means</a:t>
+            </a:r>
+            <a:r>
+              <a:rPr lang="pt-BR" dirty="0"/>
+              <a:t>: Extensão do K-</a:t>
+            </a:r>
+            <a:r>
+              <a:rPr lang="pt-BR" dirty="0" err="1"/>
+              <a:t>Means</a:t>
+            </a:r>
+            <a:r>
+              <a:rPr lang="pt-BR" dirty="0"/>
+              <a:t> que escolhe automaticamente </a:t>
+            </a:r>
+            <a:r>
+              <a:rPr lang="pt-BR" dirty="0" err="1"/>
+              <a:t>kk</a:t>
+            </a:r>
+            <a:r>
+              <a:rPr lang="pt-BR" dirty="0"/>
+              <a:t> otimizando o critério Bayesiano.</a:t>
+            </a:r>
+          </a:p>
+          <a:p>
+            <a:pPr>
+              <a:buFont typeface="Arial" panose="020B0604020202020204" pitchFamily="34" charset="0"/>
+              <a:buChar char="•"/>
+            </a:pPr>
+            <a:r>
+              <a:rPr lang="pt-BR" b="1" dirty="0"/>
+              <a:t>G-</a:t>
+            </a:r>
+            <a:r>
+              <a:rPr lang="pt-BR" b="1" dirty="0" err="1"/>
+              <a:t>Means</a:t>
+            </a:r>
+            <a:r>
+              <a:rPr lang="pt-BR" dirty="0"/>
+              <a:t>: Usa testes estatísticos para determinar se os clusters seguem uma distribuição gaussiana.</a:t>
+            </a:r>
+          </a:p>
+          <a:p>
+            <a:r>
+              <a:rPr lang="pt-BR" b="1" dirty="0"/>
+              <a:t>Considerações:</a:t>
+            </a:r>
+          </a:p>
+          <a:p>
+            <a:pPr>
+              <a:buFont typeface="Arial" panose="020B0604020202020204" pitchFamily="34" charset="0"/>
+              <a:buChar char="•"/>
+            </a:pPr>
+            <a:r>
+              <a:rPr lang="pt-BR" b="1" dirty="0"/>
+              <a:t>Dimensão dos dados</a:t>
+            </a:r>
+            <a:r>
+              <a:rPr lang="pt-BR" dirty="0"/>
+              <a:t>: Em alta dimensionalidade, os métodos podem se tornar menos claros devido à maldição da dimensionalidade.</a:t>
+            </a:r>
+          </a:p>
+          <a:p>
+            <a:pPr>
+              <a:buFont typeface="Arial" panose="020B0604020202020204" pitchFamily="34" charset="0"/>
+              <a:buChar char="•"/>
+            </a:pPr>
+            <a:r>
+              <a:rPr lang="pt-BR" b="1" dirty="0"/>
+              <a:t>Interpretação</a:t>
+            </a:r>
+            <a:r>
+              <a:rPr lang="pt-BR" dirty="0"/>
+              <a:t>: O número de clusters deve fazer sentido no contexto do problema, além de ser estatisticamente válido.</a:t>
+            </a:r>
+          </a:p>
+          <a:p>
+            <a:r>
+              <a:rPr lang="pt-BR" dirty="0"/>
+              <a:t>Combinar múltiplos métodos pode ser útil para confirmar a escolha do melhor </a:t>
+            </a:r>
+            <a:r>
+              <a:rPr lang="pt-BR" dirty="0" err="1"/>
+              <a:t>kk</a:t>
+            </a:r>
+            <a:r>
+              <a:rPr lang="pt-BR" dirty="0"/>
+              <a:t>.</a:t>
+            </a:r>
+          </a:p>
+          <a:p>
+            <a:endParaRPr lang="en-US" dirty="0"/>
+          </a:p>
+        </p:txBody>
+      </p:sp>
+      <p:sp>
+        <p:nvSpPr>
+          <p:cNvPr id="4" name="Espaço Reservado para Número de Slide 3"/>
           <p:cNvSpPr>
             <a:spLocks noGrp="1"/>
           </p:cNvSpPr>
@@ -2875,9 +2989,9 @@
           <a:bodyPr/>
           <a:lstStyle/>
           <a:p>
-            <a:fld id="{6FC8D850-966F-45A6-8DE7-15B891E7D40D}" type="slidenum">
+            <a:fld id="{F430A2A4-8C14-4B1A-AD48-7B6401078BF7}" type="slidenum">
               <a:rPr lang="pt-BR" smtClean="0"/>
-              <a:t>19</a:t>
+              <a:t>18</a:t>
             </a:fld>
             <a:endParaRPr lang="pt-BR"/>
           </a:p>
@@ -2886,7 +3000,7 @@
     </p:spTree>
     <p:extLst>
       <p:ext uri="{BB962C8B-B14F-4D97-AF65-F5344CB8AC3E}">
-        <p14:creationId xmlns:p14="http://schemas.microsoft.com/office/powerpoint/2010/main" val="9567866"/>
+        <p14:creationId xmlns:p14="http://schemas.microsoft.com/office/powerpoint/2010/main" val="3992294165"/>
       </p:ext>
     </p:extLst>
   </p:cSld>
@@ -3027,7 +3141,7 @@
           <a:p>
             <a:fld id="{221D0464-8C8A-49C0-859F-777E51766A35}" type="datetimeFigureOut">
               <a:rPr lang="pt-BR" smtClean="0"/>
-              <a:t>30/11/2024</a:t>
+              <a:t>13/06/2026</a:t>
             </a:fld>
             <a:endParaRPr lang="pt-BR"/>
           </a:p>
@@ -3197,7 +3311,7 @@
           <a:p>
             <a:fld id="{221D0464-8C8A-49C0-859F-777E51766A35}" type="datetimeFigureOut">
               <a:rPr lang="pt-BR" smtClean="0"/>
-              <a:t>30/11/2024</a:t>
+              <a:t>13/06/2026</a:t>
             </a:fld>
             <a:endParaRPr lang="pt-BR"/>
           </a:p>
@@ -3377,7 +3491,7 @@
           <a:p>
             <a:fld id="{221D0464-8C8A-49C0-859F-777E51766A35}" type="datetimeFigureOut">
               <a:rPr lang="pt-BR" smtClean="0"/>
-              <a:t>30/11/2024</a:t>
+              <a:t>13/06/2026</a:t>
             </a:fld>
             <a:endParaRPr lang="pt-BR"/>
           </a:p>
@@ -3547,7 +3661,7 @@
           <a:p>
             <a:fld id="{221D0464-8C8A-49C0-859F-777E51766A35}" type="datetimeFigureOut">
               <a:rPr lang="pt-BR" smtClean="0"/>
-              <a:t>30/11/2024</a:t>
+              <a:t>13/06/2026</a:t>
             </a:fld>
             <a:endParaRPr lang="pt-BR"/>
           </a:p>
@@ -3793,7 +3907,7 @@
           <a:p>
             <a:fld id="{221D0464-8C8A-49C0-859F-777E51766A35}" type="datetimeFigureOut">
               <a:rPr lang="pt-BR" smtClean="0"/>
-              <a:t>30/11/2024</a:t>
+              <a:t>13/06/2026</a:t>
             </a:fld>
             <a:endParaRPr lang="pt-BR"/>
           </a:p>
@@ -4025,7 +4139,7 @@
           <a:p>
             <a:fld id="{221D0464-8C8A-49C0-859F-777E51766A35}" type="datetimeFigureOut">
               <a:rPr lang="pt-BR" smtClean="0"/>
-              <a:t>30/11/2024</a:t>
+              <a:t>13/06/2026</a:t>
             </a:fld>
             <a:endParaRPr lang="pt-BR"/>
           </a:p>
@@ -4392,7 +4506,7 @@
           <a:p>
             <a:fld id="{221D0464-8C8A-49C0-859F-777E51766A35}" type="datetimeFigureOut">
               <a:rPr lang="pt-BR" smtClean="0"/>
-              <a:t>30/11/2024</a:t>
+              <a:t>13/06/2026</a:t>
             </a:fld>
             <a:endParaRPr lang="pt-BR"/>
           </a:p>
@@ -4510,7 +4624,7 @@
           <a:p>
             <a:fld id="{221D0464-8C8A-49C0-859F-777E51766A35}" type="datetimeFigureOut">
               <a:rPr lang="pt-BR" smtClean="0"/>
-              <a:t>30/11/2024</a:t>
+              <a:t>13/06/2026</a:t>
             </a:fld>
             <a:endParaRPr lang="pt-BR"/>
           </a:p>
@@ -4605,7 +4719,7 @@
           <a:p>
             <a:fld id="{221D0464-8C8A-49C0-859F-777E51766A35}" type="datetimeFigureOut">
               <a:rPr lang="pt-BR" smtClean="0"/>
-              <a:t>30/11/2024</a:t>
+              <a:t>13/06/2026</a:t>
             </a:fld>
             <a:endParaRPr lang="pt-BR"/>
           </a:p>
@@ -4882,7 +4996,7 @@
           <a:p>
             <a:fld id="{221D0464-8C8A-49C0-859F-777E51766A35}" type="datetimeFigureOut">
               <a:rPr lang="pt-BR" smtClean="0"/>
-              <a:t>30/11/2024</a:t>
+              <a:t>13/06/2026</a:t>
             </a:fld>
             <a:endParaRPr lang="pt-BR"/>
           </a:p>
@@ -5135,7 +5249,7 @@
           <a:p>
             <a:fld id="{221D0464-8C8A-49C0-859F-777E51766A35}" type="datetimeFigureOut">
               <a:rPr lang="pt-BR" smtClean="0"/>
-              <a:t>30/11/2024</a:t>
+              <a:t>13/06/2026</a:t>
             </a:fld>
             <a:endParaRPr lang="pt-BR"/>
           </a:p>
@@ -5348,7 +5462,7 @@
           <a:p>
             <a:fld id="{221D0464-8C8A-49C0-859F-777E51766A35}" type="datetimeFigureOut">
               <a:rPr lang="pt-BR" smtClean="0"/>
-              <a:t>30/11/2024</a:t>
+              <a:t>13/06/2026</a:t>
             </a:fld>
             <a:endParaRPr lang="pt-BR"/>
           </a:p>
@@ -5758,7 +5872,7 @@
           <p:cNvPr id="2" name="Título 1">
             <a:extLst>
               <a:ext uri="{FF2B5EF4-FFF2-40B4-BE49-F238E27FC236}">
-                <a16:creationId xmlns:a16="http://schemas.microsoft.com/office/drawing/2014/main" id="{32666AC8-2E17-4DB4-B0F5-60C640CCFD2E}"/>
+                <a16:creationId xmlns:a16="http://schemas.microsoft.com/office/drawing/2014/main" xmlns="" id="{32666AC8-2E17-4DB4-B0F5-60C640CCFD2E}"/>
               </a:ext>
             </a:extLst>
           </p:cNvPr>
@@ -5785,6 +5899,10 @@
               <a:rPr lang="pt-BR" sz="5400" dirty="0"/>
               <a:t>T320 - Introdução ao Aprendizado de Máquina II:</a:t>
             </a:r>
+            <a:r>
+              <a:rPr lang="pt-BR" dirty="0"/>
+              <a:t/>
+            </a:r>
             <a:br>
               <a:rPr lang="pt-BR" dirty="0"/>
             </a:br>
@@ -5800,7 +5918,7 @@
           <p:cNvPr id="4" name="CaixaDeTexto 3">
             <a:extLst>
               <a:ext uri="{FF2B5EF4-FFF2-40B4-BE49-F238E27FC236}">
-                <a16:creationId xmlns:a16="http://schemas.microsoft.com/office/drawing/2014/main" id="{430EB894-B7D4-434C-9D1A-A14094D9BEEC}"/>
+                <a16:creationId xmlns:a16="http://schemas.microsoft.com/office/drawing/2014/main" xmlns="" id="{430EB894-B7D4-434C-9D1A-A14094D9BEEC}"/>
               </a:ext>
             </a:extLst>
           </p:cNvPr>
@@ -5841,7 +5959,7 @@
           <p:cNvPr id="1026" name="Picture 2" descr="Logo">
             <a:extLst>
               <a:ext uri="{FF2B5EF4-FFF2-40B4-BE49-F238E27FC236}">
-                <a16:creationId xmlns:a16="http://schemas.microsoft.com/office/drawing/2014/main" id="{3F2642E0-4F6A-4196-8F58-E77D36E9A33F}"/>
+                <a16:creationId xmlns:a16="http://schemas.microsoft.com/office/drawing/2014/main" xmlns="" id="{3F2642E0-4F6A-4196-8F58-E77D36E9A33F}"/>
               </a:ext>
             </a:extLst>
           </p:cNvPr>
@@ -5886,7 +6004,7 @@
           <p:cNvPr id="5122" name="Picture 2" descr="Image result for machine learning">
             <a:extLst>
               <a:ext uri="{FF2B5EF4-FFF2-40B4-BE49-F238E27FC236}">
-                <a16:creationId xmlns:a16="http://schemas.microsoft.com/office/drawing/2014/main" id="{810CE0A2-4102-44A6-A370-175E7896CDCB}"/>
+                <a16:creationId xmlns:a16="http://schemas.microsoft.com/office/drawing/2014/main" xmlns="" id="{810CE0A2-4102-44A6-A370-175E7896CDCB}"/>
               </a:ext>
             </a:extLst>
           </p:cNvPr>
@@ -5944,10 +6062,261 @@
   <p:cSld>
     <p:spTree>
       <p:nvGrpSpPr>
+        <p:cNvPr id="1" name=""/>
+        <p:cNvGrpSpPr/>
+        <p:nvPr/>
+      </p:nvGrpSpPr>
+      <p:grpSpPr>
+        <a:xfrm>
+          <a:off x="0" y="0"/>
+          <a:ext cx="0" cy="0"/>
+          <a:chOff x="0" y="0"/>
+          <a:chExt cx="0" cy="0"/>
+        </a:xfrm>
+      </p:grpSpPr>
+      <p:sp>
+        <p:nvSpPr>
+          <p:cNvPr id="2" name="Título 1"/>
+          <p:cNvSpPr>
+            <a:spLocks noGrp="1"/>
+          </p:cNvSpPr>
+          <p:nvPr>
+            <p:ph type="title"/>
+          </p:nvPr>
+        </p:nvSpPr>
+        <p:spPr/>
+        <p:txBody>
+          <a:bodyPr/>
+          <a:lstStyle/>
+          <a:p>
+            <a:r>
+              <a:rPr lang="pt-BR" dirty="0"/>
+              <a:t>Quantos devem ser os clusters?</a:t>
+            </a:r>
+            <a:endParaRPr lang="en-US" dirty="0"/>
+          </a:p>
+        </p:txBody>
+      </p:sp>
+      <p:sp>
+        <p:nvSpPr>
+          <p:cNvPr id="3" name="Espaço Reservado para Conteúdo 2"/>
+          <p:cNvSpPr>
+            <a:spLocks noGrp="1"/>
+          </p:cNvSpPr>
+          <p:nvPr>
+            <p:ph idx="1"/>
+          </p:nvPr>
+        </p:nvSpPr>
+        <p:spPr>
+          <a:xfrm>
+            <a:off x="5334000" y="1690688"/>
+            <a:ext cx="6729845" cy="5167311"/>
+          </a:xfrm>
+        </p:spPr>
+        <p:txBody>
+          <a:bodyPr>
+            <a:normAutofit/>
+          </a:bodyPr>
+          <a:lstStyle/>
+          <a:p>
+            <a:r>
+              <a:rPr lang="pt-BR" dirty="0"/>
+              <a:t>Os clusters </a:t>
+            </a:r>
+            <a:r>
+              <a:rPr lang="pt-BR" b="1" i="1" dirty="0"/>
+              <a:t>não devem se sobrepor</a:t>
+            </a:r>
+            <a:r>
+              <a:rPr lang="pt-BR" dirty="0"/>
+              <a:t>: </a:t>
+            </a:r>
+            <a:r>
+              <a:rPr lang="pt-BR" b="1" i="1" dirty="0">
+                <a:solidFill>
+                  <a:srgbClr val="00B050"/>
+                </a:solidFill>
+              </a:rPr>
+              <a:t>cada exemplo</a:t>
+            </a:r>
+            <a:r>
+              <a:rPr lang="pt-BR" dirty="0"/>
+              <a:t> deve </a:t>
+            </a:r>
+            <a:r>
+              <a:rPr lang="pt-BR" b="1" i="1" dirty="0">
+                <a:solidFill>
+                  <a:srgbClr val="00B050"/>
+                </a:solidFill>
+              </a:rPr>
+              <a:t>pertencer</a:t>
+            </a:r>
+            <a:r>
+              <a:rPr lang="pt-BR" dirty="0"/>
+              <a:t> a </a:t>
+            </a:r>
+            <a:r>
+              <a:rPr lang="pt-BR" b="1" i="1" dirty="0">
+                <a:solidFill>
+                  <a:srgbClr val="00B050"/>
+                </a:solidFill>
+              </a:rPr>
+              <a:t>um e apenas a um cluster</a:t>
+            </a:r>
+            <a:r>
+              <a:rPr lang="pt-BR" dirty="0"/>
+              <a:t>. </a:t>
+            </a:r>
+          </a:p>
+          <a:p>
+            <a:r>
+              <a:rPr lang="pt-BR" dirty="0"/>
+              <a:t>Porém, </a:t>
+            </a:r>
+            <a:r>
+              <a:rPr lang="pt-BR" b="1" i="1" dirty="0">
+                <a:solidFill>
+                  <a:srgbClr val="0070C0"/>
+                </a:solidFill>
+              </a:rPr>
+              <a:t>dentro do mesmo cluster</a:t>
+            </a:r>
+            <a:r>
+              <a:rPr lang="pt-BR" dirty="0"/>
+              <a:t>, os </a:t>
+            </a:r>
+            <a:r>
+              <a:rPr lang="pt-BR" b="1" i="1" dirty="0">
+                <a:solidFill>
+                  <a:srgbClr val="0070C0"/>
+                </a:solidFill>
+              </a:rPr>
+              <a:t>exemplos</a:t>
+            </a:r>
+            <a:r>
+              <a:rPr lang="pt-BR" dirty="0"/>
+              <a:t> devem estar relativamente </a:t>
+            </a:r>
+            <a:r>
+              <a:rPr lang="pt-BR" b="1" i="1" dirty="0">
+                <a:solidFill>
+                  <a:srgbClr val="0070C0"/>
+                </a:solidFill>
+              </a:rPr>
+              <a:t>próximos</a:t>
+            </a:r>
+            <a:r>
+              <a:rPr lang="pt-BR" dirty="0"/>
+              <a:t> uns dos outros e </a:t>
+            </a:r>
+            <a:r>
+              <a:rPr lang="pt-BR" b="1" i="1" dirty="0">
+                <a:solidFill>
+                  <a:srgbClr val="7030A0"/>
+                </a:solidFill>
+              </a:rPr>
+              <a:t>distantes</a:t>
+            </a:r>
+            <a:r>
+              <a:rPr lang="pt-BR" dirty="0"/>
+              <a:t> dos </a:t>
+            </a:r>
+            <a:r>
+              <a:rPr lang="pt-BR" b="1" i="1" dirty="0">
+                <a:solidFill>
+                  <a:srgbClr val="7030A0"/>
+                </a:solidFill>
+              </a:rPr>
+              <a:t>exemplos dos outros clusters</a:t>
+            </a:r>
+            <a:r>
+              <a:rPr lang="pt-BR" dirty="0"/>
+              <a:t>.</a:t>
+            </a:r>
+          </a:p>
+          <a:p>
+            <a:r>
+              <a:rPr lang="pt-BR" dirty="0"/>
+              <a:t>Aí surge uma dúvida. </a:t>
+            </a:r>
+          </a:p>
+          <a:p>
+            <a:r>
+              <a:rPr lang="pt-BR" dirty="0"/>
+              <a:t>Quantos </a:t>
+            </a:r>
+            <a:r>
+              <a:rPr lang="pt-BR" i="1" dirty="0"/>
+              <a:t>clusters</a:t>
+            </a:r>
+            <a:r>
+              <a:rPr lang="pt-BR" dirty="0"/>
+              <a:t> um conjunto de exemplos contém?</a:t>
+            </a:r>
+          </a:p>
+        </p:txBody>
+      </p:sp>
+      <p:pic>
+        <p:nvPicPr>
+          <p:cNvPr id="5" name="Picture 2" descr="K-Means Clustering using Python. Welcome back guys! Hope you had a great… |  by Luigi Fiori | Medium"/>
+          <p:cNvPicPr>
+            <a:picLocks noChangeAspect="1" noChangeArrowheads="1"/>
+          </p:cNvPicPr>
+          <p:nvPr/>
+        </p:nvPicPr>
+        <p:blipFill rotWithShape="1">
+          <a:blip r:embed="rId2">
+            <a:extLst>
+              <a:ext uri="{28A0092B-C50C-407E-A947-70E740481C1C}">
+                <a14:useLocalDpi xmlns:a14="http://schemas.microsoft.com/office/drawing/2010/main" val="0"/>
+              </a:ext>
+            </a:extLst>
+          </a:blip>
+          <a:srcRect l="1639" t="12047" r="55246" b="11854"/>
+          <a:stretch/>
+        </p:blipFill>
+        <p:spPr bwMode="auto">
+          <a:xfrm>
+            <a:off x="1045029" y="2388412"/>
+            <a:ext cx="3798090" cy="2793188"/>
+          </a:xfrm>
+          <a:prstGeom prst="rect">
+            <a:avLst/>
+          </a:prstGeom>
+          <a:noFill/>
+          <a:extLst>
+            <a:ext uri="{909E8E84-426E-40DD-AFC4-6F175D3DCCD1}">
+              <a14:hiddenFill xmlns:a14="http://schemas.microsoft.com/office/drawing/2010/main">
+                <a:solidFill>
+                  <a:srgbClr val="FFFFFF"/>
+                </a:solidFill>
+              </a14:hiddenFill>
+            </a:ext>
+          </a:extLst>
+        </p:spPr>
+      </p:pic>
+    </p:spTree>
+    <p:extLst>
+      <p:ext uri="{BB962C8B-B14F-4D97-AF65-F5344CB8AC3E}">
+        <p14:creationId xmlns:p14="http://schemas.microsoft.com/office/powerpoint/2010/main" val="506141761"/>
+      </p:ext>
+    </p:extLst>
+  </p:cSld>
+  <p:clrMapOvr>
+    <a:masterClrMapping/>
+  </p:clrMapOvr>
+</p:sld>
+</file>
+
+<file path=ppt/slides/slide11.xml><?xml version="1.0" encoding="utf-8"?>
+<p:sld xmlns:a="http://schemas.openxmlformats.org/drawingml/2006/main" xmlns:r="http://schemas.openxmlformats.org/officeDocument/2006/relationships" xmlns:p="http://schemas.openxmlformats.org/presentationml/2006/main">
+  <p:cSld>
+    <p:spTree>
+      <p:nvGrpSpPr>
         <p:cNvPr id="1" name="">
           <a:extLst>
             <a:ext uri="{FF2B5EF4-FFF2-40B4-BE49-F238E27FC236}">
-              <a16:creationId xmlns:a16="http://schemas.microsoft.com/office/drawing/2014/main" id="{36D1FDFF-84F9-A395-CDB0-AC77470C24F7}"/>
+              <a16:creationId xmlns:a16="http://schemas.microsoft.com/office/drawing/2014/main" xmlns="" id="{36D1FDFF-84F9-A395-CDB0-AC77470C24F7}"/>
             </a:ext>
           </a:extLst>
         </p:cNvPr>
@@ -5967,7 +6336,7 @@
           <p:cNvPr id="2" name="Título 1">
             <a:extLst>
               <a:ext uri="{FF2B5EF4-FFF2-40B4-BE49-F238E27FC236}">
-                <a16:creationId xmlns:a16="http://schemas.microsoft.com/office/drawing/2014/main" id="{CA82907A-6417-D3C2-265A-0FFD53046E99}"/>
+                <a16:creationId xmlns:a16="http://schemas.microsoft.com/office/drawing/2014/main" xmlns="" id="{CA82907A-6417-D3C2-265A-0FFD53046E99}"/>
               </a:ext>
             </a:extLst>
           </p:cNvPr>
@@ -5996,7 +6365,7 @@
           <p:cNvPr id="3" name="Espaço Reservado para Conteúdo 2">
             <a:extLst>
               <a:ext uri="{FF2B5EF4-FFF2-40B4-BE49-F238E27FC236}">
-                <a16:creationId xmlns:a16="http://schemas.microsoft.com/office/drawing/2014/main" id="{3C767761-7363-3966-1F66-B32029649DCD}"/>
+                <a16:creationId xmlns:a16="http://schemas.microsoft.com/office/drawing/2014/main" xmlns="" id="{3C767761-7363-3966-1F66-B32029649DCD}"/>
               </a:ext>
             </a:extLst>
           </p:cNvPr>
@@ -6037,7 +6406,15 @@
             </a:pPr>
             <a:r>
               <a:rPr lang="pt-BR" dirty="0"/>
-              <a:t>em um extremo, todo o conjunto de dados pode ser pensado como formando um grande cluster; </a:t>
+              <a:t>em um extremo, todo o conjunto de dados pode ser pensado como formando um grande </a:t>
+            </a:r>
+            <a:r>
+              <a:rPr lang="pt-BR" i="1" dirty="0"/>
+              <a:t>cluster</a:t>
+            </a:r>
+            <a:r>
+              <a:rPr lang="pt-BR" dirty="0"/>
+              <a:t>; </a:t>
             </a:r>
           </a:p>
           <a:p>
@@ -6047,7 +6424,15 @@
             </a:pPr>
             <a:r>
               <a:rPr lang="pt-BR" dirty="0"/>
-              <a:t>no outro, cada exemplo pode ser visto como representando seu próprio cluster de um único exemplo.</a:t>
+              <a:t>no outro, cada exemplo pode ser visto como representando seu próprio </a:t>
+            </a:r>
+            <a:r>
+              <a:rPr lang="pt-BR" i="1" dirty="0"/>
+              <a:t>cluster</a:t>
+            </a:r>
+            <a:r>
+              <a:rPr lang="pt-BR" dirty="0"/>
+              <a:t> de um único exemplo.</a:t>
             </a:r>
           </a:p>
           <a:p>
@@ -6087,7 +6472,7 @@
           <p:cNvPr id="5" name="Picture 2" descr="K-Means Clustering using Python. Welcome back guys! Hope you had a great… |  by Luigi Fiori | Medium">
             <a:extLst>
               <a:ext uri="{FF2B5EF4-FFF2-40B4-BE49-F238E27FC236}">
-                <a16:creationId xmlns:a16="http://schemas.microsoft.com/office/drawing/2014/main" id="{079377DD-55D2-BED3-3BB3-D573A6F13921}"/>
+                <a16:creationId xmlns:a16="http://schemas.microsoft.com/office/drawing/2014/main" xmlns="" id="{079377DD-55D2-BED3-3BB3-D573A6F13921}"/>
               </a:ext>
             </a:extLst>
           </p:cNvPr>
@@ -6140,7 +6525,7 @@
 </p:sld>
 </file>
 
-<file path=ppt/slides/slide11.xml><?xml version="1.0" encoding="utf-8"?>
+<file path=ppt/slides/slide12.xml><?xml version="1.0" encoding="utf-8"?>
 <p:sld xmlns:a="http://schemas.openxmlformats.org/drawingml/2006/main" xmlns:r="http://schemas.openxmlformats.org/officeDocument/2006/relationships" xmlns:p="http://schemas.openxmlformats.org/presentationml/2006/main">
   <p:cSld>
     <p:spTree>
@@ -6148,7 +6533,7 @@
         <p:cNvPr id="1" name="">
           <a:extLst>
             <a:ext uri="{FF2B5EF4-FFF2-40B4-BE49-F238E27FC236}">
-              <a16:creationId xmlns:a16="http://schemas.microsoft.com/office/drawing/2014/main" id="{654994D8-D711-9C2A-C202-7BAD7B93F7EE}"/>
+              <a16:creationId xmlns="" xmlns:a16="http://schemas.microsoft.com/office/drawing/2014/main" id="{654994D8-D711-9C2A-C202-7BAD7B93F7EE}"/>
             </a:ext>
           </a:extLst>
         </p:cNvPr>
@@ -6168,7 +6553,7 @@
           <p:cNvPr id="2" name="Título 1">
             <a:extLst>
               <a:ext uri="{FF2B5EF4-FFF2-40B4-BE49-F238E27FC236}">
-                <a16:creationId xmlns:a16="http://schemas.microsoft.com/office/drawing/2014/main" id="{FA636E4B-196C-922B-890C-6917F63A065D}"/>
+                <a16:creationId xmlns="" xmlns:a16="http://schemas.microsoft.com/office/drawing/2014/main" id="{FA636E4B-196C-922B-890C-6917F63A065D}"/>
               </a:ext>
             </a:extLst>
           </p:cNvPr>
@@ -6200,210 +6585,17 @@
           </a:p>
         </p:txBody>
       </p:sp>
-      <p:sp>
-        <p:nvSpPr>
-          <p:cNvPr id="3" name="Espaço Reservado para Conteúdo 2">
-            <a:extLst>
-              <a:ext uri="{FF2B5EF4-FFF2-40B4-BE49-F238E27FC236}">
-                <a16:creationId xmlns:a16="http://schemas.microsoft.com/office/drawing/2014/main" id="{1FCDFA83-D279-17E3-E2CD-6E304EAF637F}"/>
-              </a:ext>
-            </a:extLst>
-          </p:cNvPr>
-          <p:cNvSpPr>
-            <a:spLocks noGrp="1"/>
-          </p:cNvSpPr>
-          <p:nvPr>
-            <p:ph idx="1"/>
-          </p:nvPr>
-        </p:nvSpPr>
-        <p:spPr>
-          <a:xfrm>
-            <a:off x="5769429" y="1825624"/>
-            <a:ext cx="6263244" cy="5032375"/>
-          </a:xfrm>
-        </p:spPr>
-        <p:txBody>
-          <a:bodyPr>
-            <a:normAutofit/>
-          </a:bodyPr>
-          <a:lstStyle/>
-          <a:p>
-            <a:r>
-              <a:rPr lang="pt-BR" dirty="0"/>
-              <a:t>Algoritmos para identificação de clusters geralmente precisam de uma </a:t>
-            </a:r>
-            <a:r>
-              <a:rPr lang="pt-BR" b="1" i="1" dirty="0">
-                <a:solidFill>
-                  <a:srgbClr val="7030A0"/>
-                </a:solidFill>
-              </a:rPr>
-              <a:t>métrica para avaliar a </a:t>
-            </a:r>
-            <a:r>
-              <a:rPr lang="pt-BR" b="1" i="1" dirty="0">
-                <a:solidFill>
-                  <a:srgbClr val="00B050"/>
-                </a:solidFill>
-              </a:rPr>
-              <a:t>distância</a:t>
-            </a:r>
-            <a:r>
-              <a:rPr lang="pt-BR" b="1" i="1" dirty="0">
-                <a:solidFill>
-                  <a:srgbClr val="7030A0"/>
-                </a:solidFill>
-              </a:rPr>
-              <a:t> entre um exemplo e o centroide</a:t>
-            </a:r>
-            <a:r>
-              <a:rPr lang="pt-BR" dirty="0"/>
-              <a:t> de um cluster. </a:t>
-            </a:r>
-          </a:p>
-          <a:p>
-            <a:r>
-              <a:rPr lang="pt-BR" dirty="0"/>
-              <a:t>Uma forma de fazer isso quando os atributos são </a:t>
-            </a:r>
-            <a:r>
-              <a:rPr lang="pt-BR" b="1" i="1" dirty="0">
-                <a:solidFill>
-                  <a:schemeClr val="accent5"/>
-                </a:solidFill>
-              </a:rPr>
-              <a:t>contínuos ou discretos </a:t>
-            </a:r>
-            <a:r>
-              <a:rPr lang="pt-BR" dirty="0"/>
-              <a:t>é usar a </a:t>
-            </a:r>
-            <a:r>
-              <a:rPr lang="pt-BR" b="1" i="1" dirty="0">
-                <a:solidFill>
-                  <a:srgbClr val="00B050"/>
-                </a:solidFill>
-              </a:rPr>
-              <a:t>distância euclidiana </a:t>
-            </a:r>
-            <a:r>
-              <a:rPr lang="pt-BR" dirty="0"/>
-              <a:t>entre os dois vetores.</a:t>
-            </a:r>
-          </a:p>
-        </p:txBody>
-      </p:sp>
-      <p:pic>
-        <p:nvPicPr>
-          <p:cNvPr id="3074" name="Picture 2" descr="Quantum machine learning: distance estimation for k-means clustering | by  Sashwat Anagolum | Towards Data Science">
-            <a:extLst>
-              <a:ext uri="{FF2B5EF4-FFF2-40B4-BE49-F238E27FC236}">
-                <a16:creationId xmlns:a16="http://schemas.microsoft.com/office/drawing/2014/main" id="{EE37D2FB-B661-E3F3-5FAE-2D65997FAF56}"/>
-              </a:ext>
-            </a:extLst>
-          </p:cNvPr>
-          <p:cNvPicPr>
-            <a:picLocks noChangeAspect="1" noChangeArrowheads="1"/>
-          </p:cNvPicPr>
-          <p:nvPr/>
-        </p:nvPicPr>
-        <p:blipFill rotWithShape="1">
-          <a:blip r:embed="rId2">
-            <a:extLst>
-              <a:ext uri="{28A0092B-C50C-407E-A947-70E740481C1C}">
-                <a14:useLocalDpi xmlns:a14="http://schemas.microsoft.com/office/drawing/2010/main" val="0"/>
-              </a:ext>
-            </a:extLst>
-          </a:blip>
-          <a:srcRect l="3750" t="11979" r="8929"/>
-          <a:stretch/>
-        </p:blipFill>
-        <p:spPr bwMode="auto">
-          <a:xfrm>
-            <a:off x="838200" y="2202317"/>
-            <a:ext cx="4487974" cy="3392940"/>
-          </a:xfrm>
-          <a:prstGeom prst="rect">
-            <a:avLst/>
-          </a:prstGeom>
-          <a:noFill/>
-          <a:extLst>
-            <a:ext uri="{909E8E84-426E-40DD-AFC4-6F175D3DCCD1}">
-              <a14:hiddenFill xmlns:a14="http://schemas.microsoft.com/office/drawing/2010/main">
-                <a:solidFill>
-                  <a:srgbClr val="FFFFFF"/>
-                </a:solidFill>
-              </a14:hiddenFill>
-            </a:ext>
-          </a:extLst>
-        </p:spPr>
-      </p:pic>
-    </p:spTree>
-    <p:extLst>
-      <p:ext uri="{BB962C8B-B14F-4D97-AF65-F5344CB8AC3E}">
-        <p14:creationId xmlns:p14="http://schemas.microsoft.com/office/powerpoint/2010/main" val="847345513"/>
-      </p:ext>
-    </p:extLst>
-  </p:cSld>
-  <p:clrMapOvr>
-    <a:masterClrMapping/>
-  </p:clrMapOvr>
-</p:sld>
-</file>
-
-<file path=ppt/slides/slide12.xml><?xml version="1.0" encoding="utf-8"?>
-<p:sld xmlns:a="http://schemas.openxmlformats.org/drawingml/2006/main" xmlns:r="http://schemas.openxmlformats.org/officeDocument/2006/relationships" xmlns:p="http://schemas.openxmlformats.org/presentationml/2006/main">
-  <p:cSld>
-    <p:spTree>
-      <p:nvGrpSpPr>
-        <p:cNvPr id="1" name=""/>
-        <p:cNvGrpSpPr/>
-        <p:nvPr/>
-      </p:nvGrpSpPr>
-      <p:grpSpPr>
-        <a:xfrm>
-          <a:off x="0" y="0"/>
-          <a:ext cx="0" cy="0"/>
-          <a:chOff x="0" y="0"/>
-          <a:chExt cx="0" cy="0"/>
-        </a:xfrm>
-      </p:grpSpPr>
-      <p:sp>
-        <p:nvSpPr>
-          <p:cNvPr id="2" name="Título 1"/>
-          <p:cNvSpPr>
-            <a:spLocks noGrp="1"/>
-          </p:cNvSpPr>
-          <p:nvPr>
-            <p:ph type="title"/>
-          </p:nvPr>
-        </p:nvSpPr>
-        <p:spPr/>
-        <p:txBody>
-          <a:bodyPr/>
-          <a:lstStyle/>
-          <a:p>
-            <a:r>
-              <a:rPr lang="en-US" dirty="0" err="1"/>
-              <a:t>Medindo</a:t>
-            </a:r>
-            <a:r>
-              <a:rPr lang="en-US" dirty="0"/>
-              <a:t> </a:t>
-            </a:r>
-            <a:r>
-              <a:rPr lang="en-US" dirty="0" err="1"/>
-              <a:t>distâncias</a:t>
-            </a:r>
-            <a:endParaRPr lang="en-US" dirty="0"/>
-          </a:p>
-        </p:txBody>
-      </p:sp>
-      <mc:AlternateContent xmlns:mc="http://schemas.openxmlformats.org/markup-compatibility/2006" xmlns:a14="http://schemas.microsoft.com/office/drawing/2010/main">
-        <mc:Choice Requires="a14">
+      <mc:AlternateContent xmlns:mc="http://schemas.openxmlformats.org/markup-compatibility/2006">
+        <mc:Choice xmlns:a14="http://schemas.microsoft.com/office/drawing/2010/main" Requires="a14">
           <p:sp>
             <p:nvSpPr>
-              <p:cNvPr id="3" name="Espaço Reservado para Conteúdo 2"/>
+              <p:cNvPr id="3" name="Espaço Reservado para Conteúdo 2">
+                <a:extLst>
+                  <a:ext uri="{FF2B5EF4-FFF2-40B4-BE49-F238E27FC236}">
+                    <a16:creationId xmlns="" xmlns:a16="http://schemas.microsoft.com/office/drawing/2014/main" id="{1FCDFA83-D279-17E3-E2CD-6E304EAF637F}"/>
+                  </a:ext>
+                </a:extLst>
+              </p:cNvPr>
               <p:cNvSpPr>
                 <a:spLocks noGrp="1"/>
               </p:cNvSpPr>
@@ -6413,20 +6605,93 @@
             </p:nvSpPr>
             <p:spPr>
               <a:xfrm>
-                <a:off x="5246914" y="1825624"/>
-                <a:ext cx="6785759" cy="5032375"/>
+                <a:off x="838200" y="1825624"/>
+                <a:ext cx="11353799" cy="5032375"/>
               </a:xfrm>
             </p:spPr>
             <p:txBody>
               <a:bodyPr>
-                <a:normAutofit lnSpcReduction="10000"/>
+                <a:normAutofit/>
               </a:bodyPr>
               <a:lstStyle/>
               <a:p>
                 <a:r>
                   <a:rPr lang="pt-BR" dirty="0"/>
-                  <a:t>Para exemplos com atributos contínuos e discretos ou uma mistura com categóricos, usamos uma equação mais geral para calcular as distâncias:</a:t>
-                </a:r>
+                  <a:t>Algoritmos para identificação de </a:t>
+                </a:r>
+                <a:r>
+                  <a:rPr lang="pt-BR" i="1" dirty="0"/>
+                  <a:t>clusters</a:t>
+                </a:r>
+                <a:r>
+                  <a:rPr lang="pt-BR" dirty="0"/>
+                  <a:t> precisam de uma </a:t>
+                </a:r>
+                <a:r>
+                  <a:rPr lang="pt-BR" b="1" dirty="0">
+                    <a:solidFill>
+                      <a:srgbClr val="7030A0"/>
+                    </a:solidFill>
+                  </a:rPr>
+                  <a:t>métrica para avaliar a </a:t>
+                </a:r>
+                <a:r>
+                  <a:rPr lang="pt-BR" b="1" dirty="0">
+                    <a:solidFill>
+                      <a:srgbClr val="00B050"/>
+                    </a:solidFill>
+                  </a:rPr>
+                  <a:t>distância</a:t>
+                </a:r>
+                <a:r>
+                  <a:rPr lang="pt-BR" b="1" dirty="0">
+                    <a:solidFill>
+                      <a:srgbClr val="7030A0"/>
+                    </a:solidFill>
+                  </a:rPr>
+                  <a:t> entre uma amostra e o centroide</a:t>
+                </a:r>
+                <a:r>
+                  <a:rPr lang="pt-BR" dirty="0"/>
+                  <a:t> de um </a:t>
+                </a:r>
+                <a:r>
+                  <a:rPr lang="pt-BR" i="1" dirty="0"/>
+                  <a:t>cluster</a:t>
+                </a:r>
+                <a:r>
+                  <a:rPr lang="pt-BR" dirty="0"/>
+                  <a:t>. </a:t>
+                </a:r>
+              </a:p>
+              <a:p>
+                <a:r>
+                  <a:rPr lang="pt-BR" dirty="0"/>
+                  <a:t>Uma forma de fazer isso é usar a </a:t>
+                </a:r>
+                <a:r>
+                  <a:rPr lang="pt-BR" b="1" dirty="0">
+                    <a:solidFill>
+                      <a:srgbClr val="00B050"/>
+                    </a:solidFill>
+                  </a:rPr>
+                  <a:t>distância euclidiana </a:t>
+                </a:r>
+                <a:r>
+                  <a:rPr lang="pt-BR" dirty="0"/>
+                  <a:t>entre os dois </a:t>
+                </a:r>
+                <a:r>
+                  <a:rPr lang="pt-BR" dirty="0" smtClean="0"/>
+                  <a:t>vetores (de atributos e do centroide)</a:t>
+                </a:r>
+                <a:endParaRPr lang="pt-BR" dirty="0"/>
+              </a:p>
+              <a:p>
+                <a:pPr marL="0" indent="0">
+                  <a:buNone/>
+                </a:pPr>
+                <a:endParaRPr lang="pt-BR" sz="600" dirty="0"/>
               </a:p>
               <a:p>
                 <a:pPr marL="0" indent="0">
@@ -6439,7 +6704,7 @@
                     </m:oMathParaPr>
                     <m:oMath xmlns:m="http://schemas.openxmlformats.org/officeDocument/2006/math">
                       <m:r>
-                        <a:rPr lang="pt-BR" sz="2600" b="0" i="1" smtClean="0">
+                        <a:rPr lang="pt-BR" i="1">
                           <a:latin typeface="Cambria Math" panose="02040503050406030204" pitchFamily="18" charset="0"/>
                         </a:rPr>
                         <m:t>𝑑</m:t>
@@ -6447,26 +6712,26 @@
                       <m:d>
                         <m:dPr>
                           <m:ctrlPr>
-                            <a:rPr lang="pt-BR" sz="2600" b="0" i="1" smtClean="0">
+                            <a:rPr lang="pt-BR" i="1">
                               <a:latin typeface="Cambria Math" panose="02040503050406030204" pitchFamily="18" charset="0"/>
                             </a:rPr>
                           </m:ctrlPr>
                         </m:dPr>
                         <m:e>
                           <m:r>
-                            <a:rPr lang="pt-BR" sz="2600" b="1" i="1" smtClean="0">
+                            <a:rPr lang="pt-BR" b="1" i="1">
                               <a:latin typeface="Cambria Math" panose="02040503050406030204" pitchFamily="18" charset="0"/>
                             </a:rPr>
                             <m:t>𝒙</m:t>
                           </m:r>
                           <m:r>
-                            <a:rPr lang="pt-BR" sz="2600" b="0" i="1" smtClean="0">
+                            <a:rPr lang="pt-BR" i="1">
                               <a:latin typeface="Cambria Math" panose="02040503050406030204" pitchFamily="18" charset="0"/>
                             </a:rPr>
                             <m:t>,</m:t>
                           </m:r>
                           <m:r>
-                            <a:rPr lang="pt-BR" sz="2600" b="1" i="1" smtClean="0">
+                            <a:rPr lang="pt-BR" b="1" i="1">
                               <a:latin typeface="Cambria Math" panose="02040503050406030204" pitchFamily="18" charset="0"/>
                             </a:rPr>
                             <m:t>𝒚</m:t>
@@ -6474,7 +6739,7 @@
                         </m:e>
                       </m:d>
                       <m:r>
-                        <a:rPr lang="pt-BR" sz="2600" b="0" i="1" smtClean="0">
+                        <a:rPr lang="pt-BR" i="1">
                           <a:latin typeface="Cambria Math" panose="02040503050406030204" pitchFamily="18" charset="0"/>
                         </a:rPr>
                         <m:t>=</m:t>
@@ -6483,7 +6748,7 @@
                         <m:radPr>
                           <m:degHide m:val="on"/>
                           <m:ctrlPr>
-                            <a:rPr lang="pt-BR" sz="2600" b="0" i="1" smtClean="0">
+                            <a:rPr lang="pt-BR" i="1">
                               <a:latin typeface="Cambria Math" panose="02040503050406030204" pitchFamily="18" charset="0"/>
                             </a:rPr>
                           </m:ctrlPr>
@@ -6494,7 +6759,7 @@
                             <m:naryPr>
                               <m:chr m:val="∑"/>
                               <m:ctrlPr>
-                                <a:rPr lang="pt-BR" sz="2600" b="0" i="1" smtClean="0">
+                                <a:rPr lang="pt-BR" i="1">
                                   <a:latin typeface="Cambria Math" panose="02040503050406030204" pitchFamily="18" charset="0"/>
                                 </a:rPr>
                               </m:ctrlPr>
@@ -6504,13 +6769,13 @@
                                 <m:rPr>
                                   <m:brk m:alnAt="23"/>
                                 </m:rPr>
-                                <a:rPr lang="pt-BR" sz="2600" b="0" i="1" smtClean="0">
+                                <a:rPr lang="pt-BR" i="1">
                                   <a:latin typeface="Cambria Math" panose="02040503050406030204" pitchFamily="18" charset="0"/>
                                 </a:rPr>
                                 <m:t>𝑖</m:t>
                               </m:r>
                               <m:r>
-                                <a:rPr lang="pt-BR" sz="2600" b="0" i="1" smtClean="0">
+                                <a:rPr lang="pt-BR" i="1">
                                   <a:latin typeface="Cambria Math" panose="02040503050406030204" pitchFamily="18" charset="0"/>
                                 </a:rPr>
                                 <m:t>=1</m:t>
@@ -6518,111 +6783,105 @@
                             </m:sub>
                             <m:sup>
                               <m:r>
-                                <a:rPr lang="pt-BR" sz="2600" b="0" i="1" smtClean="0">
+                                <a:rPr lang="pt-BR" i="1">
                                   <a:latin typeface="Cambria Math" panose="02040503050406030204" pitchFamily="18" charset="0"/>
                                 </a:rPr>
                                 <m:t>𝐾</m:t>
                               </m:r>
                             </m:sup>
                             <m:e>
-                              <m:sSub>
-                                <m:sSubPr>
+                              <m:sSup>
+                                <m:sSupPr>
                                   <m:ctrlPr>
-                                    <a:rPr lang="pt-BR" sz="2600" b="0" i="1" smtClean="0">
+                                    <a:rPr lang="pt-BR" i="1">
                                       <a:latin typeface="Cambria Math" panose="02040503050406030204" pitchFamily="18" charset="0"/>
                                     </a:rPr>
                                   </m:ctrlPr>
-                                </m:sSubPr>
+                                </m:sSupPr>
                                 <m:e>
-                                  <m:r>
-                                    <a:rPr lang="pt-BR" sz="2600" b="0" i="1" smtClean="0">
-                                      <a:latin typeface="Cambria Math" panose="02040503050406030204" pitchFamily="18" charset="0"/>
-                                    </a:rPr>
-                                    <m:t>𝑑</m:t>
-                                  </m:r>
-                                </m:e>
-                                <m:sub>
-                                  <m:r>
-                                    <a:rPr lang="pt-BR" sz="2600" b="0" i="1" smtClean="0">
-                                      <a:latin typeface="Cambria Math" panose="02040503050406030204" pitchFamily="18" charset="0"/>
-                                    </a:rPr>
-                                    <m:t>𝑎</m:t>
-                                  </m:r>
-                                </m:sub>
-                              </m:sSub>
-                              <m:d>
-                                <m:dPr>
-                                  <m:ctrlPr>
-                                    <a:rPr lang="pt-BR" sz="2600" b="0" i="1" smtClean="0">
-                                      <a:latin typeface="Cambria Math" panose="02040503050406030204" pitchFamily="18" charset="0"/>
-                                    </a:rPr>
-                                  </m:ctrlPr>
-                                </m:dPr>
-                                <m:e>
-                                  <m:sSub>
-                                    <m:sSubPr>
+                                  <m:d>
+                                    <m:dPr>
                                       <m:ctrlPr>
-                                        <a:rPr lang="pt-BR" sz="2600" b="0" i="1" smtClean="0">
+                                        <a:rPr lang="pt-BR" i="1">
                                           <a:latin typeface="Cambria Math" panose="02040503050406030204" pitchFamily="18" charset="0"/>
                                         </a:rPr>
                                       </m:ctrlPr>
-                                    </m:sSubPr>
+                                    </m:dPr>
                                     <m:e>
+                                      <m:sSub>
+                                        <m:sSubPr>
+                                          <m:ctrlPr>
+                                            <a:rPr lang="pt-BR" i="1">
+                                              <a:latin typeface="Cambria Math" panose="02040503050406030204" pitchFamily="18" charset="0"/>
+                                            </a:rPr>
+                                          </m:ctrlPr>
+                                        </m:sSubPr>
+                                        <m:e>
+                                          <m:r>
+                                            <a:rPr lang="pt-BR" i="1">
+                                              <a:latin typeface="Cambria Math" panose="02040503050406030204" pitchFamily="18" charset="0"/>
+                                            </a:rPr>
+                                            <m:t>𝑥</m:t>
+                                          </m:r>
+                                        </m:e>
+                                        <m:sub>
+                                          <m:r>
+                                            <a:rPr lang="pt-BR" i="1">
+                                              <a:latin typeface="Cambria Math" panose="02040503050406030204" pitchFamily="18" charset="0"/>
+                                            </a:rPr>
+                                            <m:t>𝑖</m:t>
+                                          </m:r>
+                                        </m:sub>
+                                      </m:sSub>
                                       <m:r>
-                                        <a:rPr lang="pt-BR" sz="2600" b="0" i="1" smtClean="0">
+                                        <a:rPr lang="pt-BR" i="1">
                                           <a:latin typeface="Cambria Math" panose="02040503050406030204" pitchFamily="18" charset="0"/>
                                         </a:rPr>
-                                        <m:t>𝑥</m:t>
+                                        <m:t>−</m:t>
                                       </m:r>
+                                      <m:sSub>
+                                        <m:sSubPr>
+                                          <m:ctrlPr>
+                                            <a:rPr lang="pt-BR" i="1">
+                                              <a:latin typeface="Cambria Math" panose="02040503050406030204" pitchFamily="18" charset="0"/>
+                                            </a:rPr>
+                                          </m:ctrlPr>
+                                        </m:sSubPr>
+                                        <m:e>
+                                          <m:r>
+                                            <a:rPr lang="pt-BR" i="1">
+                                              <a:latin typeface="Cambria Math" panose="02040503050406030204" pitchFamily="18" charset="0"/>
+                                            </a:rPr>
+                                            <m:t>𝑦</m:t>
+                                          </m:r>
+                                        </m:e>
+                                        <m:sub>
+                                          <m:r>
+                                            <a:rPr lang="pt-BR" i="1">
+                                              <a:latin typeface="Cambria Math" panose="02040503050406030204" pitchFamily="18" charset="0"/>
+                                            </a:rPr>
+                                            <m:t>𝑖</m:t>
+                                          </m:r>
+                                        </m:sub>
+                                      </m:sSub>
                                     </m:e>
-                                    <m:sub>
-                                      <m:r>
-                                        <a:rPr lang="pt-BR" sz="2600" b="0" i="1" smtClean="0">
-                                          <a:latin typeface="Cambria Math" panose="02040503050406030204" pitchFamily="18" charset="0"/>
-                                        </a:rPr>
-                                        <m:t>𝑖</m:t>
-                                      </m:r>
-                                    </m:sub>
-                                  </m:sSub>
+                                  </m:d>
+                                </m:e>
+                                <m:sup>
                                   <m:r>
-                                    <a:rPr lang="pt-BR" sz="2600" b="0" i="1" smtClean="0">
+                                    <a:rPr lang="pt-BR" i="1">
                                       <a:latin typeface="Cambria Math" panose="02040503050406030204" pitchFamily="18" charset="0"/>
                                     </a:rPr>
-                                    <m:t>,</m:t>
+                                    <m:t>2</m:t>
                                   </m:r>
-                                  <m:sSub>
-                                    <m:sSubPr>
-                                      <m:ctrlPr>
-                                        <a:rPr lang="pt-BR" sz="2600" i="1" smtClean="0">
-                                          <a:latin typeface="Cambria Math" panose="02040503050406030204" pitchFamily="18" charset="0"/>
-                                        </a:rPr>
-                                      </m:ctrlPr>
-                                    </m:sSubPr>
-                                    <m:e>
-                                      <m:r>
-                                        <a:rPr lang="pt-BR" sz="2600" b="0" i="1" smtClean="0">
-                                          <a:latin typeface="Cambria Math" panose="02040503050406030204" pitchFamily="18" charset="0"/>
-                                        </a:rPr>
-                                        <m:t>𝑦</m:t>
-                                      </m:r>
-                                    </m:e>
-                                    <m:sub>
-                                      <m:r>
-                                        <a:rPr lang="pt-BR" sz="2600" b="0" i="1" smtClean="0">
-                                          <a:latin typeface="Cambria Math" panose="02040503050406030204" pitchFamily="18" charset="0"/>
-                                        </a:rPr>
-                                        <m:t>𝑖</m:t>
-                                      </m:r>
-                                    </m:sub>
-                                  </m:sSub>
-                                </m:e>
-                              </m:d>
+                                </m:sup>
+                              </m:sSup>
                             </m:e>
                           </m:nary>
                         </m:e>
                       </m:rad>
                       <m:r>
-                        <a:rPr lang="pt-BR" sz="2600" b="0" i="1" smtClean="0">
+                        <a:rPr lang="pt-BR" i="1">
                           <a:latin typeface="Cambria Math" panose="02040503050406030204" pitchFamily="18" charset="0"/>
                         </a:rPr>
                         <m:t>,</m:t>
@@ -6630,7 +6889,7 @@
                     </m:oMath>
                   </m:oMathPara>
                 </a14:m>
-                <a:endParaRPr lang="pt-BR" sz="2600" dirty="0"/>
+                <a:endParaRPr lang="pt-BR" dirty="0"/>
               </a:p>
               <a:p>
                 <a:pPr marL="0" indent="0">
@@ -6652,7 +6911,7 @@
                 </a14:m>
                 <a:r>
                   <a:rPr lang="pt-BR" dirty="0"/>
-                  <a:t> é o número de atributos, </a:t>
+                  <a:t> é o número de atributos e </a:t>
                 </a:r>
                 <a14:m>
                   <m:oMath xmlns:m="http://schemas.openxmlformats.org/officeDocument/2006/math">
@@ -6665,317 +6924,6 @@
                         </m:ctrlPr>
                       </m:sSubPr>
                       <m:e>
-                        <m:r>
-                          <a:rPr lang="pt-BR" i="1">
-                            <a:latin typeface="Cambria Math" panose="02040503050406030204" pitchFamily="18" charset="0"/>
-                          </a:rPr>
-                          <m:t>𝑑</m:t>
-                        </m:r>
-                      </m:e>
-                      <m:sub>
-                        <m:r>
-                          <a:rPr lang="pt-BR" i="1">
-                            <a:latin typeface="Cambria Math" panose="02040503050406030204" pitchFamily="18" charset="0"/>
-                          </a:rPr>
-                          <m:t>𝑎</m:t>
-                        </m:r>
-                      </m:sub>
-                    </m:sSub>
-                    <m:d>
-                      <m:dPr>
-                        <m:ctrlPr>
-                          <a:rPr lang="pt-BR" i="1">
-                            <a:latin typeface="Cambria Math" panose="02040503050406030204" pitchFamily="18" charset="0"/>
-                          </a:rPr>
-                        </m:ctrlPr>
-                      </m:dPr>
-                      <m:e>
-                        <m:sSub>
-                          <m:sSubPr>
-                            <m:ctrlPr>
-                              <a:rPr lang="pt-BR" i="1">
-                                <a:latin typeface="Cambria Math" panose="02040503050406030204" pitchFamily="18" charset="0"/>
-                              </a:rPr>
-                            </m:ctrlPr>
-                          </m:sSubPr>
-                          <m:e>
-                            <m:r>
-                              <a:rPr lang="pt-BR" i="1">
-                                <a:latin typeface="Cambria Math" panose="02040503050406030204" pitchFamily="18" charset="0"/>
-                              </a:rPr>
-                              <m:t>𝑥</m:t>
-                            </m:r>
-                          </m:e>
-                          <m:sub>
-                            <m:r>
-                              <a:rPr lang="pt-BR" i="1">
-                                <a:latin typeface="Cambria Math" panose="02040503050406030204" pitchFamily="18" charset="0"/>
-                              </a:rPr>
-                              <m:t>𝑖</m:t>
-                            </m:r>
-                          </m:sub>
-                        </m:sSub>
-                        <m:r>
-                          <a:rPr lang="pt-BR" i="1">
-                            <a:latin typeface="Cambria Math" panose="02040503050406030204" pitchFamily="18" charset="0"/>
-                          </a:rPr>
-                          <m:t>,</m:t>
-                        </m:r>
-                        <m:sSub>
-                          <m:sSubPr>
-                            <m:ctrlPr>
-                              <a:rPr lang="pt-BR" i="1">
-                                <a:latin typeface="Cambria Math" panose="02040503050406030204" pitchFamily="18" charset="0"/>
-                              </a:rPr>
-                            </m:ctrlPr>
-                          </m:sSubPr>
-                          <m:e>
-                            <m:r>
-                              <a:rPr lang="pt-BR" i="1">
-                                <a:latin typeface="Cambria Math" panose="02040503050406030204" pitchFamily="18" charset="0"/>
-                              </a:rPr>
-                              <m:t>𝑦</m:t>
-                            </m:r>
-                          </m:e>
-                          <m:sub>
-                            <m:r>
-                              <a:rPr lang="pt-BR" i="1">
-                                <a:latin typeface="Cambria Math" panose="02040503050406030204" pitchFamily="18" charset="0"/>
-                              </a:rPr>
-                              <m:t>𝑖</m:t>
-                            </m:r>
-                          </m:sub>
-                        </m:sSub>
-                      </m:e>
-                    </m:d>
-                    <m:r>
-                      <a:rPr lang="pt-BR" b="0" i="1" smtClean="0">
-                        <a:latin typeface="Cambria Math" panose="02040503050406030204" pitchFamily="18" charset="0"/>
-                      </a:rPr>
-                      <m:t>=</m:t>
-                    </m:r>
-                    <m:sSup>
-                      <m:sSupPr>
-                        <m:ctrlPr>
-                          <a:rPr lang="pt-BR" b="0" i="1" smtClean="0">
-                            <a:latin typeface="Cambria Math" panose="02040503050406030204" pitchFamily="18" charset="0"/>
-                          </a:rPr>
-                        </m:ctrlPr>
-                      </m:sSupPr>
-                      <m:e>
-                        <m:d>
-                          <m:dPr>
-                            <m:ctrlPr>
-                              <a:rPr lang="pt-BR" b="0" i="1" smtClean="0">
-                                <a:latin typeface="Cambria Math" panose="02040503050406030204" pitchFamily="18" charset="0"/>
-                              </a:rPr>
-                            </m:ctrlPr>
-                          </m:dPr>
-                          <m:e>
-                            <m:sSub>
-                              <m:sSubPr>
-                                <m:ctrlPr>
-                                  <a:rPr lang="pt-BR" i="1">
-                                    <a:latin typeface="Cambria Math" panose="02040503050406030204" pitchFamily="18" charset="0"/>
-                                  </a:rPr>
-                                </m:ctrlPr>
-                              </m:sSubPr>
-                              <m:e>
-                                <m:r>
-                                  <a:rPr lang="pt-BR" i="1">
-                                    <a:latin typeface="Cambria Math" panose="02040503050406030204" pitchFamily="18" charset="0"/>
-                                  </a:rPr>
-                                  <m:t>𝑥</m:t>
-                                </m:r>
-                              </m:e>
-                              <m:sub>
-                                <m:r>
-                                  <a:rPr lang="pt-BR" i="1">
-                                    <a:latin typeface="Cambria Math" panose="02040503050406030204" pitchFamily="18" charset="0"/>
-                                  </a:rPr>
-                                  <m:t>𝑖</m:t>
-                                </m:r>
-                              </m:sub>
-                            </m:sSub>
-                            <m:r>
-                              <a:rPr lang="pt-BR" b="0" i="1" smtClean="0">
-                                <a:latin typeface="Cambria Math" panose="02040503050406030204" pitchFamily="18" charset="0"/>
-                              </a:rPr>
-                              <m:t>−</m:t>
-                            </m:r>
-                            <m:sSub>
-                              <m:sSubPr>
-                                <m:ctrlPr>
-                                  <a:rPr lang="pt-BR" i="1">
-                                    <a:latin typeface="Cambria Math" panose="02040503050406030204" pitchFamily="18" charset="0"/>
-                                  </a:rPr>
-                                </m:ctrlPr>
-                              </m:sSubPr>
-                              <m:e>
-                                <m:r>
-                                  <a:rPr lang="pt-BR" i="1">
-                                    <a:latin typeface="Cambria Math" panose="02040503050406030204" pitchFamily="18" charset="0"/>
-                                  </a:rPr>
-                                  <m:t>𝑦</m:t>
-                                </m:r>
-                              </m:e>
-                              <m:sub>
-                                <m:r>
-                                  <a:rPr lang="pt-BR" i="1">
-                                    <a:latin typeface="Cambria Math" panose="02040503050406030204" pitchFamily="18" charset="0"/>
-                                  </a:rPr>
-                                  <m:t>𝑖</m:t>
-                                </m:r>
-                              </m:sub>
-                            </m:sSub>
-                          </m:e>
-                        </m:d>
-                      </m:e>
-                      <m:sup>
-                        <m:r>
-                          <a:rPr lang="pt-BR" b="0" i="1" smtClean="0">
-                            <a:latin typeface="Cambria Math" panose="02040503050406030204" pitchFamily="18" charset="0"/>
-                          </a:rPr>
-                          <m:t>2</m:t>
-                        </m:r>
-                      </m:sup>
-                    </m:sSup>
-                  </m:oMath>
-                </a14:m>
-                <a:r>
-                  <a:rPr lang="pt-BR" dirty="0"/>
-                  <a:t> para atributos contínuos e discretos e </a:t>
-                </a:r>
-                <a14:m>
-                  <m:oMath xmlns:m="http://schemas.openxmlformats.org/officeDocument/2006/math">
-                    <m:sSub>
-                      <m:sSubPr>
-                        <m:ctrlPr>
-                          <a:rPr lang="pt-BR" i="1">
-                            <a:latin typeface="Cambria Math" panose="02040503050406030204" pitchFamily="18" charset="0"/>
-                          </a:rPr>
-                        </m:ctrlPr>
-                      </m:sSubPr>
-                      <m:e>
-                        <m:r>
-                          <a:rPr lang="pt-BR" i="1">
-                            <a:latin typeface="Cambria Math" panose="02040503050406030204" pitchFamily="18" charset="0"/>
-                          </a:rPr>
-                          <m:t>𝑑</m:t>
-                        </m:r>
-                      </m:e>
-                      <m:sub>
-                        <m:r>
-                          <a:rPr lang="pt-BR" i="1">
-                            <a:latin typeface="Cambria Math" panose="02040503050406030204" pitchFamily="18" charset="0"/>
-                          </a:rPr>
-                          <m:t>𝑎</m:t>
-                        </m:r>
-                      </m:sub>
-                    </m:sSub>
-                    <m:d>
-                      <m:dPr>
-                        <m:ctrlPr>
-                          <a:rPr lang="pt-BR" i="1">
-                            <a:latin typeface="Cambria Math" panose="02040503050406030204" pitchFamily="18" charset="0"/>
-                          </a:rPr>
-                        </m:ctrlPr>
-                      </m:dPr>
-                      <m:e>
-                        <m:sSub>
-                          <m:sSubPr>
-                            <m:ctrlPr>
-                              <a:rPr lang="pt-BR" i="1">
-                                <a:latin typeface="Cambria Math" panose="02040503050406030204" pitchFamily="18" charset="0"/>
-                              </a:rPr>
-                            </m:ctrlPr>
-                          </m:sSubPr>
-                          <m:e>
-                            <m:r>
-                              <a:rPr lang="pt-BR" i="1">
-                                <a:latin typeface="Cambria Math" panose="02040503050406030204" pitchFamily="18" charset="0"/>
-                              </a:rPr>
-                              <m:t>𝑥</m:t>
-                            </m:r>
-                          </m:e>
-                          <m:sub>
-                            <m:r>
-                              <a:rPr lang="pt-BR" i="1">
-                                <a:latin typeface="Cambria Math" panose="02040503050406030204" pitchFamily="18" charset="0"/>
-                              </a:rPr>
-                              <m:t>𝑖</m:t>
-                            </m:r>
-                          </m:sub>
-                        </m:sSub>
-                        <m:r>
-                          <a:rPr lang="pt-BR" i="1">
-                            <a:latin typeface="Cambria Math" panose="02040503050406030204" pitchFamily="18" charset="0"/>
-                          </a:rPr>
-                          <m:t>,</m:t>
-                        </m:r>
-                        <m:sSub>
-                          <m:sSubPr>
-                            <m:ctrlPr>
-                              <a:rPr lang="pt-BR" i="1">
-                                <a:latin typeface="Cambria Math" panose="02040503050406030204" pitchFamily="18" charset="0"/>
-                              </a:rPr>
-                            </m:ctrlPr>
-                          </m:sSubPr>
-                          <m:e>
-                            <m:r>
-                              <a:rPr lang="pt-BR" i="1">
-                                <a:latin typeface="Cambria Math" panose="02040503050406030204" pitchFamily="18" charset="0"/>
-                              </a:rPr>
-                              <m:t>𝑦</m:t>
-                            </m:r>
-                          </m:e>
-                          <m:sub>
-                            <m:r>
-                              <a:rPr lang="pt-BR" i="1">
-                                <a:latin typeface="Cambria Math" panose="02040503050406030204" pitchFamily="18" charset="0"/>
-                              </a:rPr>
-                              <m:t>𝑖</m:t>
-                            </m:r>
-                          </m:sub>
-                        </m:sSub>
-                      </m:e>
-                    </m:d>
-                    <m:r>
-                      <a:rPr lang="pt-BR" i="1">
-                        <a:latin typeface="Cambria Math" panose="02040503050406030204" pitchFamily="18" charset="0"/>
-                      </a:rPr>
-                      <m:t>=</m:t>
-                    </m:r>
-                    <m:r>
-                      <a:rPr lang="pt-BR" b="0" i="1" smtClean="0">
-                        <a:latin typeface="Cambria Math" panose="02040503050406030204" pitchFamily="18" charset="0"/>
-                      </a:rPr>
-                      <m:t>0 </m:t>
-                    </m:r>
-                    <m:r>
-                      <m:rPr>
-                        <m:sty m:val="p"/>
-                      </m:rPr>
-                      <a:rPr lang="pt-BR" b="0" i="0" smtClean="0">
-                        <a:latin typeface="Cambria Math" panose="02040503050406030204" pitchFamily="18" charset="0"/>
-                      </a:rPr>
-                      <m:t>se</m:t>
-                    </m:r>
-                    <m:sSub>
-                      <m:sSubPr>
-                        <m:ctrlPr>
-                          <a:rPr lang="pt-BR" i="1" smtClean="0">
-                            <a:latin typeface="Cambria Math" panose="02040503050406030204" pitchFamily="18" charset="0"/>
-                          </a:rPr>
-                        </m:ctrlPr>
-                      </m:sSubPr>
-                      <m:e>
-                        <m:r>
-                          <a:rPr lang="pt-BR" b="0" i="1" smtClean="0">
-                            <a:latin typeface="Cambria Math" panose="02040503050406030204" pitchFamily="18" charset="0"/>
-                          </a:rPr>
-                          <m:t> </m:t>
-                        </m:r>
                         <m:r>
                           <a:rPr lang="pt-BR" i="1">
                             <a:latin typeface="Cambria Math" panose="02040503050406030204" pitchFamily="18" charset="0"/>
@@ -6992,13 +6940,14 @@
                         </m:r>
                       </m:sub>
                     </m:sSub>
-                    <m:r>
-                      <a:rPr lang="pt-BR" i="1">
-                        <a:latin typeface="Cambria Math" panose="02040503050406030204" pitchFamily="18" charset="0"/>
-                        <a:ea typeface="Cambria Math" panose="02040503050406030204" pitchFamily="18" charset="0"/>
-                      </a:rPr>
-                      <m:t>=</m:t>
-                    </m:r>
+                  </m:oMath>
+                </a14:m>
+                <a:r>
+                  <a:rPr lang="pt-BR" dirty="0"/>
+                  <a:t> e </a:t>
+                </a:r>
+                <a14:m>
+                  <m:oMath xmlns:m="http://schemas.openxmlformats.org/officeDocument/2006/math">
                     <m:sSub>
                       <m:sSubPr>
                         <m:ctrlPr>
@@ -7028,201 +6977,41 @@
                 </a14:m>
                 <a:r>
                   <a:rPr lang="pt-BR" dirty="0"/>
-                  <a:t> e </a:t>
-                </a:r>
-                <a14:m>
-                  <m:oMath xmlns:m="http://schemas.openxmlformats.org/officeDocument/2006/math">
-                    <m:sSub>
-                      <m:sSubPr>
-                        <m:ctrlPr>
-                          <a:rPr lang="pt-BR" i="1">
-                            <a:latin typeface="Cambria Math" panose="02040503050406030204" pitchFamily="18" charset="0"/>
-                          </a:rPr>
-                        </m:ctrlPr>
-                      </m:sSubPr>
-                      <m:e>
-                        <m:r>
-                          <a:rPr lang="pt-BR" i="1">
-                            <a:latin typeface="Cambria Math" panose="02040503050406030204" pitchFamily="18" charset="0"/>
-                          </a:rPr>
-                          <m:t>𝑑</m:t>
-                        </m:r>
-                      </m:e>
-                      <m:sub>
-                        <m:r>
-                          <a:rPr lang="pt-BR" i="1">
-                            <a:latin typeface="Cambria Math" panose="02040503050406030204" pitchFamily="18" charset="0"/>
-                          </a:rPr>
-                          <m:t>𝑎</m:t>
-                        </m:r>
-                      </m:sub>
-                    </m:sSub>
-                    <m:d>
-                      <m:dPr>
-                        <m:ctrlPr>
-                          <a:rPr lang="pt-BR" i="1">
-                            <a:latin typeface="Cambria Math" panose="02040503050406030204" pitchFamily="18" charset="0"/>
-                          </a:rPr>
-                        </m:ctrlPr>
-                      </m:dPr>
-                      <m:e>
-                        <m:sSub>
-                          <m:sSubPr>
-                            <m:ctrlPr>
-                              <a:rPr lang="pt-BR" i="1">
-                                <a:latin typeface="Cambria Math" panose="02040503050406030204" pitchFamily="18" charset="0"/>
-                              </a:rPr>
-                            </m:ctrlPr>
-                          </m:sSubPr>
-                          <m:e>
-                            <m:r>
-                              <a:rPr lang="pt-BR" i="1">
-                                <a:latin typeface="Cambria Math" panose="02040503050406030204" pitchFamily="18" charset="0"/>
-                              </a:rPr>
-                              <m:t>𝑥</m:t>
-                            </m:r>
-                          </m:e>
-                          <m:sub>
-                            <m:r>
-                              <a:rPr lang="pt-BR" i="1">
-                                <a:latin typeface="Cambria Math" panose="02040503050406030204" pitchFamily="18" charset="0"/>
-                              </a:rPr>
-                              <m:t>𝑖</m:t>
-                            </m:r>
-                          </m:sub>
-                        </m:sSub>
-                        <m:r>
-                          <a:rPr lang="pt-BR" i="1">
-                            <a:latin typeface="Cambria Math" panose="02040503050406030204" pitchFamily="18" charset="0"/>
-                          </a:rPr>
-                          <m:t>,</m:t>
-                        </m:r>
-                        <m:sSub>
-                          <m:sSubPr>
-                            <m:ctrlPr>
-                              <a:rPr lang="pt-BR" i="1">
-                                <a:latin typeface="Cambria Math" panose="02040503050406030204" pitchFamily="18" charset="0"/>
-                              </a:rPr>
-                            </m:ctrlPr>
-                          </m:sSubPr>
-                          <m:e>
-                            <m:r>
-                              <a:rPr lang="pt-BR" i="1">
-                                <a:latin typeface="Cambria Math" panose="02040503050406030204" pitchFamily="18" charset="0"/>
-                              </a:rPr>
-                              <m:t>𝑦</m:t>
-                            </m:r>
-                          </m:e>
-                          <m:sub>
-                            <m:r>
-                              <a:rPr lang="pt-BR" i="1">
-                                <a:latin typeface="Cambria Math" panose="02040503050406030204" pitchFamily="18" charset="0"/>
-                              </a:rPr>
-                              <m:t>𝑖</m:t>
-                            </m:r>
-                          </m:sub>
-                        </m:sSub>
-                      </m:e>
-                    </m:d>
-                    <m:r>
-                      <a:rPr lang="pt-BR" i="1">
-                        <a:latin typeface="Cambria Math" panose="02040503050406030204" pitchFamily="18" charset="0"/>
-                      </a:rPr>
-                      <m:t>=</m:t>
-                    </m:r>
-                    <m:r>
-                      <a:rPr lang="pt-BR" b="0" i="1" smtClean="0">
-                        <a:latin typeface="Cambria Math" panose="02040503050406030204" pitchFamily="18" charset="0"/>
-                      </a:rPr>
-                      <m:t>1</m:t>
-                    </m:r>
-                    <m:r>
-                      <a:rPr lang="pt-BR" i="1">
-                        <a:latin typeface="Cambria Math" panose="02040503050406030204" pitchFamily="18" charset="0"/>
-                      </a:rPr>
-                      <m:t> </m:t>
-                    </m:r>
-                    <m:r>
-                      <m:rPr>
-                        <m:sty m:val="p"/>
-                      </m:rPr>
-                      <a:rPr lang="pt-BR">
-                        <a:latin typeface="Cambria Math" panose="02040503050406030204" pitchFamily="18" charset="0"/>
-                      </a:rPr>
-                      <m:t>se</m:t>
-                    </m:r>
-                    <m:sSub>
-                      <m:sSubPr>
-                        <m:ctrlPr>
-                          <a:rPr lang="pt-BR" i="1">
-                            <a:latin typeface="Cambria Math" panose="02040503050406030204" pitchFamily="18" charset="0"/>
-                          </a:rPr>
-                        </m:ctrlPr>
-                      </m:sSubPr>
-                      <m:e>
-                        <m:r>
-                          <a:rPr lang="pt-BR" i="1">
-                            <a:latin typeface="Cambria Math" panose="02040503050406030204" pitchFamily="18" charset="0"/>
-                          </a:rPr>
-                          <m:t> </m:t>
-                        </m:r>
-                        <m:r>
-                          <a:rPr lang="pt-BR" i="1">
-                            <a:latin typeface="Cambria Math" panose="02040503050406030204" pitchFamily="18" charset="0"/>
-                          </a:rPr>
-                          <m:t>𝑥</m:t>
-                        </m:r>
-                      </m:e>
-                      <m:sub>
-                        <m:r>
-                          <a:rPr lang="pt-BR" i="1">
-                            <a:latin typeface="Cambria Math" panose="02040503050406030204" pitchFamily="18" charset="0"/>
-                          </a:rPr>
-                          <m:t>𝑖</m:t>
-                        </m:r>
-                      </m:sub>
-                    </m:sSub>
-                    <m:r>
-                      <a:rPr lang="pt-BR" i="1" smtClean="0">
-                        <a:latin typeface="Cambria Math" panose="02040503050406030204" pitchFamily="18" charset="0"/>
-                        <a:ea typeface="Cambria Math" panose="02040503050406030204" pitchFamily="18" charset="0"/>
-                      </a:rPr>
-                      <m:t>≠</m:t>
-                    </m:r>
-                    <m:sSub>
-                      <m:sSubPr>
-                        <m:ctrlPr>
-                          <a:rPr lang="pt-BR" i="1" smtClean="0">
-                            <a:latin typeface="Cambria Math" panose="02040503050406030204" pitchFamily="18" charset="0"/>
-                          </a:rPr>
-                        </m:ctrlPr>
-                      </m:sSubPr>
-                      <m:e>
-                        <m:r>
-                          <a:rPr lang="pt-BR" i="1">
-                            <a:latin typeface="Cambria Math" panose="02040503050406030204" pitchFamily="18" charset="0"/>
-                          </a:rPr>
-                          <m:t>𝑦</m:t>
-                        </m:r>
-                      </m:e>
-                      <m:sub>
-                        <m:r>
-                          <a:rPr lang="pt-BR" i="1">
-                            <a:latin typeface="Cambria Math" panose="02040503050406030204" pitchFamily="18" charset="0"/>
-                          </a:rPr>
-                          <m:t>𝑖</m:t>
-                        </m:r>
-                      </m:sub>
-                    </m:sSub>
-                  </m:oMath>
-                </a14:m>
+                  <a:t> são os </a:t>
+                </a:r>
+                <a:r>
+                  <a:rPr lang="pt-BR" dirty="0" smtClean="0"/>
+                  <a:t>elementos </a:t>
+                </a:r>
                 <a:r>
                   <a:rPr lang="pt-BR" dirty="0"/>
-                  <a:t> para atributos categóricos, mas transformados em </a:t>
+                  <a:t>dos </a:t>
+                </a:r>
+                <a:r>
+                  <a:rPr lang="pt-BR" dirty="0" smtClean="0"/>
+                  <a:t>vetores.</a:t>
+                </a:r>
+              </a:p>
+              <a:p>
+                <a:r>
+                  <a:rPr lang="pt-BR" dirty="0" smtClean="0"/>
+                  <a:t>Outras </a:t>
+                </a:r>
+                <a:r>
+                  <a:rPr lang="pt-BR" dirty="0"/>
+                  <a:t>medidas de distância: </a:t>
                 </a:r>
                 <a:r>
                   <a:rPr lang="pt-BR" dirty="0" err="1"/>
-                  <a:t>numércos</a:t>
+                  <a:t>Minkowski</a:t>
+                </a:r>
+                <a:r>
+                  <a:rPr lang="pt-BR" dirty="0"/>
+                  <a:t>, cosseno, Manhattan e </a:t>
+                </a:r>
+                <a:r>
+                  <a:rPr lang="pt-BR" dirty="0" err="1"/>
+                  <a:t>Mahalanobis</a:t>
                 </a:r>
                 <a:r>
                   <a:rPr lang="pt-BR" dirty="0"/>
@@ -7232,10 +7021,16 @@
             </p:txBody>
           </p:sp>
         </mc:Choice>
-        <mc:Fallback xmlns="">
+        <mc:Fallback>
           <p:sp>
             <p:nvSpPr>
-              <p:cNvPr id="3" name="Espaço Reservado para Conteúdo 2"/>
+              <p:cNvPr id="3" name="Espaço Reservado para Conteúdo 2">
+                <a:extLst>
+                  <a:ext uri="{FF2B5EF4-FFF2-40B4-BE49-F238E27FC236}">
+                    <a16:creationId xmlns="" xmlns:a16="http://schemas.microsoft.com/office/drawing/2014/main" xmlns:a14="http://schemas.microsoft.com/office/drawing/2010/main" id="{1FCDFA83-D279-17E3-E2CD-6E304EAF637F}"/>
+                  </a:ext>
+                </a:extLst>
+              </p:cNvPr>
               <p:cNvSpPr>
                 <a:spLocks noGrp="1" noRot="1" noChangeAspect="1" noMove="1" noResize="1" noEditPoints="1" noAdjustHandles="1" noChangeArrowheads="1" noChangeShapeType="1" noTextEdit="1"/>
               </p:cNvSpPr>
@@ -7245,13 +7040,13 @@
             </p:nvSpPr>
             <p:spPr>
               <a:xfrm>
-                <a:off x="5246914" y="1825624"/>
-                <a:ext cx="6785759" cy="5032375"/>
+                <a:off x="838200" y="1825624"/>
+                <a:ext cx="11353799" cy="5032375"/>
               </a:xfrm>
-              <a:blipFill>
+              <a:blipFill rotWithShape="0">
                 <a:blip r:embed="rId2"/>
                 <a:stretch>
-                  <a:fillRect l="-1887" t="-2663" r="-1797" b="-3269"/>
+                  <a:fillRect l="-1128" t="-1937" r="-376" b="-121"/>
                 </a:stretch>
               </a:blipFill>
             </p:spPr>
@@ -7270,55 +7065,10 @@
           </p:sp>
         </mc:Fallback>
       </mc:AlternateContent>
-      <p:pic>
-        <p:nvPicPr>
-          <p:cNvPr id="4" name="Picture 2" descr="Quantum machine learning: distance estimation for k-means clustering | by  Sashwat Anagolum | Towards Data Science">
-            <a:extLst>
-              <a:ext uri="{FF2B5EF4-FFF2-40B4-BE49-F238E27FC236}">
-                <a16:creationId xmlns:a16="http://schemas.microsoft.com/office/drawing/2014/main" id="{22ACC8D3-8B80-BBE4-31ED-C31E6E11B17D}"/>
-              </a:ext>
-            </a:extLst>
-          </p:cNvPr>
-          <p:cNvPicPr>
-            <a:picLocks noChangeAspect="1" noChangeArrowheads="1"/>
-          </p:cNvPicPr>
-          <p:nvPr/>
-        </p:nvPicPr>
-        <p:blipFill rotWithShape="1">
-          <a:blip r:embed="rId3">
-            <a:extLst>
-              <a:ext uri="{28A0092B-C50C-407E-A947-70E740481C1C}">
-                <a14:useLocalDpi xmlns:a14="http://schemas.microsoft.com/office/drawing/2010/main" val="0"/>
-              </a:ext>
-            </a:extLst>
-          </a:blip>
-          <a:srcRect l="3750" t="11979" r="8929"/>
-          <a:stretch/>
-        </p:blipFill>
-        <p:spPr bwMode="auto">
-          <a:xfrm>
-            <a:off x="511629" y="2202317"/>
-            <a:ext cx="4487974" cy="3392940"/>
-          </a:xfrm>
-          <a:prstGeom prst="rect">
-            <a:avLst/>
-          </a:prstGeom>
-          <a:noFill/>
-          <a:extLst>
-            <a:ext uri="{909E8E84-426E-40DD-AFC4-6F175D3DCCD1}">
-              <a14:hiddenFill xmlns:a14="http://schemas.microsoft.com/office/drawing/2010/main">
-                <a:solidFill>
-                  <a:srgbClr val="FFFFFF"/>
-                </a:solidFill>
-              </a14:hiddenFill>
-            </a:ext>
-          </a:extLst>
-        </p:spPr>
-      </p:pic>
     </p:spTree>
     <p:extLst>
       <p:ext uri="{BB962C8B-B14F-4D97-AF65-F5344CB8AC3E}">
-        <p14:creationId xmlns:p14="http://schemas.microsoft.com/office/powerpoint/2010/main" val="2253238490"/>
+        <p14:creationId xmlns:p14="http://schemas.microsoft.com/office/powerpoint/2010/main" val="2553985745"/>
       </p:ext>
     </p:extLst>
   </p:cSld>
@@ -7362,14 +7112,22 @@
           <a:p>
             <a:r>
               <a:rPr lang="pt-BR" dirty="0"/>
-              <a:t>A qual cluster um exemplo deve pertencer?</a:t>
+              <a:t>A qual </a:t>
+            </a:r>
+            <a:r>
+              <a:rPr lang="pt-BR" i="1" dirty="0"/>
+              <a:t>cluster</a:t>
+            </a:r>
+            <a:r>
+              <a:rPr lang="pt-BR" dirty="0"/>
+              <a:t> um exemplo deve pertencer?</a:t>
             </a:r>
             <a:endParaRPr lang="en-US" dirty="0"/>
           </a:p>
         </p:txBody>
       </p:sp>
-      <mc:AlternateContent xmlns:mc="http://schemas.openxmlformats.org/markup-compatibility/2006" xmlns:a14="http://schemas.microsoft.com/office/drawing/2010/main">
-        <mc:Choice Requires="a14">
+      <mc:AlternateContent xmlns:mc="http://schemas.openxmlformats.org/markup-compatibility/2006">
+        <mc:Choice xmlns:a14="http://schemas.microsoft.com/office/drawing/2010/main" Requires="a14">
           <p:sp>
             <p:nvSpPr>
               <p:cNvPr id="3" name="Espaço Reservado para Conteúdo 2"/>
@@ -7383,7 +7141,7 @@
             <p:spPr>
               <a:xfrm>
                 <a:off x="838199" y="1825624"/>
-                <a:ext cx="10924309" cy="4710257"/>
+                <a:ext cx="11353801" cy="5032376"/>
               </a:xfrm>
             </p:spPr>
             <p:txBody>
@@ -7393,7 +7151,7 @@
               <a:lstStyle/>
               <a:p>
                 <a:r>
-                  <a:rPr lang="pt-BR" dirty="0"/>
+                  <a:rPr lang="pt-BR" dirty="0" smtClean="0"/>
                   <a:t>Vamos supor que existam </a:t>
                 </a:r>
                 <a14:m>
@@ -7408,7 +7166,15 @@
                 </a14:m>
                 <a:r>
                   <a:rPr lang="pt-BR" dirty="0"/>
-                  <a:t> clusters cujos centroides são denotados pelo vetor, </a:t>
+                  <a:t> </a:t>
+                </a:r>
+                <a:r>
+                  <a:rPr lang="pt-BR" i="1" dirty="0"/>
+                  <a:t>clusters</a:t>
+                </a:r>
+                <a:r>
+                  <a:rPr lang="pt-BR" dirty="0"/>
+                  <a:t> cujos centroides são denotados pelo vetor, </a:t>
                 </a:r>
                 <a14:m>
                   <m:oMath xmlns:m="http://schemas.openxmlformats.org/officeDocument/2006/math">
@@ -7500,7 +7266,7 @@
               <a:p>
                 <a:r>
                   <a:rPr lang="pt-BR" dirty="0"/>
-                  <a:t>Um exemplo </a:t>
+                  <a:t>Uma amostra </a:t>
                 </a:r>
                 <a14:m>
                   <m:oMath xmlns:m="http://schemas.openxmlformats.org/officeDocument/2006/math">
@@ -7650,7 +7416,11 @@
                 </a14:m>
                 <a:r>
                   <a:rPr lang="pt-BR" dirty="0"/>
-                  <a:t>é a menor dessas distâncias, então, é natural colocarmos </a:t>
+                  <a:t>é a menor dessas distâncias, então, </a:t>
+                </a:r>
+                <a:r>
+                  <a:rPr lang="pt-BR" dirty="0" smtClean="0"/>
+                  <a:t>definimos </a:t>
                 </a:r>
                 <a14:m>
                   <m:oMath xmlns:m="http://schemas.openxmlformats.org/officeDocument/2006/math">
@@ -7711,13 +7481,41 @@
                 </a14:m>
                 <a:r>
                   <a:rPr lang="pt-BR" dirty="0"/>
-                  <a:t>-ésimo cluster.</a:t>
+                  <a:t>-ésimo </a:t>
+                </a:r>
+                <a:r>
+                  <a:rPr lang="pt-BR" i="1" dirty="0"/>
+                  <a:t>cluster</a:t>
+                </a:r>
+                <a:r>
+                  <a:rPr lang="pt-BR" dirty="0"/>
+                  <a:t>.</a:t>
                 </a:r>
               </a:p>
               <a:p>
                 <a:r>
                   <a:rPr lang="pt-BR" dirty="0"/>
                   <a:t>Portanto, escolhemos a </a:t>
+                </a:r>
+                <a:r>
+                  <a:rPr lang="pt-BR" b="1" dirty="0">
+                    <a:solidFill>
+                      <a:schemeClr val="accent5"/>
+                    </a:solidFill>
+                  </a:rPr>
+                  <a:t>menor distância </a:t>
+                </a:r>
+                <a:r>
+                  <a:rPr lang="pt-BR" dirty="0"/>
+                  <a:t>para </a:t>
+                </a:r>
+                <a:r>
+                  <a:rPr lang="pt-BR" b="1" dirty="0">
+                    <a:solidFill>
+                      <a:schemeClr val="accent5"/>
+                    </a:solidFill>
+                  </a:rPr>
+                  <a:t>definir a qual </a:t>
                 </a:r>
                 <a:r>
                   <a:rPr lang="pt-BR" b="1" i="1" dirty="0">
@@ -7725,19 +7523,15 @@
                       <a:schemeClr val="accent5"/>
                     </a:solidFill>
                   </a:rPr>
-                  <a:t>menor distância </a:t>
-                </a:r>
-                <a:r>
-                  <a:rPr lang="pt-BR" dirty="0"/>
-                  <a:t>para </a:t>
-                </a:r>
-                <a:r>
-                  <a:rPr lang="pt-BR" b="1" i="1" dirty="0">
+                  <a:t>cluster</a:t>
+                </a:r>
+                <a:r>
+                  <a:rPr lang="pt-BR" b="1" dirty="0">
                     <a:solidFill>
                       <a:schemeClr val="accent5"/>
                     </a:solidFill>
                   </a:rPr>
-                  <a:t>definir a qual cluster um exemplo pertence</a:t>
+                  <a:t> um exemplo pertence</a:t>
                 </a:r>
                 <a:r>
                   <a:rPr lang="pt-BR" dirty="0"/>
@@ -7747,21 +7541,29 @@
               <a:p>
                 <a:r>
                   <a:rPr lang="pt-BR" dirty="0"/>
-                  <a:t>Agora, veremos como funciona o k-</a:t>
-                </a:r>
-                <a:r>
-                  <a:rPr lang="pt-BR" dirty="0" err="1"/>
+                  <a:t>Agora, veremos como funciona o </a:t>
+                </a:r>
+                <a:r>
+                  <a:rPr lang="pt-BR" dirty="0" smtClean="0"/>
+                  <a:t>algoritmo </a:t>
+                </a:r>
+                <a:r>
+                  <a:rPr lang="pt-BR" i="1" dirty="0"/>
+                  <a:t>k-</a:t>
+                </a:r>
+                <a:r>
+                  <a:rPr lang="pt-BR" i="1" dirty="0" err="1"/>
                   <a:t>Means</a:t>
                 </a:r>
                 <a:r>
                   <a:rPr lang="pt-BR" dirty="0"/>
-                  <a:t>, um dos algoritmos de clusterização (i.e., identificação de clusters) mais simples.</a:t>
+                  <a:t>.</a:t>
                 </a:r>
               </a:p>
             </p:txBody>
           </p:sp>
         </mc:Choice>
-        <mc:Fallback xmlns="">
+        <mc:Fallback>
           <p:sp>
             <p:nvSpPr>
               <p:cNvPr id="3" name="Espaço Reservado para Conteúdo 2"/>
@@ -7775,12 +7577,12 @@
             <p:spPr>
               <a:xfrm>
                 <a:off x="838199" y="1825624"/>
-                <a:ext cx="10924309" cy="4710257"/>
+                <a:ext cx="11353801" cy="5032376"/>
               </a:xfrm>
-              <a:blipFill>
+              <a:blipFill rotWithShape="0">
                 <a:blip r:embed="rId2"/>
                 <a:stretch>
-                  <a:fillRect l="-948" t="-2070"/>
+                  <a:fillRect l="-913" t="-1937"/>
                 </a:stretch>
               </a:blipFill>
             </p:spPr>
@@ -7802,7 +7604,7 @@
     </p:spTree>
     <p:extLst>
       <p:ext uri="{BB962C8B-B14F-4D97-AF65-F5344CB8AC3E}">
-        <p14:creationId xmlns:p14="http://schemas.microsoft.com/office/powerpoint/2010/main" val="2179787447"/>
+        <p14:creationId xmlns:p14="http://schemas.microsoft.com/office/powerpoint/2010/main" val="3747880041"/>
       </p:ext>
     </p:extLst>
   </p:cSld>
@@ -7845,14 +7647,14 @@
           <a:lstStyle/>
           <a:p>
             <a:r>
-              <a:rPr lang="pt-BR" dirty="0"/>
+              <a:rPr lang="pt-BR" i="1" dirty="0"/>
               <a:t>k-</a:t>
             </a:r>
             <a:r>
-              <a:rPr lang="pt-BR" dirty="0" err="1"/>
+              <a:rPr lang="pt-BR" i="1" dirty="0" err="1"/>
               <a:t>Means</a:t>
             </a:r>
-            <a:endParaRPr lang="en-US" dirty="0"/>
+            <a:endParaRPr lang="en-US" i="1" dirty="0"/>
           </a:p>
         </p:txBody>
       </p:sp>
@@ -7871,7 +7673,7 @@
             <p:spPr>
               <a:xfrm>
                 <a:off x="838199" y="1825624"/>
-                <a:ext cx="11152909" cy="5032375"/>
+                <a:ext cx="11353801" cy="5032375"/>
               </a:xfrm>
             </p:spPr>
             <p:txBody>
@@ -7908,15 +7710,23 @@
                 </a14:m>
                 <a:r>
                   <a:rPr lang="pt-BR" dirty="0"/>
-                  <a:t> no nome denota o número </a:t>
-                </a:r>
-                <a:r>
-                  <a:rPr lang="pt-BR" b="1" i="1" dirty="0"/>
-                  <a:t>pré-definido</a:t>
+                  <a:t> é um </a:t>
+                </a:r>
+                <a:r>
+                  <a:rPr lang="pt-BR" dirty="0" err="1"/>
+                  <a:t>hiperparâmetro</a:t>
                 </a:r>
                 <a:r>
                   <a:rPr lang="pt-BR" dirty="0"/>
-                  <a:t> de clusters, i.e., o número de clusters é um parâmetro definido pelo usuário.</a:t>
+                  <a:t> que define o número de </a:t>
+                </a:r>
+                <a:r>
+                  <a:rPr lang="pt-BR" i="1" dirty="0"/>
+                  <a:t>clusters</a:t>
+                </a:r>
+                <a:r>
+                  <a:rPr lang="pt-BR" dirty="0"/>
+                  <a:t>.</a:t>
                 </a:r>
               </a:p>
               <a:p>
@@ -7941,9 +7751,23 @@
                 <a:endParaRPr lang="pt-BR" dirty="0"/>
               </a:p>
               <a:p>
+                <a:pPr marL="0" indent="0">
+                  <a:buNone/>
+                </a:pPr>
+                <a:endParaRPr lang="pt-BR" dirty="0"/>
+              </a:p>
+              <a:p>
                 <a:r>
                   <a:rPr lang="pt-BR" dirty="0"/>
-                  <a:t>O algoritmo garantidamente chega a uma situação em que cada exemplo se encontra no cluster mais próximo, de modo que, a partir deste momento, os centroides não mudem mais.</a:t>
+                  <a:t>O algoritmo garantidamente chega a uma situação em que cada exemplo se encontra no </a:t>
+                </a:r>
+                <a:r>
+                  <a:rPr lang="pt-BR" i="1" dirty="0"/>
+                  <a:t>cluster</a:t>
+                </a:r>
+                <a:r>
+                  <a:rPr lang="pt-BR" dirty="0"/>
+                  <a:t> mais próximo, de modo que, a partir deste momento, os centroides não mudem mais.</a:t>
                 </a:r>
               </a:p>
             </p:txBody>
@@ -7963,12 +7787,12 @@
             <p:spPr>
               <a:xfrm>
                 <a:off x="838199" y="1825624"/>
-                <a:ext cx="11152909" cy="5032375"/>
+                <a:ext cx="11353801" cy="5032375"/>
               </a:xfrm>
-              <a:blipFill>
+              <a:blipFill rotWithShape="0">
                 <a:blip r:embed="rId3"/>
                 <a:stretch>
-                  <a:fillRect l="-929" t="-1937"/>
+                  <a:fillRect l="-913" t="-1937" r="-1557"/>
                 </a:stretch>
               </a:blipFill>
             </p:spPr>
@@ -7987,8 +7811,8 @@
           </p:sp>
         </mc:Fallback>
       </mc:AlternateContent>
-      <mc:AlternateContent xmlns:mc="http://schemas.openxmlformats.org/markup-compatibility/2006" xmlns:a14="http://schemas.microsoft.com/office/drawing/2010/main">
-        <mc:Choice Requires="a14">
+      <mc:AlternateContent xmlns:mc="http://schemas.openxmlformats.org/markup-compatibility/2006">
+        <mc:Choice xmlns:a14="http://schemas.microsoft.com/office/drawing/2010/main" Requires="a14">
           <p:sp>
             <p:nvSpPr>
               <p:cNvPr id="4" name="TextBox 4"/>
@@ -7997,8 +7821,8 @@
             </p:nvSpPr>
             <p:spPr>
               <a:xfrm>
-                <a:off x="2079214" y="3325262"/>
-                <a:ext cx="8670878" cy="1815882"/>
+                <a:off x="1698214" y="2989982"/>
+                <a:ext cx="9167906" cy="2031325"/>
               </a:xfrm>
               <a:prstGeom prst="rect">
                 <a:avLst/>
@@ -8017,17 +7841,25 @@
               <a:lstStyle/>
               <a:p>
                 <a:r>
-                  <a:rPr lang="pt-BR" sz="1600" b="1" dirty="0"/>
+                  <a:rPr lang="pt-BR" b="1" dirty="0"/>
                   <a:t>Entradas</a:t>
                 </a:r>
                 <a:r>
-                  <a:rPr lang="pt-BR" sz="1600" dirty="0"/>
-                  <a:t>: conjunto de exemplos e número de clusters, </a:t>
+                  <a:rPr lang="pt-BR" dirty="0"/>
+                  <a:t>: conjunto de exemplos e número de </a:t>
+                </a:r>
+                <a:r>
+                  <a:rPr lang="pt-BR" i="1" dirty="0"/>
+                  <a:t>clusters</a:t>
+                </a:r>
+                <a:r>
+                  <a:rPr lang="pt-BR" dirty="0"/>
+                  <a:t>, </a:t>
                 </a:r>
                 <a14:m>
                   <m:oMath xmlns:m="http://schemas.openxmlformats.org/officeDocument/2006/math">
                     <m:r>
-                      <a:rPr lang="pt-BR" sz="1600" i="1">
+                      <a:rPr lang="pt-BR" i="1">
                         <a:latin typeface="Cambria Math" panose="02040503050406030204" pitchFamily="18" charset="0"/>
                       </a:rPr>
                       <m:t>𝑘</m:t>
@@ -8035,10 +7867,10 @@
                   </m:oMath>
                 </a14:m>
                 <a:r>
-                  <a:rPr lang="pt-BR" sz="1600" dirty="0"/>
+                  <a:rPr lang="pt-BR" dirty="0"/>
                   <a:t>. </a:t>
                 </a:r>
-                <a:endParaRPr lang="pt-BR" sz="1600" b="1" dirty="0"/>
+                <a:endParaRPr lang="pt-BR" b="1" dirty="0"/>
               </a:p>
               <a:p>
                 <a:pPr marL="342900" indent="-342900">
@@ -8046,17 +7878,17 @@
                   <a:buAutoNum type="arabicPeriod"/>
                 </a:pPr>
                 <a:r>
-                  <a:rPr lang="pt-BR" sz="1600" b="1" dirty="0"/>
+                  <a:rPr lang="pt-BR" b="1" dirty="0"/>
                   <a:t>Defina</a:t>
                 </a:r>
                 <a:r>
-                  <a:rPr lang="pt-BR" sz="1600" dirty="0"/>
+                  <a:rPr lang="pt-BR" dirty="0"/>
                   <a:t> </a:t>
                 </a:r>
                 <a14:m>
                   <m:oMath xmlns:m="http://schemas.openxmlformats.org/officeDocument/2006/math">
                     <m:r>
-                      <a:rPr lang="pt-BR" sz="1600" i="1">
+                      <a:rPr lang="pt-BR" i="1">
                         <a:latin typeface="Cambria Math" panose="02040503050406030204" pitchFamily="18" charset="0"/>
                       </a:rPr>
                       <m:t>𝑘</m:t>
@@ -8064,9 +7896,14 @@
                   </m:oMath>
                 </a14:m>
                 <a:r>
-                  <a:rPr lang="pt-BR" sz="1600" dirty="0"/>
-                  <a:t> centroides iniciais (geralmente, feito de forma aleatória).</a:t>
-                </a:r>
+                  <a:rPr lang="pt-BR" dirty="0"/>
+                  <a:t> centroides </a:t>
+                </a:r>
+                <a:r>
+                  <a:rPr lang="pt-BR" dirty="0" smtClean="0"/>
+                  <a:t>iniciais.</a:t>
+                </a:r>
+                <a:endParaRPr lang="pt-BR" dirty="0"/>
               </a:p>
               <a:p>
                 <a:pPr marL="342900" indent="-342900">
@@ -8074,7 +7911,7 @@
                   <a:buAutoNum type="arabicPeriod"/>
                 </a:pPr>
                 <a:r>
-                  <a:rPr lang="pt-BR" sz="1600" b="1" dirty="0"/>
+                  <a:rPr lang="pt-BR" b="1" dirty="0"/>
                   <a:t>Repita</a:t>
                 </a:r>
               </a:p>
@@ -8084,25 +7921,25 @@
                   <a:buAutoNum type="alphaLcParenR"/>
                 </a:pPr>
                 <a:r>
-                  <a:rPr lang="pt-BR" sz="1600" dirty="0"/>
+                  <a:rPr lang="pt-BR" dirty="0"/>
                   <a:t>Calcule a distância de cada exemplo, </a:t>
                 </a:r>
                 <a14:m>
                   <m:oMath xmlns:m="http://schemas.openxmlformats.org/officeDocument/2006/math">
                     <m:r>
-                      <a:rPr lang="pt-BR" sz="1600" b="1" i="1">
+                      <a:rPr lang="pt-BR" b="1" i="1">
                         <a:latin typeface="Cambria Math" panose="02040503050406030204" pitchFamily="18" charset="0"/>
                       </a:rPr>
                       <m:t>𝒙</m:t>
                     </m:r>
                     <m:r>
-                      <a:rPr lang="pt-BR" sz="1600" b="1" i="1" smtClean="0">
+                      <a:rPr lang="pt-BR" b="1" i="1" smtClean="0">
                         <a:latin typeface="Cambria Math" panose="02040503050406030204" pitchFamily="18" charset="0"/>
                       </a:rPr>
                       <m:t>,</m:t>
                     </m:r>
                     <m:r>
-                      <a:rPr lang="pt-BR" sz="1600" b="1" i="1">
+                      <a:rPr lang="pt-BR" b="1" i="1">
                         <a:latin typeface="Cambria Math" panose="02040503050406030204" pitchFamily="18" charset="0"/>
                       </a:rPr>
                       <m:t> </m:t>
@@ -8110,13 +7947,13 @@
                   </m:oMath>
                 </a14:m>
                 <a:r>
-                  <a:rPr lang="pt-BR" sz="1600" dirty="0"/>
+                  <a:rPr lang="pt-BR" dirty="0"/>
                   <a:t>para cada um dos </a:t>
                 </a:r>
                 <a14:m>
                   <m:oMath xmlns:m="http://schemas.openxmlformats.org/officeDocument/2006/math">
                     <m:r>
-                      <a:rPr lang="pt-BR" sz="1600" i="1">
+                      <a:rPr lang="pt-BR" i="1">
                         <a:latin typeface="Cambria Math" panose="02040503050406030204" pitchFamily="18" charset="0"/>
                       </a:rPr>
                       <m:t>𝑘</m:t>
@@ -8124,8 +7961,8 @@
                   </m:oMath>
                 </a14:m>
                 <a:r>
-                  <a:rPr lang="pt-BR" sz="1600" dirty="0"/>
-                  <a:t> centroides e atribua cada exemplo ao cluster mais próximo.</a:t>
+                  <a:rPr lang="pt-BR" dirty="0"/>
+                  <a:t> centroides.</a:t>
                 </a:r>
               </a:p>
               <a:p>
@@ -8134,8 +7971,54 @@
                   <a:buAutoNum type="alphaLcParenR"/>
                 </a:pPr>
                 <a:r>
-                  <a:rPr lang="pt-BR" sz="1600" dirty="0"/>
-                  <a:t>Calcule o novo centroide de cada cluster.</a:t>
+                  <a:rPr lang="pt-BR" dirty="0"/>
+                  <a:t>Atribua cada exemplo, </a:t>
+                </a:r>
+                <a14:m>
+                  <m:oMath xmlns:m="http://schemas.openxmlformats.org/officeDocument/2006/math">
+                    <m:r>
+                      <a:rPr lang="pt-BR" b="1" i="1">
+                        <a:latin typeface="Cambria Math" panose="02040503050406030204" pitchFamily="18" charset="0"/>
+                      </a:rPr>
+                      <m:t>𝒙</m:t>
+                    </m:r>
+                    <m:r>
+                      <a:rPr lang="pt-BR" b="1" i="1">
+                        <a:latin typeface="Cambria Math" panose="02040503050406030204" pitchFamily="18" charset="0"/>
+                      </a:rPr>
+                      <m:t>,</m:t>
+                    </m:r>
+                  </m:oMath>
+                </a14:m>
+                <a:r>
+                  <a:rPr lang="pt-BR" dirty="0"/>
+                  <a:t> ao </a:t>
+                </a:r>
+                <a:r>
+                  <a:rPr lang="pt-BR" i="1" dirty="0"/>
+                  <a:t>cluster</a:t>
+                </a:r>
+                <a:r>
+                  <a:rPr lang="pt-BR" dirty="0"/>
+                  <a:t> mais próximo (menor distância).</a:t>
+                </a:r>
+              </a:p>
+              <a:p>
+                <a:pPr marL="800100" lvl="1" indent="-342900">
+                  <a:buFont typeface="+mj-lt"/>
+                  <a:buAutoNum type="alphaLcParenR"/>
+                </a:pPr>
+                <a:r>
+                  <a:rPr lang="pt-BR" dirty="0"/>
+                  <a:t>Calcule o novo centroide de cada </a:t>
+                </a:r>
+                <a:r>
+                  <a:rPr lang="pt-BR" i="1" dirty="0"/>
+                  <a:t>cluster</a:t>
+                </a:r>
+                <a:r>
+                  <a:rPr lang="pt-BR" dirty="0"/>
+                  <a:t>*.</a:t>
                 </a:r>
               </a:p>
               <a:p>
@@ -8144,18 +8027,18 @@
                   <a:buAutoNum type="arabicPeriod"/>
                 </a:pPr>
                 <a:r>
-                  <a:rPr lang="pt-BR" sz="1600" b="1" dirty="0"/>
+                  <a:rPr lang="pt-BR" b="1" dirty="0"/>
                   <a:t>Enquanto </a:t>
                 </a:r>
                 <a:r>
-                  <a:rPr lang="pt-BR" sz="1600" dirty="0"/>
+                  <a:rPr lang="pt-BR" dirty="0"/>
                   <a:t>as posições dos centroides continuarem mudando.</a:t>
                 </a:r>
               </a:p>
             </p:txBody>
           </p:sp>
         </mc:Choice>
-        <mc:Fallback xmlns="">
+        <mc:Fallback>
           <p:sp>
             <p:nvSpPr>
               <p:cNvPr id="4" name="TextBox 4"/>
@@ -8166,16 +8049,16 @@
             </p:nvSpPr>
             <p:spPr>
               <a:xfrm>
-                <a:off x="2079214" y="3325262"/>
-                <a:ext cx="8670878" cy="1815882"/>
+                <a:off x="1698214" y="2989982"/>
+                <a:ext cx="9167906" cy="2031325"/>
               </a:xfrm>
               <a:prstGeom prst="rect">
                 <a:avLst/>
               </a:prstGeom>
-              <a:blipFill>
+              <a:blipFill rotWithShape="0">
                 <a:blip r:embed="rId4"/>
                 <a:stretch>
-                  <a:fillRect l="-281" t="-667" b="-3000"/>
+                  <a:fillRect l="-531" t="-1190" b="-3274"/>
                 </a:stretch>
               </a:blipFill>
               <a:ln>
@@ -8199,10 +8082,62 @@
           </p:sp>
         </mc:Fallback>
       </mc:AlternateContent>
+      <p:sp>
+        <p:nvSpPr>
+          <p:cNvPr id="5" name="Retângulo 4"/>
+          <p:cNvSpPr/>
+          <p:nvPr/>
+        </p:nvSpPr>
+        <p:spPr>
+          <a:xfrm>
+            <a:off x="1698214" y="5021307"/>
+            <a:ext cx="9167906" cy="307777"/>
+          </a:xfrm>
+          <a:prstGeom prst="rect">
+            <a:avLst/>
+          </a:prstGeom>
+        </p:spPr>
+        <p:txBody>
+          <a:bodyPr wrap="square">
+            <a:spAutoFit/>
+          </a:bodyPr>
+          <a:lstStyle/>
+          <a:p>
+            <a:r>
+              <a:rPr lang="pt-BR" sz="1400" dirty="0">
+                <a:solidFill>
+                  <a:srgbClr val="000000"/>
+                </a:solidFill>
+                <a:latin typeface="Calibri" panose="020F0502020204030204" pitchFamily="34" charset="0"/>
+              </a:rPr>
+              <a:t>*os novos centroides são calculados como a média aritmética (centro geométrico) das amostras pertencentes a cada </a:t>
+            </a:r>
+            <a:r>
+              <a:rPr lang="pt-BR" sz="1400" i="1" dirty="0">
+                <a:solidFill>
+                  <a:srgbClr val="000000"/>
+                </a:solidFill>
+                <a:latin typeface="Calibri" panose="020F0502020204030204" pitchFamily="34" charset="0"/>
+              </a:rPr>
+              <a:t>cluster</a:t>
+            </a:r>
+            <a:r>
+              <a:rPr lang="pt-BR" sz="1400" dirty="0">
+                <a:solidFill>
+                  <a:srgbClr val="000000"/>
+                </a:solidFill>
+                <a:latin typeface="Calibri" panose="020F0502020204030204" pitchFamily="34" charset="0"/>
+              </a:rPr>
+              <a:t>.</a:t>
+            </a:r>
+            <a:endParaRPr lang="pt-BR" sz="1400" dirty="0"/>
+          </a:p>
+        </p:txBody>
+      </p:sp>
     </p:spTree>
     <p:extLst>
       <p:ext uri="{BB962C8B-B14F-4D97-AF65-F5344CB8AC3E}">
-        <p14:creationId xmlns:p14="http://schemas.microsoft.com/office/powerpoint/2010/main" val="2317123538"/>
+        <p14:creationId xmlns:p14="http://schemas.microsoft.com/office/powerpoint/2010/main" val="3663814827"/>
       </p:ext>
     </p:extLst>
   </p:cSld>
@@ -8252,8 +8187,8 @@
           </a:p>
         </p:txBody>
       </p:sp>
-      <mc:AlternateContent xmlns:mc="http://schemas.openxmlformats.org/markup-compatibility/2006" xmlns:a14="http://schemas.microsoft.com/office/drawing/2010/main">
-        <mc:Choice Requires="a14">
+      <mc:AlternateContent xmlns:mc="http://schemas.openxmlformats.org/markup-compatibility/2006">
+        <mc:Choice xmlns:a14="http://schemas.microsoft.com/office/drawing/2010/main" Requires="a14">
           <p:sp>
             <p:nvSpPr>
               <p:cNvPr id="3" name="Espaço Reservado para Conteúdo 2"/>
@@ -8266,8 +8201,8 @@
             </p:nvSpPr>
             <p:spPr>
               <a:xfrm>
-                <a:off x="5214257" y="1825624"/>
-                <a:ext cx="6776851" cy="5032375"/>
+                <a:off x="5043489" y="1825624"/>
+                <a:ext cx="7029450" cy="5032375"/>
               </a:xfrm>
             </p:spPr>
             <p:txBody>
@@ -8277,11 +8212,25 @@
               <a:lstStyle/>
               <a:p>
                 <a:r>
+                  <a:rPr lang="pt-BR" dirty="0" smtClean="0"/>
+                  <a:t>Os procedimentos </a:t>
+                </a:r>
+                <a:r>
                   <a:rPr lang="pt-BR" dirty="0"/>
-                  <a:t>O procedimento mais simples para inicializar os centroides é </a:t>
-                </a:r>
-                <a:r>
-                  <a:rPr lang="pt-BR" b="1" i="1" dirty="0">
+                  <a:t>mais simples para inicializar os centroides </a:t>
+                </a:r>
+                <a:r>
+                  <a:rPr lang="pt-BR" dirty="0" smtClean="0"/>
+                  <a:t>são </a:t>
+                </a:r>
+              </a:p>
+              <a:p>
+                <a:pPr lvl="1">
+                  <a:buFont typeface="Wingdings" panose="05000000000000000000" pitchFamily="2" charset="2"/>
+                  <a:buChar char="§"/>
+                </a:pPr>
+                <a:r>
+                  <a:rPr lang="pt-BR" b="1" i="1" dirty="0" smtClean="0">
                     <a:solidFill>
                       <a:schemeClr val="accent5"/>
                     </a:solidFill>
@@ -8311,8 +8260,52 @@
                 </a:r>
                 <a:r>
                   <a:rPr lang="pt-BR" dirty="0"/>
-                  <a:t> e os considerar como os centroides iniciais.</a:t>
-                </a:r>
+                  <a:t> e os considerar como os centroides iniciais</a:t>
+                </a:r>
+                <a:r>
+                  <a:rPr lang="pt-BR" dirty="0" smtClean="0"/>
+                  <a:t>.</a:t>
+                </a:r>
+              </a:p>
+              <a:p>
+                <a:pPr lvl="1">
+                  <a:buFont typeface="Wingdings" panose="05000000000000000000" pitchFamily="2" charset="2"/>
+                  <a:buChar char="§"/>
+                </a:pPr>
+                <a:r>
+                  <a:rPr lang="pt-BR" b="1" dirty="0" smtClean="0">
+                    <a:solidFill>
+                      <a:srgbClr val="7030A0"/>
+                    </a:solidFill>
+                  </a:rPr>
+                  <a:t>inicializar </a:t>
+                </a:r>
+                <a14:m>
+                  <m:oMath xmlns:m="http://schemas.openxmlformats.org/officeDocument/2006/math">
+                    <m:r>
+                      <a:rPr lang="pt-BR" b="1" i="1">
+                        <a:solidFill>
+                          <a:srgbClr val="7030A0"/>
+                        </a:solidFill>
+                        <a:latin typeface="Cambria Math" panose="02040503050406030204" pitchFamily="18" charset="0"/>
+                      </a:rPr>
+                      <m:t>𝒌</m:t>
+                    </m:r>
+                  </m:oMath>
+                </a14:m>
+                <a:r>
+                  <a:rPr lang="pt-BR" b="1" dirty="0" smtClean="0">
+                    <a:solidFill>
+                      <a:srgbClr val="7030A0"/>
+                    </a:solidFill>
+                  </a:rPr>
+                  <a:t> vetores com valores aleatórios </a:t>
+                </a:r>
+                <a:r>
+                  <a:rPr lang="pt-BR" dirty="0" smtClean="0"/>
+                  <a:t>retirados de alguma distribuição.</a:t>
+                </a:r>
+                <a:endParaRPr lang="pt-BR" dirty="0"/>
               </a:p>
               <a:p>
                 <a:r>
@@ -8359,7 +8352,23 @@
                 </a:r>
                 <a:r>
                   <a:rPr lang="pt-BR" dirty="0"/>
-                  <a:t> de um exemplo </a:t>
+                  <a:t> </a:t>
+                </a:r>
+                <a:r>
+                  <a:rPr lang="pt-BR" dirty="0" smtClean="0"/>
+                  <a:t>(i.e., </a:t>
+                </a:r>
+                <a:r>
+                  <a:rPr lang="pt-BR" b="1" dirty="0" smtClean="0"/>
+                  <a:t>tempo de treinamento</a:t>
+                </a:r>
+                <a:r>
+                  <a:rPr lang="pt-BR" dirty="0" smtClean="0"/>
+                  <a:t>) de </a:t>
+                </a:r>
+                <a:r>
+                  <a:rPr lang="pt-BR" dirty="0"/>
+                  <a:t>um exemplo </a:t>
                 </a:r>
                 <a:r>
                   <a:rPr lang="pt-BR" b="1" i="1" dirty="0">
@@ -8377,7 +8386,7 @@
             </p:txBody>
           </p:sp>
         </mc:Choice>
-        <mc:Fallback xmlns="">
+        <mc:Fallback>
           <p:sp>
             <p:nvSpPr>
               <p:cNvPr id="3" name="Espaço Reservado para Conteúdo 2"/>
@@ -8390,13 +8399,13 @@
             </p:nvSpPr>
             <p:spPr>
               <a:xfrm>
-                <a:off x="5214257" y="1825624"/>
-                <a:ext cx="6776851" cy="5032375"/>
+                <a:off x="5043489" y="1825624"/>
+                <a:ext cx="7029450" cy="5032375"/>
               </a:xfrm>
-              <a:blipFill>
+              <a:blipFill rotWithShape="0">
                 <a:blip r:embed="rId2"/>
                 <a:stretch>
-                  <a:fillRect l="-1619" t="-1937" r="-2158"/>
+                  <a:fillRect l="-1561" t="-1937" r="-1995"/>
                 </a:stretch>
               </a:blipFill>
             </p:spPr>
@@ -8420,7 +8429,7 @@
           <p:cNvPr id="4" name="Picture 2" descr="Quantum machine learning: distance estimation for k-means clustering | by  Sashwat Anagolum | Towards Data Science">
             <a:extLst>
               <a:ext uri="{FF2B5EF4-FFF2-40B4-BE49-F238E27FC236}">
-                <a16:creationId xmlns:a16="http://schemas.microsoft.com/office/drawing/2014/main" id="{3663CA52-EDD8-4A35-5A6A-3A247A7891B7}"/>
+                <a16:creationId xmlns:a16="http://schemas.microsoft.com/office/drawing/2014/main" xmlns="" id="{3663CA52-EDD8-4A35-5A6A-3A247A7891B7}"/>
               </a:ext>
             </a:extLst>
           </p:cNvPr>
@@ -8442,7 +8451,7 @@
         </p:blipFill>
         <p:spPr bwMode="auto">
           <a:xfrm>
-            <a:off x="511629" y="2202317"/>
+            <a:off x="311604" y="2516754"/>
             <a:ext cx="4487974" cy="3392940"/>
           </a:xfrm>
           <a:prstGeom prst="rect">
@@ -8481,7 +8490,7 @@
         <p:cNvPr id="1" name="">
           <a:extLst>
             <a:ext uri="{FF2B5EF4-FFF2-40B4-BE49-F238E27FC236}">
-              <a16:creationId xmlns:a16="http://schemas.microsoft.com/office/drawing/2014/main" id="{17B1A926-A8C8-946A-0DCB-7DA6EAEC80E3}"/>
+              <a16:creationId xmlns:a16="http://schemas.microsoft.com/office/drawing/2014/main" xmlns="" id="{17B1A926-A8C8-946A-0DCB-7DA6EAEC80E3}"/>
             </a:ext>
           </a:extLst>
         </p:cNvPr>
@@ -8501,7 +8510,7 @@
           <p:cNvPr id="2" name="Título 1">
             <a:extLst>
               <a:ext uri="{FF2B5EF4-FFF2-40B4-BE49-F238E27FC236}">
-                <a16:creationId xmlns:a16="http://schemas.microsoft.com/office/drawing/2014/main" id="{602E24AF-FE6E-7B0A-D179-EB49A1DEB2F8}"/>
+                <a16:creationId xmlns:a16="http://schemas.microsoft.com/office/drawing/2014/main" xmlns="" id="{602E24AF-FE6E-7B0A-D179-EB49A1DEB2F8}"/>
               </a:ext>
             </a:extLst>
           </p:cNvPr>
@@ -8530,7 +8539,7 @@
           <p:cNvPr id="3" name="Espaço Reservado para Conteúdo 2">
             <a:extLst>
               <a:ext uri="{FF2B5EF4-FFF2-40B4-BE49-F238E27FC236}">
-                <a16:creationId xmlns:a16="http://schemas.microsoft.com/office/drawing/2014/main" id="{4E35406F-F929-EFBE-0B16-7CF919C6F311}"/>
+                <a16:creationId xmlns:a16="http://schemas.microsoft.com/office/drawing/2014/main" xmlns="" id="{4E35406F-F929-EFBE-0B16-7CF919C6F311}"/>
               </a:ext>
             </a:extLst>
           </p:cNvPr>
@@ -8544,7 +8553,7 @@
         <p:spPr>
           <a:xfrm>
             <a:off x="5421086" y="1825624"/>
-            <a:ext cx="6570022" cy="5032375"/>
+            <a:ext cx="6770914" cy="5032375"/>
           </a:xfrm>
         </p:spPr>
         <p:txBody>
@@ -8591,8 +8600,43 @@
             </a:r>
             <a:r>
               <a:rPr lang="pt-BR" dirty="0"/>
-              <a:t> e o algoritmo é encerado.</a:t>
-            </a:r>
+              <a:t> e o algoritmo é encerado</a:t>
+            </a:r>
+            <a:r>
+              <a:rPr lang="pt-BR" dirty="0" smtClean="0"/>
+              <a:t>.</a:t>
+            </a:r>
+          </a:p>
+          <a:p>
+            <a:r>
+              <a:rPr lang="pt-BR" dirty="0" smtClean="0"/>
+              <a:t>Se eles forem </a:t>
+            </a:r>
+            <a:r>
+              <a:rPr lang="pt-BR" b="1" i="1" dirty="0" smtClean="0">
+                <a:solidFill>
+                  <a:schemeClr val="accent2"/>
+                </a:solidFill>
+              </a:rPr>
+              <a:t>muito próximos</a:t>
+            </a:r>
+            <a:r>
+              <a:rPr lang="pt-BR" dirty="0" smtClean="0"/>
+              <a:t>, o tempo de </a:t>
+            </a:r>
+            <a:r>
+              <a:rPr lang="pt-BR" b="1" dirty="0" smtClean="0">
+                <a:solidFill>
+                  <a:schemeClr val="accent2"/>
+                </a:solidFill>
+              </a:rPr>
+              <a:t>treinamento pode ser longo</a:t>
+            </a:r>
+            <a:r>
+              <a:rPr lang="pt-BR" dirty="0" smtClean="0"/>
+              <a:t>. </a:t>
+            </a:r>
+            <a:endParaRPr lang="pt-BR" dirty="0"/>
           </a:p>
           <a:p>
             <a:r>
@@ -8673,7 +8717,7 @@
           <p:cNvPr id="4" name="Picture 2" descr="Quantum machine learning: distance estimation for k-means clustering | by  Sashwat Anagolum | Towards Data Science">
             <a:extLst>
               <a:ext uri="{FF2B5EF4-FFF2-40B4-BE49-F238E27FC236}">
-                <a16:creationId xmlns:a16="http://schemas.microsoft.com/office/drawing/2014/main" id="{375C1022-A6C8-5B17-2FC3-13794270B208}"/>
+                <a16:creationId xmlns:a16="http://schemas.microsoft.com/office/drawing/2014/main" xmlns="" id="{375C1022-A6C8-5B17-2FC3-13794270B208}"/>
               </a:ext>
             </a:extLst>
           </p:cNvPr>
@@ -8745,6 +8789,284 @@
       </p:grpSpPr>
       <p:sp>
         <p:nvSpPr>
+          <p:cNvPr id="2" name="Título 1">
+            <a:extLst>
+              <a:ext uri="{FF2B5EF4-FFF2-40B4-BE49-F238E27FC236}">
+                <a16:creationId xmlns:a16="http://schemas.microsoft.com/office/drawing/2014/main" xmlns="" id="{654EC41E-A91F-2BE6-4481-EFFD64DC2B91}"/>
+              </a:ext>
+            </a:extLst>
+          </p:cNvPr>
+          <p:cNvSpPr>
+            <a:spLocks noGrp="1"/>
+          </p:cNvSpPr>
+          <p:nvPr>
+            <p:ph type="title"/>
+          </p:nvPr>
+        </p:nvSpPr>
+        <p:spPr/>
+        <p:txBody>
+          <a:bodyPr/>
+          <a:lstStyle/>
+          <a:p>
+            <a:r>
+              <a:rPr lang="pt-BR" dirty="0"/>
+              <a:t>Como escolher o número ideal de clusters?</a:t>
+            </a:r>
+          </a:p>
+        </p:txBody>
+      </p:sp>
+      <mc:AlternateContent xmlns:mc="http://schemas.openxmlformats.org/markup-compatibility/2006">
+        <mc:Choice xmlns:a14="http://schemas.microsoft.com/office/drawing/2010/main" Requires="a14">
+          <p:sp>
+            <p:nvSpPr>
+              <p:cNvPr id="3" name="Espaço Reservado para Conteúdo 2">
+                <a:extLst>
+                  <a:ext uri="{FF2B5EF4-FFF2-40B4-BE49-F238E27FC236}">
+                    <a16:creationId xmlns:a16="http://schemas.microsoft.com/office/drawing/2014/main" xmlns="" id="{7C91871B-A0D0-6F26-D59B-6230818E6267}"/>
+                  </a:ext>
+                </a:extLst>
+              </p:cNvPr>
+              <p:cNvSpPr>
+                <a:spLocks noGrp="1"/>
+              </p:cNvSpPr>
+              <p:nvPr>
+                <p:ph idx="1"/>
+              </p:nvPr>
+            </p:nvSpPr>
+            <p:spPr>
+              <a:xfrm>
+                <a:off x="838199" y="1825624"/>
+                <a:ext cx="11206163" cy="5032375"/>
+              </a:xfrm>
+            </p:spPr>
+            <p:txBody>
+              <a:bodyPr>
+                <a:normAutofit/>
+              </a:bodyPr>
+              <a:lstStyle/>
+              <a:p>
+                <a:r>
+                  <a:rPr lang="pt-BR" dirty="0"/>
+                  <a:t>Existem várias abordagens para determinar o valor ideal de </a:t>
+                </a:r>
+                <a14:m>
+                  <m:oMath xmlns:m="http://schemas.openxmlformats.org/officeDocument/2006/math">
+                    <m:r>
+                      <a:rPr lang="pt-BR" b="0" i="1" smtClean="0">
+                        <a:latin typeface="Cambria Math" panose="02040503050406030204" pitchFamily="18" charset="0"/>
+                      </a:rPr>
+                      <m:t>𝑘</m:t>
+                    </m:r>
+                  </m:oMath>
+                </a14:m>
+                <a:r>
+                  <a:rPr lang="pt-BR" dirty="0"/>
+                  <a:t>. </a:t>
+                </a:r>
+              </a:p>
+              <a:p>
+                <a:r>
+                  <a:rPr lang="pt-BR" dirty="0"/>
+                  <a:t>A mais </a:t>
+                </a:r>
+                <a:r>
+                  <a:rPr lang="pt-BR" dirty="0" smtClean="0"/>
+                  <a:t>comum </a:t>
+                </a:r>
+                <a:r>
+                  <a:rPr lang="pt-BR" dirty="0"/>
+                  <a:t>é o método da silhueta.</a:t>
+                </a:r>
+              </a:p>
+              <a:p>
+                <a:r>
+                  <a:rPr lang="pt-BR" dirty="0"/>
+                  <a:t>O coeficiente de silhueta avalia a </a:t>
+                </a:r>
+                <a:r>
+                  <a:rPr lang="pt-BR" b="1" dirty="0"/>
+                  <a:t>qualidade da clusterização</a:t>
+                </a:r>
+                <a:r>
+                  <a:rPr lang="pt-BR" dirty="0"/>
+                  <a:t>, considerando a </a:t>
+                </a:r>
+                <a:r>
+                  <a:rPr lang="pt-BR" b="1" i="1" dirty="0">
+                    <a:solidFill>
+                      <a:schemeClr val="accent5"/>
+                    </a:solidFill>
+                  </a:rPr>
+                  <a:t>coesão dentro dos clusters e a separação entre eles</a:t>
+                </a:r>
+                <a:r>
+                  <a:rPr lang="pt-BR" dirty="0"/>
+                  <a:t>.</a:t>
+                </a:r>
+              </a:p>
+              <a:p>
+                <a:r>
+                  <a:rPr lang="pt-BR" dirty="0"/>
+                  <a:t>Escolhemos o número de </a:t>
+                </a:r>
+                <a:r>
+                  <a:rPr lang="pt-BR" i="1" dirty="0"/>
+                  <a:t>clusters</a:t>
+                </a:r>
+                <a:r>
+                  <a:rPr lang="pt-BR" dirty="0"/>
+                  <a:t> que </a:t>
+                </a:r>
+                <a:r>
+                  <a:rPr lang="pt-BR" b="1" dirty="0">
+                    <a:solidFill>
+                      <a:schemeClr val="accent2"/>
+                    </a:solidFill>
+                  </a:rPr>
+                  <a:t>maximiza</a:t>
+                </a:r>
+                <a:r>
+                  <a:rPr lang="pt-BR" dirty="0"/>
+                  <a:t> o coeficiente</a:t>
+                </a:r>
+                <a:r>
+                  <a:rPr lang="pt-BR" dirty="0" smtClean="0"/>
+                  <a:t>.</a:t>
+                </a:r>
+              </a:p>
+              <a:p>
+                <a:pPr lvl="1">
+                  <a:buFont typeface="Wingdings" panose="05000000000000000000" pitchFamily="2" charset="2"/>
+                  <a:buChar char="§"/>
+                </a:pPr>
+                <a:r>
+                  <a:rPr lang="pt-BR" dirty="0" smtClean="0"/>
+                  <a:t>Quanto mais próximas forem as amostras de um </a:t>
+                </a:r>
+                <a:r>
+                  <a:rPr lang="pt-BR" i="1" dirty="0" smtClean="0"/>
+                  <a:t>cluster</a:t>
+                </a:r>
+                <a:r>
+                  <a:rPr lang="pt-BR" dirty="0" smtClean="0"/>
+                  <a:t> e mais distantes das amostras de outro </a:t>
+                </a:r>
+                <a:r>
+                  <a:rPr lang="pt-BR" i="1" dirty="0" smtClean="0"/>
+                  <a:t>cluster</a:t>
+                </a:r>
+                <a:r>
+                  <a:rPr lang="pt-BR" dirty="0" smtClean="0"/>
+                  <a:t>, maior o coeficiente.</a:t>
+                </a:r>
+                <a:endParaRPr lang="pt-BR" dirty="0"/>
+              </a:p>
+              <a:p>
+                <a:r>
+                  <a:rPr lang="pt-BR" dirty="0"/>
+                  <a:t>A documentação da biblioteca </a:t>
+                </a:r>
+                <a:r>
+                  <a:rPr lang="pt-BR" dirty="0" err="1"/>
+                  <a:t>SciKit-Learn</a:t>
+                </a:r>
+                <a:r>
+                  <a:rPr lang="pt-BR" dirty="0"/>
+                  <a:t> contém um exemplo de como usar a coeficiente de silhueta para definir o melhor número de clusters.</a:t>
+                </a:r>
+              </a:p>
+              <a:p>
+                <a:pPr lvl="1">
+                  <a:buFont typeface="Wingdings" panose="05000000000000000000" pitchFamily="2" charset="2"/>
+                  <a:buChar char="§"/>
+                </a:pPr>
+                <a:r>
+                  <a:rPr lang="pt-BR" dirty="0">
+                    <a:hlinkClick r:id="rId2"/>
+                  </a:rPr>
+                  <a:t>https://scikit-learn.org/1.5/auto_examples/cluster/plot_kmeans_silhouette_analysis.html</a:t>
+                </a:r>
+                <a:endParaRPr lang="pt-BR" dirty="0"/>
+              </a:p>
+            </p:txBody>
+          </p:sp>
+        </mc:Choice>
+        <mc:Fallback>
+          <p:sp>
+            <p:nvSpPr>
+              <p:cNvPr id="3" name="Espaço Reservado para Conteúdo 2">
+                <a:extLst>
+                  <a:ext uri="{FF2B5EF4-FFF2-40B4-BE49-F238E27FC236}">
+                    <a16:creationId xmlns:a16="http://schemas.microsoft.com/office/drawing/2014/main" xmlns="" xmlns:a14="http://schemas.microsoft.com/office/drawing/2010/main" id="{7C91871B-A0D0-6F26-D59B-6230818E6267}"/>
+                  </a:ext>
+                </a:extLst>
+              </p:cNvPr>
+              <p:cNvSpPr>
+                <a:spLocks noGrp="1" noRot="1" noChangeAspect="1" noMove="1" noResize="1" noEditPoints="1" noAdjustHandles="1" noChangeArrowheads="1" noChangeShapeType="1" noTextEdit="1"/>
+              </p:cNvSpPr>
+              <p:nvPr>
+                <p:ph idx="1"/>
+              </p:nvPr>
+            </p:nvSpPr>
+            <p:spPr>
+              <a:xfrm>
+                <a:off x="838199" y="1825624"/>
+                <a:ext cx="11206163" cy="5032375"/>
+              </a:xfrm>
+              <a:blipFill rotWithShape="0">
+                <a:blip r:embed="rId3"/>
+                <a:stretch>
+                  <a:fillRect l="-924" t="-1937"/>
+                </a:stretch>
+              </a:blipFill>
+            </p:spPr>
+            <p:txBody>
+              <a:bodyPr/>
+              <a:lstStyle/>
+              <a:p>
+                <a:r>
+                  <a:rPr lang="pt-BR">
+                    <a:noFill/>
+                  </a:rPr>
+                  <a:t> </a:t>
+                </a:r>
+              </a:p>
+            </p:txBody>
+          </p:sp>
+        </mc:Fallback>
+      </mc:AlternateContent>
+    </p:spTree>
+    <p:extLst>
+      <p:ext uri="{BB962C8B-B14F-4D97-AF65-F5344CB8AC3E}">
+        <p14:creationId xmlns:p14="http://schemas.microsoft.com/office/powerpoint/2010/main" val="2565590634"/>
+      </p:ext>
+    </p:extLst>
+  </p:cSld>
+  <p:clrMapOvr>
+    <a:masterClrMapping/>
+  </p:clrMapOvr>
+</p:sld>
+</file>
+
+<file path=ppt/slides/slide18.xml><?xml version="1.0" encoding="utf-8"?>
+<p:sld xmlns:a="http://schemas.openxmlformats.org/drawingml/2006/main" xmlns:r="http://schemas.openxmlformats.org/officeDocument/2006/relationships" xmlns:p="http://schemas.openxmlformats.org/presentationml/2006/main">
+  <p:cSld>
+    <p:spTree>
+      <p:nvGrpSpPr>
+        <p:cNvPr id="1" name=""/>
+        <p:cNvGrpSpPr/>
+        <p:nvPr/>
+      </p:nvGrpSpPr>
+      <p:grpSpPr>
+        <a:xfrm>
+          <a:off x="0" y="0"/>
+          <a:ext cx="0" cy="0"/>
+          <a:chOff x="0" y="0"/>
+          <a:chExt cx="0" cy="0"/>
+        </a:xfrm>
+      </p:grpSpPr>
+      <p:sp>
+        <p:nvSpPr>
           <p:cNvPr id="2" name="Título 1"/>
           <p:cNvSpPr>
             <a:spLocks noGrp="1"/>
@@ -8967,225 +9289,6 @@
 </p:sld>
 </file>
 
-<file path=ppt/slides/slide18.xml><?xml version="1.0" encoding="utf-8"?>
-<p:sld xmlns:a="http://schemas.openxmlformats.org/drawingml/2006/main" xmlns:r="http://schemas.openxmlformats.org/officeDocument/2006/relationships" xmlns:p="http://schemas.openxmlformats.org/presentationml/2006/main">
-  <p:cSld>
-    <p:spTree>
-      <p:nvGrpSpPr>
-        <p:cNvPr id="1" name=""/>
-        <p:cNvGrpSpPr/>
-        <p:nvPr/>
-      </p:nvGrpSpPr>
-      <p:grpSpPr>
-        <a:xfrm>
-          <a:off x="0" y="0"/>
-          <a:ext cx="0" cy="0"/>
-          <a:chOff x="0" y="0"/>
-          <a:chExt cx="0" cy="0"/>
-        </a:xfrm>
-      </p:grpSpPr>
-      <p:sp>
-        <p:nvSpPr>
-          <p:cNvPr id="2" name="Título 1">
-            <a:extLst>
-              <a:ext uri="{FF2B5EF4-FFF2-40B4-BE49-F238E27FC236}">
-                <a16:creationId xmlns:a16="http://schemas.microsoft.com/office/drawing/2014/main" id="{654EC41E-A91F-2BE6-4481-EFFD64DC2B91}"/>
-              </a:ext>
-            </a:extLst>
-          </p:cNvPr>
-          <p:cNvSpPr>
-            <a:spLocks noGrp="1"/>
-          </p:cNvSpPr>
-          <p:nvPr>
-            <p:ph type="title"/>
-          </p:nvPr>
-        </p:nvSpPr>
-        <p:spPr/>
-        <p:txBody>
-          <a:bodyPr/>
-          <a:lstStyle/>
-          <a:p>
-            <a:r>
-              <a:rPr lang="pt-BR" dirty="0"/>
-              <a:t>Como escolher o número ideal de clusters?</a:t>
-            </a:r>
-          </a:p>
-        </p:txBody>
-      </p:sp>
-      <mc:AlternateContent xmlns:mc="http://schemas.openxmlformats.org/markup-compatibility/2006">
-        <mc:Choice xmlns:a14="http://schemas.microsoft.com/office/drawing/2010/main" Requires="a14">
-          <p:sp>
-            <p:nvSpPr>
-              <p:cNvPr id="3" name="Espaço Reservado para Conteúdo 2">
-                <a:extLst>
-                  <a:ext uri="{FF2B5EF4-FFF2-40B4-BE49-F238E27FC236}">
-                    <a16:creationId xmlns:a16="http://schemas.microsoft.com/office/drawing/2014/main" id="{7C91871B-A0D0-6F26-D59B-6230818E6267}"/>
-                  </a:ext>
-                </a:extLst>
-              </p:cNvPr>
-              <p:cNvSpPr>
-                <a:spLocks noGrp="1"/>
-              </p:cNvSpPr>
-              <p:nvPr>
-                <p:ph idx="1"/>
-              </p:nvPr>
-            </p:nvSpPr>
-            <p:spPr>
-              <a:xfrm>
-                <a:off x="838200" y="1825625"/>
-                <a:ext cx="11049000" cy="4351338"/>
-              </a:xfrm>
-            </p:spPr>
-            <p:txBody>
-              <a:bodyPr>
-                <a:normAutofit/>
-              </a:bodyPr>
-              <a:lstStyle/>
-              <a:p>
-                <a:r>
-                  <a:rPr lang="pt-BR" dirty="0"/>
-                  <a:t>Existem várias abordagens para determinar o valor ideal de </a:t>
-                </a:r>
-                <a14:m>
-                  <m:oMath xmlns:m="http://schemas.openxmlformats.org/officeDocument/2006/math">
-                    <m:r>
-                      <a:rPr lang="pt-BR" b="0" i="1" smtClean="0">
-                        <a:latin typeface="Cambria Math" panose="02040503050406030204" pitchFamily="18" charset="0"/>
-                      </a:rPr>
-                      <m:t>𝑘</m:t>
-                    </m:r>
-                  </m:oMath>
-                </a14:m>
-                <a:r>
-                  <a:rPr lang="pt-BR" dirty="0"/>
-                  <a:t>. </a:t>
-                </a:r>
-              </a:p>
-              <a:p>
-                <a:r>
-                  <a:rPr lang="pt-BR" dirty="0"/>
-                  <a:t>A mais comum é o método da silhueta.</a:t>
-                </a:r>
-              </a:p>
-              <a:p>
-                <a:r>
-                  <a:rPr lang="pt-BR" dirty="0"/>
-                  <a:t>O coeficiente de silhueta avalia a </a:t>
-                </a:r>
-                <a:r>
-                  <a:rPr lang="pt-BR" b="1" dirty="0"/>
-                  <a:t>qualidade da clusterização</a:t>
-                </a:r>
-                <a:r>
-                  <a:rPr lang="pt-BR" dirty="0"/>
-                  <a:t>, considerando a </a:t>
-                </a:r>
-                <a:r>
-                  <a:rPr lang="pt-BR" b="1" i="1" dirty="0">
-                    <a:solidFill>
-                      <a:schemeClr val="accent5"/>
-                    </a:solidFill>
-                  </a:rPr>
-                  <a:t>coesão dentro dos clusters e a separação entre eles</a:t>
-                </a:r>
-                <a:r>
-                  <a:rPr lang="pt-BR" dirty="0"/>
-                  <a:t>.</a:t>
-                </a:r>
-              </a:p>
-              <a:p>
-                <a:r>
-                  <a:rPr lang="pt-BR" dirty="0"/>
-                  <a:t>Escolhemos o número de clusters que maximiza o coeficiente.</a:t>
-                </a:r>
-              </a:p>
-              <a:p>
-                <a:r>
-                  <a:rPr lang="pt-BR" dirty="0"/>
-                  <a:t>A documentação da biblioteca </a:t>
-                </a:r>
-                <a:r>
-                  <a:rPr lang="pt-BR" dirty="0" err="1"/>
-                  <a:t>SciKit-Learn</a:t>
-                </a:r>
-                <a:r>
-                  <a:rPr lang="pt-BR" dirty="0"/>
-                  <a:t> contém um exemplo de como usar a coeficiente de silhueta para definir o melhor número de clusters.</a:t>
-                </a:r>
-              </a:p>
-              <a:p>
-                <a:pPr lvl="1">
-                  <a:buFont typeface="Wingdings" panose="05000000000000000000" pitchFamily="2" charset="2"/>
-                  <a:buChar char="§"/>
-                </a:pPr>
-                <a:r>
-                  <a:rPr lang="pt-BR" dirty="0">
-                    <a:hlinkClick r:id="rId2"/>
-                  </a:rPr>
-                  <a:t>https://scikit-learn.org/1.5/auto_examples/cluster/plot_kmeans_silhouette_analysis.html</a:t>
-                </a:r>
-                <a:endParaRPr lang="pt-BR" dirty="0"/>
-              </a:p>
-            </p:txBody>
-          </p:sp>
-        </mc:Choice>
-        <mc:Fallback>
-          <p:sp>
-            <p:nvSpPr>
-              <p:cNvPr id="3" name="Espaço Reservado para Conteúdo 2">
-                <a:extLst>
-                  <a:ext uri="{FF2B5EF4-FFF2-40B4-BE49-F238E27FC236}">
-                    <a16:creationId xmlns:a16="http://schemas.microsoft.com/office/drawing/2014/main" id="{7C91871B-A0D0-6F26-D59B-6230818E6267}"/>
-                  </a:ext>
-                </a:extLst>
-              </p:cNvPr>
-              <p:cNvSpPr>
-                <a:spLocks noGrp="1" noRot="1" noChangeAspect="1" noMove="1" noResize="1" noEditPoints="1" noAdjustHandles="1" noChangeArrowheads="1" noChangeShapeType="1" noTextEdit="1"/>
-              </p:cNvSpPr>
-              <p:nvPr>
-                <p:ph idx="1"/>
-              </p:nvPr>
-            </p:nvSpPr>
-            <p:spPr>
-              <a:xfrm>
-                <a:off x="838200" y="1825625"/>
-                <a:ext cx="11049000" cy="4351338"/>
-              </a:xfrm>
-              <a:blipFill>
-                <a:blip r:embed="rId3"/>
-                <a:stretch>
-                  <a:fillRect l="-993" t="-2241" r="-773"/>
-                </a:stretch>
-              </a:blipFill>
-            </p:spPr>
-            <p:txBody>
-              <a:bodyPr/>
-              <a:lstStyle/>
-              <a:p>
-                <a:r>
-                  <a:rPr lang="pt-BR">
-                    <a:noFill/>
-                  </a:rPr>
-                  <a:t> </a:t>
-                </a:r>
-              </a:p>
-            </p:txBody>
-          </p:sp>
-        </mc:Fallback>
-      </mc:AlternateContent>
-    </p:spTree>
-    <p:extLst>
-      <p:ext uri="{BB962C8B-B14F-4D97-AF65-F5344CB8AC3E}">
-        <p14:creationId xmlns:p14="http://schemas.microsoft.com/office/powerpoint/2010/main" val="2565590634"/>
-      </p:ext>
-    </p:extLst>
-  </p:cSld>
-  <p:clrMapOvr>
-    <a:masterClrMapping/>
-  </p:clrMapOvr>
-</p:sld>
-</file>
-
 <file path=ppt/slides/slide19.xml><?xml version="1.0" encoding="utf-8"?>
 <p:sld xmlns:a="http://schemas.openxmlformats.org/drawingml/2006/main" xmlns:r="http://schemas.openxmlformats.org/officeDocument/2006/relationships" xmlns:p="http://schemas.openxmlformats.org/presentationml/2006/main">
   <p:cSld>
@@ -9219,9 +9322,10 @@
           <a:lstStyle/>
           <a:p>
             <a:r>
-              <a:rPr lang="pt-BR" dirty="0"/>
-              <a:t>Tarefa</a:t>
-            </a:r>
+              <a:rPr lang="pt-BR" dirty="0" smtClean="0"/>
+              <a:t>Avisos</a:t>
+            </a:r>
+            <a:endParaRPr lang="pt-BR" dirty="0"/>
           </a:p>
         </p:txBody>
       </p:sp>
@@ -9235,44 +9339,129 @@
             <p:ph idx="1"/>
           </p:nvPr>
         </p:nvSpPr>
-        <p:spPr/>
-        <p:txBody>
-          <a:bodyPr/>
+        <p:spPr>
+          <a:xfrm>
+            <a:off x="838199" y="1825624"/>
+            <a:ext cx="11154879" cy="5032376"/>
+          </a:xfrm>
+        </p:spPr>
+        <p:txBody>
+          <a:bodyPr>
+            <a:normAutofit/>
+          </a:bodyPr>
           <a:lstStyle/>
           <a:p>
             <a:r>
-              <a:rPr lang="pt-BR" b="1" dirty="0"/>
-              <a:t>Quiz</a:t>
-            </a:r>
-            <a:r>
-              <a:rPr lang="pt-BR" dirty="0"/>
-              <a:t>: “</a:t>
-            </a:r>
-            <a:r>
-              <a:rPr lang="pt-BR" i="1" dirty="0"/>
-              <a:t>T320 - Quiz - Clustering</a:t>
-            </a:r>
-            <a:r>
-              <a:rPr lang="pt-BR" dirty="0"/>
-              <a:t>” que se encontra no MS Teams.</a:t>
-            </a:r>
-          </a:p>
-          <a:p>
-            <a:r>
-              <a:rPr lang="pt-BR" dirty="0"/>
-              <a:t>Essa atividade é </a:t>
-            </a:r>
-            <a:r>
-              <a:rPr lang="pt-BR" b="1" i="1" dirty="0">
+              <a:rPr lang="pt-BR" dirty="0" smtClean="0"/>
+              <a:t>Terminamos o conteúdo da disciplina.</a:t>
+            </a:r>
+          </a:p>
+          <a:p>
+            <a:r>
+              <a:rPr lang="pt-BR" dirty="0" smtClean="0"/>
+              <a:t>As próximas aulas serão para duvidas e conclusão do projeto.</a:t>
+            </a:r>
+            <a:endParaRPr lang="pt-BR" dirty="0" smtClean="0"/>
+          </a:p>
+          <a:p>
+            <a:r>
+              <a:rPr lang="pt-BR" b="1" dirty="0" smtClean="0"/>
+              <a:t>Projeto</a:t>
+            </a:r>
+            <a:r>
+              <a:rPr lang="pt-BR" dirty="0"/>
+              <a:t>: Projeto #2.</a:t>
+            </a:r>
+          </a:p>
+          <a:p>
+            <a:pPr lvl="1">
+              <a:buFont typeface="Wingdings" panose="05000000000000000000" pitchFamily="2" charset="2"/>
+              <a:buChar char="§"/>
+            </a:pPr>
+            <a:r>
+              <a:rPr lang="pt-BR" dirty="0"/>
+              <a:t>Projeto está no </a:t>
+            </a:r>
+            <a:r>
+              <a:rPr lang="pt-BR" dirty="0" err="1"/>
+              <a:t>github</a:t>
+            </a:r>
+            <a:r>
+              <a:rPr lang="pt-BR" dirty="0"/>
+              <a:t> e pode ser feito em grupos de no máximo 3 alunos</a:t>
+            </a:r>
+            <a:r>
+              <a:rPr lang="pt-BR" dirty="0" smtClean="0"/>
+              <a:t>.</a:t>
+            </a:r>
+            <a:endParaRPr lang="pt-BR" b="1" dirty="0" smtClean="0"/>
+          </a:p>
+          <a:p>
+            <a:pPr lvl="1">
+              <a:buFont typeface="Wingdings" panose="05000000000000000000" pitchFamily="2" charset="2"/>
+              <a:buChar char="§"/>
+            </a:pPr>
+            <a:r>
+              <a:rPr lang="pt-BR" b="1" dirty="0" smtClean="0"/>
+              <a:t>Entrega</a:t>
+            </a:r>
+            <a:r>
+              <a:rPr lang="pt-BR" dirty="0"/>
+              <a:t>: </a:t>
+            </a:r>
+            <a:r>
+              <a:rPr lang="pt-BR" b="1" dirty="0" smtClean="0">
                 <a:solidFill>
-                  <a:srgbClr val="7030A0"/>
+                  <a:srgbClr val="00B050"/>
                 </a:solidFill>
               </a:rPr>
-              <a:t>opcional</a:t>
+              <a:t>28/06/2026 </a:t>
+            </a:r>
+            <a:r>
+              <a:rPr lang="pt-BR" b="1" dirty="0">
+                <a:solidFill>
+                  <a:srgbClr val="00B050"/>
+                </a:solidFill>
+              </a:rPr>
+              <a:t>até às 23:59</a:t>
             </a:r>
             <a:r>
               <a:rPr lang="pt-BR" dirty="0"/>
               <a:t>.</a:t>
+            </a:r>
+          </a:p>
+          <a:p>
+            <a:pPr lvl="1">
+              <a:buFont typeface="Wingdings" panose="05000000000000000000" pitchFamily="2" charset="2"/>
+              <a:buChar char="§"/>
+            </a:pPr>
+            <a:r>
+              <a:rPr lang="pt-BR" dirty="0"/>
+              <a:t>Leiam os enunciados atentamente.</a:t>
+            </a:r>
+          </a:p>
+          <a:p>
+            <a:pPr lvl="1">
+              <a:buFont typeface="Wingdings" panose="05000000000000000000" pitchFamily="2" charset="2"/>
+              <a:buChar char="§"/>
+            </a:pPr>
+            <a:r>
+              <a:rPr lang="pt-BR" dirty="0"/>
+              <a:t>Apenas um integrante do grupo precisa fazer a entrega.</a:t>
+            </a:r>
+          </a:p>
+          <a:p>
+            <a:pPr lvl="1">
+              <a:buFont typeface="Wingdings" panose="05000000000000000000" pitchFamily="2" charset="2"/>
+              <a:buChar char="§"/>
+            </a:pPr>
+            <a:r>
+              <a:rPr lang="pt-BR" b="1" dirty="0">
+                <a:solidFill>
+                  <a:srgbClr val="FF0000"/>
+                </a:solidFill>
+              </a:rPr>
+              <a:t>Mas não se esqueçam de colocar os nomes de todos os integrantes do grupo.</a:t>
             </a:r>
           </a:p>
         </p:txBody>
@@ -9280,7 +9469,7 @@
     </p:spTree>
     <p:extLst>
       <p:ext uri="{BB962C8B-B14F-4D97-AF65-F5344CB8AC3E}">
-        <p14:creationId xmlns:p14="http://schemas.microsoft.com/office/powerpoint/2010/main" val="1713161608"/>
+        <p14:creationId xmlns:p14="http://schemas.microsoft.com/office/powerpoint/2010/main" val="86867747"/>
       </p:ext>
     </p:extLst>
   </p:cSld>
@@ -9376,7 +9565,19 @@
             </a:r>
             <a:r>
               <a:rPr lang="pt-BR" dirty="0"/>
-              <a:t> que visam criar agrupamentos de dados (chamados de </a:t>
+              <a:t> que visam criar </a:t>
+            </a:r>
+            <a:r>
+              <a:rPr lang="pt-BR" b="1" i="1" dirty="0">
+                <a:solidFill>
+                  <a:srgbClr val="7030A0"/>
+                </a:solidFill>
+              </a:rPr>
+              <a:t>agrupamentos de dados</a:t>
+            </a:r>
+            <a:r>
+              <a:rPr lang="pt-BR" dirty="0"/>
+              <a:t> (chamados de </a:t>
             </a:r>
             <a:r>
               <a:rPr lang="pt-BR" b="1" i="1" dirty="0"/>
@@ -9478,7 +9679,7 @@
           <p:cNvPr id="4" name="Título 1">
             <a:extLst>
               <a:ext uri="{FF2B5EF4-FFF2-40B4-BE49-F238E27FC236}">
-                <a16:creationId xmlns:a16="http://schemas.microsoft.com/office/drawing/2014/main" id="{32666AC8-2E17-4DB4-B0F5-60C640CCFD2E}"/>
+                <a16:creationId xmlns:a16="http://schemas.microsoft.com/office/drawing/2014/main" xmlns="" id="{32666AC8-2E17-4DB4-B0F5-60C640CCFD2E}"/>
               </a:ext>
             </a:extLst>
           </p:cNvPr>
@@ -9796,7 +9997,7 @@
           <p:cNvPr id="4" name="Título 1">
             <a:extLst>
               <a:ext uri="{FF2B5EF4-FFF2-40B4-BE49-F238E27FC236}">
-                <a16:creationId xmlns:a16="http://schemas.microsoft.com/office/drawing/2014/main" id="{32666AC8-2E17-4DB4-B0F5-60C640CCFD2E}"/>
+                <a16:creationId xmlns:a16="http://schemas.microsoft.com/office/drawing/2014/main" xmlns="" id="{32666AC8-2E17-4DB4-B0F5-60C640CCFD2E}"/>
               </a:ext>
             </a:extLst>
           </p:cNvPr>
@@ -9922,8 +10123,21 @@
           <a:p>
             <a:r>
               <a:rPr lang="pt-BR" dirty="0"/>
-              <a:t>O que podemos fazer se não tivermos informações sobre as classes (i.e., rótulos) a que pertencem os exemplos de entrada?</a:t>
-            </a:r>
+              <a:t>O que podemos fazer </a:t>
+            </a:r>
+            <a:r>
+              <a:rPr lang="pt-BR" dirty="0" smtClean="0"/>
+              <a:t>quando não temos informações </a:t>
+            </a:r>
+            <a:r>
+              <a:rPr lang="pt-BR" dirty="0"/>
+              <a:t>sobre as classes (i.e., rótulos) a que pertencem os exemplos </a:t>
+            </a:r>
+            <a:r>
+              <a:rPr lang="pt-BR" dirty="0" smtClean="0"/>
+              <a:t>de um conjunto de dados?</a:t>
+            </a:r>
+            <a:endParaRPr lang="pt-BR" dirty="0"/>
           </a:p>
         </p:txBody>
       </p:sp>
@@ -9984,10 +10198,142 @@
   <p:cSld>
     <p:spTree>
       <p:nvGrpSpPr>
+        <p:cNvPr id="1" name=""/>
+        <p:cNvGrpSpPr/>
+        <p:nvPr/>
+      </p:nvGrpSpPr>
+      <p:grpSpPr>
+        <a:xfrm>
+          <a:off x="0" y="0"/>
+          <a:ext cx="0" cy="0"/>
+          <a:chOff x="0" y="0"/>
+          <a:chExt cx="0" cy="0"/>
+        </a:xfrm>
+      </p:grpSpPr>
+      <p:sp>
+        <p:nvSpPr>
+          <p:cNvPr id="2" name="Title 1"/>
+          <p:cNvSpPr>
+            <a:spLocks noGrp="1"/>
+          </p:cNvSpPr>
+          <p:nvPr>
+            <p:ph type="title"/>
+          </p:nvPr>
+        </p:nvSpPr>
+        <p:spPr/>
+        <p:txBody>
+          <a:bodyPr/>
+          <a:lstStyle/>
+          <a:p>
+            <a:r>
+              <a:rPr lang="pt-BR" dirty="0"/>
+              <a:t>Motivação</a:t>
+            </a:r>
+          </a:p>
+        </p:txBody>
+      </p:sp>
+      <p:sp>
+        <p:nvSpPr>
+          <p:cNvPr id="7" name="Content Placeholder 2"/>
+          <p:cNvSpPr>
+            <a:spLocks noGrp="1"/>
+          </p:cNvSpPr>
+          <p:nvPr>
+            <p:ph idx="1"/>
+          </p:nvPr>
+        </p:nvSpPr>
+        <p:spPr>
+          <a:xfrm>
+            <a:off x="5802087" y="1690688"/>
+            <a:ext cx="6240978" cy="5036683"/>
+          </a:xfrm>
+        </p:spPr>
+        <p:txBody>
+          <a:bodyPr>
+            <a:normAutofit/>
+          </a:bodyPr>
+          <a:lstStyle/>
+          <a:p>
+            <a:r>
+              <a:rPr lang="pt-BR" dirty="0" smtClean="0"/>
+              <a:t>Na figura ao lado, não sabemos a que classe ou classes pertencem os dados, mas podemos observar que alguns exemplos estão </a:t>
+            </a:r>
+            <a:r>
+              <a:rPr lang="pt-BR" b="1" i="1" dirty="0" smtClean="0">
+                <a:solidFill>
+                  <a:srgbClr val="7030A0"/>
+                </a:solidFill>
+              </a:rPr>
+              <a:t>próximos uns dos outros</a:t>
+            </a:r>
+            <a:r>
+              <a:rPr lang="pt-BR" dirty="0" smtClean="0"/>
+              <a:t>, formando grupos.</a:t>
+            </a:r>
+          </a:p>
+        </p:txBody>
+      </p:sp>
+      <p:pic>
+        <p:nvPicPr>
+          <p:cNvPr id="6" name="Picture 2" descr="K-Means Clustering using Python. Welcome back guys! Hope you had a great… |  by Luigi Fiori | Medium"/>
+          <p:cNvPicPr>
+            <a:picLocks noChangeAspect="1" noChangeArrowheads="1"/>
+          </p:cNvPicPr>
+          <p:nvPr/>
+        </p:nvPicPr>
+        <p:blipFill rotWithShape="1">
+          <a:blip r:embed="rId3">
+            <a:extLst>
+              <a:ext uri="{28A0092B-C50C-407E-A947-70E740481C1C}">
+                <a14:useLocalDpi xmlns:a14="http://schemas.microsoft.com/office/drawing/2010/main" val="0"/>
+              </a:ext>
+            </a:extLst>
+          </a:blip>
+          <a:srcRect l="1639" t="3709" r="55246" b="11854"/>
+          <a:stretch/>
+        </p:blipFill>
+        <p:spPr bwMode="auto">
+          <a:xfrm>
+            <a:off x="1090832" y="2101933"/>
+            <a:ext cx="3894188" cy="3177638"/>
+          </a:xfrm>
+          <a:prstGeom prst="rect">
+            <a:avLst/>
+          </a:prstGeom>
+          <a:noFill/>
+          <a:extLst>
+            <a:ext uri="{909E8E84-426E-40DD-AFC4-6F175D3DCCD1}">
+              <a14:hiddenFill xmlns:a14="http://schemas.microsoft.com/office/drawing/2010/main">
+                <a:solidFill>
+                  <a:srgbClr val="FFFFFF"/>
+                </a:solidFill>
+              </a14:hiddenFill>
+            </a:ext>
+          </a:extLst>
+        </p:spPr>
+      </p:pic>
+    </p:spTree>
+    <p:extLst>
+      <p:ext uri="{BB962C8B-B14F-4D97-AF65-F5344CB8AC3E}">
+        <p14:creationId xmlns:p14="http://schemas.microsoft.com/office/powerpoint/2010/main" val="3164313964"/>
+      </p:ext>
+    </p:extLst>
+  </p:cSld>
+  <p:clrMapOvr>
+    <a:masterClrMapping/>
+  </p:clrMapOvr>
+</p:sld>
+</file>
+
+<file path=ppt/slides/slide5.xml><?xml version="1.0" encoding="utf-8"?>
+<p:sld xmlns:a="http://schemas.openxmlformats.org/drawingml/2006/main" xmlns:r="http://schemas.openxmlformats.org/officeDocument/2006/relationships" xmlns:p="http://schemas.openxmlformats.org/presentationml/2006/main">
+  <p:cSld>
+    <p:spTree>
+      <p:nvGrpSpPr>
         <p:cNvPr id="1" name="">
           <a:extLst>
             <a:ext uri="{FF2B5EF4-FFF2-40B4-BE49-F238E27FC236}">
-              <a16:creationId xmlns:a16="http://schemas.microsoft.com/office/drawing/2014/main" id="{E5F23F1A-965B-E657-4F46-B48EB78CFF12}"/>
+              <a16:creationId xmlns:a16="http://schemas.microsoft.com/office/drawing/2014/main" xmlns="" id="{E5F23F1A-965B-E657-4F46-B48EB78CFF12}"/>
             </a:ext>
           </a:extLst>
         </p:cNvPr>
@@ -10007,7 +10353,7 @@
           <p:cNvPr id="2" name="Title 1">
             <a:extLst>
               <a:ext uri="{FF2B5EF4-FFF2-40B4-BE49-F238E27FC236}">
-                <a16:creationId xmlns:a16="http://schemas.microsoft.com/office/drawing/2014/main" id="{1D2CEC37-D651-72A5-0293-3FB911F60F37}"/>
+                <a16:creationId xmlns:a16="http://schemas.microsoft.com/office/drawing/2014/main" xmlns="" id="{1D2CEC37-D651-72A5-0293-3FB911F60F37}"/>
               </a:ext>
             </a:extLst>
           </p:cNvPr>
@@ -10035,7 +10381,7 @@
           <p:cNvPr id="7" name="Content Placeholder 2">
             <a:extLst>
               <a:ext uri="{FF2B5EF4-FFF2-40B4-BE49-F238E27FC236}">
-                <a16:creationId xmlns:a16="http://schemas.microsoft.com/office/drawing/2014/main" id="{B3C1A135-4B52-F54B-5BDE-7C6DA1069706}"/>
+                <a16:creationId xmlns:a16="http://schemas.microsoft.com/office/drawing/2014/main" xmlns="" id="{B3C1A135-4B52-F54B-5BDE-7C6DA1069706}"/>
               </a:ext>
             </a:extLst>
           </p:cNvPr>
@@ -10048,8 +10394,8 @@
         </p:nvSpPr>
         <p:spPr>
           <a:xfrm>
-            <a:off x="838199" y="4052457"/>
-            <a:ext cx="11204865" cy="2674914"/>
+            <a:off x="838199" y="4572000"/>
+            <a:ext cx="11204865" cy="2285999"/>
           </a:xfrm>
         </p:spPr>
         <p:txBody>
@@ -10060,58 +10406,46 @@
           <a:p>
             <a:r>
               <a:rPr lang="pt-BR" dirty="0"/>
-              <a:t>Veremos que informações úteis podem ser obtidas mesmo de exemplos cujas classes não são conhecidas.</a:t>
-            </a:r>
-          </a:p>
-          <a:p>
-            <a:r>
-              <a:rPr lang="pt-BR" dirty="0"/>
-              <a:t>Enquanto o </a:t>
-            </a:r>
-            <a:r>
-              <a:rPr lang="pt-BR" b="1" i="1" dirty="0"/>
-              <a:t>aprendizado supervisionado </a:t>
-            </a:r>
-            <a:r>
-              <a:rPr lang="pt-BR" dirty="0"/>
-              <a:t>se concentra na </a:t>
-            </a:r>
-            <a:r>
-              <a:rPr lang="pt-BR" b="1" i="1" dirty="0">
+              <a:t>A tarefa mais popular dos algoritmos de aprendizado não supervisionado é a </a:t>
+            </a:r>
+            <a:r>
+              <a:rPr lang="pt-BR" b="1" i="1" dirty="0" smtClean="0">
                 <a:solidFill>
                   <a:srgbClr val="00B050"/>
                 </a:solidFill>
               </a:rPr>
-              <a:t>indução de classificadores</a:t>
-            </a:r>
-            <a:r>
-              <a:rPr lang="pt-BR" dirty="0"/>
-              <a:t>, o </a:t>
-            </a:r>
-            <a:r>
-              <a:rPr lang="pt-BR" b="1" i="1" dirty="0"/>
-              <a:t>aprendizado não-supervisionado </a:t>
-            </a:r>
-            <a:r>
-              <a:rPr lang="pt-BR" dirty="0"/>
-              <a:t>está interessado em </a:t>
-            </a:r>
-            <a:r>
-              <a:rPr lang="pt-BR" b="1" i="1" dirty="0">
+              <a:t>identificação de </a:t>
+            </a:r>
+            <a:r>
+              <a:rPr lang="pt-BR" b="1" i="1" dirty="0" smtClean="0">
                 <a:solidFill>
                   <a:srgbClr val="7030A0"/>
                 </a:solidFill>
               </a:rPr>
-              <a:t>descobrir propriedades úteis dos dados disponíveis</a:t>
-            </a:r>
-            <a:r>
-              <a:rPr lang="pt-BR" dirty="0"/>
-              <a:t>.</a:t>
-            </a:r>
-            <a:endParaRPr lang="en-US" dirty="0"/>
-          </a:p>
-          <a:p>
-            <a:endParaRPr lang="pt-BR" dirty="0"/>
+              <a:t>clusters</a:t>
+            </a:r>
+            <a:r>
+              <a:rPr lang="pt-BR" dirty="0" smtClean="0"/>
+              <a:t>. </a:t>
+            </a:r>
+          </a:p>
+          <a:p>
+            <a:r>
+              <a:rPr lang="pt-BR" dirty="0" smtClean="0"/>
+              <a:t>Veremos que com eles, podemos obter informações uteis de dados não rotulados usando algum critério de </a:t>
+            </a:r>
+            <a:r>
+              <a:rPr lang="pt-BR" b="1" dirty="0" smtClean="0">
+                <a:solidFill>
+                  <a:schemeClr val="accent2"/>
+                </a:solidFill>
+              </a:rPr>
+              <a:t>similaridade entre eles</a:t>
+            </a:r>
+            <a:r>
+              <a:rPr lang="pt-BR" b="1" dirty="0" smtClean="0"/>
+              <a:t> (e.g., a distância).</a:t>
+            </a:r>
           </a:p>
         </p:txBody>
       </p:sp>
@@ -10120,7 +10454,7 @@
           <p:cNvPr id="5" name="Grupo 4">
             <a:extLst>
               <a:ext uri="{FF2B5EF4-FFF2-40B4-BE49-F238E27FC236}">
-                <a16:creationId xmlns:a16="http://schemas.microsoft.com/office/drawing/2014/main" id="{FD3AFEA6-16E8-D562-210E-DDE126CC469D}"/>
+                <a16:creationId xmlns:a16="http://schemas.microsoft.com/office/drawing/2014/main" xmlns="" id="{FD3AFEA6-16E8-D562-210E-DDE126CC469D}"/>
               </a:ext>
             </a:extLst>
           </p:cNvPr>
@@ -10129,8 +10463,8 @@
         </p:nvGrpSpPr>
         <p:grpSpPr>
           <a:xfrm>
-            <a:off x="3115576" y="1690688"/>
-            <a:ext cx="5960847" cy="2029172"/>
+            <a:off x="2674464" y="1690688"/>
+            <a:ext cx="6868547" cy="2748308"/>
             <a:chOff x="3186691" y="4631401"/>
             <a:chExt cx="5960847" cy="2029172"/>
           </a:xfrm>
@@ -10140,7 +10474,7 @@
             <p:cNvPr id="6" name="Picture 2" descr="K-Means Clustering using Python. Welcome back guys! Hope you had a great… |  by Luigi Fiori | Medium">
               <a:extLst>
                 <a:ext uri="{FF2B5EF4-FFF2-40B4-BE49-F238E27FC236}">
-                  <a16:creationId xmlns:a16="http://schemas.microsoft.com/office/drawing/2014/main" id="{5EE61C46-3856-780A-E6BB-BC8EBB4234F4}"/>
+                  <a16:creationId xmlns:a16="http://schemas.microsoft.com/office/drawing/2014/main" xmlns="" id="{5EE61C46-3856-780A-E6BB-BC8EBB4234F4}"/>
                 </a:ext>
               </a:extLst>
             </p:cNvPr>
@@ -10185,7 +10519,7 @@
             <p:cNvPr id="8" name="CaixaDeTexto 7">
               <a:extLst>
                 <a:ext uri="{FF2B5EF4-FFF2-40B4-BE49-F238E27FC236}">
-                  <a16:creationId xmlns:a16="http://schemas.microsoft.com/office/drawing/2014/main" id="{843AD3E7-A8FE-599D-36F8-EA8BA9682F1B}"/>
+                  <a16:creationId xmlns:a16="http://schemas.microsoft.com/office/drawing/2014/main" xmlns="" id="{843AD3E7-A8FE-599D-36F8-EA8BA9682F1B}"/>
                 </a:ext>
               </a:extLst>
             </p:cNvPr>
@@ -10210,10 +10544,10 @@
             <a:p>
               <a:pPr algn="ctr"/>
               <a:r>
-                <a:rPr lang="pt-BR" sz="1400" b="1" dirty="0" err="1"/>
+                <a:rPr lang="pt-BR" sz="1400" b="1" i="1" dirty="0" err="1"/>
                 <a:t>clustering</a:t>
               </a:r>
-              <a:endParaRPr lang="en-US" sz="1400" b="1" dirty="0"/>
+              <a:endParaRPr lang="en-US" sz="1400" b="1" i="1" dirty="0"/>
             </a:p>
           </p:txBody>
         </p:sp>
@@ -10222,7 +10556,7 @@
             <p:cNvPr id="9" name="Picture 2" descr="K-Means Clustering using Python. Welcome back guys! Hope you had a great… |  by Luigi Fiori | Medium">
               <a:extLst>
                 <a:ext uri="{FF2B5EF4-FFF2-40B4-BE49-F238E27FC236}">
-                  <a16:creationId xmlns:a16="http://schemas.microsoft.com/office/drawing/2014/main" id="{E7C74A0F-F2DD-912F-E092-3530D068D40B}"/>
+                  <a16:creationId xmlns:a16="http://schemas.microsoft.com/office/drawing/2014/main" xmlns="" id="{E7C74A0F-F2DD-912F-E092-3530D068D40B}"/>
                 </a:ext>
               </a:extLst>
             </p:cNvPr>
@@ -10267,7 +10601,7 @@
             <p:cNvPr id="10" name="Seta para a direita 9">
               <a:extLst>
                 <a:ext uri="{FF2B5EF4-FFF2-40B4-BE49-F238E27FC236}">
-                  <a16:creationId xmlns:a16="http://schemas.microsoft.com/office/drawing/2014/main" id="{88A77E2D-B8CF-1AE8-8196-DD8F94371FF0}"/>
+                  <a16:creationId xmlns:a16="http://schemas.microsoft.com/office/drawing/2014/main" xmlns="" id="{88A77E2D-B8CF-1AE8-8196-DD8F94371FF0}"/>
                 </a:ext>
               </a:extLst>
             </p:cNvPr>
@@ -10325,276 +10659,6 @@
 </p:sld>
 </file>
 
-<file path=ppt/slides/slide5.xml><?xml version="1.0" encoding="utf-8"?>
-<p:sld xmlns:a="http://schemas.openxmlformats.org/drawingml/2006/main" xmlns:r="http://schemas.openxmlformats.org/officeDocument/2006/relationships" xmlns:p="http://schemas.openxmlformats.org/presentationml/2006/main">
-  <p:cSld>
-    <p:spTree>
-      <p:nvGrpSpPr>
-        <p:cNvPr id="1" name=""/>
-        <p:cNvGrpSpPr/>
-        <p:nvPr/>
-      </p:nvGrpSpPr>
-      <p:grpSpPr>
-        <a:xfrm>
-          <a:off x="0" y="0"/>
-          <a:ext cx="0" cy="0"/>
-          <a:chOff x="0" y="0"/>
-          <a:chExt cx="0" cy="0"/>
-        </a:xfrm>
-      </p:grpSpPr>
-      <p:sp>
-        <p:nvSpPr>
-          <p:cNvPr id="2" name="Title 1"/>
-          <p:cNvSpPr>
-            <a:spLocks noGrp="1"/>
-          </p:cNvSpPr>
-          <p:nvPr>
-            <p:ph type="title"/>
-          </p:nvPr>
-        </p:nvSpPr>
-        <p:spPr/>
-        <p:txBody>
-          <a:bodyPr/>
-          <a:lstStyle/>
-          <a:p>
-            <a:r>
-              <a:rPr lang="pt-BR" dirty="0"/>
-              <a:t>Motivação</a:t>
-            </a:r>
-          </a:p>
-        </p:txBody>
-      </p:sp>
-      <p:sp>
-        <p:nvSpPr>
-          <p:cNvPr id="7" name="Content Placeholder 2"/>
-          <p:cNvSpPr>
-            <a:spLocks noGrp="1"/>
-          </p:cNvSpPr>
-          <p:nvPr>
-            <p:ph idx="1"/>
-          </p:nvPr>
-        </p:nvSpPr>
-        <p:spPr>
-          <a:xfrm>
-            <a:off x="4996543" y="1690688"/>
-            <a:ext cx="7046521" cy="5167311"/>
-          </a:xfrm>
-        </p:spPr>
-        <p:txBody>
-          <a:bodyPr>
-            <a:normAutofit/>
-          </a:bodyPr>
-          <a:lstStyle/>
-          <a:p>
-            <a:r>
-              <a:rPr lang="pt-BR" dirty="0"/>
-              <a:t>A tarefa mais popular dos algoritmos deste paradigma é a procura por </a:t>
-            </a:r>
-            <a:r>
-              <a:rPr lang="pt-BR" b="1" i="1" dirty="0"/>
-              <a:t>grupos</a:t>
-            </a:r>
-            <a:r>
-              <a:rPr lang="pt-BR" dirty="0"/>
-              <a:t> (chamados </a:t>
-            </a:r>
-            <a:r>
-              <a:rPr lang="pt-BR" b="1" i="1" dirty="0">
-                <a:solidFill>
-                  <a:srgbClr val="7030A0"/>
-                </a:solidFill>
-              </a:rPr>
-              <a:t>clusters</a:t>
-            </a:r>
-            <a:r>
-              <a:rPr lang="pt-BR" dirty="0"/>
-              <a:t>) de </a:t>
-            </a:r>
-            <a:r>
-              <a:rPr lang="pt-BR" b="1" i="1" dirty="0">
-                <a:solidFill>
-                  <a:srgbClr val="7030A0"/>
-                </a:solidFill>
-              </a:rPr>
-              <a:t>exemplos semelhantes</a:t>
-            </a:r>
-            <a:r>
-              <a:rPr lang="pt-BR" dirty="0"/>
-              <a:t>. </a:t>
-            </a:r>
-          </a:p>
-          <a:p>
-            <a:r>
-              <a:rPr lang="pt-BR" dirty="0"/>
-              <a:t>Os </a:t>
-            </a:r>
-            <a:r>
-              <a:rPr lang="pt-BR" b="1" i="1" dirty="0">
-                <a:solidFill>
-                  <a:schemeClr val="accent2"/>
-                </a:solidFill>
-              </a:rPr>
-              <a:t>centroides</a:t>
-            </a:r>
-            <a:r>
-              <a:rPr lang="pt-BR" dirty="0"/>
-              <a:t> desses </a:t>
-            </a:r>
-            <a:r>
-              <a:rPr lang="pt-BR" b="1" i="1" dirty="0"/>
-              <a:t>clusters</a:t>
-            </a:r>
-            <a:r>
-              <a:rPr lang="pt-BR" dirty="0"/>
-              <a:t> podem então ser usados ​​como </a:t>
-            </a:r>
-          </a:p>
-          <a:p>
-            <a:pPr lvl="1">
-              <a:buFont typeface="Wingdings" panose="05000000000000000000" pitchFamily="2" charset="2"/>
-              <a:buChar char="§"/>
-            </a:pPr>
-            <a:r>
-              <a:rPr lang="pt-BR" dirty="0"/>
-              <a:t>centros para redes Bayesianas ou de </a:t>
-            </a:r>
-            <a:r>
-              <a:rPr lang="en-US" dirty="0" err="1"/>
-              <a:t>Função</a:t>
-            </a:r>
-            <a:r>
-              <a:rPr lang="en-US" dirty="0"/>
-              <a:t> de base radial (</a:t>
-            </a:r>
-            <a:r>
-              <a:rPr lang="pt-BR" dirty="0"/>
-              <a:t>RBF), </a:t>
-            </a:r>
-          </a:p>
-          <a:p>
-            <a:pPr lvl="1">
-              <a:buFont typeface="Wingdings" panose="05000000000000000000" pitchFamily="2" charset="2"/>
-              <a:buChar char="§"/>
-            </a:pPr>
-            <a:r>
-              <a:rPr lang="pt-BR" dirty="0"/>
-              <a:t>estimativas de valores de atributos desconhecidos (ou ausentes),</a:t>
-            </a:r>
-          </a:p>
-          <a:p>
-            <a:pPr lvl="1">
-              <a:buFont typeface="Wingdings" panose="05000000000000000000" pitchFamily="2" charset="2"/>
-              <a:buChar char="§"/>
-            </a:pPr>
-            <a:r>
-              <a:rPr lang="pt-BR" dirty="0"/>
-              <a:t>ferramentas de visualização de dados multidimensionais,</a:t>
-            </a:r>
-          </a:p>
-          <a:p>
-            <a:pPr lvl="1">
-              <a:buFont typeface="Wingdings" panose="05000000000000000000" pitchFamily="2" charset="2"/>
-              <a:buChar char="§"/>
-            </a:pPr>
-            <a:r>
-              <a:rPr lang="pt-BR" dirty="0"/>
-              <a:t>auxiliares para criação de classificadores mais simples.</a:t>
-            </a:r>
-          </a:p>
-        </p:txBody>
-      </p:sp>
-      <p:pic>
-        <p:nvPicPr>
-          <p:cNvPr id="2050" name="Picture 2" descr="K-means clustering on the digits dataset (PCA-reduced data) Centroids are marked with white cross"/>
-          <p:cNvPicPr>
-            <a:picLocks noChangeAspect="1" noChangeArrowheads="1"/>
-          </p:cNvPicPr>
-          <p:nvPr/>
-        </p:nvPicPr>
-        <p:blipFill rotWithShape="1">
-          <a:blip r:embed="rId3">
-            <a:extLst>
-              <a:ext uri="{28A0092B-C50C-407E-A947-70E740481C1C}">
-                <a14:useLocalDpi xmlns:a14="http://schemas.microsoft.com/office/drawing/2010/main" val="0"/>
-              </a:ext>
-            </a:extLst>
-          </a:blip>
-          <a:srcRect l="12278" t="11622" r="9484" b="10196"/>
-          <a:stretch/>
-        </p:blipFill>
-        <p:spPr bwMode="auto">
-          <a:xfrm>
-            <a:off x="838200" y="2471058"/>
-            <a:ext cx="3780793" cy="2833534"/>
-          </a:xfrm>
-          <a:prstGeom prst="rect">
-            <a:avLst/>
-          </a:prstGeom>
-          <a:noFill/>
-          <a:extLst>
-            <a:ext uri="{909E8E84-426E-40DD-AFC4-6F175D3DCCD1}">
-              <a14:hiddenFill xmlns:a14="http://schemas.microsoft.com/office/drawing/2010/main">
-                <a:solidFill>
-                  <a:srgbClr val="FFFFFF"/>
-                </a:solidFill>
-              </a14:hiddenFill>
-            </a:ext>
-          </a:extLst>
-        </p:spPr>
-      </p:pic>
-      <p:sp>
-        <p:nvSpPr>
-          <p:cNvPr id="4" name="CaixaDeTexto 3">
-            <a:extLst>
-              <a:ext uri="{FF2B5EF4-FFF2-40B4-BE49-F238E27FC236}">
-                <a16:creationId xmlns:a16="http://schemas.microsoft.com/office/drawing/2014/main" id="{8983938C-72D4-9E58-2CE8-D43E36E7012F}"/>
-              </a:ext>
-            </a:extLst>
-          </p:cNvPr>
-          <p:cNvSpPr txBox="1"/>
-          <p:nvPr/>
-        </p:nvSpPr>
-        <p:spPr>
-          <a:xfrm>
-            <a:off x="838200" y="5292546"/>
-            <a:ext cx="3780793" cy="1200329"/>
-          </a:xfrm>
-          <a:prstGeom prst="rect">
-            <a:avLst/>
-          </a:prstGeom>
-          <a:noFill/>
-        </p:spPr>
-        <p:txBody>
-          <a:bodyPr wrap="square">
-            <a:spAutoFit/>
-          </a:bodyPr>
-          <a:lstStyle/>
-          <a:p>
-            <a:pPr algn="ctr"/>
-            <a:r>
-              <a:rPr lang="pt-BR" b="1" dirty="0"/>
-              <a:t>centroide</a:t>
-            </a:r>
-            <a:r>
-              <a:rPr lang="pt-BR" dirty="0"/>
-              <a:t> é o ponto central de um cluster de dados. Representa a "média" das amostras dentro do cluster.</a:t>
-            </a:r>
-          </a:p>
-        </p:txBody>
-      </p:sp>
-    </p:spTree>
-    <p:extLst>
-      <p:ext uri="{BB962C8B-B14F-4D97-AF65-F5344CB8AC3E}">
-        <p14:creationId xmlns:p14="http://schemas.microsoft.com/office/powerpoint/2010/main" val="794970236"/>
-      </p:ext>
-    </p:extLst>
-  </p:cSld>
-  <p:clrMapOvr>
-    <a:masterClrMapping/>
-  </p:clrMapOvr>
-</p:sld>
-</file>
-
 <file path=ppt/slides/slide6.xml><?xml version="1.0" encoding="utf-8"?>
 <p:sld xmlns:a="http://schemas.openxmlformats.org/drawingml/2006/main" xmlns:r="http://schemas.openxmlformats.org/officeDocument/2006/relationships" xmlns:p="http://schemas.openxmlformats.org/presentationml/2006/main">
   <p:cSld>
@@ -10650,8 +10714,8 @@
         </p:nvSpPr>
         <p:spPr>
           <a:xfrm>
-            <a:off x="838199" y="1825625"/>
-            <a:ext cx="11194473" cy="5032376"/>
+            <a:off x="838200" y="4921135"/>
+            <a:ext cx="11353800" cy="1936866"/>
           </a:xfrm>
         </p:spPr>
         <p:txBody>
@@ -10659,46 +10723,24 @@
           <a:lstStyle/>
           <a:p>
             <a:r>
-              <a:rPr lang="pt-BR" dirty="0"/>
-              <a:t>A </a:t>
-            </a:r>
-            <a:r>
-              <a:rPr lang="pt-BR" b="1" i="1" dirty="0">
+              <a:rPr lang="pt-BR" dirty="0" smtClean="0"/>
+              <a:t>Na tarefa de </a:t>
+            </a:r>
+            <a:r>
+              <a:rPr lang="pt-BR" b="1" i="1" dirty="0" smtClean="0">
                 <a:solidFill>
                   <a:schemeClr val="accent2"/>
                 </a:solidFill>
               </a:rPr>
-              <a:t>tarefa fundamental </a:t>
-            </a:r>
-            <a:r>
-              <a:rPr lang="pt-BR" dirty="0"/>
-              <a:t>do </a:t>
-            </a:r>
-            <a:r>
-              <a:rPr lang="pt-BR" b="1" i="1" dirty="0"/>
-              <a:t>aprendizado não-supervisionado </a:t>
-            </a:r>
-            <a:r>
-              <a:rPr lang="pt-BR" dirty="0"/>
-              <a:t>é a </a:t>
-            </a:r>
-            <a:r>
-              <a:rPr lang="pt-BR" b="1" i="1" dirty="0">
-                <a:solidFill>
-                  <a:srgbClr val="7030A0"/>
-                </a:solidFill>
-              </a:rPr>
               <a:t>identificação de clusters</a:t>
             </a:r>
             <a:r>
-              <a:rPr lang="pt-BR" dirty="0"/>
-              <a:t>. </a:t>
-            </a:r>
-          </a:p>
-          <a:p>
-            <a:r>
-              <a:rPr lang="pt-BR" dirty="0"/>
-              <a:t>Nessa tarefa, a </a:t>
+              <a:rPr lang="pt-BR" dirty="0" smtClean="0"/>
+              <a:t>, </a:t>
+            </a:r>
+            <a:r>
+              <a:rPr lang="pt-BR" dirty="0"/>
+              <a:t>a </a:t>
             </a:r>
             <a:r>
               <a:rPr lang="pt-BR" b="1" i="1" dirty="0">
@@ -10722,7 +10764,19 @@
             </a:r>
             <a:r>
               <a:rPr lang="pt-BR" dirty="0"/>
-              <a:t>(i.e., exemplos), </a:t>
+              <a:t>(i.e., </a:t>
+            </a:r>
+            <a:r>
+              <a:rPr lang="pt-BR" dirty="0" smtClean="0"/>
+              <a:t>exemplos) </a:t>
+            </a:r>
+            <a:r>
+              <a:rPr lang="pt-BR" b="1" i="1" dirty="0" smtClean="0">
+                <a:solidFill>
+                  <a:srgbClr val="FF0000"/>
+                </a:solidFill>
+              </a:rPr>
+              <a:t>sem </a:t>
             </a:r>
             <a:r>
               <a:rPr lang="pt-BR" b="1" i="1" dirty="0">
@@ -10730,7 +10784,7 @@
                   <a:srgbClr val="FF0000"/>
                 </a:solidFill>
               </a:rPr>
-              <a:t>mas sem rótulos</a:t>
+              <a:t>rótulos</a:t>
             </a:r>
             <a:r>
               <a:rPr lang="pt-BR" dirty="0"/>
@@ -10752,7 +10806,11 @@
             </a:r>
             <a:r>
               <a:rPr lang="pt-BR" dirty="0"/>
-              <a:t> é um conjunto com os </a:t>
+              <a:t> </a:t>
+            </a:r>
+            <a:r>
+              <a:rPr lang="pt-BR" dirty="0" smtClean="0"/>
+              <a:t>são valores indicando os </a:t>
             </a:r>
             <a:r>
               <a:rPr lang="pt-BR" b="1" i="1" dirty="0">
@@ -10777,8 +10835,8 @@
         </p:nvGrpSpPr>
         <p:grpSpPr>
           <a:xfrm>
-            <a:off x="1078958" y="4579446"/>
-            <a:ext cx="5960847" cy="2029172"/>
+            <a:off x="838200" y="2074134"/>
+            <a:ext cx="6718380" cy="2463555"/>
             <a:chOff x="3186691" y="4631401"/>
             <a:chExt cx="5960847" cy="2029172"/>
           </a:xfrm>
@@ -10831,7 +10889,7 @@
           <p:spPr>
             <a:xfrm>
               <a:off x="5584396" y="5199404"/>
-              <a:ext cx="1130804" cy="307777"/>
+              <a:ext cx="1130804" cy="253509"/>
             </a:xfrm>
             <a:prstGeom prst="rect">
               <a:avLst/>
@@ -10846,10 +10904,10 @@
             <a:p>
               <a:pPr algn="ctr"/>
               <a:r>
-                <a:rPr lang="pt-BR" sz="1400" b="1" dirty="0" err="1"/>
+                <a:rPr lang="pt-BR" sz="1400" b="1" i="1" dirty="0" err="1"/>
                 <a:t>clustering</a:t>
               </a:r>
-              <a:endParaRPr lang="en-US" sz="1400" b="1" dirty="0"/>
+              <a:endParaRPr lang="en-US" sz="1400" b="1" i="1" dirty="0"/>
             </a:p>
           </p:txBody>
         </p:sp>
@@ -10944,8 +11002,8 @@
         </p:nvSpPr>
         <p:spPr>
           <a:xfrm>
-            <a:off x="7168503" y="4854292"/>
-            <a:ext cx="4839707" cy="1477328"/>
+            <a:off x="7912411" y="2743740"/>
+            <a:ext cx="3891662" cy="1169551"/>
           </a:xfrm>
           <a:prstGeom prst="rect">
             <a:avLst/>
@@ -10959,12 +11017,36 @@
           <a:p>
             <a:pPr algn="ctr"/>
             <a:r>
-              <a:rPr lang="pt-BR" b="1" dirty="0"/>
+              <a:rPr lang="pt-BR" sz="1400" b="1" dirty="0"/>
               <a:t>OBS</a:t>
             </a:r>
             <a:r>
-              <a:rPr lang="pt-BR" dirty="0"/>
-              <a:t>.: A identificação visual de clusters em um espaço bidimensional é fácil, mas em quatro ou mais dimensões isso já não é mais possível. Nesses casos, apenas algoritmos de identificação de clusters conseguem agrupar os dados. </a:t>
+              <a:rPr lang="pt-BR" sz="1400" dirty="0"/>
+              <a:t>.: A identificação visual de </a:t>
+            </a:r>
+            <a:r>
+              <a:rPr lang="pt-BR" sz="1400" i="1" dirty="0"/>
+              <a:t>clusters</a:t>
+            </a:r>
+            <a:r>
+              <a:rPr lang="pt-BR" sz="1400" dirty="0"/>
+              <a:t> em um espaço </a:t>
+            </a:r>
+            <a:r>
+              <a:rPr lang="pt-BR" sz="1400" dirty="0" smtClean="0"/>
+              <a:t>bi ou tridimensional </a:t>
+            </a:r>
+            <a:r>
+              <a:rPr lang="pt-BR" sz="1400" dirty="0"/>
+              <a:t>é fácil, mas em quatro ou mais dimensões isso já não é mais possível. Nesses casos, apenas algoritmos de identificação de </a:t>
+            </a:r>
+            <a:r>
+              <a:rPr lang="pt-BR" sz="1400" i="1" dirty="0"/>
+              <a:t>clusters</a:t>
+            </a:r>
+            <a:r>
+              <a:rPr lang="pt-BR" sz="1400" dirty="0"/>
+              <a:t> conseguem agrupar os dados. </a:t>
             </a:r>
           </a:p>
         </p:txBody>
@@ -11049,19 +11131,27 @@
         </p:nvSpPr>
         <p:spPr>
           <a:xfrm>
-            <a:off x="5257800" y="1825624"/>
-            <a:ext cx="6712526" cy="5032375"/>
+            <a:off x="5014913" y="1825624"/>
+            <a:ext cx="7038541" cy="5032375"/>
           </a:xfrm>
         </p:spPr>
         <p:txBody>
           <a:bodyPr>
-            <a:normAutofit/>
+            <a:normAutofit lnSpcReduction="10000"/>
           </a:bodyPr>
           <a:lstStyle/>
           <a:p>
             <a:r>
               <a:rPr lang="pt-BR" dirty="0"/>
-              <a:t>Para realizar a identificação, temos que </a:t>
+              <a:t>Para realizar a </a:t>
+            </a:r>
+            <a:r>
+              <a:rPr lang="pt-BR" dirty="0" smtClean="0"/>
+              <a:t>clusterização, </a:t>
+            </a:r>
+            <a:r>
+              <a:rPr lang="pt-BR" dirty="0"/>
+              <a:t>temos que </a:t>
             </a:r>
             <a:r>
               <a:rPr lang="pt-BR" b="1" i="1" dirty="0">
@@ -11079,8 +11169,29 @@
           <a:p>
             <a:r>
               <a:rPr lang="pt-BR" dirty="0"/>
-              <a:t>Existem algumas opções como a densidade, distribuição, hierarquia, etc.</a:t>
-            </a:r>
+              <a:t>Existem algumas opções como a </a:t>
+            </a:r>
+            <a:r>
+              <a:rPr lang="pt-BR" dirty="0" smtClean="0"/>
+              <a:t>densidade, a distribuição</a:t>
+            </a:r>
+            <a:r>
+              <a:rPr lang="pt-BR" dirty="0"/>
+              <a:t> </a:t>
+            </a:r>
+            <a:r>
+              <a:rPr lang="pt-BR" dirty="0" smtClean="0"/>
+              <a:t>e a hierarquia </a:t>
+            </a:r>
+            <a:r>
+              <a:rPr lang="pt-BR" dirty="0"/>
+              <a:t>dos </a:t>
+            </a:r>
+            <a:r>
+              <a:rPr lang="pt-BR" dirty="0" smtClean="0"/>
+              <a:t>dados.</a:t>
+            </a:r>
+            <a:endParaRPr lang="pt-BR" dirty="0"/>
           </a:p>
           <a:p>
             <a:r>
@@ -11093,13 +11204,56 @@
             </a:r>
             <a:r>
               <a:rPr lang="pt-BR" dirty="0"/>
-              <a:t>(i.e., centros) dos clusters.</a:t>
-            </a:r>
-          </a:p>
-          <a:p>
-            <a:r>
-              <a:rPr lang="pt-BR" dirty="0"/>
-              <a:t>Se os atributos forem numéricos, o </a:t>
+              <a:t>(i.e., </a:t>
+            </a:r>
+            <a:r>
+              <a:rPr lang="pt-BR" b="1" i="1" dirty="0" smtClean="0">
+                <a:solidFill>
+                  <a:schemeClr val="accent2"/>
+                </a:solidFill>
+              </a:rPr>
+              <a:t>centros geométricos</a:t>
+            </a:r>
+            <a:r>
+              <a:rPr lang="pt-BR" dirty="0" smtClean="0"/>
+              <a:t>) </a:t>
+            </a:r>
+            <a:r>
+              <a:rPr lang="pt-BR" dirty="0"/>
+              <a:t>dos </a:t>
+            </a:r>
+            <a:r>
+              <a:rPr lang="pt-BR" i="1" dirty="0"/>
+              <a:t>clusters</a:t>
+            </a:r>
+            <a:r>
+              <a:rPr lang="pt-BR" dirty="0" smtClean="0"/>
+              <a:t>.</a:t>
+            </a:r>
+          </a:p>
+          <a:p>
+            <a:pPr lvl="1">
+              <a:buFont typeface="Wingdings" panose="05000000000000000000" pitchFamily="2" charset="2"/>
+              <a:buChar char="§"/>
+            </a:pPr>
+            <a:r>
+              <a:rPr lang="pt-BR" dirty="0" smtClean="0"/>
+              <a:t>O algoritmo que usa centroides é conhecido como k-</a:t>
+            </a:r>
+            <a:r>
+              <a:rPr lang="pt-BR" dirty="0" err="1" smtClean="0"/>
+              <a:t>means</a:t>
+            </a:r>
+            <a:r>
+              <a:rPr lang="pt-BR" dirty="0" smtClean="0"/>
+              <a:t>.</a:t>
+            </a:r>
+            <a:endParaRPr lang="pt-BR" dirty="0" smtClean="0"/>
+          </a:p>
+          <a:p>
+            <a:r>
+              <a:rPr lang="pt-BR" dirty="0"/>
+              <a:t>Os </a:t>
             </a:r>
             <a:r>
               <a:rPr lang="pt-BR" b="1" i="1" dirty="0">
@@ -11107,11 +11261,11 @@
                   <a:srgbClr val="7030A0"/>
                 </a:solidFill>
               </a:rPr>
-              <a:t>centroide</a:t>
-            </a:r>
-            <a:r>
-              <a:rPr lang="pt-BR" dirty="0"/>
-              <a:t> é obtido através das </a:t>
+              <a:t>centroides</a:t>
+            </a:r>
+            <a:r>
+              <a:rPr lang="pt-BR" dirty="0"/>
+              <a:t> são obtidos através da </a:t>
             </a:r>
             <a:r>
               <a:rPr lang="pt-BR" b="1" i="1" dirty="0">
@@ -11119,12 +11273,21 @@
                   <a:srgbClr val="00B050"/>
                 </a:solidFill>
               </a:rPr>
-              <a:t>médias individuais dos atributos</a:t>
-            </a:r>
-            <a:r>
-              <a:rPr lang="pt-BR" dirty="0"/>
+              <a:t>média individual de cada atributo </a:t>
+            </a:r>
+            <a:r>
+              <a:rPr lang="pt-BR" b="1" i="1" dirty="0">
+                <a:solidFill>
+                  <a:srgbClr val="7030A0"/>
+                </a:solidFill>
+              </a:rPr>
+              <a:t>das amostras que pertencem ao cluster</a:t>
+            </a:r>
+            <a:r>
+              <a:rPr lang="pt-BR" dirty="0" smtClean="0"/>
               <a:t>.</a:t>
             </a:r>
+            <a:endParaRPr lang="pt-BR" dirty="0"/>
           </a:p>
         </p:txBody>
       </p:sp>
@@ -11133,7 +11296,7 @@
           <p:cNvPr id="1028" name="Picture 4" descr="K Means Clustering no Aprendizado de Máquinas — Aprendizado de Máquina —  DATA SCIENCE">
             <a:extLst>
               <a:ext uri="{FF2B5EF4-FFF2-40B4-BE49-F238E27FC236}">
-                <a16:creationId xmlns:a16="http://schemas.microsoft.com/office/drawing/2014/main" id="{D99905E1-3749-BAAD-E01A-C9B3686C4770}"/>
+                <a16:creationId xmlns:a16="http://schemas.microsoft.com/office/drawing/2014/main" xmlns="" id="{D99905E1-3749-BAAD-E01A-C9B3686C4770}"/>
               </a:ext>
             </a:extLst>
           </p:cNvPr>
@@ -11155,7 +11318,7 @@
         </p:blipFill>
         <p:spPr bwMode="auto">
           <a:xfrm>
-            <a:off x="838200" y="2253343"/>
+            <a:off x="538162" y="2467655"/>
             <a:ext cx="3951287" cy="3037114"/>
           </a:xfrm>
           <a:prstGeom prst="rect">
@@ -11194,7 +11357,7 @@
         <p:cNvPr id="1" name="">
           <a:extLst>
             <a:ext uri="{FF2B5EF4-FFF2-40B4-BE49-F238E27FC236}">
-              <a16:creationId xmlns:a16="http://schemas.microsoft.com/office/drawing/2014/main" id="{5B00F73A-8390-7530-E708-9D3EBFB35B37}"/>
+              <a16:creationId xmlns:a16="http://schemas.microsoft.com/office/drawing/2014/main" xmlns="" id="{5B00F73A-8390-7530-E708-9D3EBFB35B37}"/>
             </a:ext>
           </a:extLst>
         </p:cNvPr>
@@ -11214,7 +11377,7 @@
           <p:cNvPr id="2" name="Título 1">
             <a:extLst>
               <a:ext uri="{FF2B5EF4-FFF2-40B4-BE49-F238E27FC236}">
-                <a16:creationId xmlns:a16="http://schemas.microsoft.com/office/drawing/2014/main" id="{A7779880-5E02-1DB8-EA94-C86330794A8C}"/>
+                <a16:creationId xmlns:a16="http://schemas.microsoft.com/office/drawing/2014/main" xmlns="" id="{A7779880-5E02-1DB8-EA94-C86330794A8C}"/>
               </a:ext>
             </a:extLst>
           </p:cNvPr>
@@ -11235,32 +11398,41 @@
               <a:t>Como </a:t>
             </a:r>
             <a:r>
-              <a:rPr lang="en-US" dirty="0" err="1"/>
-              <a:t>representar</a:t>
-            </a:r>
-            <a:r>
-              <a:rPr lang="en-US" dirty="0"/>
+              <a:rPr lang="en-US" dirty="0" err="1" smtClean="0"/>
+              <a:t>calcular</a:t>
+            </a:r>
+            <a:r>
+              <a:rPr lang="en-US" dirty="0" smtClean="0"/>
               <a:t> </a:t>
             </a:r>
             <a:r>
-              <a:rPr lang="en-US" dirty="0" err="1"/>
+              <a:rPr lang="en-US" dirty="0" err="1" smtClean="0"/>
               <a:t>os</a:t>
             </a:r>
             <a:r>
-              <a:rPr lang="en-US" dirty="0"/>
-              <a:t> clusters?</a:t>
-            </a:r>
-          </a:p>
-        </p:txBody>
-      </p:sp>
-      <mc:AlternateContent xmlns:mc="http://schemas.openxmlformats.org/markup-compatibility/2006" xmlns:a14="http://schemas.microsoft.com/office/drawing/2010/main">
-        <mc:Choice Requires="a14">
+              <a:rPr lang="en-US" dirty="0" smtClean="0"/>
+              <a:t> </a:t>
+            </a:r>
+            <a:r>
+              <a:rPr lang="en-US" dirty="0" err="1" smtClean="0"/>
+              <a:t>centroides</a:t>
+            </a:r>
+            <a:r>
+              <a:rPr lang="en-US" dirty="0" smtClean="0"/>
+              <a:t>?</a:t>
+            </a:r>
+            <a:endParaRPr lang="en-US" dirty="0"/>
+          </a:p>
+        </p:txBody>
+      </p:sp>
+      <mc:AlternateContent xmlns:mc="http://schemas.openxmlformats.org/markup-compatibility/2006">
+        <mc:Choice xmlns:a14="http://schemas.microsoft.com/office/drawing/2010/main" Requires="a14">
           <p:sp>
             <p:nvSpPr>
               <p:cNvPr id="3" name="Espaço Reservado para Conteúdo 2">
                 <a:extLst>
                   <a:ext uri="{FF2B5EF4-FFF2-40B4-BE49-F238E27FC236}">
-                    <a16:creationId xmlns:a16="http://schemas.microsoft.com/office/drawing/2014/main" id="{A72472E5-6211-3EFD-BA89-06782640C939}"/>
+                    <a16:creationId xmlns:a16="http://schemas.microsoft.com/office/drawing/2014/main" xmlns="" id="{A72472E5-6211-3EFD-BA89-06782640C939}"/>
                   </a:ext>
                 </a:extLst>
               </p:cNvPr>
@@ -11508,43 +11680,47 @@
               <a:p>
                 <a:r>
                   <a:rPr lang="pt-BR" dirty="0"/>
-                  <a:t>Se os atributos </a:t>
-                </a:r>
-                <a:r>
-                  <a:rPr lang="pt-BR" b="1" i="1" dirty="0">
+                  <a:t>O</a:t>
+                </a:r>
+                <a:r>
+                  <a:rPr lang="pt-BR" dirty="0" smtClean="0"/>
+                  <a:t>s </a:t>
+                </a:r>
+                <a:r>
+                  <a:rPr lang="pt-BR" dirty="0"/>
+                  <a:t>atributos </a:t>
+                </a:r>
+                <a:r>
+                  <a:rPr lang="pt-BR" b="1" i="1" dirty="0" smtClean="0">
                     <a:solidFill>
                       <a:srgbClr val="7030A0"/>
                     </a:solidFill>
                   </a:rPr>
-                  <a:t>não forem numéricos</a:t>
+                  <a:t>devem ser numéricos</a:t>
                 </a:r>
                 <a:r>
                   <a:rPr lang="pt-BR" dirty="0"/>
-                  <a:t>, devemos </a:t>
-                </a:r>
-                <a:r>
-                  <a:rPr lang="pt-BR" b="1" i="1" dirty="0">
-                    <a:solidFill>
-                      <a:srgbClr val="00B050"/>
-                    </a:solidFill>
-                  </a:rPr>
-                  <a:t>transformá-los em numéricos</a:t>
-                </a:r>
-                <a:r>
-                  <a:rPr lang="pt-BR" dirty="0"/>
-                  <a:t>.</a:t>
+                  <a:t> </a:t>
+                </a:r>
+                <a:r>
+                  <a:rPr lang="pt-BR" dirty="0" smtClean="0"/>
+                  <a:t>p</a:t>
+                </a:r>
+                <a:r>
+                  <a:rPr lang="pt-BR" dirty="0" smtClean="0"/>
+                  <a:t>ara o cálculo do centroide e da métrica de similaridade.</a:t>
                 </a:r>
               </a:p>
             </p:txBody>
           </p:sp>
         </mc:Choice>
-        <mc:Fallback xmlns="">
+        <mc:Fallback>
           <p:sp>
             <p:nvSpPr>
               <p:cNvPr id="3" name="Espaço Reservado para Conteúdo 2">
                 <a:extLst>
                   <a:ext uri="{FF2B5EF4-FFF2-40B4-BE49-F238E27FC236}">
-                    <a16:creationId xmlns:a16="http://schemas.microsoft.com/office/drawing/2014/main" id="{A72472E5-6211-3EFD-BA89-06782640C939}"/>
+                    <a16:creationId xmlns:a16="http://schemas.microsoft.com/office/drawing/2014/main" xmlns="" xmlns:a14="http://schemas.microsoft.com/office/drawing/2010/main" id="{A72472E5-6211-3EFD-BA89-06782640C939}"/>
                   </a:ext>
                 </a:extLst>
               </p:cNvPr>
@@ -11560,7 +11736,7 @@
                 <a:off x="5072743" y="1825624"/>
                 <a:ext cx="6897583" cy="5032375"/>
               </a:xfrm>
-              <a:blipFill>
+              <a:blipFill rotWithShape="0">
                 <a:blip r:embed="rId3"/>
                 <a:stretch>
                   <a:fillRect l="-1590" t="-1937" r="-1678"/>
@@ -11587,7 +11763,7 @@
           <p:cNvPr id="5" name="Picture 4" descr="K Means Clustering no Aprendizado de Máquinas — Aprendizado de Máquina —  DATA SCIENCE">
             <a:extLst>
               <a:ext uri="{FF2B5EF4-FFF2-40B4-BE49-F238E27FC236}">
-                <a16:creationId xmlns:a16="http://schemas.microsoft.com/office/drawing/2014/main" id="{1340B874-C37C-46C8-FA71-6364C1463C13}"/>
+                <a16:creationId xmlns:a16="http://schemas.microsoft.com/office/drawing/2014/main" xmlns="" id="{1340B874-C37C-46C8-FA71-6364C1463C13}"/>
               </a:ext>
             </a:extLst>
           </p:cNvPr>
@@ -11609,7 +11785,7 @@
         </p:blipFill>
         <p:spPr bwMode="auto">
           <a:xfrm>
-            <a:off x="838200" y="2111829"/>
+            <a:off x="723900" y="2340429"/>
             <a:ext cx="3831771" cy="3037114"/>
           </a:xfrm>
           <a:prstGeom prst="rect">
@@ -11659,7 +11835,7 @@
       </p:grpSpPr>
       <p:sp>
         <p:nvSpPr>
-          <p:cNvPr id="2" name="Título 1"/>
+          <p:cNvPr id="2" name="Title 1"/>
           <p:cNvSpPr>
             <a:spLocks noGrp="1"/>
           </p:cNvSpPr>
@@ -11673,16 +11849,16 @@
           <a:lstStyle/>
           <a:p>
             <a:r>
-              <a:rPr lang="pt-BR" dirty="0"/>
-              <a:t>Quantos devem ser os clusters?</a:t>
-            </a:r>
-            <a:endParaRPr lang="en-US" dirty="0"/>
-          </a:p>
-        </p:txBody>
-      </p:sp>
-      <p:sp>
-        <p:nvSpPr>
-          <p:cNvPr id="3" name="Espaço Reservado para Conteúdo 2"/>
+              <a:rPr lang="pt-BR" dirty="0" smtClean="0"/>
+              <a:t>Como podemos usar os centroides?</a:t>
+            </a:r>
+            <a:endParaRPr lang="pt-BR" dirty="0"/>
+          </a:p>
+        </p:txBody>
+      </p:sp>
+      <p:sp>
+        <p:nvSpPr>
+          <p:cNvPr id="7" name="Content Placeholder 2"/>
           <p:cNvSpPr>
             <a:spLocks noGrp="1"/>
           </p:cNvSpPr>
@@ -11692,8 +11868,8 @@
         </p:nvSpPr>
         <p:spPr>
           <a:xfrm>
-            <a:off x="5334000" y="1690688"/>
-            <a:ext cx="6729845" cy="5167311"/>
+            <a:off x="4996543" y="1690688"/>
+            <a:ext cx="7195457" cy="5167311"/>
           </a:xfrm>
         </p:spPr>
         <p:txBody>
@@ -11703,157 +11879,169 @@
           <a:lstStyle/>
           <a:p>
             <a:r>
-              <a:rPr lang="pt-BR" dirty="0"/>
-              <a:t>Os clusters </a:t>
-            </a:r>
-            <a:r>
-              <a:rPr lang="pt-BR" b="1" i="1" dirty="0"/>
-              <a:t>não devem se sobrepor</a:t>
-            </a:r>
-            <a:r>
-              <a:rPr lang="pt-BR" dirty="0"/>
-              <a:t>: </a:t>
-            </a:r>
-            <a:r>
-              <a:rPr lang="pt-BR" b="1" i="1" dirty="0">
+              <a:rPr lang="pt-BR" dirty="0" smtClean="0"/>
+              <a:t>Os </a:t>
+            </a:r>
+            <a:r>
+              <a:rPr lang="pt-BR" b="1" i="1" dirty="0" smtClean="0">
                 <a:solidFill>
-                  <a:srgbClr val="00B050"/>
+                  <a:schemeClr val="accent2"/>
                 </a:solidFill>
               </a:rPr>
-              <a:t>cada exemplo</a:t>
-            </a:r>
-            <a:r>
-              <a:rPr lang="pt-BR" dirty="0"/>
-              <a:t> deve </a:t>
-            </a:r>
-            <a:r>
-              <a:rPr lang="pt-BR" b="1" i="1" dirty="0">
-                <a:solidFill>
-                  <a:srgbClr val="00B050"/>
-                </a:solidFill>
-              </a:rPr>
-              <a:t>pertencer</a:t>
-            </a:r>
-            <a:r>
-              <a:rPr lang="pt-BR" dirty="0"/>
-              <a:t> a </a:t>
-            </a:r>
-            <a:r>
-              <a:rPr lang="pt-BR" b="1" i="1" dirty="0">
-                <a:solidFill>
-                  <a:srgbClr val="00B050"/>
-                </a:solidFill>
-              </a:rPr>
-              <a:t>um e apenas a um cluster</a:t>
-            </a:r>
-            <a:r>
-              <a:rPr lang="pt-BR" dirty="0"/>
-              <a:t>. </a:t>
-            </a:r>
-          </a:p>
-          <a:p>
-            <a:r>
-              <a:rPr lang="pt-BR" dirty="0"/>
-              <a:t>Porém, </a:t>
-            </a:r>
-            <a:r>
-              <a:rPr lang="pt-BR" b="1" i="1" dirty="0">
-                <a:solidFill>
-                  <a:srgbClr val="0070C0"/>
-                </a:solidFill>
-              </a:rPr>
-              <a:t>dentro do mesmo cluster</a:t>
-            </a:r>
-            <a:r>
-              <a:rPr lang="pt-BR" dirty="0"/>
-              <a:t>, os </a:t>
-            </a:r>
-            <a:r>
-              <a:rPr lang="pt-BR" b="1" i="1" dirty="0">
-                <a:solidFill>
-                  <a:srgbClr val="0070C0"/>
-                </a:solidFill>
-              </a:rPr>
-              <a:t>exemplos</a:t>
-            </a:r>
-            <a:r>
-              <a:rPr lang="pt-BR" dirty="0"/>
-              <a:t> devem estar relativamente </a:t>
-            </a:r>
-            <a:r>
-              <a:rPr lang="pt-BR" b="1" i="1" dirty="0">
-                <a:solidFill>
-                  <a:srgbClr val="0070C0"/>
-                </a:solidFill>
-              </a:rPr>
-              <a:t>próximos</a:t>
-            </a:r>
-            <a:r>
-              <a:rPr lang="pt-BR" dirty="0"/>
-              <a:t> uns dos outros e </a:t>
-            </a:r>
-            <a:r>
-              <a:rPr lang="pt-BR" b="1" i="1" dirty="0">
-                <a:solidFill>
-                  <a:srgbClr val="7030A0"/>
-                </a:solidFill>
-              </a:rPr>
-              <a:t>distantes</a:t>
-            </a:r>
-            <a:r>
-              <a:rPr lang="pt-BR" dirty="0"/>
-              <a:t> dos </a:t>
-            </a:r>
-            <a:r>
-              <a:rPr lang="pt-BR" b="1" i="1" dirty="0">
-                <a:solidFill>
-                  <a:srgbClr val="7030A0"/>
-                </a:solidFill>
-              </a:rPr>
-              <a:t>exemplos dos outros clusters</a:t>
-            </a:r>
-            <a:r>
-              <a:rPr lang="pt-BR" dirty="0"/>
+              <a:t>centroides</a:t>
+            </a:r>
+            <a:r>
+              <a:rPr lang="pt-BR" dirty="0" smtClean="0"/>
+              <a:t> podem ser usados ​​como </a:t>
+            </a:r>
+          </a:p>
+          <a:p>
+            <a:pPr lvl="1">
+              <a:buFont typeface="Wingdings" panose="05000000000000000000" pitchFamily="2" charset="2"/>
+              <a:buChar char="§"/>
+            </a:pPr>
+            <a:r>
+              <a:rPr lang="pt-BR" dirty="0" smtClean="0"/>
+              <a:t>forma de comprimir ou sumarizar os dados,</a:t>
+            </a:r>
+          </a:p>
+          <a:p>
+            <a:pPr lvl="2">
+              <a:buFont typeface="Courier New" panose="02070309020205020404" pitchFamily="49" charset="0"/>
+              <a:buChar char="o"/>
+            </a:pPr>
+            <a:r>
+              <a:rPr lang="pt-BR" dirty="0" smtClean="0"/>
+              <a:t>Usa-se o centroide para representar todo o </a:t>
+            </a:r>
+            <a:r>
+              <a:rPr lang="pt-BR" i="1" dirty="0" smtClean="0"/>
+              <a:t>cluster</a:t>
+            </a:r>
+            <a:r>
+              <a:rPr lang="pt-BR" dirty="0" smtClean="0"/>
               <a:t>.</a:t>
             </a:r>
-          </a:p>
-          <a:p>
-            <a:r>
-              <a:rPr lang="pt-BR" dirty="0"/>
-              <a:t>Aí surge uma dúvida. </a:t>
-            </a:r>
-          </a:p>
-          <a:p>
-            <a:r>
-              <a:rPr lang="pt-BR" dirty="0"/>
-              <a:t>Quantos clusters um conjunto de exemplos contém?</a:t>
-            </a:r>
+            <a:endParaRPr lang="pt-BR" dirty="0" smtClean="0"/>
+          </a:p>
+          <a:p>
+            <a:pPr lvl="1">
+              <a:buFont typeface="Wingdings" panose="05000000000000000000" pitchFamily="2" charset="2"/>
+              <a:buChar char="§"/>
+            </a:pPr>
+            <a:r>
+              <a:rPr lang="pt-BR" dirty="0" smtClean="0"/>
+              <a:t>f</a:t>
+            </a:r>
+            <a:r>
+              <a:rPr lang="pt-BR" dirty="0" smtClean="0"/>
+              <a:t>orma de detectar anomalias,</a:t>
+            </a:r>
+          </a:p>
+          <a:p>
+            <a:pPr lvl="2">
+              <a:buFont typeface="Courier New" panose="02070309020205020404" pitchFamily="49" charset="0"/>
+              <a:buChar char="o"/>
+            </a:pPr>
+            <a:r>
+              <a:rPr lang="pt-BR" dirty="0" smtClean="0"/>
+              <a:t>A distancia até o centroide pode indicar uma anomalia.</a:t>
+            </a:r>
+            <a:endParaRPr lang="pt-BR" dirty="0" smtClean="0"/>
+          </a:p>
+          <a:p>
+            <a:pPr lvl="1">
+              <a:buFont typeface="Wingdings" panose="05000000000000000000" pitchFamily="2" charset="2"/>
+              <a:buChar char="§"/>
+            </a:pPr>
+            <a:r>
+              <a:rPr lang="pt-BR" dirty="0" smtClean="0"/>
+              <a:t>centros para inicialização de modelos de misturas Gaussianas ou de redes de </a:t>
+            </a:r>
+            <a:r>
+              <a:rPr lang="pt-BR" dirty="0" smtClean="0"/>
+              <a:t>f</a:t>
+            </a:r>
+            <a:r>
+              <a:rPr lang="pt-BR" dirty="0" smtClean="0"/>
+              <a:t>unção de base radial, </a:t>
+            </a:r>
+          </a:p>
+          <a:p>
+            <a:pPr lvl="1">
+              <a:buFont typeface="Wingdings" panose="05000000000000000000" pitchFamily="2" charset="2"/>
+              <a:buChar char="§"/>
+            </a:pPr>
+            <a:r>
+              <a:rPr lang="pt-BR" dirty="0" smtClean="0"/>
+              <a:t>estimativas de valores de atributos ausentes,</a:t>
+            </a:r>
+          </a:p>
+          <a:p>
+            <a:pPr lvl="2">
+              <a:buFont typeface="Courier New" panose="02070309020205020404" pitchFamily="49" charset="0"/>
+              <a:buChar char="o"/>
+            </a:pPr>
+            <a:r>
+              <a:rPr lang="pt-BR" dirty="0" smtClean="0"/>
+              <a:t>Usa-se o valor de centroide para preencher o valor.</a:t>
+            </a:r>
+            <a:endParaRPr lang="pt-BR" dirty="0" smtClean="0"/>
+          </a:p>
+          <a:p>
+            <a:pPr lvl="1">
+              <a:buFont typeface="Wingdings" panose="05000000000000000000" pitchFamily="2" charset="2"/>
+              <a:buChar char="§"/>
+            </a:pPr>
+            <a:r>
+              <a:rPr lang="pt-BR" dirty="0" smtClean="0"/>
+              <a:t>protótipos </a:t>
+            </a:r>
+            <a:r>
+              <a:rPr lang="pt-BR" dirty="0"/>
+              <a:t>para classificadores baseados em </a:t>
+            </a:r>
+            <a:r>
+              <a:rPr lang="pt-BR" dirty="0" smtClean="0"/>
+              <a:t>distância.</a:t>
+            </a:r>
+          </a:p>
+          <a:p>
+            <a:pPr lvl="2">
+              <a:buFont typeface="Courier New" panose="02070309020205020404" pitchFamily="49" charset="0"/>
+              <a:buChar char="o"/>
+            </a:pPr>
+            <a:r>
+              <a:rPr lang="pt-BR" dirty="0" smtClean="0"/>
+              <a:t>Classificadores mais simples do que os baseados em modelos supervisionados (e.g., redes neurais)</a:t>
+            </a:r>
+            <a:endParaRPr lang="pt-BR" dirty="0"/>
           </a:p>
         </p:txBody>
       </p:sp>
       <p:pic>
         <p:nvPicPr>
-          <p:cNvPr id="5" name="Picture 2" descr="K-Means Clustering using Python. Welcome back guys! Hope you had a great… |  by Luigi Fiori | Medium"/>
+          <p:cNvPr id="2050" name="Picture 2" descr="K-means clustering on the digits dataset (PCA-reduced data) Centroids are marked with white cross"/>
           <p:cNvPicPr>
             <a:picLocks noChangeAspect="1" noChangeArrowheads="1"/>
           </p:cNvPicPr>
           <p:nvPr/>
         </p:nvPicPr>
         <p:blipFill rotWithShape="1">
-          <a:blip r:embed="rId2">
+          <a:blip r:embed="rId3">
             <a:extLst>
               <a:ext uri="{28A0092B-C50C-407E-A947-70E740481C1C}">
                 <a14:useLocalDpi xmlns:a14="http://schemas.microsoft.com/office/drawing/2010/main" val="0"/>
               </a:ext>
             </a:extLst>
           </a:blip>
-          <a:srcRect l="1639" t="12047" r="55246" b="11854"/>
+          <a:srcRect l="12278" t="11622" r="9484" b="10196"/>
           <a:stretch/>
         </p:blipFill>
         <p:spPr bwMode="auto">
           <a:xfrm>
-            <a:off x="1045029" y="2388412"/>
-            <a:ext cx="3798090" cy="2793188"/>
+            <a:off x="838200" y="2471058"/>
+            <a:ext cx="3780793" cy="2833534"/>
           </a:xfrm>
           <a:prstGeom prst="rect">
             <a:avLst/>
@@ -11870,10 +12058,66 @@
           </a:extLst>
         </p:spPr>
       </p:pic>
+      <p:sp>
+        <p:nvSpPr>
+          <p:cNvPr id="4" name="CaixaDeTexto 3">
+            <a:extLst>
+              <a:ext uri="{FF2B5EF4-FFF2-40B4-BE49-F238E27FC236}">
+                <a16:creationId xmlns:a16="http://schemas.microsoft.com/office/drawing/2014/main" xmlns="" id="{8983938C-72D4-9E58-2CE8-D43E36E7012F}"/>
+              </a:ext>
+            </a:extLst>
+          </p:cNvPr>
+          <p:cNvSpPr txBox="1"/>
+          <p:nvPr/>
+        </p:nvSpPr>
+        <p:spPr>
+          <a:xfrm>
+            <a:off x="838200" y="5292546"/>
+            <a:ext cx="3780793" cy="1200329"/>
+          </a:xfrm>
+          <a:prstGeom prst="rect">
+            <a:avLst/>
+          </a:prstGeom>
+          <a:noFill/>
+        </p:spPr>
+        <p:txBody>
+          <a:bodyPr wrap="square">
+            <a:spAutoFit/>
+          </a:bodyPr>
+          <a:lstStyle/>
+          <a:p>
+            <a:pPr algn="ctr"/>
+            <a:r>
+              <a:rPr lang="pt-BR" b="1" dirty="0"/>
+              <a:t>centroide</a:t>
+            </a:r>
+            <a:r>
+              <a:rPr lang="pt-BR" dirty="0"/>
+              <a:t> é o ponto central de um cluster de dados. Representa a </a:t>
+            </a:r>
+            <a:r>
+              <a:rPr lang="pt-BR" dirty="0" smtClean="0"/>
+              <a:t>média geométrica </a:t>
+            </a:r>
+            <a:r>
+              <a:rPr lang="pt-BR" dirty="0"/>
+              <a:t>das amostras dentro do </a:t>
+            </a:r>
+            <a:r>
+              <a:rPr lang="pt-BR" i="1" dirty="0"/>
+              <a:t>cluster</a:t>
+            </a:r>
+            <a:r>
+              <a:rPr lang="pt-BR" dirty="0"/>
+              <a:t>.</a:t>
+            </a:r>
+          </a:p>
+        </p:txBody>
+      </p:sp>
     </p:spTree>
     <p:extLst>
       <p:ext uri="{BB962C8B-B14F-4D97-AF65-F5344CB8AC3E}">
-        <p14:creationId xmlns:p14="http://schemas.microsoft.com/office/powerpoint/2010/main" val="506141761"/>
+        <p14:creationId xmlns:p14="http://schemas.microsoft.com/office/powerpoint/2010/main" val="794970236"/>
       </p:ext>
     </p:extLst>
   </p:cSld>

--- a/slides/T320_kMeans.pptx
+++ b/slides/T320_kMeans.pptx
@@ -887,7 +887,7 @@
         <p:cNvPr id="1" name="">
           <a:extLst>
             <a:ext uri="{FF2B5EF4-FFF2-40B4-BE49-F238E27FC236}">
-              <a16:creationId xmlns:a16="http://schemas.microsoft.com/office/drawing/2014/main" xmlns="" id="{BFE637E2-97BB-CFD3-DBB7-5EC561A4F1C5}"/>
+              <a16:creationId xmlns:a16="http://schemas.microsoft.com/office/drawing/2014/main" id="{BFE637E2-97BB-CFD3-DBB7-5EC561A4F1C5}"/>
             </a:ext>
           </a:extLst>
         </p:cNvPr>
@@ -907,7 +907,7 @@
           <p:cNvPr id="2" name="Slide Image Placeholder 1">
             <a:extLst>
               <a:ext uri="{FF2B5EF4-FFF2-40B4-BE49-F238E27FC236}">
-                <a16:creationId xmlns:a16="http://schemas.microsoft.com/office/drawing/2014/main" xmlns="" id="{4ED7BD22-361E-0DCE-46D8-42A9C128E592}"/>
+                <a16:creationId xmlns:a16="http://schemas.microsoft.com/office/drawing/2014/main" id="{4ED7BD22-361E-0DCE-46D8-42A9C128E592}"/>
               </a:ext>
             </a:extLst>
           </p:cNvPr>
@@ -925,7 +925,7 @@
           <p:cNvPr id="3" name="Notes Placeholder 2">
             <a:extLst>
               <a:ext uri="{FF2B5EF4-FFF2-40B4-BE49-F238E27FC236}">
-                <a16:creationId xmlns:a16="http://schemas.microsoft.com/office/drawing/2014/main" xmlns="" id="{A845AE5E-1008-C289-F444-04515B31A21D}"/>
+                <a16:creationId xmlns:a16="http://schemas.microsoft.com/office/drawing/2014/main" id="{A845AE5E-1008-C289-F444-04515B31A21D}"/>
               </a:ext>
             </a:extLst>
           </p:cNvPr>
@@ -967,7 +967,7 @@
           <p:cNvPr id="4" name="Slide Number Placeholder 3">
             <a:extLst>
               <a:ext uri="{FF2B5EF4-FFF2-40B4-BE49-F238E27FC236}">
-                <a16:creationId xmlns:a16="http://schemas.microsoft.com/office/drawing/2014/main" xmlns="" id="{64C5BAB2-4C6F-96F0-D4ED-0C66FFB4872B}"/>
+                <a16:creationId xmlns:a16="http://schemas.microsoft.com/office/drawing/2014/main" id="{64C5BAB2-4C6F-96F0-D4ED-0C66FFB4872B}"/>
               </a:ext>
             </a:extLst>
           </p:cNvPr>
@@ -1096,7 +1096,7 @@
         <p:cNvPr id="1" name="">
           <a:extLst>
             <a:ext uri="{FF2B5EF4-FFF2-40B4-BE49-F238E27FC236}">
-              <a16:creationId xmlns:a16="http://schemas.microsoft.com/office/drawing/2014/main" xmlns="" id="{D98F69D2-AA2F-1FAB-FC58-E17B9F051FEC}"/>
+              <a16:creationId xmlns:a16="http://schemas.microsoft.com/office/drawing/2014/main" id="{D98F69D2-AA2F-1FAB-FC58-E17B9F051FEC}"/>
             </a:ext>
           </a:extLst>
         </p:cNvPr>
@@ -1116,7 +1116,7 @@
           <p:cNvPr id="2" name="Espaço Reservado para Imagem de Slide 1">
             <a:extLst>
               <a:ext uri="{FF2B5EF4-FFF2-40B4-BE49-F238E27FC236}">
-                <a16:creationId xmlns:a16="http://schemas.microsoft.com/office/drawing/2014/main" xmlns="" id="{BFA38404-D7C9-03F2-A7E5-10C0EFC8F190}"/>
+                <a16:creationId xmlns:a16="http://schemas.microsoft.com/office/drawing/2014/main" id="{BFA38404-D7C9-03F2-A7E5-10C0EFC8F190}"/>
               </a:ext>
             </a:extLst>
           </p:cNvPr>
@@ -1134,7 +1134,7 @@
           <p:cNvPr id="3" name="Espaço Reservado para Anotações 2">
             <a:extLst>
               <a:ext uri="{FF2B5EF4-FFF2-40B4-BE49-F238E27FC236}">
-                <a16:creationId xmlns:a16="http://schemas.microsoft.com/office/drawing/2014/main" xmlns="" id="{5A8313F1-5D52-52B4-46D0-20D6D6D5149A}"/>
+                <a16:creationId xmlns:a16="http://schemas.microsoft.com/office/drawing/2014/main" id="{5A8313F1-5D52-52B4-46D0-20D6D6D5149A}"/>
               </a:ext>
             </a:extLst>
           </p:cNvPr>
@@ -1159,7 +1159,7 @@
           <p:cNvPr id="4" name="Espaço Reservado para Número de Slide 3">
             <a:extLst>
               <a:ext uri="{FF2B5EF4-FFF2-40B4-BE49-F238E27FC236}">
-                <a16:creationId xmlns:a16="http://schemas.microsoft.com/office/drawing/2014/main" xmlns="" id="{428A95A6-CC49-168A-C37A-1C6EB3B93225}"/>
+                <a16:creationId xmlns:a16="http://schemas.microsoft.com/office/drawing/2014/main" id="{428A95A6-CC49-168A-C37A-1C6EB3B93225}"/>
               </a:ext>
             </a:extLst>
           </p:cNvPr>
@@ -5872,7 +5872,7 @@
           <p:cNvPr id="2" name="Título 1">
             <a:extLst>
               <a:ext uri="{FF2B5EF4-FFF2-40B4-BE49-F238E27FC236}">
-                <a16:creationId xmlns:a16="http://schemas.microsoft.com/office/drawing/2014/main" xmlns="" id="{32666AC8-2E17-4DB4-B0F5-60C640CCFD2E}"/>
+                <a16:creationId xmlns:a16="http://schemas.microsoft.com/office/drawing/2014/main" id="{32666AC8-2E17-4DB4-B0F5-60C640CCFD2E}"/>
               </a:ext>
             </a:extLst>
           </p:cNvPr>
@@ -5899,10 +5899,6 @@
               <a:rPr lang="pt-BR" sz="5400" dirty="0"/>
               <a:t>T320 - Introdução ao Aprendizado de Máquina II:</a:t>
             </a:r>
-            <a:r>
-              <a:rPr lang="pt-BR" dirty="0"/>
-              <a:t/>
-            </a:r>
             <a:br>
               <a:rPr lang="pt-BR" dirty="0"/>
             </a:br>
@@ -5918,7 +5914,7 @@
           <p:cNvPr id="4" name="CaixaDeTexto 3">
             <a:extLst>
               <a:ext uri="{FF2B5EF4-FFF2-40B4-BE49-F238E27FC236}">
-                <a16:creationId xmlns:a16="http://schemas.microsoft.com/office/drawing/2014/main" xmlns="" id="{430EB894-B7D4-434C-9D1A-A14094D9BEEC}"/>
+                <a16:creationId xmlns:a16="http://schemas.microsoft.com/office/drawing/2014/main" id="{430EB894-B7D4-434C-9D1A-A14094D9BEEC}"/>
               </a:ext>
             </a:extLst>
           </p:cNvPr>
@@ -5959,7 +5955,7 @@
           <p:cNvPr id="1026" name="Picture 2" descr="Logo">
             <a:extLst>
               <a:ext uri="{FF2B5EF4-FFF2-40B4-BE49-F238E27FC236}">
-                <a16:creationId xmlns:a16="http://schemas.microsoft.com/office/drawing/2014/main" xmlns="" id="{3F2642E0-4F6A-4196-8F58-E77D36E9A33F}"/>
+                <a16:creationId xmlns:a16="http://schemas.microsoft.com/office/drawing/2014/main" id="{3F2642E0-4F6A-4196-8F58-E77D36E9A33F}"/>
               </a:ext>
             </a:extLst>
           </p:cNvPr>
@@ -6004,7 +6000,7 @@
           <p:cNvPr id="5122" name="Picture 2" descr="Image result for machine learning">
             <a:extLst>
               <a:ext uri="{FF2B5EF4-FFF2-40B4-BE49-F238E27FC236}">
-                <a16:creationId xmlns:a16="http://schemas.microsoft.com/office/drawing/2014/main" xmlns="" id="{810CE0A2-4102-44A6-A370-175E7896CDCB}"/>
+                <a16:creationId xmlns:a16="http://schemas.microsoft.com/office/drawing/2014/main" id="{810CE0A2-4102-44A6-A370-175E7896CDCB}"/>
               </a:ext>
             </a:extLst>
           </p:cNvPr>
@@ -6316,7 +6312,7 @@
         <p:cNvPr id="1" name="">
           <a:extLst>
             <a:ext uri="{FF2B5EF4-FFF2-40B4-BE49-F238E27FC236}">
-              <a16:creationId xmlns:a16="http://schemas.microsoft.com/office/drawing/2014/main" xmlns="" id="{36D1FDFF-84F9-A395-CDB0-AC77470C24F7}"/>
+              <a16:creationId xmlns:a16="http://schemas.microsoft.com/office/drawing/2014/main" id="{36D1FDFF-84F9-A395-CDB0-AC77470C24F7}"/>
             </a:ext>
           </a:extLst>
         </p:cNvPr>
@@ -6336,7 +6332,7 @@
           <p:cNvPr id="2" name="Título 1">
             <a:extLst>
               <a:ext uri="{FF2B5EF4-FFF2-40B4-BE49-F238E27FC236}">
-                <a16:creationId xmlns:a16="http://schemas.microsoft.com/office/drawing/2014/main" xmlns="" id="{CA82907A-6417-D3C2-265A-0FFD53046E99}"/>
+                <a16:creationId xmlns:a16="http://schemas.microsoft.com/office/drawing/2014/main" id="{CA82907A-6417-D3C2-265A-0FFD53046E99}"/>
               </a:ext>
             </a:extLst>
           </p:cNvPr>
@@ -6365,7 +6361,7 @@
           <p:cNvPr id="3" name="Espaço Reservado para Conteúdo 2">
             <a:extLst>
               <a:ext uri="{FF2B5EF4-FFF2-40B4-BE49-F238E27FC236}">
-                <a16:creationId xmlns:a16="http://schemas.microsoft.com/office/drawing/2014/main" xmlns="" id="{3C767761-7363-3966-1F66-B32029649DCD}"/>
+                <a16:creationId xmlns:a16="http://schemas.microsoft.com/office/drawing/2014/main" id="{3C767761-7363-3966-1F66-B32029649DCD}"/>
               </a:ext>
             </a:extLst>
           </p:cNvPr>
@@ -6472,7 +6468,7 @@
           <p:cNvPr id="5" name="Picture 2" descr="K-Means Clustering using Python. Welcome back guys! Hope you had a great… |  by Luigi Fiori | Medium">
             <a:extLst>
               <a:ext uri="{FF2B5EF4-FFF2-40B4-BE49-F238E27FC236}">
-                <a16:creationId xmlns:a16="http://schemas.microsoft.com/office/drawing/2014/main" xmlns="" id="{079377DD-55D2-BED3-3BB3-D573A6F13921}"/>
+                <a16:creationId xmlns:a16="http://schemas.microsoft.com/office/drawing/2014/main" id="{079377DD-55D2-BED3-3BB3-D573A6F13921}"/>
               </a:ext>
             </a:extLst>
           </p:cNvPr>
@@ -6533,7 +6529,7 @@
         <p:cNvPr id="1" name="">
           <a:extLst>
             <a:ext uri="{FF2B5EF4-FFF2-40B4-BE49-F238E27FC236}">
-              <a16:creationId xmlns="" xmlns:a16="http://schemas.microsoft.com/office/drawing/2014/main" id="{654994D8-D711-9C2A-C202-7BAD7B93F7EE}"/>
+              <a16:creationId xmlns:a16="http://schemas.microsoft.com/office/drawing/2014/main" id="{654994D8-D711-9C2A-C202-7BAD7B93F7EE}"/>
             </a:ext>
           </a:extLst>
         </p:cNvPr>
@@ -6553,7 +6549,7 @@
           <p:cNvPr id="2" name="Título 1">
             <a:extLst>
               <a:ext uri="{FF2B5EF4-FFF2-40B4-BE49-F238E27FC236}">
-                <a16:creationId xmlns="" xmlns:a16="http://schemas.microsoft.com/office/drawing/2014/main" id="{FA636E4B-196C-922B-890C-6917F63A065D}"/>
+                <a16:creationId xmlns:a16="http://schemas.microsoft.com/office/drawing/2014/main" id="{FA636E4B-196C-922B-890C-6917F63A065D}"/>
               </a:ext>
             </a:extLst>
           </p:cNvPr>
@@ -6585,14 +6581,14 @@
           </a:p>
         </p:txBody>
       </p:sp>
-      <mc:AlternateContent xmlns:mc="http://schemas.openxmlformats.org/markup-compatibility/2006">
-        <mc:Choice xmlns:a14="http://schemas.microsoft.com/office/drawing/2010/main" Requires="a14">
+      <mc:AlternateContent xmlns:mc="http://schemas.openxmlformats.org/markup-compatibility/2006" xmlns:a14="http://schemas.microsoft.com/office/drawing/2010/main">
+        <mc:Choice Requires="a14">
           <p:sp>
             <p:nvSpPr>
               <p:cNvPr id="3" name="Espaço Reservado para Conteúdo 2">
                 <a:extLst>
                   <a:ext uri="{FF2B5EF4-FFF2-40B4-BE49-F238E27FC236}">
-                    <a16:creationId xmlns="" xmlns:a16="http://schemas.microsoft.com/office/drawing/2014/main" id="{1FCDFA83-D279-17E3-E2CD-6E304EAF637F}"/>
+                    <a16:creationId xmlns:a16="http://schemas.microsoft.com/office/drawing/2014/main" id="{1FCDFA83-D279-17E3-E2CD-6E304EAF637F}"/>
                   </a:ext>
                 </a:extLst>
               </p:cNvPr>
@@ -6679,13 +6675,8 @@
                 </a:r>
                 <a:r>
                   <a:rPr lang="pt-BR" dirty="0"/>
-                  <a:t>entre os dois </a:t>
-                </a:r>
-                <a:r>
-                  <a:rPr lang="pt-BR" dirty="0" smtClean="0"/>
-                  <a:t>vetores (de atributos e do centroide)</a:t>
-                </a:r>
-                <a:endParaRPr lang="pt-BR" dirty="0"/>
+                  <a:t>entre os dois vetores (de atributos e do centroide)</a:t>
+                </a:r>
               </a:p>
               <a:p>
                 <a:pPr marL="0" indent="0">
@@ -6977,29 +6968,13 @@
                 </a14:m>
                 <a:r>
                   <a:rPr lang="pt-BR" dirty="0"/>
-                  <a:t> são os </a:t>
-                </a:r>
-                <a:r>
-                  <a:rPr lang="pt-BR" dirty="0" smtClean="0"/>
-                  <a:t>elementos </a:t>
-                </a:r>
-                <a:r>
-                  <a:rPr lang="pt-BR" dirty="0"/>
-                  <a:t>dos </a:t>
-                </a:r>
-                <a:r>
-                  <a:rPr lang="pt-BR" dirty="0" smtClean="0"/>
-                  <a:t>vetores.</a:t>
+                  <a:t> são os elementos dos vetores.</a:t>
                 </a:r>
               </a:p>
               <a:p>
                 <a:r>
-                  <a:rPr lang="pt-BR" dirty="0" smtClean="0"/>
-                  <a:t>Outras </a:t>
-                </a:r>
-                <a:r>
                   <a:rPr lang="pt-BR" dirty="0"/>
-                  <a:t>medidas de distância: </a:t>
+                  <a:t>Outras medidas de distância: </a:t>
                 </a:r>
                 <a:r>
                   <a:rPr lang="pt-BR" dirty="0" err="1"/>
@@ -7021,7 +6996,7 @@
             </p:txBody>
           </p:sp>
         </mc:Choice>
-        <mc:Fallback>
+        <mc:Fallback xmlns="">
           <p:sp>
             <p:nvSpPr>
               <p:cNvPr id="3" name="Espaço Reservado para Conteúdo 2">
@@ -7126,8 +7101,8 @@
           </a:p>
         </p:txBody>
       </p:sp>
-      <mc:AlternateContent xmlns:mc="http://schemas.openxmlformats.org/markup-compatibility/2006">
-        <mc:Choice xmlns:a14="http://schemas.microsoft.com/office/drawing/2010/main" Requires="a14">
+      <mc:AlternateContent xmlns:mc="http://schemas.openxmlformats.org/markup-compatibility/2006" xmlns:a14="http://schemas.microsoft.com/office/drawing/2010/main">
+        <mc:Choice Requires="a14">
           <p:sp>
             <p:nvSpPr>
               <p:cNvPr id="3" name="Espaço Reservado para Conteúdo 2"/>
@@ -7151,7 +7126,7 @@
               <a:lstStyle/>
               <a:p>
                 <a:r>
-                  <a:rPr lang="pt-BR" dirty="0" smtClean="0"/>
+                  <a:rPr lang="pt-BR" dirty="0"/>
                   <a:t>Vamos supor que existam </a:t>
                 </a:r>
                 <a14:m>
@@ -7416,11 +7391,7 @@
                 </a14:m>
                 <a:r>
                   <a:rPr lang="pt-BR" dirty="0"/>
-                  <a:t>é a menor dessas distâncias, então, </a:t>
-                </a:r>
-                <a:r>
-                  <a:rPr lang="pt-BR" dirty="0" smtClean="0"/>
-                  <a:t>definimos </a:t>
+                  <a:t>é a menor dessas distâncias, então, definimos </a:t>
                 </a:r>
                 <a14:m>
                   <m:oMath xmlns:m="http://schemas.openxmlformats.org/officeDocument/2006/math">
@@ -7541,11 +7512,7 @@
               <a:p>
                 <a:r>
                   <a:rPr lang="pt-BR" dirty="0"/>
-                  <a:t>Agora, veremos como funciona o </a:t>
-                </a:r>
-                <a:r>
-                  <a:rPr lang="pt-BR" dirty="0" smtClean="0"/>
-                  <a:t>algoritmo </a:t>
+                  <a:t>Agora, veremos como funciona o algoritmo </a:t>
                 </a:r>
                 <a:r>
                   <a:rPr lang="pt-BR" i="1" dirty="0"/>
@@ -7563,7 +7530,7 @@
             </p:txBody>
           </p:sp>
         </mc:Choice>
-        <mc:Fallback>
+        <mc:Fallback xmlns="">
           <p:sp>
             <p:nvSpPr>
               <p:cNvPr id="3" name="Espaço Reservado para Conteúdo 2"/>
@@ -7811,8 +7778,8 @@
           </p:sp>
         </mc:Fallback>
       </mc:AlternateContent>
-      <mc:AlternateContent xmlns:mc="http://schemas.openxmlformats.org/markup-compatibility/2006">
-        <mc:Choice xmlns:a14="http://schemas.microsoft.com/office/drawing/2010/main" Requires="a14">
+      <mc:AlternateContent xmlns:mc="http://schemas.openxmlformats.org/markup-compatibility/2006" xmlns:a14="http://schemas.microsoft.com/office/drawing/2010/main">
+        <mc:Choice Requires="a14">
           <p:sp>
             <p:nvSpPr>
               <p:cNvPr id="4" name="TextBox 4"/>
@@ -7897,13 +7864,8 @@
                 </a14:m>
                 <a:r>
                   <a:rPr lang="pt-BR" dirty="0"/>
-                  <a:t> centroides </a:t>
-                </a:r>
-                <a:r>
-                  <a:rPr lang="pt-BR" dirty="0" smtClean="0"/>
-                  <a:t>iniciais.</a:t>
-                </a:r>
-                <a:endParaRPr lang="pt-BR" dirty="0"/>
+                  <a:t> centroides iniciais.</a:t>
+                </a:r>
               </a:p>
               <a:p>
                 <a:pPr marL="342900" indent="-342900">
@@ -8038,7 +8000,7 @@
             </p:txBody>
           </p:sp>
         </mc:Choice>
-        <mc:Fallback>
+        <mc:Fallback xmlns="">
           <p:sp>
             <p:nvSpPr>
               <p:cNvPr id="4" name="TextBox 4"/>
@@ -8187,8 +8149,8 @@
           </a:p>
         </p:txBody>
       </p:sp>
-      <mc:AlternateContent xmlns:mc="http://schemas.openxmlformats.org/markup-compatibility/2006">
-        <mc:Choice xmlns:a14="http://schemas.microsoft.com/office/drawing/2010/main" Requires="a14">
+      <mc:AlternateContent xmlns:mc="http://schemas.openxmlformats.org/markup-compatibility/2006" xmlns:a14="http://schemas.microsoft.com/office/drawing/2010/main">
+        <mc:Choice Requires="a14">
           <p:sp>
             <p:nvSpPr>
               <p:cNvPr id="3" name="Espaço Reservado para Conteúdo 2"/>
@@ -8212,16 +8174,8 @@
               <a:lstStyle/>
               <a:p>
                 <a:r>
-                  <a:rPr lang="pt-BR" dirty="0" smtClean="0"/>
-                  <a:t>Os procedimentos </a:t>
-                </a:r>
-                <a:r>
                   <a:rPr lang="pt-BR" dirty="0"/>
-                  <a:t>mais simples para inicializar os centroides </a:t>
-                </a:r>
-                <a:r>
-                  <a:rPr lang="pt-BR" dirty="0" smtClean="0"/>
-                  <a:t>são </a:t>
+                  <a:t>Os procedimentos mais simples para inicializar os centroides são </a:t>
                 </a:r>
               </a:p>
               <a:p>
@@ -8230,7 +8184,7 @@
                   <a:buChar char="§"/>
                 </a:pPr>
                 <a:r>
-                  <a:rPr lang="pt-BR" b="1" i="1" dirty="0" smtClean="0">
+                  <a:rPr lang="pt-BR" b="1" i="1" dirty="0">
                     <a:solidFill>
                       <a:schemeClr val="accent5"/>
                     </a:solidFill>
@@ -8260,11 +8214,7 @@
                 </a:r>
                 <a:r>
                   <a:rPr lang="pt-BR" dirty="0"/>
-                  <a:t> e os considerar como os centroides iniciais</a:t>
-                </a:r>
-                <a:r>
-                  <a:rPr lang="pt-BR" dirty="0" smtClean="0"/>
-                  <a:t>.</a:t>
+                  <a:t> e os considerar como os centroides iniciais.</a:t>
                 </a:r>
               </a:p>
               <a:p>
@@ -8273,7 +8223,7 @@
                   <a:buChar char="§"/>
                 </a:pPr>
                 <a:r>
-                  <a:rPr lang="pt-BR" b="1" dirty="0" smtClean="0">
+                  <a:rPr lang="pt-BR" b="1" dirty="0">
                     <a:solidFill>
                       <a:srgbClr val="7030A0"/>
                     </a:solidFill>
@@ -8294,7 +8244,7 @@
                   </m:oMath>
                 </a14:m>
                 <a:r>
-                  <a:rPr lang="pt-BR" b="1" dirty="0" smtClean="0">
+                  <a:rPr lang="pt-BR" b="1" dirty="0">
                     <a:solidFill>
                       <a:srgbClr val="7030A0"/>
                     </a:solidFill>
@@ -8302,10 +8252,9 @@
                   <a:t> vetores com valores aleatórios </a:t>
                 </a:r>
                 <a:r>
-                  <a:rPr lang="pt-BR" dirty="0" smtClean="0"/>
+                  <a:rPr lang="pt-BR" dirty="0"/>
                   <a:t>retirados de alguma distribuição.</a:t>
                 </a:r>
-                <a:endParaRPr lang="pt-BR" dirty="0"/>
               </a:p>
               <a:p>
                 <a:r>
@@ -8352,23 +8301,15 @@
                 </a:r>
                 <a:r>
                   <a:rPr lang="pt-BR" dirty="0"/>
-                  <a:t> </a:t>
-                </a:r>
-                <a:r>
-                  <a:rPr lang="pt-BR" dirty="0" smtClean="0"/>
-                  <a:t>(i.e., </a:t>
-                </a:r>
-                <a:r>
-                  <a:rPr lang="pt-BR" b="1" dirty="0" smtClean="0"/>
+                  <a:t> (i.e., </a:t>
+                </a:r>
+                <a:r>
+                  <a:rPr lang="pt-BR" b="1" dirty="0"/>
                   <a:t>tempo de treinamento</a:t>
                 </a:r>
                 <a:r>
-                  <a:rPr lang="pt-BR" dirty="0" smtClean="0"/>
-                  <a:t>) de </a:t>
-                </a:r>
-                <a:r>
                   <a:rPr lang="pt-BR" dirty="0"/>
-                  <a:t>um exemplo </a:t>
+                  <a:t>) de um exemplo </a:t>
                 </a:r>
                 <a:r>
                   <a:rPr lang="pt-BR" b="1" i="1" dirty="0">
@@ -8386,7 +8327,7 @@
             </p:txBody>
           </p:sp>
         </mc:Choice>
-        <mc:Fallback>
+        <mc:Fallback xmlns="">
           <p:sp>
             <p:nvSpPr>
               <p:cNvPr id="3" name="Espaço Reservado para Conteúdo 2"/>
@@ -8429,7 +8370,7 @@
           <p:cNvPr id="4" name="Picture 2" descr="Quantum machine learning: distance estimation for k-means clustering | by  Sashwat Anagolum | Towards Data Science">
             <a:extLst>
               <a:ext uri="{FF2B5EF4-FFF2-40B4-BE49-F238E27FC236}">
-                <a16:creationId xmlns:a16="http://schemas.microsoft.com/office/drawing/2014/main" xmlns="" id="{3663CA52-EDD8-4A35-5A6A-3A247A7891B7}"/>
+                <a16:creationId xmlns:a16="http://schemas.microsoft.com/office/drawing/2014/main" id="{3663CA52-EDD8-4A35-5A6A-3A247A7891B7}"/>
               </a:ext>
             </a:extLst>
           </p:cNvPr>
@@ -8490,7 +8431,7 @@
         <p:cNvPr id="1" name="">
           <a:extLst>
             <a:ext uri="{FF2B5EF4-FFF2-40B4-BE49-F238E27FC236}">
-              <a16:creationId xmlns:a16="http://schemas.microsoft.com/office/drawing/2014/main" xmlns="" id="{17B1A926-A8C8-946A-0DCB-7DA6EAEC80E3}"/>
+              <a16:creationId xmlns:a16="http://schemas.microsoft.com/office/drawing/2014/main" id="{17B1A926-A8C8-946A-0DCB-7DA6EAEC80E3}"/>
             </a:ext>
           </a:extLst>
         </p:cNvPr>
@@ -8510,7 +8451,7 @@
           <p:cNvPr id="2" name="Título 1">
             <a:extLst>
               <a:ext uri="{FF2B5EF4-FFF2-40B4-BE49-F238E27FC236}">
-                <a16:creationId xmlns:a16="http://schemas.microsoft.com/office/drawing/2014/main" xmlns="" id="{602E24AF-FE6E-7B0A-D179-EB49A1DEB2F8}"/>
+                <a16:creationId xmlns:a16="http://schemas.microsoft.com/office/drawing/2014/main" id="{602E24AF-FE6E-7B0A-D179-EB49A1DEB2F8}"/>
               </a:ext>
             </a:extLst>
           </p:cNvPr>
@@ -8539,7 +8480,7 @@
           <p:cNvPr id="3" name="Espaço Reservado para Conteúdo 2">
             <a:extLst>
               <a:ext uri="{FF2B5EF4-FFF2-40B4-BE49-F238E27FC236}">
-                <a16:creationId xmlns:a16="http://schemas.microsoft.com/office/drawing/2014/main" xmlns="" id="{4E35406F-F929-EFBE-0B16-7CF919C6F311}"/>
+                <a16:creationId xmlns:a16="http://schemas.microsoft.com/office/drawing/2014/main" id="{4E35406F-F929-EFBE-0B16-7CF919C6F311}"/>
               </a:ext>
             </a:extLst>
           </p:cNvPr>
@@ -8600,20 +8541,16 @@
             </a:r>
             <a:r>
               <a:rPr lang="pt-BR" dirty="0"/>
-              <a:t> e o algoritmo é encerado</a:t>
-            </a:r>
-            <a:r>
-              <a:rPr lang="pt-BR" dirty="0" smtClean="0"/>
-              <a:t>.</a:t>
-            </a:r>
-          </a:p>
-          <a:p>
-            <a:r>
-              <a:rPr lang="pt-BR" dirty="0" smtClean="0"/>
+              <a:t> e o algoritmo é encerado.</a:t>
+            </a:r>
+          </a:p>
+          <a:p>
+            <a:r>
+              <a:rPr lang="pt-BR" dirty="0"/>
               <a:t>Se eles forem </a:t>
             </a:r>
             <a:r>
-              <a:rPr lang="pt-BR" b="1" i="1" dirty="0" smtClean="0">
+              <a:rPr lang="pt-BR" b="1" i="1" dirty="0">
                 <a:solidFill>
                   <a:schemeClr val="accent2"/>
                 </a:solidFill>
@@ -8621,11 +8558,11 @@
               <a:t>muito próximos</a:t>
             </a:r>
             <a:r>
-              <a:rPr lang="pt-BR" dirty="0" smtClean="0"/>
+              <a:rPr lang="pt-BR" dirty="0"/>
               <a:t>, o tempo de </a:t>
             </a:r>
             <a:r>
-              <a:rPr lang="pt-BR" b="1" dirty="0" smtClean="0">
+              <a:rPr lang="pt-BR" b="1" dirty="0">
                 <a:solidFill>
                   <a:schemeClr val="accent2"/>
                 </a:solidFill>
@@ -8633,10 +8570,9 @@
               <a:t>treinamento pode ser longo</a:t>
             </a:r>
             <a:r>
-              <a:rPr lang="pt-BR" dirty="0" smtClean="0"/>
+              <a:rPr lang="pt-BR" dirty="0"/>
               <a:t>. </a:t>
             </a:r>
-            <a:endParaRPr lang="pt-BR" dirty="0"/>
           </a:p>
           <a:p>
             <a:r>
@@ -8717,7 +8653,7 @@
           <p:cNvPr id="4" name="Picture 2" descr="Quantum machine learning: distance estimation for k-means clustering | by  Sashwat Anagolum | Towards Data Science">
             <a:extLst>
               <a:ext uri="{FF2B5EF4-FFF2-40B4-BE49-F238E27FC236}">
-                <a16:creationId xmlns:a16="http://schemas.microsoft.com/office/drawing/2014/main" xmlns="" id="{375C1022-A6C8-5B17-2FC3-13794270B208}"/>
+                <a16:creationId xmlns:a16="http://schemas.microsoft.com/office/drawing/2014/main" id="{375C1022-A6C8-5B17-2FC3-13794270B208}"/>
               </a:ext>
             </a:extLst>
           </p:cNvPr>
@@ -8792,7 +8728,7 @@
           <p:cNvPr id="2" name="Título 1">
             <a:extLst>
               <a:ext uri="{FF2B5EF4-FFF2-40B4-BE49-F238E27FC236}">
-                <a16:creationId xmlns:a16="http://schemas.microsoft.com/office/drawing/2014/main" xmlns="" id="{654EC41E-A91F-2BE6-4481-EFFD64DC2B91}"/>
+                <a16:creationId xmlns:a16="http://schemas.microsoft.com/office/drawing/2014/main" id="{654EC41E-A91F-2BE6-4481-EFFD64DC2B91}"/>
               </a:ext>
             </a:extLst>
           </p:cNvPr>
@@ -8815,14 +8751,14 @@
           </a:p>
         </p:txBody>
       </p:sp>
-      <mc:AlternateContent xmlns:mc="http://schemas.openxmlformats.org/markup-compatibility/2006">
-        <mc:Choice xmlns:a14="http://schemas.microsoft.com/office/drawing/2010/main" Requires="a14">
+      <mc:AlternateContent xmlns:mc="http://schemas.openxmlformats.org/markup-compatibility/2006" xmlns:a14="http://schemas.microsoft.com/office/drawing/2010/main">
+        <mc:Choice Requires="a14">
           <p:sp>
             <p:nvSpPr>
               <p:cNvPr id="3" name="Espaço Reservado para Conteúdo 2">
                 <a:extLst>
                   <a:ext uri="{FF2B5EF4-FFF2-40B4-BE49-F238E27FC236}">
-                    <a16:creationId xmlns:a16="http://schemas.microsoft.com/office/drawing/2014/main" xmlns="" id="{7C91871B-A0D0-6F26-D59B-6230818E6267}"/>
+                    <a16:creationId xmlns:a16="http://schemas.microsoft.com/office/drawing/2014/main" id="{7C91871B-A0D0-6F26-D59B-6230818E6267}"/>
                   </a:ext>
                 </a:extLst>
               </p:cNvPr>
@@ -8867,15 +8803,7 @@
               <a:p>
                 <a:r>
                   <a:rPr lang="pt-BR" dirty="0"/>
-                  <a:t>A mais </a:t>
-                </a:r>
-                <a:r>
-                  <a:rPr lang="pt-BR" dirty="0" smtClean="0"/>
-                  <a:t>comum </a:t>
-                </a:r>
-                <a:r>
-                  <a:rPr lang="pt-BR" dirty="0"/>
-                  <a:t>é o método da silhueta.</a:t>
+                  <a:t>A mais comum é o método da silhueta.</a:t>
                 </a:r>
               </a:p>
               <a:p>
@@ -8927,11 +8855,7 @@
                 </a:r>
                 <a:r>
                   <a:rPr lang="pt-BR" dirty="0"/>
-                  <a:t> o coeficiente</a:t>
-                </a:r>
-                <a:r>
-                  <a:rPr lang="pt-BR" dirty="0" smtClean="0"/>
-                  <a:t>.</a:t>
+                  <a:t> o coeficiente.</a:t>
                 </a:r>
               </a:p>
               <a:p>
@@ -8940,26 +8864,25 @@
                   <a:buChar char="§"/>
                 </a:pPr>
                 <a:r>
-                  <a:rPr lang="pt-BR" dirty="0" smtClean="0"/>
+                  <a:rPr lang="pt-BR" dirty="0"/>
                   <a:t>Quanto mais próximas forem as amostras de um </a:t>
                 </a:r>
                 <a:r>
-                  <a:rPr lang="pt-BR" i="1" dirty="0" smtClean="0"/>
+                  <a:rPr lang="pt-BR" i="1" dirty="0"/>
                   <a:t>cluster</a:t>
                 </a:r>
                 <a:r>
-                  <a:rPr lang="pt-BR" dirty="0" smtClean="0"/>
+                  <a:rPr lang="pt-BR" dirty="0"/>
                   <a:t> e mais distantes das amostras de outro </a:t>
                 </a:r>
                 <a:r>
-                  <a:rPr lang="pt-BR" i="1" dirty="0" smtClean="0"/>
+                  <a:rPr lang="pt-BR" i="1" dirty="0"/>
                   <a:t>cluster</a:t>
                 </a:r>
                 <a:r>
-                  <a:rPr lang="pt-BR" dirty="0" smtClean="0"/>
+                  <a:rPr lang="pt-BR" dirty="0"/>
                   <a:t>, maior o coeficiente.</a:t>
                 </a:r>
-                <a:endParaRPr lang="pt-BR" dirty="0"/>
               </a:p>
               <a:p>
                 <a:r>
@@ -8991,7 +8914,7 @@
             </p:txBody>
           </p:sp>
         </mc:Choice>
-        <mc:Fallback>
+        <mc:Fallback xmlns="">
           <p:sp>
             <p:nvSpPr>
               <p:cNvPr id="3" name="Espaço Reservado para Conteúdo 2">
@@ -9322,10 +9245,9 @@
           <a:lstStyle/>
           <a:p>
             <a:r>
-              <a:rPr lang="pt-BR" dirty="0" smtClean="0"/>
+              <a:rPr lang="pt-BR" dirty="0"/>
               <a:t>Avisos</a:t>
             </a:r>
-            <a:endParaRPr lang="pt-BR" dirty="0"/>
           </a:p>
         </p:txBody>
       </p:sp>
@@ -9352,20 +9274,19 @@
           <a:lstStyle/>
           <a:p>
             <a:r>
-              <a:rPr lang="pt-BR" dirty="0" smtClean="0"/>
+              <a:rPr lang="pt-BR" dirty="0"/>
               <a:t>Terminamos o conteúdo da disciplina.</a:t>
             </a:r>
           </a:p>
           <a:p>
             <a:r>
-              <a:rPr lang="pt-BR" dirty="0" smtClean="0"/>
-              <a:t>As próximas aulas serão para duvidas e conclusão do projeto.</a:t>
-            </a:r>
-            <a:endParaRPr lang="pt-BR" dirty="0" smtClean="0"/>
-          </a:p>
-          <a:p>
-            <a:r>
-              <a:rPr lang="pt-BR" b="1" dirty="0" smtClean="0"/>
+              <a:rPr lang="pt-BR" dirty="0"/>
+              <a:t>As próximas aulas serão para dúvidas e conclusão do projeto.</a:t>
+            </a:r>
+          </a:p>
+          <a:p>
+            <a:r>
+              <a:rPr lang="pt-BR" b="1" dirty="0"/>
               <a:t>Projeto</a:t>
             </a:r>
             <a:r>
@@ -9388,13 +9309,9 @@
             </a:r>
             <a:r>
               <a:rPr lang="pt-BR" dirty="0"/>
-              <a:t> e pode ser feito em grupos de no máximo 3 alunos</a:t>
-            </a:r>
-            <a:r>
-              <a:rPr lang="pt-BR" dirty="0" smtClean="0"/>
-              <a:t>.</a:t>
-            </a:r>
-            <a:endParaRPr lang="pt-BR" b="1" dirty="0" smtClean="0"/>
+              <a:t> e pode ser feito em grupos de no máximo 3 alunos.</a:t>
+            </a:r>
+            <a:endParaRPr lang="pt-BR" b="1" dirty="0"/>
           </a:p>
           <a:p>
             <a:pPr lvl="1">
@@ -9402,20 +9319,12 @@
               <a:buChar char="§"/>
             </a:pPr>
             <a:r>
-              <a:rPr lang="pt-BR" b="1" dirty="0" smtClean="0"/>
+              <a:rPr lang="pt-BR" b="1" dirty="0"/>
               <a:t>Entrega</a:t>
             </a:r>
             <a:r>
               <a:rPr lang="pt-BR" dirty="0"/>
               <a:t>: </a:t>
-            </a:r>
-            <a:r>
-              <a:rPr lang="pt-BR" b="1" dirty="0" smtClean="0">
-                <a:solidFill>
-                  <a:srgbClr val="00B050"/>
-                </a:solidFill>
-              </a:rPr>
-              <a:t>28/06/2026 </a:t>
             </a:r>
             <a:r>
               <a:rPr lang="pt-BR" b="1" dirty="0">
@@ -9423,7 +9332,7 @@
                   <a:srgbClr val="00B050"/>
                 </a:solidFill>
               </a:rPr>
-              <a:t>até às 23:59</a:t>
+              <a:t>28/06/2026 até às 23:59</a:t>
             </a:r>
             <a:r>
               <a:rPr lang="pt-BR" dirty="0"/>
@@ -9679,7 +9588,7 @@
           <p:cNvPr id="4" name="Título 1">
             <a:extLst>
               <a:ext uri="{FF2B5EF4-FFF2-40B4-BE49-F238E27FC236}">
-                <a16:creationId xmlns:a16="http://schemas.microsoft.com/office/drawing/2014/main" xmlns="" id="{32666AC8-2E17-4DB4-B0F5-60C640CCFD2E}"/>
+                <a16:creationId xmlns:a16="http://schemas.microsoft.com/office/drawing/2014/main" id="{32666AC8-2E17-4DB4-B0F5-60C640CCFD2E}"/>
               </a:ext>
             </a:extLst>
           </p:cNvPr>
@@ -9997,7 +9906,7 @@
           <p:cNvPr id="4" name="Título 1">
             <a:extLst>
               <a:ext uri="{FF2B5EF4-FFF2-40B4-BE49-F238E27FC236}">
-                <a16:creationId xmlns:a16="http://schemas.microsoft.com/office/drawing/2014/main" xmlns="" id="{32666AC8-2E17-4DB4-B0F5-60C640CCFD2E}"/>
+                <a16:creationId xmlns:a16="http://schemas.microsoft.com/office/drawing/2014/main" id="{32666AC8-2E17-4DB4-B0F5-60C640CCFD2E}"/>
               </a:ext>
             </a:extLst>
           </p:cNvPr>
@@ -10123,21 +10032,8 @@
           <a:p>
             <a:r>
               <a:rPr lang="pt-BR" dirty="0"/>
-              <a:t>O que podemos fazer </a:t>
-            </a:r>
-            <a:r>
-              <a:rPr lang="pt-BR" dirty="0" smtClean="0"/>
-              <a:t>quando não temos informações </a:t>
-            </a:r>
-            <a:r>
-              <a:rPr lang="pt-BR" dirty="0"/>
-              <a:t>sobre as classes (i.e., rótulos) a que pertencem os exemplos </a:t>
-            </a:r>
-            <a:r>
-              <a:rPr lang="pt-BR" dirty="0" smtClean="0"/>
-              <a:t>de um conjunto de dados?</a:t>
-            </a:r>
-            <a:endParaRPr lang="pt-BR" dirty="0"/>
+              <a:t>O que podemos fazer quando não temos informações sobre as classes (i.e., rótulos) a que pertencem os exemplos de um conjunto de dados?</a:t>
+            </a:r>
           </a:p>
         </p:txBody>
       </p:sp>
@@ -10255,11 +10151,11 @@
           <a:lstStyle/>
           <a:p>
             <a:r>
-              <a:rPr lang="pt-BR" dirty="0" smtClean="0"/>
+              <a:rPr lang="pt-BR" dirty="0"/>
               <a:t>Na figura ao lado, não sabemos a que classe ou classes pertencem os dados, mas podemos observar que alguns exemplos estão </a:t>
             </a:r>
             <a:r>
-              <a:rPr lang="pt-BR" b="1" i="1" dirty="0" smtClean="0">
+              <a:rPr lang="pt-BR" b="1" i="1" dirty="0">
                 <a:solidFill>
                   <a:srgbClr val="7030A0"/>
                 </a:solidFill>
@@ -10267,7 +10163,7 @@
               <a:t>próximos uns dos outros</a:t>
             </a:r>
             <a:r>
-              <a:rPr lang="pt-BR" dirty="0" smtClean="0"/>
+              <a:rPr lang="pt-BR" dirty="0"/>
               <a:t>, formando grupos.</a:t>
             </a:r>
           </a:p>
@@ -10333,7 +10229,7 @@
         <p:cNvPr id="1" name="">
           <a:extLst>
             <a:ext uri="{FF2B5EF4-FFF2-40B4-BE49-F238E27FC236}">
-              <a16:creationId xmlns:a16="http://schemas.microsoft.com/office/drawing/2014/main" xmlns="" id="{E5F23F1A-965B-E657-4F46-B48EB78CFF12}"/>
+              <a16:creationId xmlns:a16="http://schemas.microsoft.com/office/drawing/2014/main" id="{E5F23F1A-965B-E657-4F46-B48EB78CFF12}"/>
             </a:ext>
           </a:extLst>
         </p:cNvPr>
@@ -10353,7 +10249,7 @@
           <p:cNvPr id="2" name="Title 1">
             <a:extLst>
               <a:ext uri="{FF2B5EF4-FFF2-40B4-BE49-F238E27FC236}">
-                <a16:creationId xmlns:a16="http://schemas.microsoft.com/office/drawing/2014/main" xmlns="" id="{1D2CEC37-D651-72A5-0293-3FB911F60F37}"/>
+                <a16:creationId xmlns:a16="http://schemas.microsoft.com/office/drawing/2014/main" id="{1D2CEC37-D651-72A5-0293-3FB911F60F37}"/>
               </a:ext>
             </a:extLst>
           </p:cNvPr>
@@ -10381,7 +10277,7 @@
           <p:cNvPr id="7" name="Content Placeholder 2">
             <a:extLst>
               <a:ext uri="{FF2B5EF4-FFF2-40B4-BE49-F238E27FC236}">
-                <a16:creationId xmlns:a16="http://schemas.microsoft.com/office/drawing/2014/main" xmlns="" id="{B3C1A135-4B52-F54B-5BDE-7C6DA1069706}"/>
+                <a16:creationId xmlns:a16="http://schemas.microsoft.com/office/drawing/2014/main" id="{B3C1A135-4B52-F54B-5BDE-7C6DA1069706}"/>
               </a:ext>
             </a:extLst>
           </p:cNvPr>
@@ -10409,7 +10305,7 @@
               <a:t>A tarefa mais popular dos algoritmos de aprendizado não supervisionado é a </a:t>
             </a:r>
             <a:r>
-              <a:rPr lang="pt-BR" b="1" i="1" dirty="0" smtClean="0">
+              <a:rPr lang="pt-BR" b="1" i="1" dirty="0">
                 <a:solidFill>
                   <a:srgbClr val="00B050"/>
                 </a:solidFill>
@@ -10417,7 +10313,7 @@
               <a:t>identificação de </a:t>
             </a:r>
             <a:r>
-              <a:rPr lang="pt-BR" b="1" i="1" dirty="0" smtClean="0">
+              <a:rPr lang="pt-BR" b="1" i="1" dirty="0">
                 <a:solidFill>
                   <a:srgbClr val="7030A0"/>
                 </a:solidFill>
@@ -10425,17 +10321,17 @@
               <a:t>clusters</a:t>
             </a:r>
             <a:r>
-              <a:rPr lang="pt-BR" dirty="0" smtClean="0"/>
+              <a:rPr lang="pt-BR" dirty="0"/>
               <a:t>. </a:t>
             </a:r>
           </a:p>
           <a:p>
             <a:r>
-              <a:rPr lang="pt-BR" dirty="0" smtClean="0"/>
+              <a:rPr lang="pt-BR" dirty="0"/>
               <a:t>Veremos que com eles, podemos obter informações uteis de dados não rotulados usando algum critério de </a:t>
             </a:r>
             <a:r>
-              <a:rPr lang="pt-BR" b="1" dirty="0" smtClean="0">
+              <a:rPr lang="pt-BR" b="1" dirty="0">
                 <a:solidFill>
                   <a:schemeClr val="accent2"/>
                 </a:solidFill>
@@ -10443,7 +10339,7 @@
               <a:t>similaridade entre eles</a:t>
             </a:r>
             <a:r>
-              <a:rPr lang="pt-BR" b="1" dirty="0" smtClean="0"/>
+              <a:rPr lang="pt-BR" b="1" dirty="0"/>
               <a:t> (e.g., a distância).</a:t>
             </a:r>
           </a:p>
@@ -10454,7 +10350,7 @@
           <p:cNvPr id="5" name="Grupo 4">
             <a:extLst>
               <a:ext uri="{FF2B5EF4-FFF2-40B4-BE49-F238E27FC236}">
-                <a16:creationId xmlns:a16="http://schemas.microsoft.com/office/drawing/2014/main" xmlns="" id="{FD3AFEA6-16E8-D562-210E-DDE126CC469D}"/>
+                <a16:creationId xmlns:a16="http://schemas.microsoft.com/office/drawing/2014/main" id="{FD3AFEA6-16E8-D562-210E-DDE126CC469D}"/>
               </a:ext>
             </a:extLst>
           </p:cNvPr>
@@ -10474,7 +10370,7 @@
             <p:cNvPr id="6" name="Picture 2" descr="K-Means Clustering using Python. Welcome back guys! Hope you had a great… |  by Luigi Fiori | Medium">
               <a:extLst>
                 <a:ext uri="{FF2B5EF4-FFF2-40B4-BE49-F238E27FC236}">
-                  <a16:creationId xmlns:a16="http://schemas.microsoft.com/office/drawing/2014/main" xmlns="" id="{5EE61C46-3856-780A-E6BB-BC8EBB4234F4}"/>
+                  <a16:creationId xmlns:a16="http://schemas.microsoft.com/office/drawing/2014/main" id="{5EE61C46-3856-780A-E6BB-BC8EBB4234F4}"/>
                 </a:ext>
               </a:extLst>
             </p:cNvPr>
@@ -10519,7 +10415,7 @@
             <p:cNvPr id="8" name="CaixaDeTexto 7">
               <a:extLst>
                 <a:ext uri="{FF2B5EF4-FFF2-40B4-BE49-F238E27FC236}">
-                  <a16:creationId xmlns:a16="http://schemas.microsoft.com/office/drawing/2014/main" xmlns="" id="{843AD3E7-A8FE-599D-36F8-EA8BA9682F1B}"/>
+                  <a16:creationId xmlns:a16="http://schemas.microsoft.com/office/drawing/2014/main" id="{843AD3E7-A8FE-599D-36F8-EA8BA9682F1B}"/>
                 </a:ext>
               </a:extLst>
             </p:cNvPr>
@@ -10556,7 +10452,7 @@
             <p:cNvPr id="9" name="Picture 2" descr="K-Means Clustering using Python. Welcome back guys! Hope you had a great… |  by Luigi Fiori | Medium">
               <a:extLst>
                 <a:ext uri="{FF2B5EF4-FFF2-40B4-BE49-F238E27FC236}">
-                  <a16:creationId xmlns:a16="http://schemas.microsoft.com/office/drawing/2014/main" xmlns="" id="{E7C74A0F-F2DD-912F-E092-3530D068D40B}"/>
+                  <a16:creationId xmlns:a16="http://schemas.microsoft.com/office/drawing/2014/main" id="{E7C74A0F-F2DD-912F-E092-3530D068D40B}"/>
                 </a:ext>
               </a:extLst>
             </p:cNvPr>
@@ -10601,7 +10497,7 @@
             <p:cNvPr id="10" name="Seta para a direita 9">
               <a:extLst>
                 <a:ext uri="{FF2B5EF4-FFF2-40B4-BE49-F238E27FC236}">
-                  <a16:creationId xmlns:a16="http://schemas.microsoft.com/office/drawing/2014/main" xmlns="" id="{88A77E2D-B8CF-1AE8-8196-DD8F94371FF0}"/>
+                  <a16:creationId xmlns:a16="http://schemas.microsoft.com/office/drawing/2014/main" id="{88A77E2D-B8CF-1AE8-8196-DD8F94371FF0}"/>
                 </a:ext>
               </a:extLst>
             </p:cNvPr>
@@ -10723,11 +10619,11 @@
           <a:lstStyle/>
           <a:p>
             <a:r>
-              <a:rPr lang="pt-BR" dirty="0" smtClean="0"/>
+              <a:rPr lang="pt-BR" dirty="0"/>
               <a:t>Na tarefa de </a:t>
             </a:r>
             <a:r>
-              <a:rPr lang="pt-BR" b="1" i="1" dirty="0" smtClean="0">
+              <a:rPr lang="pt-BR" b="1" i="1" dirty="0">
                 <a:solidFill>
                   <a:schemeClr val="accent2"/>
                 </a:solidFill>
@@ -10735,12 +10631,8 @@
               <a:t>identificação de clusters</a:t>
             </a:r>
             <a:r>
-              <a:rPr lang="pt-BR" dirty="0" smtClean="0"/>
-              <a:t>, </a:t>
-            </a:r>
-            <a:r>
-              <a:rPr lang="pt-BR" dirty="0"/>
-              <a:t>a </a:t>
+              <a:rPr lang="pt-BR" dirty="0"/>
+              <a:t>, a </a:t>
             </a:r>
             <a:r>
               <a:rPr lang="pt-BR" b="1" i="1" dirty="0">
@@ -10764,19 +10656,7 @@
             </a:r>
             <a:r>
               <a:rPr lang="pt-BR" dirty="0"/>
-              <a:t>(i.e., </a:t>
-            </a:r>
-            <a:r>
-              <a:rPr lang="pt-BR" dirty="0" smtClean="0"/>
-              <a:t>exemplos) </a:t>
-            </a:r>
-            <a:r>
-              <a:rPr lang="pt-BR" b="1" i="1" dirty="0" smtClean="0">
-                <a:solidFill>
-                  <a:srgbClr val="FF0000"/>
-                </a:solidFill>
-              </a:rPr>
-              <a:t>sem </a:t>
+              <a:t>(i.e., exemplos) </a:t>
             </a:r>
             <a:r>
               <a:rPr lang="pt-BR" b="1" i="1" dirty="0">
@@ -10784,7 +10664,7 @@
                   <a:srgbClr val="FF0000"/>
                 </a:solidFill>
               </a:rPr>
-              <a:t>rótulos</a:t>
+              <a:t>sem rótulos</a:t>
             </a:r>
             <a:r>
               <a:rPr lang="pt-BR" dirty="0"/>
@@ -10806,11 +10686,7 @@
             </a:r>
             <a:r>
               <a:rPr lang="pt-BR" dirty="0"/>
-              <a:t> </a:t>
-            </a:r>
-            <a:r>
-              <a:rPr lang="pt-BR" dirty="0" smtClean="0"/>
-              <a:t>são valores indicando os </a:t>
+              <a:t> são valores indicando os </a:t>
             </a:r>
             <a:r>
               <a:rPr lang="pt-BR" b="1" i="1" dirty="0">
@@ -11030,15 +10906,7 @@
             </a:r>
             <a:r>
               <a:rPr lang="pt-BR" sz="1400" dirty="0"/>
-              <a:t> em um espaço </a:t>
-            </a:r>
-            <a:r>
-              <a:rPr lang="pt-BR" sz="1400" dirty="0" smtClean="0"/>
-              <a:t>bi ou tridimensional </a:t>
-            </a:r>
-            <a:r>
-              <a:rPr lang="pt-BR" sz="1400" dirty="0"/>
-              <a:t>é fácil, mas em quatro ou mais dimensões isso já não é mais possível. Nesses casos, apenas algoritmos de identificação de </a:t>
+              <a:t> em um espaço bi ou tridimensional é fácil, mas em quatro ou mais dimensões isso já não é mais possível. Nesses casos, apenas algoritmos de identificação de </a:t>
             </a:r>
             <a:r>
               <a:rPr lang="pt-BR" sz="1400" i="1" dirty="0"/>
@@ -11143,15 +11011,7 @@
           <a:p>
             <a:r>
               <a:rPr lang="pt-BR" dirty="0"/>
-              <a:t>Para realizar a </a:t>
-            </a:r>
-            <a:r>
-              <a:rPr lang="pt-BR" dirty="0" smtClean="0"/>
-              <a:t>clusterização, </a:t>
-            </a:r>
-            <a:r>
-              <a:rPr lang="pt-BR" dirty="0"/>
-              <a:t>temos que </a:t>
+              <a:t>Para realizar a clusterização, temos que </a:t>
             </a:r>
             <a:r>
               <a:rPr lang="pt-BR" b="1" i="1" dirty="0">
@@ -11169,29 +11029,8 @@
           <a:p>
             <a:r>
               <a:rPr lang="pt-BR" dirty="0"/>
-              <a:t>Existem algumas opções como a </a:t>
-            </a:r>
-            <a:r>
-              <a:rPr lang="pt-BR" dirty="0" smtClean="0"/>
-              <a:t>densidade, a distribuição</a:t>
-            </a:r>
-            <a:r>
-              <a:rPr lang="pt-BR" dirty="0"/>
-              <a:t> </a:t>
-            </a:r>
-            <a:r>
-              <a:rPr lang="pt-BR" dirty="0" smtClean="0"/>
-              <a:t>e a hierarquia </a:t>
-            </a:r>
-            <a:r>
-              <a:rPr lang="pt-BR" dirty="0"/>
-              <a:t>dos </a:t>
-            </a:r>
-            <a:r>
-              <a:rPr lang="pt-BR" dirty="0" smtClean="0"/>
-              <a:t>dados.</a:t>
-            </a:r>
-            <a:endParaRPr lang="pt-BR" dirty="0"/>
+              <a:t>Existem algumas opções como a densidade, a distribuição e a hierarquia dos dados.</a:t>
+            </a:r>
           </a:p>
           <a:p>
             <a:r>
@@ -11207,7 +11046,7 @@
               <a:t>(i.e., </a:t>
             </a:r>
             <a:r>
-              <a:rPr lang="pt-BR" b="1" i="1" dirty="0" smtClean="0">
+              <a:rPr lang="pt-BR" b="1" i="1" dirty="0">
                 <a:solidFill>
                   <a:schemeClr val="accent2"/>
                 </a:solidFill>
@@ -11215,19 +11054,15 @@
               <a:t>centros geométricos</a:t>
             </a:r>
             <a:r>
-              <a:rPr lang="pt-BR" dirty="0" smtClean="0"/>
-              <a:t>) </a:t>
-            </a:r>
-            <a:r>
-              <a:rPr lang="pt-BR" dirty="0"/>
-              <a:t>dos </a:t>
+              <a:rPr lang="pt-BR" dirty="0"/>
+              <a:t>) dos </a:t>
             </a:r>
             <a:r>
               <a:rPr lang="pt-BR" i="1" dirty="0"/>
               <a:t>clusters</a:t>
             </a:r>
             <a:r>
-              <a:rPr lang="pt-BR" dirty="0" smtClean="0"/>
+              <a:rPr lang="pt-BR" dirty="0"/>
               <a:t>.</a:t>
             </a:r>
           </a:p>
@@ -11237,18 +11072,17 @@
               <a:buChar char="§"/>
             </a:pPr>
             <a:r>
-              <a:rPr lang="pt-BR" dirty="0" smtClean="0"/>
+              <a:rPr lang="pt-BR" dirty="0"/>
               <a:t>O algoritmo que usa centroides é conhecido como k-</a:t>
             </a:r>
             <a:r>
-              <a:rPr lang="pt-BR" dirty="0" err="1" smtClean="0"/>
+              <a:rPr lang="pt-BR" dirty="0" err="1"/>
               <a:t>means</a:t>
             </a:r>
             <a:r>
-              <a:rPr lang="pt-BR" dirty="0" smtClean="0"/>
+              <a:rPr lang="pt-BR" dirty="0"/>
               <a:t>.</a:t>
             </a:r>
-            <a:endParaRPr lang="pt-BR" dirty="0" smtClean="0"/>
           </a:p>
           <a:p>
             <a:r>
@@ -11284,10 +11118,9 @@
               <a:t>das amostras que pertencem ao cluster</a:t>
             </a:r>
             <a:r>
-              <a:rPr lang="pt-BR" dirty="0" smtClean="0"/>
+              <a:rPr lang="pt-BR" dirty="0"/>
               <a:t>.</a:t>
             </a:r>
-            <a:endParaRPr lang="pt-BR" dirty="0"/>
           </a:p>
         </p:txBody>
       </p:sp>
@@ -11296,7 +11129,7 @@
           <p:cNvPr id="1028" name="Picture 4" descr="K Means Clustering no Aprendizado de Máquinas — Aprendizado de Máquina —  DATA SCIENCE">
             <a:extLst>
               <a:ext uri="{FF2B5EF4-FFF2-40B4-BE49-F238E27FC236}">
-                <a16:creationId xmlns:a16="http://schemas.microsoft.com/office/drawing/2014/main" xmlns="" id="{D99905E1-3749-BAAD-E01A-C9B3686C4770}"/>
+                <a16:creationId xmlns:a16="http://schemas.microsoft.com/office/drawing/2014/main" id="{D99905E1-3749-BAAD-E01A-C9B3686C4770}"/>
               </a:ext>
             </a:extLst>
           </p:cNvPr>
@@ -11357,7 +11190,7 @@
         <p:cNvPr id="1" name="">
           <a:extLst>
             <a:ext uri="{FF2B5EF4-FFF2-40B4-BE49-F238E27FC236}">
-              <a16:creationId xmlns:a16="http://schemas.microsoft.com/office/drawing/2014/main" xmlns="" id="{5B00F73A-8390-7530-E708-9D3EBFB35B37}"/>
+              <a16:creationId xmlns:a16="http://schemas.microsoft.com/office/drawing/2014/main" id="{5B00F73A-8390-7530-E708-9D3EBFB35B37}"/>
             </a:ext>
           </a:extLst>
         </p:cNvPr>
@@ -11377,7 +11210,7 @@
           <p:cNvPr id="2" name="Título 1">
             <a:extLst>
               <a:ext uri="{FF2B5EF4-FFF2-40B4-BE49-F238E27FC236}">
-                <a16:creationId xmlns:a16="http://schemas.microsoft.com/office/drawing/2014/main" xmlns="" id="{A7779880-5E02-1DB8-EA94-C86330794A8C}"/>
+                <a16:creationId xmlns:a16="http://schemas.microsoft.com/office/drawing/2014/main" id="{A7779880-5E02-1DB8-EA94-C86330794A8C}"/>
               </a:ext>
             </a:extLst>
           </p:cNvPr>
@@ -11398,41 +11231,40 @@
               <a:t>Como </a:t>
             </a:r>
             <a:r>
-              <a:rPr lang="en-US" dirty="0" err="1" smtClean="0"/>
+              <a:rPr lang="en-US" dirty="0" err="1"/>
               <a:t>calcular</a:t>
             </a:r>
             <a:r>
-              <a:rPr lang="en-US" dirty="0" smtClean="0"/>
+              <a:rPr lang="en-US" dirty="0"/>
               <a:t> </a:t>
             </a:r>
             <a:r>
-              <a:rPr lang="en-US" dirty="0" err="1" smtClean="0"/>
+              <a:rPr lang="en-US" dirty="0" err="1"/>
               <a:t>os</a:t>
             </a:r>
             <a:r>
-              <a:rPr lang="en-US" dirty="0" smtClean="0"/>
+              <a:rPr lang="en-US" dirty="0"/>
               <a:t> </a:t>
             </a:r>
             <a:r>
-              <a:rPr lang="en-US" dirty="0" err="1" smtClean="0"/>
+              <a:rPr lang="en-US" dirty="0" err="1"/>
               <a:t>centroides</a:t>
             </a:r>
             <a:r>
-              <a:rPr lang="en-US" dirty="0" smtClean="0"/>
+              <a:rPr lang="en-US" dirty="0"/>
               <a:t>?</a:t>
             </a:r>
-            <a:endParaRPr lang="en-US" dirty="0"/>
-          </a:p>
-        </p:txBody>
-      </p:sp>
-      <mc:AlternateContent xmlns:mc="http://schemas.openxmlformats.org/markup-compatibility/2006">
-        <mc:Choice xmlns:a14="http://schemas.microsoft.com/office/drawing/2010/main" Requires="a14">
+          </a:p>
+        </p:txBody>
+      </p:sp>
+      <mc:AlternateContent xmlns:mc="http://schemas.openxmlformats.org/markup-compatibility/2006" xmlns:a14="http://schemas.microsoft.com/office/drawing/2010/main">
+        <mc:Choice Requires="a14">
           <p:sp>
             <p:nvSpPr>
               <p:cNvPr id="3" name="Espaço Reservado para Conteúdo 2">
                 <a:extLst>
                   <a:ext uri="{FF2B5EF4-FFF2-40B4-BE49-F238E27FC236}">
-                    <a16:creationId xmlns:a16="http://schemas.microsoft.com/office/drawing/2014/main" xmlns="" id="{A72472E5-6211-3EFD-BA89-06782640C939}"/>
+                    <a16:creationId xmlns:a16="http://schemas.microsoft.com/office/drawing/2014/main" id="{A72472E5-6211-3EFD-BA89-06782640C939}"/>
                   </a:ext>
                 </a:extLst>
               </p:cNvPr>
@@ -11680,18 +11512,10 @@
               <a:p>
                 <a:r>
                   <a:rPr lang="pt-BR" dirty="0"/>
-                  <a:t>O</a:t>
-                </a:r>
-                <a:r>
-                  <a:rPr lang="pt-BR" dirty="0" smtClean="0"/>
-                  <a:t>s </a:t>
-                </a:r>
-                <a:r>
-                  <a:rPr lang="pt-BR" dirty="0"/>
-                  <a:t>atributos </a:t>
-                </a:r>
-                <a:r>
-                  <a:rPr lang="pt-BR" b="1" i="1" dirty="0" smtClean="0">
+                  <a:t>Os atributos </a:t>
+                </a:r>
+                <a:r>
+                  <a:rPr lang="pt-BR" b="1" i="1" dirty="0">
                     <a:solidFill>
                       <a:srgbClr val="7030A0"/>
                     </a:solidFill>
@@ -11700,21 +11524,13 @@
                 </a:r>
                 <a:r>
                   <a:rPr lang="pt-BR" dirty="0"/>
-                  <a:t> </a:t>
-                </a:r>
-                <a:r>
-                  <a:rPr lang="pt-BR" dirty="0" smtClean="0"/>
-                  <a:t>p</a:t>
-                </a:r>
-                <a:r>
-                  <a:rPr lang="pt-BR" dirty="0" smtClean="0"/>
-                  <a:t>ara o cálculo do centroide e da métrica de similaridade.</a:t>
+                  <a:t> para o cálculo do centroide e da métrica de similaridade.</a:t>
                 </a:r>
               </a:p>
             </p:txBody>
           </p:sp>
         </mc:Choice>
-        <mc:Fallback>
+        <mc:Fallback xmlns="">
           <p:sp>
             <p:nvSpPr>
               <p:cNvPr id="3" name="Espaço Reservado para Conteúdo 2">
@@ -11763,7 +11579,7 @@
           <p:cNvPr id="5" name="Picture 4" descr="K Means Clustering no Aprendizado de Máquinas — Aprendizado de Máquina —  DATA SCIENCE">
             <a:extLst>
               <a:ext uri="{FF2B5EF4-FFF2-40B4-BE49-F238E27FC236}">
-                <a16:creationId xmlns:a16="http://schemas.microsoft.com/office/drawing/2014/main" xmlns="" id="{1340B874-C37C-46C8-FA71-6364C1463C13}"/>
+                <a16:creationId xmlns:a16="http://schemas.microsoft.com/office/drawing/2014/main" id="{1340B874-C37C-46C8-FA71-6364C1463C13}"/>
               </a:ext>
             </a:extLst>
           </p:cNvPr>
@@ -11849,10 +11665,9 @@
           <a:lstStyle/>
           <a:p>
             <a:r>
-              <a:rPr lang="pt-BR" dirty="0" smtClean="0"/>
+              <a:rPr lang="pt-BR" dirty="0"/>
               <a:t>Como podemos usar os centroides?</a:t>
             </a:r>
-            <a:endParaRPr lang="pt-BR" dirty="0"/>
           </a:p>
         </p:txBody>
       </p:sp>
@@ -11879,11 +11694,11 @@
           <a:lstStyle/>
           <a:p>
             <a:r>
-              <a:rPr lang="pt-BR" dirty="0" smtClean="0"/>
+              <a:rPr lang="pt-BR" dirty="0"/>
               <a:t>Os </a:t>
             </a:r>
             <a:r>
-              <a:rPr lang="pt-BR" b="1" i="1" dirty="0" smtClean="0">
+              <a:rPr lang="pt-BR" b="1" i="1" dirty="0">
                 <a:solidFill>
                   <a:schemeClr val="accent2"/>
                 </a:solidFill>
@@ -11891,7 +11706,7 @@
               <a:t>centroides</a:t>
             </a:r>
             <a:r>
-              <a:rPr lang="pt-BR" dirty="0" smtClean="0"/>
+              <a:rPr lang="pt-BR" dirty="0"/>
               <a:t> podem ser usados ​​como </a:t>
             </a:r>
           </a:p>
@@ -11901,7 +11716,7 @@
               <a:buChar char="§"/>
             </a:pPr>
             <a:r>
-              <a:rPr lang="pt-BR" dirty="0" smtClean="0"/>
+              <a:rPr lang="pt-BR" dirty="0"/>
               <a:t>forma de comprimir ou sumarizar os dados,</a:t>
             </a:r>
           </a:p>
@@ -11911,18 +11726,17 @@
               <a:buChar char="o"/>
             </a:pPr>
             <a:r>
-              <a:rPr lang="pt-BR" dirty="0" smtClean="0"/>
+              <a:rPr lang="pt-BR" dirty="0"/>
               <a:t>Usa-se o centroide para representar todo o </a:t>
             </a:r>
             <a:r>
-              <a:rPr lang="pt-BR" i="1" dirty="0" smtClean="0"/>
+              <a:rPr lang="pt-BR" i="1" dirty="0"/>
               <a:t>cluster</a:t>
             </a:r>
             <a:r>
-              <a:rPr lang="pt-BR" dirty="0" smtClean="0"/>
+              <a:rPr lang="pt-BR" dirty="0"/>
               <a:t>.</a:t>
             </a:r>
-            <a:endParaRPr lang="pt-BR" dirty="0" smtClean="0"/>
           </a:p>
           <a:p>
             <a:pPr lvl="1">
@@ -11930,12 +11744,8 @@
               <a:buChar char="§"/>
             </a:pPr>
             <a:r>
-              <a:rPr lang="pt-BR" dirty="0" smtClean="0"/>
-              <a:t>f</a:t>
-            </a:r>
-            <a:r>
-              <a:rPr lang="pt-BR" dirty="0" smtClean="0"/>
-              <a:t>orma de detectar anomalias,</a:t>
+              <a:rPr lang="pt-BR" dirty="0"/>
+              <a:t>forma de detectar anomalias,</a:t>
             </a:r>
           </a:p>
           <a:p>
@@ -11944,10 +11754,9 @@
               <a:buChar char="o"/>
             </a:pPr>
             <a:r>
-              <a:rPr lang="pt-BR" dirty="0" smtClean="0"/>
+              <a:rPr lang="pt-BR" dirty="0"/>
               <a:t>A distancia até o centroide pode indicar uma anomalia.</a:t>
             </a:r>
-            <a:endParaRPr lang="pt-BR" dirty="0" smtClean="0"/>
           </a:p>
           <a:p>
             <a:pPr lvl="1">
@@ -11955,16 +11764,8 @@
               <a:buChar char="§"/>
             </a:pPr>
             <a:r>
-              <a:rPr lang="pt-BR" dirty="0" smtClean="0"/>
-              <a:t>centros para inicialização de modelos de misturas Gaussianas ou de redes de </a:t>
-            </a:r>
-            <a:r>
-              <a:rPr lang="pt-BR" dirty="0" smtClean="0"/>
-              <a:t>f</a:t>
-            </a:r>
-            <a:r>
-              <a:rPr lang="pt-BR" dirty="0" smtClean="0"/>
-              <a:t>unção de base radial, </a:t>
+              <a:rPr lang="pt-BR" dirty="0"/>
+              <a:t>centros para inicialização de modelos de misturas Gaussianas ou de redes de função de base radial, </a:t>
             </a:r>
           </a:p>
           <a:p>
@@ -11973,7 +11774,7 @@
               <a:buChar char="§"/>
             </a:pPr>
             <a:r>
-              <a:rPr lang="pt-BR" dirty="0" smtClean="0"/>
+              <a:rPr lang="pt-BR" dirty="0"/>
               <a:t>estimativas de valores de atributos ausentes,</a:t>
             </a:r>
           </a:p>
@@ -11983,10 +11784,9 @@
               <a:buChar char="o"/>
             </a:pPr>
             <a:r>
-              <a:rPr lang="pt-BR" dirty="0" smtClean="0"/>
+              <a:rPr lang="pt-BR" dirty="0"/>
               <a:t>Usa-se o valor de centroide para preencher o valor.</a:t>
             </a:r>
-            <a:endParaRPr lang="pt-BR" dirty="0" smtClean="0"/>
           </a:p>
           <a:p>
             <a:pPr lvl="1">
@@ -11994,16 +11794,8 @@
               <a:buChar char="§"/>
             </a:pPr>
             <a:r>
-              <a:rPr lang="pt-BR" dirty="0" smtClean="0"/>
-              <a:t>protótipos </a:t>
-            </a:r>
-            <a:r>
-              <a:rPr lang="pt-BR" dirty="0"/>
-              <a:t>para classificadores baseados em </a:t>
-            </a:r>
-            <a:r>
-              <a:rPr lang="pt-BR" dirty="0" smtClean="0"/>
-              <a:t>distância.</a:t>
+              <a:rPr lang="pt-BR" dirty="0"/>
+              <a:t>protótipos para classificadores baseados em distância.</a:t>
             </a:r>
           </a:p>
           <a:p>
@@ -12012,10 +11804,9 @@
               <a:buChar char="o"/>
             </a:pPr>
             <a:r>
-              <a:rPr lang="pt-BR" dirty="0" smtClean="0"/>
+              <a:rPr lang="pt-BR" dirty="0"/>
               <a:t>Classificadores mais simples do que os baseados em modelos supervisionados (e.g., redes neurais)</a:t>
             </a:r>
-            <a:endParaRPr lang="pt-BR" dirty="0"/>
           </a:p>
         </p:txBody>
       </p:sp>
@@ -12063,7 +11854,7 @@
           <p:cNvPr id="4" name="CaixaDeTexto 3">
             <a:extLst>
               <a:ext uri="{FF2B5EF4-FFF2-40B4-BE49-F238E27FC236}">
-                <a16:creationId xmlns:a16="http://schemas.microsoft.com/office/drawing/2014/main" xmlns="" id="{8983938C-72D4-9E58-2CE8-D43E36E7012F}"/>
+                <a16:creationId xmlns:a16="http://schemas.microsoft.com/office/drawing/2014/main" id="{8983938C-72D4-9E58-2CE8-D43E36E7012F}"/>
               </a:ext>
             </a:extLst>
           </p:cNvPr>
@@ -12093,15 +11884,7 @@
             </a:r>
             <a:r>
               <a:rPr lang="pt-BR" dirty="0"/>
-              <a:t> é o ponto central de um cluster de dados. Representa a </a:t>
-            </a:r>
-            <a:r>
-              <a:rPr lang="pt-BR" dirty="0" smtClean="0"/>
-              <a:t>média geométrica </a:t>
-            </a:r>
-            <a:r>
-              <a:rPr lang="pt-BR" dirty="0"/>
-              <a:t>das amostras dentro do </a:t>
+              <a:t> é o ponto central de um cluster de dados. Representa a média geométrica das amostras dentro do </a:t>
             </a:r>
             <a:r>
               <a:rPr lang="pt-BR" i="1" dirty="0"/>
